--- a/report/Defi2_Togo_Energie_Climat_Forets.pptx
+++ b/report/Defi2_Togo_Energie_Climat_Forets.pptx
@@ -15,7 +15,6 @@
     <p:sldId id="263" r:id="rId14"/>
     <p:sldId id="264" r:id="rId15"/>
     <p:sldId id="265" r:id="rId16"/>
-    <p:sldId id="266" r:id="rId17"/>
   </p:sldIdLst>
   <p:sldSz cx="12191695" cy="6858000" type="screen4x3"/>
   <p:notesSz cx="6858000" cy="9144000"/>
@@ -6087,7 +6086,7 @@
                 </a:solidFill>
                 <a:latin typeface="Segoe UI"/>
               </a:rPr>
-              <a:t>OÙ AGIR</a:t>
+              <a:t>RECOMMANDATIONS</a:t>
             </a:r>
           </a:p>
         </p:txBody>
@@ -6126,7 +6125,7 @@
                 </a:solidFill>
                 <a:latin typeface="Segoe UI"/>
               </a:rPr>
-              <a:t>9 massifs restent prioritaires quelle que soit la pondération</a:t>
+              <a:t>Quatre leviers, dans cet ordre</a:t>
             </a:r>
           </a:p>
         </p:txBody>
@@ -6204,7 +6203,7 @@
                 </a:solidFill>
                 <a:latin typeface="Segoe UI"/>
               </a:rPr>
-              <a:t>10 / 11</a:t>
+              <a:t>10 / 10</a:t>
             </a:r>
           </a:p>
         </p:txBody>
@@ -6233,111 +6232,16 @@
           </a:prstGeom>
         </p:spPr>
       </p:pic>
-      <p:graphicFrame>
-        <p:nvGraphicFramePr>
-          <p:cNvPr id="8" name="Chart 7"/>
-          <p:cNvGraphicFramePr>
-            <a:graphicFrameLocks noGrp="1"/>
-          </p:cNvGraphicFramePr>
-          <p:nvPr/>
-        </p:nvGraphicFramePr>
-        <p:xfrm>
-          <a:off x="566928" y="1572768"/>
-          <a:ext cx="6949440" cy="3712463"/>
-        </p:xfrm>
-        <a:graphic>
-          <a:graphicData uri="http://schemas.openxmlformats.org/drawingml/2006/chart">
-            <c:chart xmlns:c="http://schemas.openxmlformats.org/drawingml/2006/chart" r:id="rId3"/>
-          </a:graphicData>
-        </a:graphic>
-      </p:graphicFrame>
-      <p:sp>
-        <p:nvSpPr>
-          <p:cNvPr id="9" name="TextBox 8"/>
-          <p:cNvSpPr txBox="1"/>
-          <p:nvPr/>
-        </p:nvSpPr>
-        <p:spPr>
-          <a:xfrm>
-            <a:off x="7790688" y="1609344"/>
-            <a:ext cx="3834079" cy="2286000"/>
-          </a:xfrm>
-          <a:prstGeom prst="rect">
-            <a:avLst/>
-          </a:prstGeom>
-          <a:noFill/>
-        </p:spPr>
-        <p:txBody>
-          <a:bodyPr wrap="square" anchor="t" lIns="0" rIns="0" tIns="0" bIns="0">
-            <a:spAutoFit/>
-          </a:bodyPr>
-          <a:lstStyle/>
-          <a:p>
-            <a:pPr algn="l">
-              <a:lnSpc>
-                <a:spcPct val="140000"/>
-              </a:lnSpc>
-            </a:pPr>
-            <a:r>
-              <a:rPr sz="1150" b="0">
-                <a:solidFill>
-                  <a:srgbClr val="324239"/>
-                </a:solidFill>
-                <a:latin typeface="Segoe UI"/>
-              </a:rPr>
-              <a:t>Sur les 53 forêts classées du territoire, 9 ne quittent jamais le top 10, quelle que soit la pondération testée entre enclavement, surface et stress thermique.</a:t>
-            </a:r>
-          </a:p>
-          <a:p>
-            <a:pPr algn="l">
-              <a:lnSpc>
-                <a:spcPct val="140000"/>
-              </a:lnSpc>
-              <a:spcBef>
-                <a:spcPts val="600"/>
-              </a:spcBef>
-            </a:pPr>
-            <a:r>
-              <a:rPr sz="1150" b="0">
-                <a:solidFill>
-                  <a:srgbClr val="324239"/>
-                </a:solidFill>
-                <a:latin typeface="Segoe UI"/>
-              </a:rPr>
-              <a:t>Le classement de tête est donc un résultat des données, pas un choix d'analyste : ce sont de grands massifs enclavés, éloignés de tout pôle raccordé, donc soumis à la pression du bois-énergie.</a:t>
-            </a:r>
-          </a:p>
-          <a:p>
-            <a:pPr algn="l">
-              <a:lnSpc>
-                <a:spcPct val="140000"/>
-              </a:lnSpc>
-              <a:spcBef>
-                <a:spcPts val="600"/>
-              </a:spcBef>
-            </a:pPr>
-            <a:r>
-              <a:rPr sz="1150" b="0">
-                <a:solidFill>
-                  <a:srgbClr val="324239"/>
-                </a:solidFill>
-                <a:latin typeface="Segoe UI"/>
-              </a:rPr>
-              <a:t>Éloignement médian d'un pôle urbain : 29 km.</a:t>
-            </a:r>
-          </a:p>
-        </p:txBody>
-      </p:sp>
-      <p:sp>
-        <p:nvSpPr>
-          <p:cNvPr id="10" name="Rounded Rectangle 9"/>
+      <p:sp>
+        <p:nvSpPr>
+          <p:cNvPr id="8" name="Rounded Rectangle 7"/>
           <p:cNvSpPr/>
           <p:nvPr/>
         </p:nvSpPr>
         <p:spPr>
           <a:xfrm>
-            <a:off x="7790688" y="4114800"/>
-            <a:ext cx="3834079" cy="1170432"/>
+            <a:off x="566928" y="1572768"/>
+            <a:ext cx="11057839" cy="1097280"/>
           </a:xfrm>
           <a:prstGeom prst="roundRect">
             <a:avLst>
@@ -6345,10 +6249,12 @@
             </a:avLst>
           </a:prstGeom>
           <a:solidFill>
-            <a:srgbClr val="FBF0DC"/>
+            <a:srgbClr val="FFFFFF"/>
           </a:solidFill>
-          <a:ln>
-            <a:noFill/>
+          <a:ln w="9525">
+            <a:solidFill>
+              <a:srgbClr val="D5DED8"/>
+            </a:solidFill>
           </a:ln>
           <a:effectLst/>
         </p:spPr>
@@ -6376,14 +6282,92 @@
       </p:sp>
       <p:sp>
         <p:nvSpPr>
+          <p:cNvPr id="9" name="TextBox 8"/>
+          <p:cNvSpPr txBox="1"/>
+          <p:nvPr/>
+        </p:nvSpPr>
+        <p:spPr>
+          <a:xfrm>
+            <a:off x="749808" y="1810512"/>
+            <a:ext cx="411480" cy="384048"/>
+          </a:xfrm>
+          <a:prstGeom prst="rect">
+            <a:avLst/>
+          </a:prstGeom>
+          <a:noFill/>
+        </p:spPr>
+        <p:txBody>
+          <a:bodyPr wrap="square" anchor="t" lIns="0" rIns="0" tIns="0" bIns="0">
+            <a:spAutoFit/>
+          </a:bodyPr>
+          <a:lstStyle/>
+          <a:p>
+            <a:pPr algn="l">
+              <a:lnSpc>
+                <a:spcPct val="100000"/>
+              </a:lnSpc>
+            </a:pPr>
+            <a:r>
+              <a:rPr sz="2400" b="1">
+                <a:solidFill>
+                  <a:srgbClr val="B32418"/>
+                </a:solidFill>
+                <a:latin typeface="Segoe UI"/>
+              </a:rPr>
+              <a:t>1</a:t>
+            </a:r>
+          </a:p>
+        </p:txBody>
+      </p:sp>
+      <p:sp>
+        <p:nvSpPr>
+          <p:cNvPr id="10" name="TextBox 9"/>
+          <p:cNvSpPr txBox="1"/>
+          <p:nvPr/>
+        </p:nvSpPr>
+        <p:spPr>
+          <a:xfrm>
+            <a:off x="1170432" y="1719072"/>
+            <a:ext cx="3017520" cy="256032"/>
+          </a:xfrm>
+          <a:prstGeom prst="rect">
+            <a:avLst/>
+          </a:prstGeom>
+          <a:noFill/>
+        </p:spPr>
+        <p:txBody>
+          <a:bodyPr wrap="square" anchor="t" lIns="0" rIns="0" tIns="0" bIns="0">
+            <a:spAutoFit/>
+          </a:bodyPr>
+          <a:lstStyle/>
+          <a:p>
+            <a:pPr algn="l">
+              <a:lnSpc>
+                <a:spcPct val="125000"/>
+              </a:lnSpc>
+            </a:pPr>
+            <a:r>
+              <a:rPr sz="1250" b="1">
+                <a:solidFill>
+                  <a:srgbClr val="0C1A14"/>
+                </a:solidFill>
+                <a:latin typeface="Segoe UI"/>
+              </a:rPr>
+              <a:t>Cuisson propre</a:t>
+            </a:r>
+          </a:p>
+        </p:txBody>
+      </p:sp>
+      <p:sp>
+        <p:nvSpPr>
           <p:cNvPr id="11" name="TextBox 10"/>
           <p:cNvSpPr txBox="1"/>
           <p:nvPr/>
         </p:nvSpPr>
         <p:spPr>
           <a:xfrm>
-            <a:off x="7973568" y="4251960"/>
-            <a:ext cx="3468319" cy="164592"/>
+            <a:off x="1170432" y="2011680"/>
+            <a:ext cx="3108960" cy="585216"/>
           </a:xfrm>
           <a:prstGeom prst="rect">
             <a:avLst/>
@@ -6402,13 +6386,13 @@
               </a:lnSpc>
             </a:pPr>
             <a:r>
-              <a:rPr sz="850" b="1" spc="60">
-                <a:solidFill>
-                  <a:srgbClr val="B87407"/>
-                </a:solidFill>
-                <a:latin typeface="Segoe UI"/>
-              </a:rPr>
-              <a:t>DÉCISION</a:t>
+              <a:rPr sz="850" b="0">
+                <a:solidFill>
+                  <a:srgbClr val="5D6E64"/>
+                </a:solidFill>
+                <a:latin typeface="Segoe UI"/>
+              </a:rPr>
+              <a:t>GPL subventionné en zone périurbaine, foyers améliorés certifiés en zone rurale enclavée.</a:t>
             </a:r>
           </a:p>
         </p:txBody>
@@ -6421,74 +6405,255 @@
         </p:nvSpPr>
         <p:spPr>
           <a:xfrm>
-            <a:off x="7973568" y="4480560"/>
-            <a:ext cx="3468319" cy="713232"/>
-          </a:xfrm>
-          <a:prstGeom prst="rect">
-            <a:avLst/>
-          </a:prstGeom>
-          <a:noFill/>
-        </p:spPr>
-        <p:txBody>
-          <a:bodyPr wrap="square" anchor="t" lIns="0" rIns="0" tIns="0" bIns="0">
-            <a:spAutoFit/>
-          </a:bodyPr>
-          <a:lstStyle/>
-          <a:p>
-            <a:pPr algn="l">
-              <a:lnSpc>
-                <a:spcPct val="135000"/>
-              </a:lnSpc>
-            </a:pPr>
-            <a:r>
-              <a:rPr sz="1100" b="0">
+            <a:off x="4590288" y="1728216"/>
+            <a:ext cx="2194560" cy="146304"/>
+          </a:xfrm>
+          <a:prstGeom prst="rect">
+            <a:avLst/>
+          </a:prstGeom>
+          <a:noFill/>
+        </p:spPr>
+        <p:txBody>
+          <a:bodyPr wrap="square" anchor="t" lIns="0" rIns="0" tIns="0" bIns="0">
+            <a:spAutoFit/>
+          </a:bodyPr>
+          <a:lstStyle/>
+          <a:p>
+            <a:pPr algn="l">
+              <a:lnSpc>
+                <a:spcPct val="125000"/>
+              </a:lnSpc>
+            </a:pPr>
+            <a:r>
+              <a:rPr sz="750" b="1" spc="50">
+                <a:solidFill>
+                  <a:srgbClr val="5D6E64"/>
+                </a:solidFill>
+                <a:latin typeface="Segoe UI"/>
+              </a:rPr>
+              <a:t>PORTÉE DIRECTE</a:t>
+            </a:r>
+          </a:p>
+        </p:txBody>
+      </p:sp>
+      <p:sp>
+        <p:nvSpPr>
+          <p:cNvPr id="13" name="TextBox 12"/>
+          <p:cNvSpPr txBox="1"/>
+          <p:nvPr/>
+        </p:nvSpPr>
+        <p:spPr>
+          <a:xfrm>
+            <a:off x="4590288" y="1920240"/>
+            <a:ext cx="2212848" cy="694944"/>
+          </a:xfrm>
+          <a:prstGeom prst="rect">
+            <a:avLst/>
+          </a:prstGeom>
+          <a:noFill/>
+        </p:spPr>
+        <p:txBody>
+          <a:bodyPr wrap="square" anchor="t" lIns="0" rIns="0" tIns="0" bIns="0">
+            <a:spAutoFit/>
+          </a:bodyPr>
+          <a:lstStyle/>
+          <a:p>
+            <a:pPr algn="l">
+              <a:lnSpc>
+                <a:spcPct val="125000"/>
+              </a:lnSpc>
+            </a:pPr>
+            <a:r>
+              <a:rPr sz="850" b="0">
                 <a:solidFill>
                   <a:srgbClr val="0C1A14"/>
                 </a:solidFill>
                 <a:latin typeface="Segoe UI"/>
               </a:rPr>
-              <a:t>Ces massifs reçoivent le premier budget de protection. Les forêts dont l'intervalle de rang est large méritent une instruction complémentaire avant tout engagement.</a:t>
-            </a:r>
-          </a:p>
-        </p:txBody>
-      </p:sp>
-    </p:spTree>
-  </p:cSld>
-  <p:clrMapOvr>
-    <a:masterClrMapping/>
-  </p:clrMapOvr>
-</p:sld>
-</file>
-
-<file path=ppt/slides/slide11.xml><?xml version="1.0" encoding="utf-8"?>
-<p:sld xmlns:a="http://schemas.openxmlformats.org/drawingml/2006/main" xmlns:p="http://schemas.openxmlformats.org/presentationml/2006/main" xmlns:r="http://schemas.openxmlformats.org/officeDocument/2006/relationships">
-  <p:cSld>
-    <p:spTree>
-      <p:nvGrpSpPr>
-        <p:cNvPr id="1" name=""/>
-        <p:cNvGrpSpPr/>
-        <p:nvPr/>
-      </p:nvGrpSpPr>
-      <p:grpSpPr/>
-      <p:sp>
-        <p:nvSpPr>
-          <p:cNvPr id="2" name="Rectangle 1"/>
+              <a:t>8,1 M de personnes</a:t>
+            </a:r>
+          </a:p>
+        </p:txBody>
+      </p:sp>
+      <p:sp>
+        <p:nvSpPr>
+          <p:cNvPr id="14" name="TextBox 13"/>
+          <p:cNvSpPr txBox="1"/>
+          <p:nvPr/>
+        </p:nvSpPr>
+        <p:spPr>
+          <a:xfrm>
+            <a:off x="6967728" y="1728216"/>
+            <a:ext cx="2194560" cy="146304"/>
+          </a:xfrm>
+          <a:prstGeom prst="rect">
+            <a:avLst/>
+          </a:prstGeom>
+          <a:noFill/>
+        </p:spPr>
+        <p:txBody>
+          <a:bodyPr wrap="square" anchor="t" lIns="0" rIns="0" tIns="0" bIns="0">
+            <a:spAutoFit/>
+          </a:bodyPr>
+          <a:lstStyle/>
+          <a:p>
+            <a:pPr algn="l">
+              <a:lnSpc>
+                <a:spcPct val="125000"/>
+              </a:lnSpc>
+            </a:pPr>
+            <a:r>
+              <a:rPr sz="750" b="1" spc="50">
+                <a:solidFill>
+                  <a:srgbClr val="5D6E64"/>
+                </a:solidFill>
+                <a:latin typeface="Segoe UI"/>
+              </a:rPr>
+              <a:t>CIBLE 2030</a:t>
+            </a:r>
+          </a:p>
+        </p:txBody>
+      </p:sp>
+      <p:sp>
+        <p:nvSpPr>
+          <p:cNvPr id="15" name="TextBox 14"/>
+          <p:cNvSpPr txBox="1"/>
+          <p:nvPr/>
+        </p:nvSpPr>
+        <p:spPr>
+          <a:xfrm>
+            <a:off x="6967728" y="1920240"/>
+            <a:ext cx="2212848" cy="694944"/>
+          </a:xfrm>
+          <a:prstGeom prst="rect">
+            <a:avLst/>
+          </a:prstGeom>
+          <a:noFill/>
+        </p:spPr>
+        <p:txBody>
+          <a:bodyPr wrap="square" anchor="t" lIns="0" rIns="0" tIns="0" bIns="0">
+            <a:spAutoFit/>
+          </a:bodyPr>
+          <a:lstStyle/>
+          <a:p>
+            <a:pPr algn="l">
+              <a:lnSpc>
+                <a:spcPct val="125000"/>
+              </a:lnSpc>
+            </a:pPr>
+            <a:r>
+              <a:rPr sz="850" b="0">
+                <a:solidFill>
+                  <a:srgbClr val="0C1A14"/>
+                </a:solidFill>
+                <a:latin typeface="Segoe UI"/>
+              </a:rPr>
+              <a:t>De 0,9 % à 15 % d'accès rural à une cuisson propre en 2030</a:t>
+            </a:r>
+          </a:p>
+        </p:txBody>
+      </p:sp>
+      <p:sp>
+        <p:nvSpPr>
+          <p:cNvPr id="16" name="TextBox 15"/>
+          <p:cNvSpPr txBox="1"/>
+          <p:nvPr/>
+        </p:nvSpPr>
+        <p:spPr>
+          <a:xfrm>
+            <a:off x="9345168" y="1728216"/>
+            <a:ext cx="2194560" cy="146304"/>
+          </a:xfrm>
+          <a:prstGeom prst="rect">
+            <a:avLst/>
+          </a:prstGeom>
+          <a:noFill/>
+        </p:spPr>
+        <p:txBody>
+          <a:bodyPr wrap="square" anchor="t" lIns="0" rIns="0" tIns="0" bIns="0">
+            <a:spAutoFit/>
+          </a:bodyPr>
+          <a:lstStyle/>
+          <a:p>
+            <a:pPr algn="l">
+              <a:lnSpc>
+                <a:spcPct val="125000"/>
+              </a:lnSpc>
+            </a:pPr>
+            <a:r>
+              <a:rPr sz="750" b="1" spc="50">
+                <a:solidFill>
+                  <a:srgbClr val="5D6E64"/>
+                </a:solidFill>
+                <a:latin typeface="Segoe UI"/>
+              </a:rPr>
+              <a:t>INDICATEUR DE SUIVI</a:t>
+            </a:r>
+          </a:p>
+        </p:txBody>
+      </p:sp>
+      <p:sp>
+        <p:nvSpPr>
+          <p:cNvPr id="17" name="TextBox 16"/>
+          <p:cNvSpPr txBox="1"/>
+          <p:nvPr/>
+        </p:nvSpPr>
+        <p:spPr>
+          <a:xfrm>
+            <a:off x="9345168" y="1920240"/>
+            <a:ext cx="2212848" cy="694944"/>
+          </a:xfrm>
+          <a:prstGeom prst="rect">
+            <a:avLst/>
+          </a:prstGeom>
+          <a:noFill/>
+        </p:spPr>
+        <p:txBody>
+          <a:bodyPr wrap="square" anchor="t" lIns="0" rIns="0" tIns="0" bIns="0">
+            <a:spAutoFit/>
+          </a:bodyPr>
+          <a:lstStyle/>
+          <a:p>
+            <a:pPr algn="l">
+              <a:lnSpc>
+                <a:spcPct val="125000"/>
+              </a:lnSpc>
+            </a:pPr>
+            <a:r>
+              <a:rPr sz="850" b="0">
+                <a:solidFill>
+                  <a:srgbClr val="0C1A14"/>
+                </a:solidFill>
+                <a:latin typeface="Segoe UI"/>
+              </a:rPr>
+              <a:t>EG.CFT.ACCS.RU.ZS — et non le taux d'énergie renouvelable</a:t>
+            </a:r>
+          </a:p>
+        </p:txBody>
+      </p:sp>
+      <p:sp>
+        <p:nvSpPr>
+          <p:cNvPr id="18" name="Rounded Rectangle 17"/>
           <p:cNvSpPr/>
           <p:nvPr/>
         </p:nvSpPr>
         <p:spPr>
           <a:xfrm>
-            <a:off x="0" y="0"/>
-            <a:ext cx="12191695" cy="6858000"/>
-          </a:xfrm>
-          <a:prstGeom prst="rect">
-            <a:avLst/>
+            <a:off x="566928" y="2761488"/>
+            <a:ext cx="11057839" cy="1097280"/>
+          </a:xfrm>
+          <a:prstGeom prst="roundRect">
+            <a:avLst>
+              <a:gd name="adj" fmla="val 5000"/>
+            </a:avLst>
           </a:prstGeom>
           <a:solidFill>
             <a:srgbClr val="FFFFFF"/>
           </a:solidFill>
-          <a:ln>
-            <a:noFill/>
+          <a:ln w="9525">
+            <a:solidFill>
+              <a:srgbClr val="D5DED8"/>
+            </a:solidFill>
           </a:ln>
           <a:effectLst/>
         </p:spPr>
@@ -6516,14 +6681,53 @@
       </p:sp>
       <p:sp>
         <p:nvSpPr>
-          <p:cNvPr id="3" name="TextBox 2"/>
-          <p:cNvSpPr txBox="1"/>
-          <p:nvPr/>
-        </p:nvSpPr>
-        <p:spPr>
-          <a:xfrm>
-            <a:off x="566928" y="420624"/>
-            <a:ext cx="11057839" cy="201168"/>
+          <p:cNvPr id="19" name="TextBox 18"/>
+          <p:cNvSpPr txBox="1"/>
+          <p:nvPr/>
+        </p:nvSpPr>
+        <p:spPr>
+          <a:xfrm>
+            <a:off x="749808" y="2999232"/>
+            <a:ext cx="411480" cy="384048"/>
+          </a:xfrm>
+          <a:prstGeom prst="rect">
+            <a:avLst/>
+          </a:prstGeom>
+          <a:noFill/>
+        </p:spPr>
+        <p:txBody>
+          <a:bodyPr wrap="square" anchor="t" lIns="0" rIns="0" tIns="0" bIns="0">
+            <a:spAutoFit/>
+          </a:bodyPr>
+          <a:lstStyle/>
+          <a:p>
+            <a:pPr algn="l">
+              <a:lnSpc>
+                <a:spcPct val="100000"/>
+              </a:lnSpc>
+            </a:pPr>
+            <a:r>
+              <a:rPr sz="2400" b="1">
+                <a:solidFill>
+                  <a:srgbClr val="B87407"/>
+                </a:solidFill>
+                <a:latin typeface="Segoe UI"/>
+              </a:rPr>
+              <a:t>2</a:t>
+            </a:r>
+          </a:p>
+        </p:txBody>
+      </p:sp>
+      <p:sp>
+        <p:nvSpPr>
+          <p:cNvPr id="20" name="TextBox 19"/>
+          <p:cNvSpPr txBox="1"/>
+          <p:nvPr/>
+        </p:nvSpPr>
+        <p:spPr>
+          <a:xfrm>
+            <a:off x="1170432" y="2907792"/>
+            <a:ext cx="3017520" cy="256032"/>
           </a:xfrm>
           <a:prstGeom prst="rect">
             <a:avLst/>
@@ -6542,66 +6746,144 @@
               </a:lnSpc>
             </a:pPr>
             <a:r>
-              <a:rPr sz="950" b="1" spc="70">
+              <a:rPr sz="1250" b="1">
+                <a:solidFill>
+                  <a:srgbClr val="0C1A14"/>
+                </a:solidFill>
+                <a:latin typeface="Segoe UI"/>
+              </a:rPr>
+              <a:t>Solaire villageois décentralisé</a:t>
+            </a:r>
+          </a:p>
+        </p:txBody>
+      </p:sp>
+      <p:sp>
+        <p:nvSpPr>
+          <p:cNvPr id="21" name="TextBox 20"/>
+          <p:cNvSpPr txBox="1"/>
+          <p:nvPr/>
+        </p:nvSpPr>
+        <p:spPr>
+          <a:xfrm>
+            <a:off x="1170432" y="3200400"/>
+            <a:ext cx="3108960" cy="585216"/>
+          </a:xfrm>
+          <a:prstGeom prst="rect">
+            <a:avLst/>
+          </a:prstGeom>
+          <a:noFill/>
+        </p:spPr>
+        <p:txBody>
+          <a:bodyPr wrap="square" anchor="t" lIns="0" rIns="0" tIns="0" bIns="0">
+            <a:spAutoFit/>
+          </a:bodyPr>
+          <a:lstStyle/>
+          <a:p>
+            <a:pPr algn="l">
+              <a:lnSpc>
+                <a:spcPct val="125000"/>
+              </a:lnSpc>
+            </a:pPr>
+            <a:r>
+              <a:rPr sz="850" b="0">
                 <a:solidFill>
                   <a:srgbClr val="5D6E64"/>
                 </a:solidFill>
                 <a:latin typeface="Segoe UI"/>
               </a:rPr>
-              <a:t>RECOMMANDATIONS</a:t>
-            </a:r>
-          </a:p>
-        </p:txBody>
-      </p:sp>
-      <p:sp>
-        <p:nvSpPr>
-          <p:cNvPr id="4" name="TextBox 3"/>
-          <p:cNvSpPr txBox="1"/>
-          <p:nvPr/>
-        </p:nvSpPr>
-        <p:spPr>
-          <a:xfrm>
-            <a:off x="566928" y="658368"/>
-            <a:ext cx="11057839" cy="841248"/>
-          </a:xfrm>
-          <a:prstGeom prst="rect">
-            <a:avLst/>
-          </a:prstGeom>
-          <a:noFill/>
-        </p:spPr>
-        <p:txBody>
-          <a:bodyPr wrap="square" anchor="t" lIns="0" rIns="0" tIns="0" bIns="0">
-            <a:spAutoFit/>
-          </a:bodyPr>
-          <a:lstStyle/>
-          <a:p>
-            <a:pPr algn="l">
-              <a:lnSpc>
-                <a:spcPct val="106000"/>
-              </a:lnSpc>
-            </a:pPr>
-            <a:r>
-              <a:rPr sz="2550" b="1">
+              <a:t>Mini-réseaux avec stockage pour les gros bourgs, kits domestiques pour l'habitat dispersé, dimensionnés sur les usages productifs.</a:t>
+            </a:r>
+          </a:p>
+        </p:txBody>
+      </p:sp>
+      <p:sp>
+        <p:nvSpPr>
+          <p:cNvPr id="22" name="TextBox 21"/>
+          <p:cNvSpPr txBox="1"/>
+          <p:nvPr/>
+        </p:nvSpPr>
+        <p:spPr>
+          <a:xfrm>
+            <a:off x="4590288" y="2916936"/>
+            <a:ext cx="2194560" cy="146304"/>
+          </a:xfrm>
+          <a:prstGeom prst="rect">
+            <a:avLst/>
+          </a:prstGeom>
+          <a:noFill/>
+        </p:spPr>
+        <p:txBody>
+          <a:bodyPr wrap="square" anchor="t" lIns="0" rIns="0" tIns="0" bIns="0">
+            <a:spAutoFit/>
+          </a:bodyPr>
+          <a:lstStyle/>
+          <a:p>
+            <a:pPr algn="l">
+              <a:lnSpc>
+                <a:spcPct val="125000"/>
+              </a:lnSpc>
+            </a:pPr>
+            <a:r>
+              <a:rPr sz="750" b="1" spc="50">
+                <a:solidFill>
+                  <a:srgbClr val="5D6E64"/>
+                </a:solidFill>
+                <a:latin typeface="Segoe UI"/>
+              </a:rPr>
+              <a:t>PORTÉE DIRECTE</a:t>
+            </a:r>
+          </a:p>
+        </p:txBody>
+      </p:sp>
+      <p:sp>
+        <p:nvSpPr>
+          <p:cNvPr id="23" name="TextBox 22"/>
+          <p:cNvSpPr txBox="1"/>
+          <p:nvPr/>
+        </p:nvSpPr>
+        <p:spPr>
+          <a:xfrm>
+            <a:off x="4590288" y="3108960"/>
+            <a:ext cx="2212848" cy="694944"/>
+          </a:xfrm>
+          <a:prstGeom prst="rect">
+            <a:avLst/>
+          </a:prstGeom>
+          <a:noFill/>
+        </p:spPr>
+        <p:txBody>
+          <a:bodyPr wrap="square" anchor="t" lIns="0" rIns="0" tIns="0" bIns="0">
+            <a:spAutoFit/>
+          </a:bodyPr>
+          <a:lstStyle/>
+          <a:p>
+            <a:pPr algn="l">
+              <a:lnSpc>
+                <a:spcPct val="125000"/>
+              </a:lnSpc>
+            </a:pPr>
+            <a:r>
+              <a:rPr sz="850" b="0">
                 <a:solidFill>
                   <a:srgbClr val="0C1A14"/>
                 </a:solidFill>
                 <a:latin typeface="Segoe UI"/>
               </a:rPr>
-              <a:t>Quatre leviers, dans cet ordre</a:t>
-            </a:r>
-          </a:p>
-        </p:txBody>
-      </p:sp>
-      <p:sp>
-        <p:nvSpPr>
-          <p:cNvPr id="5" name="TextBox 4"/>
-          <p:cNvSpPr txBox="1"/>
-          <p:nvPr/>
-        </p:nvSpPr>
-        <p:spPr>
-          <a:xfrm>
-            <a:off x="896112" y="6437376"/>
-            <a:ext cx="11057839" cy="182880"/>
+              <a:t>3,7 M de ruraux sans électricité</a:t>
+            </a:r>
+          </a:p>
+        </p:txBody>
+      </p:sp>
+      <p:sp>
+        <p:nvSpPr>
+          <p:cNvPr id="24" name="TextBox 23"/>
+          <p:cNvSpPr txBox="1"/>
+          <p:nvPr/>
+        </p:nvSpPr>
+        <p:spPr>
+          <a:xfrm>
+            <a:off x="6967728" y="2916936"/>
+            <a:ext cx="2194560" cy="146304"/>
           </a:xfrm>
           <a:prstGeom prst="rect">
             <a:avLst/>
@@ -6620,40 +6902,118 @@
               </a:lnSpc>
             </a:pPr>
             <a:r>
+              <a:rPr sz="750" b="1" spc="50">
+                <a:solidFill>
+                  <a:srgbClr val="5D6E64"/>
+                </a:solidFill>
+                <a:latin typeface="Segoe UI"/>
+              </a:rPr>
+              <a:t>CIBLE 2030</a:t>
+            </a:r>
+          </a:p>
+        </p:txBody>
+      </p:sp>
+      <p:sp>
+        <p:nvSpPr>
+          <p:cNvPr id="25" name="TextBox 24"/>
+          <p:cNvSpPr txBox="1"/>
+          <p:nvPr/>
+        </p:nvSpPr>
+        <p:spPr>
+          <a:xfrm>
+            <a:off x="6967728" y="3108960"/>
+            <a:ext cx="2212848" cy="694944"/>
+          </a:xfrm>
+          <a:prstGeom prst="rect">
+            <a:avLst/>
+          </a:prstGeom>
+          <a:noFill/>
+        </p:spPr>
+        <p:txBody>
+          <a:bodyPr wrap="square" anchor="t" lIns="0" rIns="0" tIns="0" bIns="0">
+            <a:spAutoFit/>
+          </a:bodyPr>
+          <a:lstStyle/>
+          <a:p>
+            <a:pPr algn="l">
+              <a:lnSpc>
+                <a:spcPct val="125000"/>
+              </a:lnSpc>
+            </a:pPr>
+            <a:r>
               <a:rPr sz="850" b="0">
                 <a:solidFill>
+                  <a:srgbClr val="0C1A14"/>
+                </a:solidFill>
+                <a:latin typeface="Segoe UI"/>
+              </a:rPr>
+              <a:t>Dépasser 65 700 raccordements ruraux par an — le seuil démographique — puis viser l'accès universel</a:t>
+            </a:r>
+          </a:p>
+        </p:txBody>
+      </p:sp>
+      <p:sp>
+        <p:nvSpPr>
+          <p:cNvPr id="26" name="TextBox 25"/>
+          <p:cNvSpPr txBox="1"/>
+          <p:nvPr/>
+        </p:nvSpPr>
+        <p:spPr>
+          <a:xfrm>
+            <a:off x="9345168" y="2916936"/>
+            <a:ext cx="2194560" cy="146304"/>
+          </a:xfrm>
+          <a:prstGeom prst="rect">
+            <a:avLst/>
+          </a:prstGeom>
+          <a:noFill/>
+        </p:spPr>
+        <p:txBody>
+          <a:bodyPr wrap="square" anchor="t" lIns="0" rIns="0" tIns="0" bIns="0">
+            <a:spAutoFit/>
+          </a:bodyPr>
+          <a:lstStyle/>
+          <a:p>
+            <a:pPr algn="l">
+              <a:lnSpc>
+                <a:spcPct val="125000"/>
+              </a:lnSpc>
+            </a:pPr>
+            <a:r>
+              <a:rPr sz="750" b="1" spc="50">
+                <a:solidFill>
                   <a:srgbClr val="5D6E64"/>
                 </a:solidFill>
                 <a:latin typeface="Segoe UI"/>
               </a:rPr>
-              <a:t>Défi 2 · Énergie, Climat &amp; Forêts au Togo</a:t>
-            </a:r>
-          </a:p>
-        </p:txBody>
-      </p:sp>
-      <p:sp>
-        <p:nvSpPr>
-          <p:cNvPr id="6" name="TextBox 5"/>
-          <p:cNvSpPr txBox="1"/>
-          <p:nvPr/>
-        </p:nvSpPr>
-        <p:spPr>
-          <a:xfrm>
-            <a:off x="11076127" y="6437376"/>
-            <a:ext cx="548640" cy="182880"/>
-          </a:xfrm>
-          <a:prstGeom prst="rect">
-            <a:avLst/>
-          </a:prstGeom>
-          <a:noFill/>
-        </p:spPr>
-        <p:txBody>
-          <a:bodyPr wrap="square" anchor="t" lIns="0" rIns="0" tIns="0" bIns="0">
-            <a:spAutoFit/>
-          </a:bodyPr>
-          <a:lstStyle/>
-          <a:p>
-            <a:pPr algn="r">
+              <a:t>INDICATEUR DE SUIVI</a:t>
+            </a:r>
+          </a:p>
+        </p:txBody>
+      </p:sp>
+      <p:sp>
+        <p:nvSpPr>
+          <p:cNvPr id="27" name="TextBox 26"/>
+          <p:cNvSpPr txBox="1"/>
+          <p:nvPr/>
+        </p:nvSpPr>
+        <p:spPr>
+          <a:xfrm>
+            <a:off x="9345168" y="3108960"/>
+            <a:ext cx="2212848" cy="694944"/>
+          </a:xfrm>
+          <a:prstGeom prst="rect">
+            <a:avLst/>
+          </a:prstGeom>
+          <a:noFill/>
+        </p:spPr>
+        <p:txBody>
+          <a:bodyPr wrap="square" anchor="t" lIns="0" rIns="0" tIns="0" bIns="0">
+            <a:spAutoFit/>
+          </a:bodyPr>
+          <a:lstStyle/>
+          <a:p>
+            <a:pPr algn="l">
               <a:lnSpc>
                 <a:spcPct val="125000"/>
               </a:lnSpc>
@@ -6661,49 +7021,25 @@
             <a:r>
               <a:rPr sz="850" b="0">
                 <a:solidFill>
-                  <a:srgbClr val="5D6E64"/>
-                </a:solidFill>
-                <a:latin typeface="Segoe UI"/>
-              </a:rPr>
-              <a:t>11 / 11</a:t>
-            </a:r>
-          </a:p>
-        </p:txBody>
-      </p:sp>
-      <p:pic>
-        <p:nvPicPr>
-          <p:cNvPr id="7" name="Picture 6" descr="armoiries_togo.png"/>
-          <p:cNvPicPr>
-            <a:picLocks noChangeAspect="1"/>
-          </p:cNvPicPr>
-          <p:nvPr/>
-        </p:nvPicPr>
-        <p:blipFill>
-          <a:blip r:embed="rId2"/>
-          <a:stretch>
-            <a:fillRect/>
-          </a:stretch>
-        </p:blipFill>
-        <p:spPr>
-          <a:xfrm>
-            <a:off x="548640" y="6327648"/>
-            <a:ext cx="216073" cy="310896"/>
-          </a:xfrm>
-          <a:prstGeom prst="rect">
-            <a:avLst/>
-          </a:prstGeom>
-        </p:spPr>
-      </p:pic>
-      <p:sp>
-        <p:nvSpPr>
-          <p:cNvPr id="8" name="Rounded Rectangle 7"/>
+                  <a:srgbClr val="0C1A14"/>
+                </a:solidFill>
+                <a:latin typeface="Segoe UI"/>
+              </a:rPr>
+              <a:t>Le volume annuel de raccordements, et non le seul taux d'accès</a:t>
+            </a:r>
+          </a:p>
+        </p:txBody>
+      </p:sp>
+      <p:sp>
+        <p:nvSpPr>
+          <p:cNvPr id="28" name="Rounded Rectangle 27"/>
           <p:cNvSpPr/>
           <p:nvPr/>
         </p:nvSpPr>
         <p:spPr>
           <a:xfrm>
-            <a:off x="566928" y="1572768"/>
-            <a:ext cx="11057839" cy="1069848"/>
+            <a:off x="566928" y="3950208"/>
+            <a:ext cx="11057839" cy="1097280"/>
           </a:xfrm>
           <a:prstGeom prst="roundRect">
             <a:avLst>
@@ -6744,13 +7080,13 @@
       </p:sp>
       <p:sp>
         <p:nvSpPr>
-          <p:cNvPr id="9" name="TextBox 8"/>
-          <p:cNvSpPr txBox="1"/>
-          <p:nvPr/>
-        </p:nvSpPr>
-        <p:spPr>
-          <a:xfrm>
-            <a:off x="749808" y="1792224"/>
+          <p:cNvPr id="29" name="TextBox 28"/>
+          <p:cNvSpPr txBox="1"/>
+          <p:nvPr/>
+        </p:nvSpPr>
+        <p:spPr>
+          <a:xfrm>
+            <a:off x="749808" y="4187952"/>
             <a:ext cx="411480" cy="384048"/>
           </a:xfrm>
           <a:prstGeom prst="rect">
@@ -6772,24 +7108,24 @@
             <a:r>
               <a:rPr sz="2400" b="1">
                 <a:solidFill>
-                  <a:srgbClr val="B32418"/>
-                </a:solidFill>
-                <a:latin typeface="Segoe UI"/>
-              </a:rPr>
-              <a:t>1</a:t>
-            </a:r>
-          </a:p>
-        </p:txBody>
-      </p:sp>
-      <p:sp>
-        <p:nvSpPr>
-          <p:cNvPr id="10" name="TextBox 9"/>
-          <p:cNvSpPr txBox="1"/>
-          <p:nvPr/>
-        </p:nvSpPr>
-        <p:spPr>
-          <a:xfrm>
-            <a:off x="1170432" y="1709928"/>
+                  <a:srgbClr val="0F7A4A"/>
+                </a:solidFill>
+                <a:latin typeface="Segoe UI"/>
+              </a:rPr>
+              <a:t>3</a:t>
+            </a:r>
+          </a:p>
+        </p:txBody>
+      </p:sp>
+      <p:sp>
+        <p:nvSpPr>
+          <p:cNvPr id="30" name="TextBox 29"/>
+          <p:cNvSpPr txBox="1"/>
+          <p:nvPr/>
+        </p:nvSpPr>
+        <p:spPr>
+          <a:xfrm>
+            <a:off x="1170432" y="4096512"/>
             <a:ext cx="3017520" cy="256032"/>
           </a:xfrm>
           <a:prstGeom prst="rect">
@@ -6815,20 +7151,20 @@
                 </a:solidFill>
                 <a:latin typeface="Segoe UI"/>
               </a:rPr>
-              <a:t>Cuisson propre</a:t>
-            </a:r>
-          </a:p>
-        </p:txBody>
-      </p:sp>
-      <p:sp>
-        <p:nvSpPr>
-          <p:cNvPr id="11" name="TextBox 10"/>
-          <p:cNvSpPr txBox="1"/>
-          <p:nvPr/>
-        </p:nvSpPr>
-        <p:spPr>
-          <a:xfrm>
-            <a:off x="1170432" y="1993392"/>
+              <a:t>Protection ciblée des massifs</a:t>
+            </a:r>
+          </a:p>
+        </p:txBody>
+      </p:sp>
+      <p:sp>
+        <p:nvSpPr>
+          <p:cNvPr id="31" name="TextBox 30"/>
+          <p:cNvSpPr txBox="1"/>
+          <p:nvPr/>
+        </p:nvSpPr>
+        <p:spPr>
+          <a:xfrm>
+            <a:off x="1170432" y="4389120"/>
             <a:ext cx="3108960" cy="585216"/>
           </a:xfrm>
           <a:prstGeom prst="rect">
@@ -6854,20 +7190,20 @@
                 </a:solidFill>
                 <a:latin typeface="Segoe UI"/>
               </a:rPr>
-              <a:t>GPL subventionné en zone périurbaine, foyers améliorés certifiés en zone rurale enclavée.</a:t>
-            </a:r>
-          </a:p>
-        </p:txBody>
-      </p:sp>
-      <p:sp>
-        <p:nvSpPr>
-          <p:cNvPr id="12" name="TextBox 11"/>
-          <p:cNvSpPr txBox="1"/>
-          <p:nvPr/>
-        </p:nvSpPr>
-        <p:spPr>
-          <a:xfrm>
-            <a:off x="4590288" y="1719072"/>
+              <a:t>Surveillance, régénération assistée et agroforesterie concentrées sur les massifs prioritaires plutôt que saupoudrées.</a:t>
+            </a:r>
+          </a:p>
+        </p:txBody>
+      </p:sp>
+      <p:sp>
+        <p:nvSpPr>
+          <p:cNvPr id="32" name="TextBox 31"/>
+          <p:cNvSpPr txBox="1"/>
+          <p:nvPr/>
+        </p:nvSpPr>
+        <p:spPr>
+          <a:xfrm>
+            <a:off x="4590288" y="4105656"/>
             <a:ext cx="2194560" cy="146304"/>
           </a:xfrm>
           <a:prstGeom prst="rect">
@@ -6900,14 +7236,14 @@
       </p:sp>
       <p:sp>
         <p:nvSpPr>
-          <p:cNvPr id="13" name="TextBox 12"/>
-          <p:cNvSpPr txBox="1"/>
-          <p:nvPr/>
-        </p:nvSpPr>
-        <p:spPr>
-          <a:xfrm>
-            <a:off x="4590288" y="1911096"/>
-            <a:ext cx="2212848" cy="676656"/>
+          <p:cNvPr id="33" name="TextBox 32"/>
+          <p:cNvSpPr txBox="1"/>
+          <p:nvPr/>
+        </p:nvSpPr>
+        <p:spPr>
+          <a:xfrm>
+            <a:off x="4590288" y="4297680"/>
+            <a:ext cx="2212848" cy="694944"/>
           </a:xfrm>
           <a:prstGeom prst="rect">
             <a:avLst/>
@@ -6932,20 +7268,20 @@
                 </a:solidFill>
                 <a:latin typeface="Segoe UI"/>
               </a:rPr>
-              <a:t>8,1 M de personnes</a:t>
-            </a:r>
-          </a:p>
-        </p:txBody>
-      </p:sp>
-      <p:sp>
-        <p:nvSpPr>
-          <p:cNvPr id="14" name="TextBox 13"/>
-          <p:cNvSpPr txBox="1"/>
-          <p:nvPr/>
-        </p:nvSpPr>
-        <p:spPr>
-          <a:xfrm>
-            <a:off x="6967728" y="1719072"/>
+              <a:t>9 massifs · 91 468 ha de forêts classées</a:t>
+            </a:r>
+          </a:p>
+        </p:txBody>
+      </p:sp>
+      <p:sp>
+        <p:nvSpPr>
+          <p:cNvPr id="34" name="TextBox 33"/>
+          <p:cNvSpPr txBox="1"/>
+          <p:nvPr/>
+        </p:nvSpPr>
+        <p:spPr>
+          <a:xfrm>
+            <a:off x="6967728" y="4105656"/>
             <a:ext cx="2194560" cy="146304"/>
           </a:xfrm>
           <a:prstGeom prst="rect">
@@ -6978,14 +7314,14 @@
       </p:sp>
       <p:sp>
         <p:nvSpPr>
-          <p:cNvPr id="15" name="TextBox 14"/>
-          <p:cNvSpPr txBox="1"/>
-          <p:nvPr/>
-        </p:nvSpPr>
-        <p:spPr>
-          <a:xfrm>
-            <a:off x="6967728" y="1911096"/>
-            <a:ext cx="2212848" cy="676656"/>
+          <p:cNvPr id="35" name="TextBox 34"/>
+          <p:cNvSpPr txBox="1"/>
+          <p:nvPr/>
+        </p:nvSpPr>
+        <p:spPr>
+          <a:xfrm>
+            <a:off x="6967728" y="4297680"/>
+            <a:ext cx="2212848" cy="694944"/>
           </a:xfrm>
           <a:prstGeom prst="rect">
             <a:avLst/>
@@ -7010,20 +7346,20 @@
                 </a:solidFill>
                 <a:latin typeface="Segoe UI"/>
               </a:rPr>
-              <a:t>De 0,9 % à 15 % d'accès rural à une cuisson propre en 2030</a:t>
-            </a:r>
-          </a:p>
-        </p:txBody>
-      </p:sp>
-      <p:sp>
-        <p:nvSpPr>
-          <p:cNvPr id="16" name="TextBox 15"/>
-          <p:cNvSpPr txBox="1"/>
-          <p:nvPr/>
-        </p:nvSpPr>
-        <p:spPr>
-          <a:xfrm>
-            <a:off x="9345168" y="1719072"/>
+              <a:t>Perte nette nulle sur les massifs prioritaires</a:t>
+            </a:r>
+          </a:p>
+        </p:txBody>
+      </p:sp>
+      <p:sp>
+        <p:nvSpPr>
+          <p:cNvPr id="36" name="TextBox 35"/>
+          <p:cNvSpPr txBox="1"/>
+          <p:nvPr/>
+        </p:nvSpPr>
+        <p:spPr>
+          <a:xfrm>
+            <a:off x="9345168" y="4105656"/>
             <a:ext cx="2194560" cy="146304"/>
           </a:xfrm>
           <a:prstGeom prst="rect">
@@ -7056,14 +7392,14 @@
       </p:sp>
       <p:sp>
         <p:nvSpPr>
-          <p:cNvPr id="17" name="TextBox 16"/>
-          <p:cNvSpPr txBox="1"/>
-          <p:nvPr/>
-        </p:nvSpPr>
-        <p:spPr>
-          <a:xfrm>
-            <a:off x="9345168" y="1911096"/>
-            <a:ext cx="2212848" cy="676656"/>
+          <p:cNvPr id="37" name="TextBox 36"/>
+          <p:cNvSpPr txBox="1"/>
+          <p:nvPr/>
+        </p:nvSpPr>
+        <p:spPr>
+          <a:xfrm>
+            <a:off x="9345168" y="4297680"/>
+            <a:ext cx="2212848" cy="694944"/>
           </a:xfrm>
           <a:prstGeom prst="rect">
             <a:avLst/>
@@ -7088,21 +7424,21 @@
                 </a:solidFill>
                 <a:latin typeface="Segoe UI"/>
               </a:rPr>
-              <a:t>EG.CFT.ACCS.RU.ZS — et non le taux d'énergie renouvelable</a:t>
-            </a:r>
-          </a:p>
-        </p:txBody>
-      </p:sp>
-      <p:sp>
-        <p:nvSpPr>
-          <p:cNvPr id="18" name="Rounded Rectangle 17"/>
+              <a:t>Un suivi surfacique par massif, à créer : AG.LND.FRST.K2 ne contient que 3 mesures indépendantes</a:t>
+            </a:r>
+          </a:p>
+        </p:txBody>
+      </p:sp>
+      <p:sp>
+        <p:nvSpPr>
+          <p:cNvPr id="38" name="Rounded Rectangle 37"/>
           <p:cNvSpPr/>
           <p:nvPr/>
         </p:nvSpPr>
         <p:spPr>
           <a:xfrm>
-            <a:off x="566928" y="2724912"/>
-            <a:ext cx="11057839" cy="1069848"/>
+            <a:off x="566928" y="5138928"/>
+            <a:ext cx="11057839" cy="1097280"/>
           </a:xfrm>
           <a:prstGeom prst="roundRect">
             <a:avLst>
@@ -7143,13 +7479,13 @@
       </p:sp>
       <p:sp>
         <p:nvSpPr>
-          <p:cNvPr id="19" name="TextBox 18"/>
-          <p:cNvSpPr txBox="1"/>
-          <p:nvPr/>
-        </p:nvSpPr>
-        <p:spPr>
-          <a:xfrm>
-            <a:off x="749808" y="2944368"/>
+          <p:cNvPr id="39" name="TextBox 38"/>
+          <p:cNvSpPr txBox="1"/>
+          <p:nvPr/>
+        </p:nvSpPr>
+        <p:spPr>
+          <a:xfrm>
+            <a:off x="749808" y="5376672"/>
             <a:ext cx="411480" cy="384048"/>
           </a:xfrm>
           <a:prstGeom prst="rect">
@@ -7171,24 +7507,24 @@
             <a:r>
               <a:rPr sz="2400" b="1">
                 <a:solidFill>
-                  <a:srgbClr val="B87407"/>
-                </a:solidFill>
-                <a:latin typeface="Segoe UI"/>
-              </a:rPr>
-              <a:t>2</a:t>
-            </a:r>
-          </a:p>
-        </p:txBody>
-      </p:sp>
-      <p:sp>
-        <p:nvSpPr>
-          <p:cNvPr id="20" name="TextBox 19"/>
-          <p:cNvSpPr txBox="1"/>
-          <p:nvPr/>
-        </p:nvSpPr>
-        <p:spPr>
-          <a:xfrm>
-            <a:off x="1170432" y="2862072"/>
+                  <a:srgbClr val="7C441F"/>
+                </a:solidFill>
+                <a:latin typeface="Segoe UI"/>
+              </a:rPr>
+              <a:t>4</a:t>
+            </a:r>
+          </a:p>
+        </p:txBody>
+      </p:sp>
+      <p:sp>
+        <p:nvSpPr>
+          <p:cNvPr id="40" name="TextBox 39"/>
+          <p:cNvSpPr txBox="1"/>
+          <p:nvPr/>
+        </p:nvSpPr>
+        <p:spPr>
+          <a:xfrm>
+            <a:off x="1170432" y="5285232"/>
             <a:ext cx="3017520" cy="256032"/>
           </a:xfrm>
           <a:prstGeom prst="rect">
@@ -7214,20 +7550,20 @@
                 </a:solidFill>
                 <a:latin typeface="Segoe UI"/>
               </a:rPr>
-              <a:t>Solaire villageois décentralisé</a:t>
-            </a:r>
-          </a:p>
-        </p:txBody>
-      </p:sp>
-      <p:sp>
-        <p:nvSpPr>
-          <p:cNvPr id="21" name="TextBox 20"/>
-          <p:cNvSpPr txBox="1"/>
-          <p:nvPr/>
-        </p:nvSpPr>
-        <p:spPr>
-          <a:xfrm>
-            <a:off x="1170432" y="3145536"/>
+              <a:t>Intensification agricole</a:t>
+            </a:r>
+          </a:p>
+        </p:txBody>
+      </p:sp>
+      <p:sp>
+        <p:nvSpPr>
+          <p:cNvPr id="41" name="TextBox 40"/>
+          <p:cNvSpPr txBox="1"/>
+          <p:nvPr/>
+        </p:nvSpPr>
+        <p:spPr>
+          <a:xfrm>
+            <a:off x="1170432" y="5577840"/>
             <a:ext cx="3108960" cy="585216"/>
           </a:xfrm>
           <a:prstGeom prst="rect">
@@ -7253,20 +7589,20 @@
                 </a:solidFill>
                 <a:latin typeface="Segoe UI"/>
               </a:rPr>
-              <a:t>Mini-réseaux avec stockage pour les gros bourgs, kits domestiques pour l'habitat dispersé, dimensionnés sur les usages productifs.</a:t>
-            </a:r>
-          </a:p>
-        </p:txBody>
-      </p:sp>
-      <p:sp>
-        <p:nvSpPr>
-          <p:cNvPr id="22" name="TextBox 21"/>
-          <p:cNvSpPr txBox="1"/>
-          <p:nvPr/>
-        </p:nvSpPr>
-        <p:spPr>
-          <a:xfrm>
-            <a:off x="4590288" y="2871216"/>
+              <a:t>Semences améliorées, fertilité des sols et conseil agricole sur les bassins céréaliers riverains des massifs prioritaires.</a:t>
+            </a:r>
+          </a:p>
+        </p:txBody>
+      </p:sp>
+      <p:sp>
+        <p:nvSpPr>
+          <p:cNvPr id="42" name="TextBox 41"/>
+          <p:cNvSpPr txBox="1"/>
+          <p:nvPr/>
+        </p:nvSpPr>
+        <p:spPr>
+          <a:xfrm>
+            <a:off x="4590288" y="5294376"/>
             <a:ext cx="2194560" cy="146304"/>
           </a:xfrm>
           <a:prstGeom prst="rect">
@@ -7299,14 +7635,14 @@
       </p:sp>
       <p:sp>
         <p:nvSpPr>
-          <p:cNvPr id="23" name="TextBox 22"/>
-          <p:cNvSpPr txBox="1"/>
-          <p:nvPr/>
-        </p:nvSpPr>
-        <p:spPr>
-          <a:xfrm>
-            <a:off x="4590288" y="3063240"/>
-            <a:ext cx="2212848" cy="676656"/>
+          <p:cNvPr id="43" name="TextBox 42"/>
+          <p:cNvSpPr txBox="1"/>
+          <p:nvPr/>
+        </p:nvSpPr>
+        <p:spPr>
+          <a:xfrm>
+            <a:off x="4590288" y="5486400"/>
+            <a:ext cx="2212848" cy="694944"/>
           </a:xfrm>
           <a:prstGeom prst="rect">
             <a:avLst/>
@@ -7331,20 +7667,20 @@
                 </a:solidFill>
                 <a:latin typeface="Segoe UI"/>
               </a:rPr>
-              <a:t>3,7 M de ruraux sans électricité</a:t>
-            </a:r>
-          </a:p>
-        </p:txBody>
-      </p:sp>
-      <p:sp>
-        <p:nvSpPr>
-          <p:cNvPr id="24" name="TextBox 23"/>
-          <p:cNvSpPr txBox="1"/>
-          <p:nvPr/>
-        </p:nvSpPr>
-        <p:spPr>
-          <a:xfrm>
-            <a:off x="6967728" y="2871216"/>
+              <a:t>19 700 ha défrichés par an, soit 6.7 × la perte forestière</a:t>
+            </a:r>
+          </a:p>
+        </p:txBody>
+      </p:sp>
+      <p:sp>
+        <p:nvSpPr>
+          <p:cNvPr id="44" name="TextBox 43"/>
+          <p:cNvSpPr txBox="1"/>
+          <p:nvPr/>
+        </p:nvSpPr>
+        <p:spPr>
+          <a:xfrm>
+            <a:off x="6967728" y="5294376"/>
             <a:ext cx="2194560" cy="146304"/>
           </a:xfrm>
           <a:prstGeom prst="rect">
@@ -7377,14 +7713,14 @@
       </p:sp>
       <p:sp>
         <p:nvSpPr>
-          <p:cNvPr id="25" name="TextBox 24"/>
-          <p:cNvSpPr txBox="1"/>
-          <p:nvPr/>
-        </p:nvSpPr>
-        <p:spPr>
-          <a:xfrm>
-            <a:off x="6967728" y="3063240"/>
-            <a:ext cx="2212848" cy="676656"/>
+          <p:cNvPr id="45" name="TextBox 44"/>
+          <p:cNvSpPr txBox="1"/>
+          <p:nvPr/>
+        </p:nvSpPr>
+        <p:spPr>
+          <a:xfrm>
+            <a:off x="6967728" y="5486400"/>
+            <a:ext cx="2212848" cy="694944"/>
           </a:xfrm>
           <a:prstGeom prst="rect">
             <a:avLst/>
@@ -7409,20 +7745,20 @@
                 </a:solidFill>
                 <a:latin typeface="Segoe UI"/>
               </a:rPr>
-              <a:t>Dépasser 65 700 raccordements ruraux par an — le seuil démographique — puis viser l'accès universel</a:t>
-            </a:r>
-          </a:p>
-        </p:txBody>
-      </p:sp>
-      <p:sp>
-        <p:nvSpPr>
-          <p:cNvPr id="26" name="TextBox 25"/>
-          <p:cNvSpPr txBox="1"/>
-          <p:nvPr/>
-        </p:nvSpPr>
-        <p:spPr>
-          <a:xfrm>
-            <a:off x="9345168" y="2871216"/>
+              <a:t>Ramener l'expansion des surfaces céréalières vers zéro</a:t>
+            </a:r>
+          </a:p>
+        </p:txBody>
+      </p:sp>
+      <p:sp>
+        <p:nvSpPr>
+          <p:cNvPr id="46" name="TextBox 45"/>
+          <p:cNvSpPr txBox="1"/>
+          <p:nvPr/>
+        </p:nvSpPr>
+        <p:spPr>
+          <a:xfrm>
+            <a:off x="9345168" y="5294376"/>
             <a:ext cx="2194560" cy="146304"/>
           </a:xfrm>
           <a:prstGeom prst="rect">
@@ -7455,14 +7791,14 @@
       </p:sp>
       <p:sp>
         <p:nvSpPr>
-          <p:cNvPr id="27" name="TextBox 26"/>
-          <p:cNvSpPr txBox="1"/>
-          <p:nvPr/>
-        </p:nvSpPr>
-        <p:spPr>
-          <a:xfrm>
-            <a:off x="9345168" y="3063240"/>
-            <a:ext cx="2212848" cy="676656"/>
+          <p:cNvPr id="47" name="TextBox 46"/>
+          <p:cNvSpPr txBox="1"/>
+          <p:nvPr/>
+        </p:nvSpPr>
+        <p:spPr>
+          <a:xfrm>
+            <a:off x="9345168" y="5486400"/>
+            <a:ext cx="2212848" cy="694944"/>
           </a:xfrm>
           <a:prstGeom prst="rect">
             <a:avLst/>
@@ -7487,844 +7823,7 @@
                 </a:solidFill>
                 <a:latin typeface="Segoe UI"/>
               </a:rPr>
-              <a:t>Le volume annuel de raccordements, et non le seul taux d'accès</a:t>
-            </a:r>
-          </a:p>
-        </p:txBody>
-      </p:sp>
-      <p:sp>
-        <p:nvSpPr>
-          <p:cNvPr id="28" name="Rounded Rectangle 27"/>
-          <p:cNvSpPr/>
-          <p:nvPr/>
-        </p:nvSpPr>
-        <p:spPr>
-          <a:xfrm>
-            <a:off x="566928" y="3877056"/>
-            <a:ext cx="11057839" cy="1069848"/>
-          </a:xfrm>
-          <a:prstGeom prst="roundRect">
-            <a:avLst>
-              <a:gd name="adj" fmla="val 5000"/>
-            </a:avLst>
-          </a:prstGeom>
-          <a:solidFill>
-            <a:srgbClr val="FFFFFF"/>
-          </a:solidFill>
-          <a:ln w="9525">
-            <a:solidFill>
-              <a:srgbClr val="D5DED8"/>
-            </a:solidFill>
-          </a:ln>
-          <a:effectLst/>
-        </p:spPr>
-        <p:style>
-          <a:lnRef idx="1">
-            <a:schemeClr val="accent1"/>
-          </a:lnRef>
-          <a:fillRef idx="3">
-            <a:schemeClr val="accent1"/>
-          </a:fillRef>
-          <a:effectRef idx="2">
-            <a:schemeClr val="accent1"/>
-          </a:effectRef>
-          <a:fontRef idx="minor">
-            <a:schemeClr val="lt1"/>
-          </a:fontRef>
-        </p:style>
-        <p:txBody>
-          <a:bodyPr rtlCol="0" anchor="ctr" wrap="square"/>
-          <a:lstStyle/>
-          <a:p>
-            <a:pPr algn="ctr"/>
-          </a:p>
-        </p:txBody>
-      </p:sp>
-      <p:sp>
-        <p:nvSpPr>
-          <p:cNvPr id="29" name="TextBox 28"/>
-          <p:cNvSpPr txBox="1"/>
-          <p:nvPr/>
-        </p:nvSpPr>
-        <p:spPr>
-          <a:xfrm>
-            <a:off x="749808" y="4096512"/>
-            <a:ext cx="411480" cy="384048"/>
-          </a:xfrm>
-          <a:prstGeom prst="rect">
-            <a:avLst/>
-          </a:prstGeom>
-          <a:noFill/>
-        </p:spPr>
-        <p:txBody>
-          <a:bodyPr wrap="square" anchor="t" lIns="0" rIns="0" tIns="0" bIns="0">
-            <a:spAutoFit/>
-          </a:bodyPr>
-          <a:lstStyle/>
-          <a:p>
-            <a:pPr algn="l">
-              <a:lnSpc>
-                <a:spcPct val="100000"/>
-              </a:lnSpc>
-            </a:pPr>
-            <a:r>
-              <a:rPr sz="2400" b="1">
-                <a:solidFill>
-                  <a:srgbClr val="0F7A4A"/>
-                </a:solidFill>
-                <a:latin typeface="Segoe UI"/>
-              </a:rPr>
-              <a:t>3</a:t>
-            </a:r>
-          </a:p>
-        </p:txBody>
-      </p:sp>
-      <p:sp>
-        <p:nvSpPr>
-          <p:cNvPr id="30" name="TextBox 29"/>
-          <p:cNvSpPr txBox="1"/>
-          <p:nvPr/>
-        </p:nvSpPr>
-        <p:spPr>
-          <a:xfrm>
-            <a:off x="1170432" y="4014216"/>
-            <a:ext cx="3017520" cy="256032"/>
-          </a:xfrm>
-          <a:prstGeom prst="rect">
-            <a:avLst/>
-          </a:prstGeom>
-          <a:noFill/>
-        </p:spPr>
-        <p:txBody>
-          <a:bodyPr wrap="square" anchor="t" lIns="0" rIns="0" tIns="0" bIns="0">
-            <a:spAutoFit/>
-          </a:bodyPr>
-          <a:lstStyle/>
-          <a:p>
-            <a:pPr algn="l">
-              <a:lnSpc>
-                <a:spcPct val="125000"/>
-              </a:lnSpc>
-            </a:pPr>
-            <a:r>
-              <a:rPr sz="1250" b="1">
-                <a:solidFill>
-                  <a:srgbClr val="0C1A14"/>
-                </a:solidFill>
-                <a:latin typeface="Segoe UI"/>
-              </a:rPr>
-              <a:t>Protection ciblée des massifs</a:t>
-            </a:r>
-          </a:p>
-        </p:txBody>
-      </p:sp>
-      <p:sp>
-        <p:nvSpPr>
-          <p:cNvPr id="31" name="TextBox 30"/>
-          <p:cNvSpPr txBox="1"/>
-          <p:nvPr/>
-        </p:nvSpPr>
-        <p:spPr>
-          <a:xfrm>
-            <a:off x="1170432" y="4297680"/>
-            <a:ext cx="3108960" cy="585216"/>
-          </a:xfrm>
-          <a:prstGeom prst="rect">
-            <a:avLst/>
-          </a:prstGeom>
-          <a:noFill/>
-        </p:spPr>
-        <p:txBody>
-          <a:bodyPr wrap="square" anchor="t" lIns="0" rIns="0" tIns="0" bIns="0">
-            <a:spAutoFit/>
-          </a:bodyPr>
-          <a:lstStyle/>
-          <a:p>
-            <a:pPr algn="l">
-              <a:lnSpc>
-                <a:spcPct val="125000"/>
-              </a:lnSpc>
-            </a:pPr>
-            <a:r>
-              <a:rPr sz="850" b="0">
-                <a:solidFill>
-                  <a:srgbClr val="5D6E64"/>
-                </a:solidFill>
-                <a:latin typeface="Segoe UI"/>
-              </a:rPr>
-              <a:t>Surveillance, régénération assistée et agroforesterie concentrées sur les massifs prioritaires plutôt que saupoudrées.</a:t>
-            </a:r>
-          </a:p>
-        </p:txBody>
-      </p:sp>
-      <p:sp>
-        <p:nvSpPr>
-          <p:cNvPr id="32" name="TextBox 31"/>
-          <p:cNvSpPr txBox="1"/>
-          <p:nvPr/>
-        </p:nvSpPr>
-        <p:spPr>
-          <a:xfrm>
-            <a:off x="4590288" y="4023360"/>
-            <a:ext cx="2194560" cy="146304"/>
-          </a:xfrm>
-          <a:prstGeom prst="rect">
-            <a:avLst/>
-          </a:prstGeom>
-          <a:noFill/>
-        </p:spPr>
-        <p:txBody>
-          <a:bodyPr wrap="square" anchor="t" lIns="0" rIns="0" tIns="0" bIns="0">
-            <a:spAutoFit/>
-          </a:bodyPr>
-          <a:lstStyle/>
-          <a:p>
-            <a:pPr algn="l">
-              <a:lnSpc>
-                <a:spcPct val="125000"/>
-              </a:lnSpc>
-            </a:pPr>
-            <a:r>
-              <a:rPr sz="750" b="1" spc="50">
-                <a:solidFill>
-                  <a:srgbClr val="5D6E64"/>
-                </a:solidFill>
-                <a:latin typeface="Segoe UI"/>
-              </a:rPr>
-              <a:t>PORTÉE DIRECTE</a:t>
-            </a:r>
-          </a:p>
-        </p:txBody>
-      </p:sp>
-      <p:sp>
-        <p:nvSpPr>
-          <p:cNvPr id="33" name="TextBox 32"/>
-          <p:cNvSpPr txBox="1"/>
-          <p:nvPr/>
-        </p:nvSpPr>
-        <p:spPr>
-          <a:xfrm>
-            <a:off x="4590288" y="4215384"/>
-            <a:ext cx="2212848" cy="676656"/>
-          </a:xfrm>
-          <a:prstGeom prst="rect">
-            <a:avLst/>
-          </a:prstGeom>
-          <a:noFill/>
-        </p:spPr>
-        <p:txBody>
-          <a:bodyPr wrap="square" anchor="t" lIns="0" rIns="0" tIns="0" bIns="0">
-            <a:spAutoFit/>
-          </a:bodyPr>
-          <a:lstStyle/>
-          <a:p>
-            <a:pPr algn="l">
-              <a:lnSpc>
-                <a:spcPct val="125000"/>
-              </a:lnSpc>
-            </a:pPr>
-            <a:r>
-              <a:rPr sz="850" b="0">
-                <a:solidFill>
-                  <a:srgbClr val="0C1A14"/>
-                </a:solidFill>
-                <a:latin typeface="Segoe UI"/>
-              </a:rPr>
-              <a:t>9 massifs · 91 468 ha de forêts classées</a:t>
-            </a:r>
-          </a:p>
-        </p:txBody>
-      </p:sp>
-      <p:sp>
-        <p:nvSpPr>
-          <p:cNvPr id="34" name="TextBox 33"/>
-          <p:cNvSpPr txBox="1"/>
-          <p:nvPr/>
-        </p:nvSpPr>
-        <p:spPr>
-          <a:xfrm>
-            <a:off x="6967728" y="4023360"/>
-            <a:ext cx="2194560" cy="146304"/>
-          </a:xfrm>
-          <a:prstGeom prst="rect">
-            <a:avLst/>
-          </a:prstGeom>
-          <a:noFill/>
-        </p:spPr>
-        <p:txBody>
-          <a:bodyPr wrap="square" anchor="t" lIns="0" rIns="0" tIns="0" bIns="0">
-            <a:spAutoFit/>
-          </a:bodyPr>
-          <a:lstStyle/>
-          <a:p>
-            <a:pPr algn="l">
-              <a:lnSpc>
-                <a:spcPct val="125000"/>
-              </a:lnSpc>
-            </a:pPr>
-            <a:r>
-              <a:rPr sz="750" b="1" spc="50">
-                <a:solidFill>
-                  <a:srgbClr val="5D6E64"/>
-                </a:solidFill>
-                <a:latin typeface="Segoe UI"/>
-              </a:rPr>
-              <a:t>CIBLE 2030</a:t>
-            </a:r>
-          </a:p>
-        </p:txBody>
-      </p:sp>
-      <p:sp>
-        <p:nvSpPr>
-          <p:cNvPr id="35" name="TextBox 34"/>
-          <p:cNvSpPr txBox="1"/>
-          <p:nvPr/>
-        </p:nvSpPr>
-        <p:spPr>
-          <a:xfrm>
-            <a:off x="6967728" y="4215384"/>
-            <a:ext cx="2212848" cy="676656"/>
-          </a:xfrm>
-          <a:prstGeom prst="rect">
-            <a:avLst/>
-          </a:prstGeom>
-          <a:noFill/>
-        </p:spPr>
-        <p:txBody>
-          <a:bodyPr wrap="square" anchor="t" lIns="0" rIns="0" tIns="0" bIns="0">
-            <a:spAutoFit/>
-          </a:bodyPr>
-          <a:lstStyle/>
-          <a:p>
-            <a:pPr algn="l">
-              <a:lnSpc>
-                <a:spcPct val="125000"/>
-              </a:lnSpc>
-            </a:pPr>
-            <a:r>
-              <a:rPr sz="850" b="0">
-                <a:solidFill>
-                  <a:srgbClr val="0C1A14"/>
-                </a:solidFill>
-                <a:latin typeface="Segoe UI"/>
-              </a:rPr>
-              <a:t>Perte nette nulle sur les massifs prioritaires</a:t>
-            </a:r>
-          </a:p>
-        </p:txBody>
-      </p:sp>
-      <p:sp>
-        <p:nvSpPr>
-          <p:cNvPr id="36" name="TextBox 35"/>
-          <p:cNvSpPr txBox="1"/>
-          <p:nvPr/>
-        </p:nvSpPr>
-        <p:spPr>
-          <a:xfrm>
-            <a:off x="9345168" y="4023360"/>
-            <a:ext cx="2194560" cy="146304"/>
-          </a:xfrm>
-          <a:prstGeom prst="rect">
-            <a:avLst/>
-          </a:prstGeom>
-          <a:noFill/>
-        </p:spPr>
-        <p:txBody>
-          <a:bodyPr wrap="square" anchor="t" lIns="0" rIns="0" tIns="0" bIns="0">
-            <a:spAutoFit/>
-          </a:bodyPr>
-          <a:lstStyle/>
-          <a:p>
-            <a:pPr algn="l">
-              <a:lnSpc>
-                <a:spcPct val="125000"/>
-              </a:lnSpc>
-            </a:pPr>
-            <a:r>
-              <a:rPr sz="750" b="1" spc="50">
-                <a:solidFill>
-                  <a:srgbClr val="5D6E64"/>
-                </a:solidFill>
-                <a:latin typeface="Segoe UI"/>
-              </a:rPr>
-              <a:t>INDICATEUR DE SUIVI</a:t>
-            </a:r>
-          </a:p>
-        </p:txBody>
-      </p:sp>
-      <p:sp>
-        <p:nvSpPr>
-          <p:cNvPr id="37" name="TextBox 36"/>
-          <p:cNvSpPr txBox="1"/>
-          <p:nvPr/>
-        </p:nvSpPr>
-        <p:spPr>
-          <a:xfrm>
-            <a:off x="9345168" y="4215384"/>
-            <a:ext cx="2212848" cy="676656"/>
-          </a:xfrm>
-          <a:prstGeom prst="rect">
-            <a:avLst/>
-          </a:prstGeom>
-          <a:noFill/>
-        </p:spPr>
-        <p:txBody>
-          <a:bodyPr wrap="square" anchor="t" lIns="0" rIns="0" tIns="0" bIns="0">
-            <a:spAutoFit/>
-          </a:bodyPr>
-          <a:lstStyle/>
-          <a:p>
-            <a:pPr algn="l">
-              <a:lnSpc>
-                <a:spcPct val="125000"/>
-              </a:lnSpc>
-            </a:pPr>
-            <a:r>
-              <a:rPr sz="850" b="0">
-                <a:solidFill>
-                  <a:srgbClr val="0C1A14"/>
-                </a:solidFill>
-                <a:latin typeface="Segoe UI"/>
-              </a:rPr>
-              <a:t>Un suivi surfacique par massif, à créer : AG.LND.FRST.K2 ne contient que 3 mesures indépendantes</a:t>
-            </a:r>
-          </a:p>
-        </p:txBody>
-      </p:sp>
-      <p:sp>
-        <p:nvSpPr>
-          <p:cNvPr id="38" name="Rounded Rectangle 37"/>
-          <p:cNvSpPr/>
-          <p:nvPr/>
-        </p:nvSpPr>
-        <p:spPr>
-          <a:xfrm>
-            <a:off x="566928" y="5029200"/>
-            <a:ext cx="11057839" cy="1069848"/>
-          </a:xfrm>
-          <a:prstGeom prst="roundRect">
-            <a:avLst>
-              <a:gd name="adj" fmla="val 5000"/>
-            </a:avLst>
-          </a:prstGeom>
-          <a:solidFill>
-            <a:srgbClr val="FFFFFF"/>
-          </a:solidFill>
-          <a:ln w="9525">
-            <a:solidFill>
-              <a:srgbClr val="D5DED8"/>
-            </a:solidFill>
-          </a:ln>
-          <a:effectLst/>
-        </p:spPr>
-        <p:style>
-          <a:lnRef idx="1">
-            <a:schemeClr val="accent1"/>
-          </a:lnRef>
-          <a:fillRef idx="3">
-            <a:schemeClr val="accent1"/>
-          </a:fillRef>
-          <a:effectRef idx="2">
-            <a:schemeClr val="accent1"/>
-          </a:effectRef>
-          <a:fontRef idx="minor">
-            <a:schemeClr val="lt1"/>
-          </a:fontRef>
-        </p:style>
-        <p:txBody>
-          <a:bodyPr rtlCol="0" anchor="ctr" wrap="square"/>
-          <a:lstStyle/>
-          <a:p>
-            <a:pPr algn="ctr"/>
-          </a:p>
-        </p:txBody>
-      </p:sp>
-      <p:sp>
-        <p:nvSpPr>
-          <p:cNvPr id="39" name="TextBox 38"/>
-          <p:cNvSpPr txBox="1"/>
-          <p:nvPr/>
-        </p:nvSpPr>
-        <p:spPr>
-          <a:xfrm>
-            <a:off x="749808" y="5248656"/>
-            <a:ext cx="411480" cy="384048"/>
-          </a:xfrm>
-          <a:prstGeom prst="rect">
-            <a:avLst/>
-          </a:prstGeom>
-          <a:noFill/>
-        </p:spPr>
-        <p:txBody>
-          <a:bodyPr wrap="square" anchor="t" lIns="0" rIns="0" tIns="0" bIns="0">
-            <a:spAutoFit/>
-          </a:bodyPr>
-          <a:lstStyle/>
-          <a:p>
-            <a:pPr algn="l">
-              <a:lnSpc>
-                <a:spcPct val="100000"/>
-              </a:lnSpc>
-            </a:pPr>
-            <a:r>
-              <a:rPr sz="2400" b="1">
-                <a:solidFill>
-                  <a:srgbClr val="7C441F"/>
-                </a:solidFill>
-                <a:latin typeface="Segoe UI"/>
-              </a:rPr>
-              <a:t>4</a:t>
-            </a:r>
-          </a:p>
-        </p:txBody>
-      </p:sp>
-      <p:sp>
-        <p:nvSpPr>
-          <p:cNvPr id="40" name="TextBox 39"/>
-          <p:cNvSpPr txBox="1"/>
-          <p:nvPr/>
-        </p:nvSpPr>
-        <p:spPr>
-          <a:xfrm>
-            <a:off x="1170432" y="5166360"/>
-            <a:ext cx="3017520" cy="256032"/>
-          </a:xfrm>
-          <a:prstGeom prst="rect">
-            <a:avLst/>
-          </a:prstGeom>
-          <a:noFill/>
-        </p:spPr>
-        <p:txBody>
-          <a:bodyPr wrap="square" anchor="t" lIns="0" rIns="0" tIns="0" bIns="0">
-            <a:spAutoFit/>
-          </a:bodyPr>
-          <a:lstStyle/>
-          <a:p>
-            <a:pPr algn="l">
-              <a:lnSpc>
-                <a:spcPct val="125000"/>
-              </a:lnSpc>
-            </a:pPr>
-            <a:r>
-              <a:rPr sz="1250" b="1">
-                <a:solidFill>
-                  <a:srgbClr val="0C1A14"/>
-                </a:solidFill>
-                <a:latin typeface="Segoe UI"/>
-              </a:rPr>
-              <a:t>Intensification agricole</a:t>
-            </a:r>
-          </a:p>
-        </p:txBody>
-      </p:sp>
-      <p:sp>
-        <p:nvSpPr>
-          <p:cNvPr id="41" name="TextBox 40"/>
-          <p:cNvSpPr txBox="1"/>
-          <p:nvPr/>
-        </p:nvSpPr>
-        <p:spPr>
-          <a:xfrm>
-            <a:off x="1170432" y="5449824"/>
-            <a:ext cx="3108960" cy="585216"/>
-          </a:xfrm>
-          <a:prstGeom prst="rect">
-            <a:avLst/>
-          </a:prstGeom>
-          <a:noFill/>
-        </p:spPr>
-        <p:txBody>
-          <a:bodyPr wrap="square" anchor="t" lIns="0" rIns="0" tIns="0" bIns="0">
-            <a:spAutoFit/>
-          </a:bodyPr>
-          <a:lstStyle/>
-          <a:p>
-            <a:pPr algn="l">
-              <a:lnSpc>
-                <a:spcPct val="125000"/>
-              </a:lnSpc>
-            </a:pPr>
-            <a:r>
-              <a:rPr sz="850" b="0">
-                <a:solidFill>
-                  <a:srgbClr val="5D6E64"/>
-                </a:solidFill>
-                <a:latin typeface="Segoe UI"/>
-              </a:rPr>
-              <a:t>Semences améliorées, fertilité des sols et conseil agricole sur les bassins céréaliers riverains des massifs prioritaires.</a:t>
-            </a:r>
-          </a:p>
-        </p:txBody>
-      </p:sp>
-      <p:sp>
-        <p:nvSpPr>
-          <p:cNvPr id="42" name="TextBox 41"/>
-          <p:cNvSpPr txBox="1"/>
-          <p:nvPr/>
-        </p:nvSpPr>
-        <p:spPr>
-          <a:xfrm>
-            <a:off x="4590288" y="5175504"/>
-            <a:ext cx="2194560" cy="146304"/>
-          </a:xfrm>
-          <a:prstGeom prst="rect">
-            <a:avLst/>
-          </a:prstGeom>
-          <a:noFill/>
-        </p:spPr>
-        <p:txBody>
-          <a:bodyPr wrap="square" anchor="t" lIns="0" rIns="0" tIns="0" bIns="0">
-            <a:spAutoFit/>
-          </a:bodyPr>
-          <a:lstStyle/>
-          <a:p>
-            <a:pPr algn="l">
-              <a:lnSpc>
-                <a:spcPct val="125000"/>
-              </a:lnSpc>
-            </a:pPr>
-            <a:r>
-              <a:rPr sz="750" b="1" spc="50">
-                <a:solidFill>
-                  <a:srgbClr val="5D6E64"/>
-                </a:solidFill>
-                <a:latin typeface="Segoe UI"/>
-              </a:rPr>
-              <a:t>PORTÉE DIRECTE</a:t>
-            </a:r>
-          </a:p>
-        </p:txBody>
-      </p:sp>
-      <p:sp>
-        <p:nvSpPr>
-          <p:cNvPr id="43" name="TextBox 42"/>
-          <p:cNvSpPr txBox="1"/>
-          <p:nvPr/>
-        </p:nvSpPr>
-        <p:spPr>
-          <a:xfrm>
-            <a:off x="4590288" y="5367528"/>
-            <a:ext cx="2212848" cy="676656"/>
-          </a:xfrm>
-          <a:prstGeom prst="rect">
-            <a:avLst/>
-          </a:prstGeom>
-          <a:noFill/>
-        </p:spPr>
-        <p:txBody>
-          <a:bodyPr wrap="square" anchor="t" lIns="0" rIns="0" tIns="0" bIns="0">
-            <a:spAutoFit/>
-          </a:bodyPr>
-          <a:lstStyle/>
-          <a:p>
-            <a:pPr algn="l">
-              <a:lnSpc>
-                <a:spcPct val="125000"/>
-              </a:lnSpc>
-            </a:pPr>
-            <a:r>
-              <a:rPr sz="850" b="0">
-                <a:solidFill>
-                  <a:srgbClr val="0C1A14"/>
-                </a:solidFill>
-                <a:latin typeface="Segoe UI"/>
-              </a:rPr>
-              <a:t>19 700 ha défrichés par an, soit 6.7 × la perte forestière</a:t>
-            </a:r>
-          </a:p>
-        </p:txBody>
-      </p:sp>
-      <p:sp>
-        <p:nvSpPr>
-          <p:cNvPr id="44" name="TextBox 43"/>
-          <p:cNvSpPr txBox="1"/>
-          <p:nvPr/>
-        </p:nvSpPr>
-        <p:spPr>
-          <a:xfrm>
-            <a:off x="6967728" y="5175504"/>
-            <a:ext cx="2194560" cy="146304"/>
-          </a:xfrm>
-          <a:prstGeom prst="rect">
-            <a:avLst/>
-          </a:prstGeom>
-          <a:noFill/>
-        </p:spPr>
-        <p:txBody>
-          <a:bodyPr wrap="square" anchor="t" lIns="0" rIns="0" tIns="0" bIns="0">
-            <a:spAutoFit/>
-          </a:bodyPr>
-          <a:lstStyle/>
-          <a:p>
-            <a:pPr algn="l">
-              <a:lnSpc>
-                <a:spcPct val="125000"/>
-              </a:lnSpc>
-            </a:pPr>
-            <a:r>
-              <a:rPr sz="750" b="1" spc="50">
-                <a:solidFill>
-                  <a:srgbClr val="5D6E64"/>
-                </a:solidFill>
-                <a:latin typeface="Segoe UI"/>
-              </a:rPr>
-              <a:t>CIBLE 2030</a:t>
-            </a:r>
-          </a:p>
-        </p:txBody>
-      </p:sp>
-      <p:sp>
-        <p:nvSpPr>
-          <p:cNvPr id="45" name="TextBox 44"/>
-          <p:cNvSpPr txBox="1"/>
-          <p:nvPr/>
-        </p:nvSpPr>
-        <p:spPr>
-          <a:xfrm>
-            <a:off x="6967728" y="5367528"/>
-            <a:ext cx="2212848" cy="676656"/>
-          </a:xfrm>
-          <a:prstGeom prst="rect">
-            <a:avLst/>
-          </a:prstGeom>
-          <a:noFill/>
-        </p:spPr>
-        <p:txBody>
-          <a:bodyPr wrap="square" anchor="t" lIns="0" rIns="0" tIns="0" bIns="0">
-            <a:spAutoFit/>
-          </a:bodyPr>
-          <a:lstStyle/>
-          <a:p>
-            <a:pPr algn="l">
-              <a:lnSpc>
-                <a:spcPct val="125000"/>
-              </a:lnSpc>
-            </a:pPr>
-            <a:r>
-              <a:rPr sz="850" b="0">
-                <a:solidFill>
-                  <a:srgbClr val="0C1A14"/>
-                </a:solidFill>
-                <a:latin typeface="Segoe UI"/>
-              </a:rPr>
-              <a:t>Ramener l'expansion des surfaces céréalières vers zéro</a:t>
-            </a:r>
-          </a:p>
-        </p:txBody>
-      </p:sp>
-      <p:sp>
-        <p:nvSpPr>
-          <p:cNvPr id="46" name="TextBox 45"/>
-          <p:cNvSpPr txBox="1"/>
-          <p:nvPr/>
-        </p:nvSpPr>
-        <p:spPr>
-          <a:xfrm>
-            <a:off x="9345168" y="5175504"/>
-            <a:ext cx="2194560" cy="146304"/>
-          </a:xfrm>
-          <a:prstGeom prst="rect">
-            <a:avLst/>
-          </a:prstGeom>
-          <a:noFill/>
-        </p:spPr>
-        <p:txBody>
-          <a:bodyPr wrap="square" anchor="t" lIns="0" rIns="0" tIns="0" bIns="0">
-            <a:spAutoFit/>
-          </a:bodyPr>
-          <a:lstStyle/>
-          <a:p>
-            <a:pPr algn="l">
-              <a:lnSpc>
-                <a:spcPct val="125000"/>
-              </a:lnSpc>
-            </a:pPr>
-            <a:r>
-              <a:rPr sz="750" b="1" spc="50">
-                <a:solidFill>
-                  <a:srgbClr val="5D6E64"/>
-                </a:solidFill>
-                <a:latin typeface="Segoe UI"/>
-              </a:rPr>
-              <a:t>INDICATEUR DE SUIVI</a:t>
-            </a:r>
-          </a:p>
-        </p:txBody>
-      </p:sp>
-      <p:sp>
-        <p:nvSpPr>
-          <p:cNvPr id="47" name="TextBox 46"/>
-          <p:cNvSpPr txBox="1"/>
-          <p:nvPr/>
-        </p:nvSpPr>
-        <p:spPr>
-          <a:xfrm>
-            <a:off x="9345168" y="5367528"/>
-            <a:ext cx="2212848" cy="676656"/>
-          </a:xfrm>
-          <a:prstGeom prst="rect">
-            <a:avLst/>
-          </a:prstGeom>
-          <a:noFill/>
-        </p:spPr>
-        <p:txBody>
-          <a:bodyPr wrap="square" anchor="t" lIns="0" rIns="0" tIns="0" bIns="0">
-            <a:spAutoFit/>
-          </a:bodyPr>
-          <a:lstStyle/>
-          <a:p>
-            <a:pPr algn="l">
-              <a:lnSpc>
-                <a:spcPct val="125000"/>
-              </a:lnSpc>
-            </a:pPr>
-            <a:r>
-              <a:rPr sz="850" b="0">
-                <a:solidFill>
-                  <a:srgbClr val="0C1A14"/>
-                </a:solidFill>
-                <a:latin typeface="Segoe UI"/>
-              </a:rPr>
               <a:t>AG.PRD.CREL.MT / AG.LND.CREL.HA, lus comme un rendement en t/ha</a:t>
-            </a:r>
-          </a:p>
-        </p:txBody>
-      </p:sp>
-      <p:sp>
-        <p:nvSpPr>
-          <p:cNvPr id="48" name="TextBox 47"/>
-          <p:cNvSpPr txBox="1"/>
-          <p:nvPr/>
-        </p:nvSpPr>
-        <p:spPr>
-          <a:xfrm>
-            <a:off x="566928" y="6236208"/>
-            <a:ext cx="11057839" cy="402336"/>
-          </a:xfrm>
-          <a:prstGeom prst="rect">
-            <a:avLst/>
-          </a:prstGeom>
-          <a:noFill/>
-        </p:spPr>
-        <p:txBody>
-          <a:bodyPr wrap="square" anchor="t" lIns="0" rIns="0" tIns="0" bIns="0">
-            <a:spAutoFit/>
-          </a:bodyPr>
-          <a:lstStyle/>
-          <a:p>
-            <a:pPr algn="l">
-              <a:lnSpc>
-                <a:spcPct val="130000"/>
-              </a:lnSpc>
-            </a:pPr>
-            <a:r>
-              <a:rPr sz="900" b="0">
-                <a:solidFill>
-                  <a:srgbClr val="5D6E64"/>
-                </a:solidFill>
-                <a:latin typeface="Segoe UI"/>
-              </a:rPr>
-              <a:t>Aucun coût ni budget dans les six jeux de données : ces quatre leviers fixent un ordre de priorité et des cibles physiques, pas un plan de financement. Le quatrième relève de la politique agricole, hors du périmètre énergie du défi — mais le défrichement de terres cultivables avance plus vite que la forêt ne recule.</a:t>
             </a:r>
           </a:p>
         </p:txBody>
@@ -8542,7 +8041,7 @@
                 </a:solidFill>
                 <a:latin typeface="Segoe UI"/>
               </a:rPr>
-              <a:t>2 / 11</a:t>
+              <a:t>2 / 10</a:t>
             </a:r>
           </a:p>
         </p:txBody>
@@ -8580,7 +8079,7 @@
         <p:spPr>
           <a:xfrm>
             <a:off x="566928" y="1572768"/>
-            <a:ext cx="2145731" cy="1389888"/>
+            <a:ext cx="2145731" cy="1481328"/>
           </a:xfrm>
           <a:prstGeom prst="roundRect">
             <a:avLst>
@@ -8715,7 +8214,7 @@
         <p:spPr>
           <a:xfrm>
             <a:off x="722376" y="2414016"/>
-            <a:ext cx="1834835" cy="457200"/>
+            <a:ext cx="1834835" cy="548640"/>
           </a:xfrm>
           <a:prstGeom prst="rect">
             <a:avLst/>
@@ -8754,7 +8253,7 @@
         <p:spPr>
           <a:xfrm>
             <a:off x="2794955" y="1572768"/>
-            <a:ext cx="2145731" cy="1389888"/>
+            <a:ext cx="2145731" cy="1481328"/>
           </a:xfrm>
           <a:prstGeom prst="roundRect">
             <a:avLst>
@@ -8889,7 +8388,7 @@
         <p:spPr>
           <a:xfrm>
             <a:off x="2950403" y="2414016"/>
-            <a:ext cx="1834835" cy="457200"/>
+            <a:ext cx="1834835" cy="548640"/>
           </a:xfrm>
           <a:prstGeom prst="rect">
             <a:avLst/>
@@ -8928,7 +8427,7 @@
         <p:spPr>
           <a:xfrm>
             <a:off x="5022982" y="1572768"/>
-            <a:ext cx="2145731" cy="1389888"/>
+            <a:ext cx="2145731" cy="1481328"/>
           </a:xfrm>
           <a:prstGeom prst="roundRect">
             <a:avLst>
@@ -9063,7 +8562,7 @@
         <p:spPr>
           <a:xfrm>
             <a:off x="5178430" y="2414016"/>
-            <a:ext cx="1834835" cy="457200"/>
+            <a:ext cx="1834835" cy="548640"/>
           </a:xfrm>
           <a:prstGeom prst="rect">
             <a:avLst/>
@@ -9102,7 +8601,7 @@
         <p:spPr>
           <a:xfrm>
             <a:off x="7251009" y="1572768"/>
-            <a:ext cx="2145731" cy="1389888"/>
+            <a:ext cx="2145731" cy="1481328"/>
           </a:xfrm>
           <a:prstGeom prst="roundRect">
             <a:avLst>
@@ -9237,7 +8736,7 @@
         <p:spPr>
           <a:xfrm>
             <a:off x="7406457" y="2414016"/>
-            <a:ext cx="1834835" cy="457200"/>
+            <a:ext cx="1834835" cy="548640"/>
           </a:xfrm>
           <a:prstGeom prst="rect">
             <a:avLst/>
@@ -9276,7 +8775,7 @@
         <p:spPr>
           <a:xfrm>
             <a:off x="9479036" y="1572768"/>
-            <a:ext cx="2145731" cy="1389888"/>
+            <a:ext cx="2145731" cy="1481328"/>
           </a:xfrm>
           <a:prstGeom prst="roundRect">
             <a:avLst>
@@ -9411,7 +8910,7 @@
         <p:spPr>
           <a:xfrm>
             <a:off x="9634484" y="2414016"/>
-            <a:ext cx="1834835" cy="457200"/>
+            <a:ext cx="1834835" cy="548640"/>
           </a:xfrm>
           <a:prstGeom prst="rect">
             <a:avLst/>
@@ -9449,8 +8948,8 @@
         </p:nvSpPr>
         <p:spPr>
           <a:xfrm>
-            <a:off x="566928" y="3108960"/>
-            <a:ext cx="11057839" cy="1060704"/>
+            <a:off x="566928" y="3182112"/>
+            <a:ext cx="11057839" cy="1097280"/>
           </a:xfrm>
           <a:prstGeom prst="roundRect">
             <a:avLst>
@@ -9495,7 +8994,7 @@
         </p:nvSpPr>
         <p:spPr>
           <a:xfrm>
-            <a:off x="749808" y="3246120"/>
+            <a:off x="749808" y="3319272"/>
             <a:ext cx="10692079" cy="164592"/>
           </a:xfrm>
           <a:prstGeom prst="rect">
@@ -9534,8 +9033,8 @@
         </p:nvSpPr>
         <p:spPr>
           <a:xfrm>
-            <a:off x="749808" y="3474720"/>
-            <a:ext cx="10692079" cy="603504"/>
+            <a:off x="749808" y="3547872"/>
+            <a:ext cx="10692079" cy="640080"/>
           </a:xfrm>
           <a:prstGeom prst="rect">
             <a:avLst/>
@@ -9560,7 +9059,7 @@
                 </a:solidFill>
                 <a:latin typeface="Segoe UI"/>
               </a:rPr>
-              <a:t>Le taux d'accès rural a été multiplié par 8 depuis 1998. Le nombre de ruraux privés d'électricité a augmenté de 19 % sur la même période, parce que la population rurale a crû plus vite que le réseau. Piloter sur le taux, c'est piloter sur l'indicateur qui progresse pendant que le problème grandit — au rythme observé, l'accès universel rural tomberait en 2104.</a:t>
+              <a:t>Le taux d'accès rural a été multiplié par 8 depuis 1998 ; le nombre de ruraux privés d'électricité a augmenté de 19 % sur la même période, parce que la population rurale croît plus vite que le réseau. Piloter sur le taux, c'est piloter sur l'indicateur qui progresse pendant que le problème grandit. Au rythme observé (+0,91 pt/an), l'accès universel rural tombe en 2104 : tenir 2030 demanderait +9,4 pt/an, soit 10 fois plus vite.</a:t>
             </a:r>
           </a:p>
         </p:txBody>
@@ -9573,7 +9072,7 @@
         </p:nvSpPr>
         <p:spPr>
           <a:xfrm>
-            <a:off x="566928" y="4361688"/>
+            <a:off x="566928" y="4443984"/>
             <a:ext cx="11057839" cy="182880"/>
           </a:xfrm>
           <a:prstGeom prst="rect">
@@ -9612,7 +9111,7 @@
         </p:nvSpPr>
         <p:spPr>
           <a:xfrm>
-            <a:off x="566928" y="4636008"/>
+            <a:off x="566928" y="4718304"/>
             <a:ext cx="2702737" cy="1481328"/>
           </a:xfrm>
           <a:prstGeom prst="roundRect">
@@ -9660,7 +9159,7 @@
         </p:nvSpPr>
         <p:spPr>
           <a:xfrm>
-            <a:off x="713232" y="4727448"/>
+            <a:off x="713232" y="4809744"/>
             <a:ext cx="274320" cy="292608"/>
           </a:xfrm>
           <a:prstGeom prst="rect">
@@ -9699,7 +9198,7 @@
         </p:nvSpPr>
         <p:spPr>
           <a:xfrm>
-            <a:off x="1024128" y="4764024"/>
+            <a:off x="1024128" y="4846320"/>
             <a:ext cx="2135809" cy="256032"/>
           </a:xfrm>
           <a:prstGeom prst="rect">
@@ -9738,7 +9237,7 @@
         </p:nvSpPr>
         <p:spPr>
           <a:xfrm>
-            <a:off x="713232" y="5202936"/>
+            <a:off x="713232" y="5285232"/>
             <a:ext cx="2410129" cy="274320"/>
           </a:xfrm>
           <a:prstGeom prst="rect">
@@ -9777,7 +9276,7 @@
         </p:nvSpPr>
         <p:spPr>
           <a:xfrm>
-            <a:off x="713232" y="5495544"/>
+            <a:off x="713232" y="5577840"/>
             <a:ext cx="2410129" cy="530352"/>
           </a:xfrm>
           <a:prstGeom prst="rect">
@@ -9816,7 +9315,7 @@
         </p:nvSpPr>
         <p:spPr>
           <a:xfrm>
-            <a:off x="3351961" y="4636008"/>
+            <a:off x="3351961" y="4718304"/>
             <a:ext cx="2702737" cy="1481328"/>
           </a:xfrm>
           <a:prstGeom prst="roundRect">
@@ -9864,7 +9363,7 @@
         </p:nvSpPr>
         <p:spPr>
           <a:xfrm>
-            <a:off x="3498265" y="4727448"/>
+            <a:off x="3498265" y="4809744"/>
             <a:ext cx="274320" cy="292608"/>
           </a:xfrm>
           <a:prstGeom prst="rect">
@@ -9903,7 +9402,7 @@
         </p:nvSpPr>
         <p:spPr>
           <a:xfrm>
-            <a:off x="3809161" y="4764024"/>
+            <a:off x="3809161" y="4846320"/>
             <a:ext cx="2135809" cy="256032"/>
           </a:xfrm>
           <a:prstGeom prst="rect">
@@ -9942,7 +9441,7 @@
         </p:nvSpPr>
         <p:spPr>
           <a:xfrm>
-            <a:off x="3498265" y="5202936"/>
+            <a:off x="3498265" y="5285232"/>
             <a:ext cx="2410129" cy="274320"/>
           </a:xfrm>
           <a:prstGeom prst="rect">
@@ -9981,7 +9480,7 @@
         </p:nvSpPr>
         <p:spPr>
           <a:xfrm>
-            <a:off x="3498265" y="5495544"/>
+            <a:off x="3498265" y="5577840"/>
             <a:ext cx="2410129" cy="530352"/>
           </a:xfrm>
           <a:prstGeom prst="rect">
@@ -10020,7 +9519,7 @@
         </p:nvSpPr>
         <p:spPr>
           <a:xfrm>
-            <a:off x="6136995" y="4636008"/>
+            <a:off x="6136995" y="4718304"/>
             <a:ext cx="2702737" cy="1481328"/>
           </a:xfrm>
           <a:prstGeom prst="roundRect">
@@ -10068,7 +9567,7 @@
         </p:nvSpPr>
         <p:spPr>
           <a:xfrm>
-            <a:off x="6283299" y="4727448"/>
+            <a:off x="6283299" y="4809744"/>
             <a:ext cx="274320" cy="292608"/>
           </a:xfrm>
           <a:prstGeom prst="rect">
@@ -10107,7 +9606,7 @@
         </p:nvSpPr>
         <p:spPr>
           <a:xfrm>
-            <a:off x="6594195" y="4764024"/>
+            <a:off x="6594195" y="4846320"/>
             <a:ext cx="2135809" cy="256032"/>
           </a:xfrm>
           <a:prstGeom prst="rect">
@@ -10146,7 +9645,7 @@
         </p:nvSpPr>
         <p:spPr>
           <a:xfrm>
-            <a:off x="6283299" y="5202936"/>
+            <a:off x="6283299" y="5285232"/>
             <a:ext cx="2410129" cy="274320"/>
           </a:xfrm>
           <a:prstGeom prst="rect">
@@ -10185,7 +9684,7 @@
         </p:nvSpPr>
         <p:spPr>
           <a:xfrm>
-            <a:off x="6283299" y="5495544"/>
+            <a:off x="6283299" y="5577840"/>
             <a:ext cx="2410129" cy="530352"/>
           </a:xfrm>
           <a:prstGeom prst="rect">
@@ -10224,7 +9723,7 @@
         </p:nvSpPr>
         <p:spPr>
           <a:xfrm>
-            <a:off x="8922029" y="4636008"/>
+            <a:off x="8922029" y="4718304"/>
             <a:ext cx="2702737" cy="1481328"/>
           </a:xfrm>
           <a:prstGeom prst="roundRect">
@@ -10272,7 +9771,7 @@
         </p:nvSpPr>
         <p:spPr>
           <a:xfrm>
-            <a:off x="9068333" y="4727448"/>
+            <a:off x="9068333" y="4809744"/>
             <a:ext cx="274320" cy="292608"/>
           </a:xfrm>
           <a:prstGeom prst="rect">
@@ -10311,7 +9810,7 @@
         </p:nvSpPr>
         <p:spPr>
           <a:xfrm>
-            <a:off x="9379229" y="4764024"/>
+            <a:off x="9379229" y="4846320"/>
             <a:ext cx="2135809" cy="256032"/>
           </a:xfrm>
           <a:prstGeom prst="rect">
@@ -10350,7 +9849,7 @@
         </p:nvSpPr>
         <p:spPr>
           <a:xfrm>
-            <a:off x="9068333" y="5202936"/>
+            <a:off x="9068333" y="5285232"/>
             <a:ext cx="2410129" cy="274320"/>
           </a:xfrm>
           <a:prstGeom prst="rect">
@@ -10389,7 +9888,7 @@
         </p:nvSpPr>
         <p:spPr>
           <a:xfrm>
-            <a:off x="9068333" y="5495544"/>
+            <a:off x="9068333" y="5577840"/>
             <a:ext cx="2410129" cy="530352"/>
           </a:xfrm>
           <a:prstGeom prst="rect">
@@ -10633,7 +10132,7 @@
                 </a:solidFill>
                 <a:latin typeface="Segoe UI"/>
               </a:rPr>
-              <a:t>3 / 11</a:t>
+              <a:t>3 / 10</a:t>
             </a:r>
           </a:p>
         </p:txBody>
@@ -11350,7 +10849,7 @@
                 </a:solidFill>
                 <a:latin typeface="Segoe UI"/>
               </a:rPr>
-              <a:t>DIAGNOSTIC</a:t>
+              <a:t>LA PREUVE</a:t>
             </a:r>
           </a:p>
         </p:txBody>
@@ -11389,7 +10888,7 @@
                 </a:solidFill>
                 <a:latin typeface="Segoe UI"/>
               </a:rPr>
-              <a:t>Cinq chiffres qui commandent tout le reste</a:t>
+              <a:t>L'accès progresse, la forêt recule, la cuisson ne bouge pas</a:t>
             </a:r>
           </a:p>
         </p:txBody>
@@ -11467,7 +10966,7 @@
                 </a:solidFill>
                 <a:latin typeface="Segoe UI"/>
               </a:rPr>
-              <a:t>4 / 11</a:t>
+              <a:t>4 / 10</a:t>
             </a:r>
           </a:p>
         </p:txBody>
@@ -11496,93 +10995,42 @@
           </a:prstGeom>
         </p:spPr>
       </p:pic>
-      <p:sp>
-        <p:nvSpPr>
-          <p:cNvPr id="8" name="Rounded Rectangle 7"/>
-          <p:cNvSpPr/>
-          <p:nvPr/>
-        </p:nvSpPr>
-        <p:spPr>
-          <a:xfrm>
-            <a:off x="566928" y="1572768"/>
-            <a:ext cx="2123785" cy="1600200"/>
-          </a:xfrm>
-          <a:prstGeom prst="roundRect">
-            <a:avLst>
-              <a:gd name="adj" fmla="val 5000"/>
-            </a:avLst>
-          </a:prstGeom>
-          <a:solidFill>
-            <a:srgbClr val="FFFFFF"/>
-          </a:solidFill>
-          <a:ln w="9525">
-            <a:solidFill>
-              <a:srgbClr val="D5DED8"/>
-            </a:solidFill>
-          </a:ln>
-          <a:effectLst/>
-        </p:spPr>
-        <p:style>
-          <a:lnRef idx="1">
-            <a:schemeClr val="accent1"/>
-          </a:lnRef>
-          <a:fillRef idx="3">
-            <a:schemeClr val="accent1"/>
-          </a:fillRef>
-          <a:effectRef idx="2">
-            <a:schemeClr val="accent1"/>
-          </a:effectRef>
-          <a:fontRef idx="minor">
-            <a:schemeClr val="lt1"/>
-          </a:fontRef>
-        </p:style>
-        <p:txBody>
-          <a:bodyPr rtlCol="0" anchor="ctr" wrap="square"/>
-          <a:lstStyle/>
-          <a:p>
-            <a:pPr algn="ctr"/>
-          </a:p>
-        </p:txBody>
-      </p:sp>
-      <p:sp>
-        <p:nvSpPr>
-          <p:cNvPr id="9" name="TextBox 8"/>
-          <p:cNvSpPr txBox="1"/>
-          <p:nvPr/>
-        </p:nvSpPr>
-        <p:spPr>
-          <a:xfrm>
-            <a:off x="722376" y="1709928"/>
-            <a:ext cx="1812889" cy="182880"/>
-          </a:xfrm>
-          <a:prstGeom prst="rect">
-            <a:avLst/>
-          </a:prstGeom>
-          <a:noFill/>
-        </p:spPr>
-        <p:txBody>
-          <a:bodyPr wrap="square" anchor="t" lIns="0" rIns="0" tIns="0" bIns="0">
-            <a:spAutoFit/>
-          </a:bodyPr>
-          <a:lstStyle/>
-          <a:p>
-            <a:pPr algn="l">
-              <a:lnSpc>
-                <a:spcPct val="125000"/>
-              </a:lnSpc>
-            </a:pPr>
-            <a:r>
-              <a:rPr sz="800" b="1" spc="50">
-                <a:solidFill>
-                  <a:srgbClr val="0C1A14"/>
-                </a:solidFill>
-                <a:latin typeface="Segoe UI"/>
-              </a:rPr>
-              <a:t>RURAUX PRIVÉS D'ÉLECTRICITÉ</a:t>
-            </a:r>
-          </a:p>
-        </p:txBody>
-      </p:sp>
+      <p:graphicFrame>
+        <p:nvGraphicFramePr>
+          <p:cNvPr id="8" name="Chart 7"/>
+          <p:cNvGraphicFramePr>
+            <a:graphicFrameLocks noGrp="1"/>
+          </p:cNvGraphicFramePr>
+          <p:nvPr/>
+        </p:nvGraphicFramePr>
+        <p:xfrm>
+          <a:off x="566928" y="1572768"/>
+          <a:ext cx="11057839" cy="2240280"/>
+        </p:xfrm>
+        <a:graphic>
+          <a:graphicData uri="http://schemas.openxmlformats.org/drawingml/2006/chart">
+            <c:chart xmlns:c="http://schemas.openxmlformats.org/drawingml/2006/chart" r:id="rId3"/>
+          </a:graphicData>
+        </a:graphic>
+      </p:graphicFrame>
+      <p:graphicFrame>
+        <p:nvGraphicFramePr>
+          <p:cNvPr id="9" name="Chart 8"/>
+          <p:cNvGraphicFramePr>
+            <a:graphicFrameLocks noGrp="1"/>
+          </p:cNvGraphicFramePr>
+          <p:nvPr/>
+        </p:nvGraphicFramePr>
+        <p:xfrm>
+          <a:off x="566928" y="3877056"/>
+          <a:ext cx="11057839" cy="1700784"/>
+        </p:xfrm>
+        <a:graphic>
+          <a:graphicData uri="http://schemas.openxmlformats.org/drawingml/2006/chart">
+            <c:chart xmlns:c="http://schemas.openxmlformats.org/drawingml/2006/chart" r:id="rId4"/>
+          </a:graphicData>
+        </a:graphic>
+      </p:graphicFrame>
       <p:sp>
         <p:nvSpPr>
           <p:cNvPr id="10" name="TextBox 9"/>
@@ -11591,876 +11039,8 @@
         </p:nvSpPr>
         <p:spPr>
           <a:xfrm>
-            <a:off x="722376" y="1938528"/>
-            <a:ext cx="1812889" cy="411480"/>
-          </a:xfrm>
-          <a:prstGeom prst="rect">
-            <a:avLst/>
-          </a:prstGeom>
-          <a:noFill/>
-        </p:spPr>
-        <p:txBody>
-          <a:bodyPr wrap="square" anchor="t" lIns="0" rIns="0" tIns="0" bIns="0">
-            <a:spAutoFit/>
-          </a:bodyPr>
-          <a:lstStyle/>
-          <a:p>
-            <a:pPr algn="l">
-              <a:lnSpc>
-                <a:spcPct val="100000"/>
-              </a:lnSpc>
-            </a:pPr>
-            <a:r>
-              <a:rPr sz="2600" b="1">
-                <a:solidFill>
-                  <a:srgbClr val="B32418"/>
-                </a:solidFill>
-                <a:latin typeface="Segoe UI"/>
-              </a:rPr>
-              <a:t>+19</a:t>
-            </a:r>
-            <a:r>
-              <a:rPr sz="2600" b="1">
-                <a:solidFill>
-                  <a:srgbClr val="B32418"/>
-                </a:solidFill>
-                <a:latin typeface="Segoe UI"/>
-              </a:rPr>
-              <a:t> %</a:t>
-            </a:r>
-          </a:p>
-        </p:txBody>
-      </p:sp>
-      <p:sp>
-        <p:nvSpPr>
-          <p:cNvPr id="11" name="TextBox 10"/>
-          <p:cNvSpPr txBox="1"/>
-          <p:nvPr/>
-        </p:nvSpPr>
-        <p:spPr>
-          <a:xfrm>
-            <a:off x="722376" y="2414016"/>
-            <a:ext cx="1812889" cy="667512"/>
-          </a:xfrm>
-          <a:prstGeom prst="rect">
-            <a:avLst/>
-          </a:prstGeom>
-          <a:noFill/>
-        </p:spPr>
-        <p:txBody>
-          <a:bodyPr wrap="square" anchor="t" lIns="0" rIns="0" tIns="0" bIns="0">
-            <a:spAutoFit/>
-          </a:bodyPr>
-          <a:lstStyle/>
-          <a:p>
-            <a:pPr algn="l">
-              <a:lnSpc>
-                <a:spcPct val="130000"/>
-              </a:lnSpc>
-            </a:pPr>
-            <a:r>
-              <a:rPr sz="850" b="0">
-                <a:solidFill>
-                  <a:srgbClr val="5D6E64"/>
-                </a:solidFill>
-                <a:latin typeface="Segoe UI"/>
-              </a:rPr>
-              <a:t>depuis 1998 — de 3,11 à 3,72 M de personnes, alors que le taux d'accès était multiplié par 8</a:t>
-            </a:r>
-          </a:p>
-        </p:txBody>
-      </p:sp>
-      <p:sp>
-        <p:nvSpPr>
-          <p:cNvPr id="12" name="Rounded Rectangle 11"/>
-          <p:cNvSpPr/>
-          <p:nvPr/>
-        </p:nvSpPr>
-        <p:spPr>
-          <a:xfrm>
-            <a:off x="2800441" y="1572768"/>
-            <a:ext cx="2123785" cy="1600200"/>
-          </a:xfrm>
-          <a:prstGeom prst="roundRect">
-            <a:avLst>
-              <a:gd name="adj" fmla="val 5000"/>
-            </a:avLst>
-          </a:prstGeom>
-          <a:solidFill>
-            <a:srgbClr val="FFFFFF"/>
-          </a:solidFill>
-          <a:ln w="9525">
-            <a:solidFill>
-              <a:srgbClr val="D5DED8"/>
-            </a:solidFill>
-          </a:ln>
-          <a:effectLst/>
-        </p:spPr>
-        <p:style>
-          <a:lnRef idx="1">
-            <a:schemeClr val="accent1"/>
-          </a:lnRef>
-          <a:fillRef idx="3">
-            <a:schemeClr val="accent1"/>
-          </a:fillRef>
-          <a:effectRef idx="2">
-            <a:schemeClr val="accent1"/>
-          </a:effectRef>
-          <a:fontRef idx="minor">
-            <a:schemeClr val="lt1"/>
-          </a:fontRef>
-        </p:style>
-        <p:txBody>
-          <a:bodyPr rtlCol="0" anchor="ctr" wrap="square"/>
-          <a:lstStyle/>
-          <a:p>
-            <a:pPr algn="ctr"/>
-          </a:p>
-        </p:txBody>
-      </p:sp>
-      <p:sp>
-        <p:nvSpPr>
-          <p:cNvPr id="13" name="TextBox 12"/>
-          <p:cNvSpPr txBox="1"/>
-          <p:nvPr/>
-        </p:nvSpPr>
-        <p:spPr>
-          <a:xfrm>
-            <a:off x="2955889" y="1709928"/>
-            <a:ext cx="1812889" cy="182880"/>
-          </a:xfrm>
-          <a:prstGeom prst="rect">
-            <a:avLst/>
-          </a:prstGeom>
-          <a:noFill/>
-        </p:spPr>
-        <p:txBody>
-          <a:bodyPr wrap="square" anchor="t" lIns="0" rIns="0" tIns="0" bIns="0">
-            <a:spAutoFit/>
-          </a:bodyPr>
-          <a:lstStyle/>
-          <a:p>
-            <a:pPr algn="l">
-              <a:lnSpc>
-                <a:spcPct val="125000"/>
-              </a:lnSpc>
-            </a:pPr>
-            <a:r>
-              <a:rPr sz="800" b="1" spc="50">
-                <a:solidFill>
-                  <a:srgbClr val="0C1A14"/>
-                </a:solidFill>
-                <a:latin typeface="Segoe UI"/>
-              </a:rPr>
-              <a:t>RACCORDEMENTS MANQUANTS</a:t>
-            </a:r>
-          </a:p>
-        </p:txBody>
-      </p:sp>
-      <p:sp>
-        <p:nvSpPr>
-          <p:cNvPr id="14" name="TextBox 13"/>
-          <p:cNvSpPr txBox="1"/>
-          <p:nvPr/>
-        </p:nvSpPr>
-        <p:spPr>
-          <a:xfrm>
-            <a:off x="2955889" y="1938528"/>
-            <a:ext cx="1812889" cy="411480"/>
-          </a:xfrm>
-          <a:prstGeom prst="rect">
-            <a:avLst/>
-          </a:prstGeom>
-          <a:noFill/>
-        </p:spPr>
-        <p:txBody>
-          <a:bodyPr wrap="square" anchor="t" lIns="0" rIns="0" tIns="0" bIns="0">
-            <a:spAutoFit/>
-          </a:bodyPr>
-          <a:lstStyle/>
-          <a:p>
-            <a:pPr algn="l">
-              <a:lnSpc>
-                <a:spcPct val="100000"/>
-              </a:lnSpc>
-            </a:pPr>
-            <a:r>
-              <a:rPr sz="2600" b="1">
-                <a:solidFill>
-                  <a:srgbClr val="B32418"/>
-                </a:solidFill>
-                <a:latin typeface="Segoe UI"/>
-              </a:rPr>
-              <a:t>13 800</a:t>
-            </a:r>
-            <a:r>
-              <a:rPr sz="2600" b="1">
-                <a:solidFill>
-                  <a:srgbClr val="B32418"/>
-                </a:solidFill>
-                <a:latin typeface="Segoe UI"/>
-              </a:rPr>
-              <a:t> /an</a:t>
-            </a:r>
-          </a:p>
-        </p:txBody>
-      </p:sp>
-      <p:sp>
-        <p:nvSpPr>
-          <p:cNvPr id="15" name="TextBox 14"/>
-          <p:cNvSpPr txBox="1"/>
-          <p:nvPr/>
-        </p:nvSpPr>
-        <p:spPr>
-          <a:xfrm>
-            <a:off x="2955889" y="2414016"/>
-            <a:ext cx="1812889" cy="667512"/>
-          </a:xfrm>
-          <a:prstGeom prst="rect">
-            <a:avLst/>
-          </a:prstGeom>
-          <a:noFill/>
-        </p:spPr>
-        <p:txBody>
-          <a:bodyPr wrap="square" anchor="t" lIns="0" rIns="0" tIns="0" bIns="0">
-            <a:spAutoFit/>
-          </a:bodyPr>
-          <a:lstStyle/>
-          <a:p>
-            <a:pPr algn="l">
-              <a:lnSpc>
-                <a:spcPct val="130000"/>
-              </a:lnSpc>
-            </a:pPr>
-            <a:r>
-              <a:rPr sz="850" b="0">
-                <a:solidFill>
-                  <a:srgbClr val="5D6E64"/>
-                </a:solidFill>
-                <a:latin typeface="Segoe UI"/>
-              </a:rPr>
-              <a:t>le déficit annuel face à la seule croissance rurale, sur 2012–2022</a:t>
-            </a:r>
-          </a:p>
-        </p:txBody>
-      </p:sp>
-      <p:sp>
-        <p:nvSpPr>
-          <p:cNvPr id="16" name="Rounded Rectangle 15"/>
-          <p:cNvSpPr/>
-          <p:nvPr/>
-        </p:nvSpPr>
-        <p:spPr>
-          <a:xfrm>
-            <a:off x="5033954" y="1572768"/>
-            <a:ext cx="2123785" cy="1600200"/>
-          </a:xfrm>
-          <a:prstGeom prst="roundRect">
-            <a:avLst>
-              <a:gd name="adj" fmla="val 5000"/>
-            </a:avLst>
-          </a:prstGeom>
-          <a:solidFill>
-            <a:srgbClr val="FFFFFF"/>
-          </a:solidFill>
-          <a:ln w="9525">
-            <a:solidFill>
-              <a:srgbClr val="D5DED8"/>
-            </a:solidFill>
-          </a:ln>
-          <a:effectLst/>
-        </p:spPr>
-        <p:style>
-          <a:lnRef idx="1">
-            <a:schemeClr val="accent1"/>
-          </a:lnRef>
-          <a:fillRef idx="3">
-            <a:schemeClr val="accent1"/>
-          </a:fillRef>
-          <a:effectRef idx="2">
-            <a:schemeClr val="accent1"/>
-          </a:effectRef>
-          <a:fontRef idx="minor">
-            <a:schemeClr val="lt1"/>
-          </a:fontRef>
-        </p:style>
-        <p:txBody>
-          <a:bodyPr rtlCol="0" anchor="ctr" wrap="square"/>
-          <a:lstStyle/>
-          <a:p>
-            <a:pPr algn="ctr"/>
-          </a:p>
-        </p:txBody>
-      </p:sp>
-      <p:sp>
-        <p:nvSpPr>
-          <p:cNvPr id="17" name="TextBox 16"/>
-          <p:cNvSpPr txBox="1"/>
-          <p:nvPr/>
-        </p:nvSpPr>
-        <p:spPr>
-          <a:xfrm>
-            <a:off x="5189402" y="1709928"/>
-            <a:ext cx="1812889" cy="182880"/>
-          </a:xfrm>
-          <a:prstGeom prst="rect">
-            <a:avLst/>
-          </a:prstGeom>
-          <a:noFill/>
-        </p:spPr>
-        <p:txBody>
-          <a:bodyPr wrap="square" anchor="t" lIns="0" rIns="0" tIns="0" bIns="0">
-            <a:spAutoFit/>
-          </a:bodyPr>
-          <a:lstStyle/>
-          <a:p>
-            <a:pPr algn="l">
-              <a:lnSpc>
-                <a:spcPct val="125000"/>
-              </a:lnSpc>
-            </a:pPr>
-            <a:r>
-              <a:rPr sz="800" b="1" spc="50">
-                <a:solidFill>
-                  <a:srgbClr val="0C1A14"/>
-                </a:solidFill>
-                <a:latin typeface="Segoe UI"/>
-              </a:rPr>
-              <a:t>MÉNAGES AU BOIS OU AU CHARBON</a:t>
-            </a:r>
-          </a:p>
-        </p:txBody>
-      </p:sp>
-      <p:sp>
-        <p:nvSpPr>
-          <p:cNvPr id="18" name="TextBox 17"/>
-          <p:cNvSpPr txBox="1"/>
-          <p:nvPr/>
-        </p:nvSpPr>
-        <p:spPr>
-          <a:xfrm>
-            <a:off x="5189402" y="1938528"/>
-            <a:ext cx="1812889" cy="411480"/>
-          </a:xfrm>
-          <a:prstGeom prst="rect">
-            <a:avLst/>
-          </a:prstGeom>
-          <a:noFill/>
-        </p:spPr>
-        <p:txBody>
-          <a:bodyPr wrap="square" anchor="t" lIns="0" rIns="0" tIns="0" bIns="0">
-            <a:spAutoFit/>
-          </a:bodyPr>
-          <a:lstStyle/>
-          <a:p>
-            <a:pPr algn="l">
-              <a:lnSpc>
-                <a:spcPct val="100000"/>
-              </a:lnSpc>
-            </a:pPr>
-            <a:r>
-              <a:rPr sz="2600" b="1">
-                <a:solidFill>
-                  <a:srgbClr val="B32418"/>
-                </a:solidFill>
-                <a:latin typeface="Segoe UI"/>
-              </a:rPr>
-              <a:t>89</a:t>
-            </a:r>
-            <a:r>
-              <a:rPr sz="2600" b="1">
-                <a:solidFill>
-                  <a:srgbClr val="B32418"/>
-                </a:solidFill>
-                <a:latin typeface="Segoe UI"/>
-              </a:rPr>
-              <a:t> %</a:t>
-            </a:r>
-          </a:p>
-        </p:txBody>
-      </p:sp>
-      <p:sp>
-        <p:nvSpPr>
-          <p:cNvPr id="19" name="TextBox 18"/>
-          <p:cNvSpPr txBox="1"/>
-          <p:nvPr/>
-        </p:nvSpPr>
-        <p:spPr>
-          <a:xfrm>
-            <a:off x="5189402" y="2414016"/>
-            <a:ext cx="1812889" cy="667512"/>
-          </a:xfrm>
-          <a:prstGeom prst="rect">
-            <a:avLst/>
-          </a:prstGeom>
-          <a:noFill/>
-        </p:spPr>
-        <p:txBody>
-          <a:bodyPr wrap="square" anchor="t" lIns="0" rIns="0" tIns="0" bIns="0">
-            <a:spAutoFit/>
-          </a:bodyPr>
-          <a:lstStyle/>
-          <a:p>
-            <a:pPr algn="l">
-              <a:lnSpc>
-                <a:spcPct val="130000"/>
-              </a:lnSpc>
-            </a:pPr>
-            <a:r>
-              <a:rPr sz="850" b="0">
-                <a:solidFill>
-                  <a:srgbClr val="5D6E64"/>
-                </a:solidFill>
-                <a:latin typeface="Segoe UI"/>
-              </a:rPr>
-              <a:t>en 2017, contre 90 % en 2014 : aucun recul</a:t>
-            </a:r>
-          </a:p>
-        </p:txBody>
-      </p:sp>
-      <p:sp>
-        <p:nvSpPr>
-          <p:cNvPr id="20" name="Rounded Rectangle 19"/>
-          <p:cNvSpPr/>
-          <p:nvPr/>
-        </p:nvSpPr>
-        <p:spPr>
-          <a:xfrm>
-            <a:off x="7267468" y="1572768"/>
-            <a:ext cx="2123785" cy="1600200"/>
-          </a:xfrm>
-          <a:prstGeom prst="roundRect">
-            <a:avLst>
-              <a:gd name="adj" fmla="val 5000"/>
-            </a:avLst>
-          </a:prstGeom>
-          <a:solidFill>
-            <a:srgbClr val="FFFFFF"/>
-          </a:solidFill>
-          <a:ln w="9525">
-            <a:solidFill>
-              <a:srgbClr val="D5DED8"/>
-            </a:solidFill>
-          </a:ln>
-          <a:effectLst/>
-        </p:spPr>
-        <p:style>
-          <a:lnRef idx="1">
-            <a:schemeClr val="accent1"/>
-          </a:lnRef>
-          <a:fillRef idx="3">
-            <a:schemeClr val="accent1"/>
-          </a:fillRef>
-          <a:effectRef idx="2">
-            <a:schemeClr val="accent1"/>
-          </a:effectRef>
-          <a:fontRef idx="minor">
-            <a:schemeClr val="lt1"/>
-          </a:fontRef>
-        </p:style>
-        <p:txBody>
-          <a:bodyPr rtlCol="0" anchor="ctr" wrap="square"/>
-          <a:lstStyle/>
-          <a:p>
-            <a:pPr algn="ctr"/>
-          </a:p>
-        </p:txBody>
-      </p:sp>
-      <p:sp>
-        <p:nvSpPr>
-          <p:cNvPr id="21" name="TextBox 20"/>
-          <p:cNvSpPr txBox="1"/>
-          <p:nvPr/>
-        </p:nvSpPr>
-        <p:spPr>
-          <a:xfrm>
-            <a:off x="7422916" y="1709928"/>
-            <a:ext cx="1812889" cy="182880"/>
-          </a:xfrm>
-          <a:prstGeom prst="rect">
-            <a:avLst/>
-          </a:prstGeom>
-          <a:noFill/>
-        </p:spPr>
-        <p:txBody>
-          <a:bodyPr wrap="square" anchor="t" lIns="0" rIns="0" tIns="0" bIns="0">
-            <a:spAutoFit/>
-          </a:bodyPr>
-          <a:lstStyle/>
-          <a:p>
-            <a:pPr algn="l">
-              <a:lnSpc>
-                <a:spcPct val="125000"/>
-              </a:lnSpc>
-            </a:pPr>
-            <a:r>
-              <a:rPr sz="800" b="1" spc="50">
-                <a:solidFill>
-                  <a:srgbClr val="0C1A14"/>
-                </a:solidFill>
-                <a:latin typeface="Segoe UI"/>
-              </a:rPr>
-              <a:t>FORÊT PERDUE CHAQUE ANNÉE</a:t>
-            </a:r>
-          </a:p>
-        </p:txBody>
-      </p:sp>
-      <p:sp>
-        <p:nvSpPr>
-          <p:cNvPr id="22" name="TextBox 21"/>
-          <p:cNvSpPr txBox="1"/>
-          <p:nvPr/>
-        </p:nvSpPr>
-        <p:spPr>
-          <a:xfrm>
-            <a:off x="7422916" y="1938528"/>
-            <a:ext cx="1812889" cy="411480"/>
-          </a:xfrm>
-          <a:prstGeom prst="rect">
-            <a:avLst/>
-          </a:prstGeom>
-          <a:noFill/>
-        </p:spPr>
-        <p:txBody>
-          <a:bodyPr wrap="square" anchor="t" lIns="0" rIns="0" tIns="0" bIns="0">
-            <a:spAutoFit/>
-          </a:bodyPr>
-          <a:lstStyle/>
-          <a:p>
-            <a:pPr algn="l">
-              <a:lnSpc>
-                <a:spcPct val="100000"/>
-              </a:lnSpc>
-            </a:pPr>
-            <a:r>
-              <a:rPr sz="2600" b="1">
-                <a:solidFill>
-                  <a:srgbClr val="B32418"/>
-                </a:solidFill>
-                <a:latin typeface="Segoe UI"/>
-              </a:rPr>
-              <a:t>2 960</a:t>
-            </a:r>
-            <a:r>
-              <a:rPr sz="2600" b="1">
-                <a:solidFill>
-                  <a:srgbClr val="B32418"/>
-                </a:solidFill>
-                <a:latin typeface="Segoe UI"/>
-              </a:rPr>
-              <a:t> ha</a:t>
-            </a:r>
-          </a:p>
-        </p:txBody>
-      </p:sp>
-      <p:sp>
-        <p:nvSpPr>
-          <p:cNvPr id="23" name="TextBox 22"/>
-          <p:cNvSpPr txBox="1"/>
-          <p:nvPr/>
-        </p:nvSpPr>
-        <p:spPr>
-          <a:xfrm>
-            <a:off x="7422916" y="2414016"/>
-            <a:ext cx="1812889" cy="667512"/>
-          </a:xfrm>
-          <a:prstGeom prst="rect">
-            <a:avLst/>
-          </a:prstGeom>
-          <a:noFill/>
-        </p:spPr>
-        <p:txBody>
-          <a:bodyPr wrap="square" anchor="t" lIns="0" rIns="0" tIns="0" bIns="0">
-            <a:spAutoFit/>
-          </a:bodyPr>
-          <a:lstStyle/>
-          <a:p>
-            <a:pPr algn="l">
-              <a:lnSpc>
-                <a:spcPct val="130000"/>
-              </a:lnSpc>
-            </a:pPr>
-            <a:r>
-              <a:rPr sz="850" b="0">
-                <a:solidFill>
-                  <a:srgbClr val="5D6E64"/>
-                </a:solidFill>
-                <a:latin typeface="Segoe UI"/>
-              </a:rPr>
-              <a:t>dans le régime en cours depuis 2000 — 3.1 fois moins que dans les années 1990, mais sans reprise</a:t>
-            </a:r>
-          </a:p>
-        </p:txBody>
-      </p:sp>
-      <p:sp>
-        <p:nvSpPr>
-          <p:cNvPr id="24" name="Rounded Rectangle 23"/>
-          <p:cNvSpPr/>
-          <p:nvPr/>
-        </p:nvSpPr>
-        <p:spPr>
-          <a:xfrm>
-            <a:off x="9500981" y="1572768"/>
-            <a:ext cx="2123785" cy="1600200"/>
-          </a:xfrm>
-          <a:prstGeom prst="roundRect">
-            <a:avLst>
-              <a:gd name="adj" fmla="val 5000"/>
-            </a:avLst>
-          </a:prstGeom>
-          <a:solidFill>
-            <a:srgbClr val="FFFFFF"/>
-          </a:solidFill>
-          <a:ln w="9525">
-            <a:solidFill>
-              <a:srgbClr val="D5DED8"/>
-            </a:solidFill>
-          </a:ln>
-          <a:effectLst/>
-        </p:spPr>
-        <p:style>
-          <a:lnRef idx="1">
-            <a:schemeClr val="accent1"/>
-          </a:lnRef>
-          <a:fillRef idx="3">
-            <a:schemeClr val="accent1"/>
-          </a:fillRef>
-          <a:effectRef idx="2">
-            <a:schemeClr val="accent1"/>
-          </a:effectRef>
-          <a:fontRef idx="minor">
-            <a:schemeClr val="lt1"/>
-          </a:fontRef>
-        </p:style>
-        <p:txBody>
-          <a:bodyPr rtlCol="0" anchor="ctr" wrap="square"/>
-          <a:lstStyle/>
-          <a:p>
-            <a:pPr algn="ctr"/>
-          </a:p>
-        </p:txBody>
-      </p:sp>
-      <p:sp>
-        <p:nvSpPr>
-          <p:cNvPr id="25" name="TextBox 24"/>
-          <p:cNvSpPr txBox="1"/>
-          <p:nvPr/>
-        </p:nvSpPr>
-        <p:spPr>
-          <a:xfrm>
-            <a:off x="9656429" y="1709928"/>
-            <a:ext cx="1812889" cy="182880"/>
-          </a:xfrm>
-          <a:prstGeom prst="rect">
-            <a:avLst/>
-          </a:prstGeom>
-          <a:noFill/>
-        </p:spPr>
-        <p:txBody>
-          <a:bodyPr wrap="square" anchor="t" lIns="0" rIns="0" tIns="0" bIns="0">
-            <a:spAutoFit/>
-          </a:bodyPr>
-          <a:lstStyle/>
-          <a:p>
-            <a:pPr algn="l">
-              <a:lnSpc>
-                <a:spcPct val="125000"/>
-              </a:lnSpc>
-            </a:pPr>
-            <a:r>
-              <a:rPr sz="800" b="1" spc="50">
-                <a:solidFill>
-                  <a:srgbClr val="0C1A14"/>
-                </a:solidFill>
-                <a:latin typeface="Segoe UI"/>
-              </a:rPr>
-              <a:t>EXPANSION AGRICOLE</a:t>
-            </a:r>
-          </a:p>
-        </p:txBody>
-      </p:sp>
-      <p:sp>
-        <p:nvSpPr>
-          <p:cNvPr id="26" name="TextBox 25"/>
-          <p:cNvSpPr txBox="1"/>
-          <p:nvPr/>
-        </p:nvSpPr>
-        <p:spPr>
-          <a:xfrm>
-            <a:off x="9656429" y="1938528"/>
-            <a:ext cx="1812889" cy="411480"/>
-          </a:xfrm>
-          <a:prstGeom prst="rect">
-            <a:avLst/>
-          </a:prstGeom>
-          <a:noFill/>
-        </p:spPr>
-        <p:txBody>
-          <a:bodyPr wrap="square" anchor="t" lIns="0" rIns="0" tIns="0" bIns="0">
-            <a:spAutoFit/>
-          </a:bodyPr>
-          <a:lstStyle/>
-          <a:p>
-            <a:pPr algn="l">
-              <a:lnSpc>
-                <a:spcPct val="100000"/>
-              </a:lnSpc>
-            </a:pPr>
-            <a:r>
-              <a:rPr sz="2600" b="1">
-                <a:solidFill>
-                  <a:srgbClr val="B87407"/>
-                </a:solidFill>
-                <a:latin typeface="Segoe UI"/>
-              </a:rPr>
-              <a:t>× 5.0</a:t>
-            </a:r>
-            <a:r>
-              <a:rPr sz="2600" b="1">
-                <a:solidFill>
-                  <a:srgbClr val="B87407"/>
-                </a:solidFill>
-                <a:latin typeface="Segoe UI"/>
-              </a:rPr>
-              <a:t/>
-            </a:r>
-          </a:p>
-        </p:txBody>
-      </p:sp>
-      <p:sp>
-        <p:nvSpPr>
-          <p:cNvPr id="27" name="TextBox 26"/>
-          <p:cNvSpPr txBox="1"/>
-          <p:nvPr/>
-        </p:nvSpPr>
-        <p:spPr>
-          <a:xfrm>
-            <a:off x="9656429" y="2414016"/>
-            <a:ext cx="1812889" cy="667512"/>
-          </a:xfrm>
-          <a:prstGeom prst="rect">
-            <a:avLst/>
-          </a:prstGeom>
-          <a:noFill/>
-        </p:spPr>
-        <p:txBody>
-          <a:bodyPr wrap="square" anchor="t" lIns="0" rIns="0" tIns="0" bIns="0">
-            <a:spAutoFit/>
-          </a:bodyPr>
-          <a:lstStyle/>
-          <a:p>
-            <a:pPr algn="l">
-              <a:lnSpc>
-                <a:spcPct val="130000"/>
-              </a:lnSpc>
-            </a:pPr>
-            <a:r>
-              <a:rPr sz="850" b="0">
-                <a:solidFill>
-                  <a:srgbClr val="5D6E64"/>
-                </a:solidFill>
-                <a:latin typeface="Segoe UI"/>
-              </a:rPr>
-              <a:t>ce que la forêt perd : 6 600 km² gagnés par l'agriculture contre 1 317 km² de forêt perdus</a:t>
-            </a:r>
-          </a:p>
-        </p:txBody>
-      </p:sp>
-      <p:sp>
-        <p:nvSpPr>
-          <p:cNvPr id="28" name="Rounded Rectangle 27"/>
-          <p:cNvSpPr/>
-          <p:nvPr/>
-        </p:nvSpPr>
-        <p:spPr>
-          <a:xfrm>
-            <a:off x="566928" y="3429000"/>
-            <a:ext cx="11057839" cy="1371600"/>
-          </a:xfrm>
-          <a:prstGeom prst="roundRect">
-            <a:avLst>
-              <a:gd name="adj" fmla="val 5000"/>
-            </a:avLst>
-          </a:prstGeom>
-          <a:solidFill>
-            <a:srgbClr val="FBE7E4"/>
-          </a:solidFill>
-          <a:ln>
-            <a:noFill/>
-          </a:ln>
-          <a:effectLst/>
-        </p:spPr>
-        <p:style>
-          <a:lnRef idx="1">
-            <a:schemeClr val="accent1"/>
-          </a:lnRef>
-          <a:fillRef idx="3">
-            <a:schemeClr val="accent1"/>
-          </a:fillRef>
-          <a:effectRef idx="2">
-            <a:schemeClr val="accent1"/>
-          </a:effectRef>
-          <a:fontRef idx="minor">
-            <a:schemeClr val="lt1"/>
-          </a:fontRef>
-        </p:style>
-        <p:txBody>
-          <a:bodyPr rtlCol="0" anchor="ctr" wrap="square"/>
-          <a:lstStyle/>
-          <a:p>
-            <a:pPr algn="ctr"/>
-          </a:p>
-        </p:txBody>
-      </p:sp>
-      <p:sp>
-        <p:nvSpPr>
-          <p:cNvPr id="29" name="TextBox 28"/>
-          <p:cNvSpPr txBox="1"/>
-          <p:nvPr/>
-        </p:nvSpPr>
-        <p:spPr>
-          <a:xfrm>
-            <a:off x="749808" y="3566160"/>
-            <a:ext cx="10692079" cy="164592"/>
-          </a:xfrm>
-          <a:prstGeom prst="rect">
-            <a:avLst/>
-          </a:prstGeom>
-          <a:noFill/>
-        </p:spPr>
-        <p:txBody>
-          <a:bodyPr wrap="square" anchor="t" lIns="0" rIns="0" tIns="0" bIns="0">
-            <a:spAutoFit/>
-          </a:bodyPr>
-          <a:lstStyle/>
-          <a:p>
-            <a:pPr algn="l">
-              <a:lnSpc>
-                <a:spcPct val="125000"/>
-              </a:lnSpc>
-            </a:pPr>
-            <a:r>
-              <a:rPr sz="850" b="1" spc="60">
-                <a:solidFill>
-                  <a:srgbClr val="B32418"/>
-                </a:solidFill>
-                <a:latin typeface="Segoe UI"/>
-              </a:rPr>
-              <a:t>LE CONSTAT QUI COMMANDE TOUT LE RESTE</a:t>
-            </a:r>
-          </a:p>
-        </p:txBody>
-      </p:sp>
-      <p:sp>
-        <p:nvSpPr>
-          <p:cNvPr id="30" name="TextBox 29"/>
-          <p:cNvSpPr txBox="1"/>
-          <p:nvPr/>
-        </p:nvSpPr>
-        <p:spPr>
-          <a:xfrm>
-            <a:off x="749808" y="3794760"/>
-            <a:ext cx="10692079" cy="914400"/>
+            <a:off x="566928" y="5632704"/>
+            <a:ext cx="11057839" cy="640080"/>
           </a:xfrm>
           <a:prstGeom prst="rect">
             <a:avLst/>
@@ -12479,13 +11059,13 @@
               </a:lnSpc>
             </a:pPr>
             <a:r>
-              <a:rPr sz="1100" b="0">
-                <a:solidFill>
-                  <a:srgbClr val="0C1A14"/>
-                </a:solidFill>
-                <a:latin typeface="Segoe UI"/>
-              </a:rPr>
-              <a:t>Le rythme actuel ne mène pas à 2030, il mène à 2104. L'électrification rurale progresse de +0,91 point par an depuis 1998 ; atteindre 100 % en 2030 en demanderait +9,4, soit 10 fois plus vite. L'extension du réseau seule ne produit pas une telle accélération.</a:t>
+              <a:rPr sz="1050" b="0">
+                <a:solidFill>
+                  <a:srgbClr val="324239"/>
+                </a:solidFill>
+                <a:latin typeface="Segoe UI"/>
+              </a:rPr>
+              <a:t>Deux panneaux, un seul axe du temps : chaque série garde son échelle. Le couvert passe de 23,7 % à 22,2 % du territoire pendant que l'accès rural est multiplié par 8 — et que la cuisson propre reste à 0,9 %. L'électricité éclaire les foyers, elle ne remplace pas le bois dans les marmites.</a:t>
             </a:r>
           </a:p>
         </p:txBody>
@@ -12586,7 +11166,7 @@
                 </a:solidFill>
                 <a:latin typeface="Segoe UI"/>
               </a:rPr>
-              <a:t>LA PREUVE</a:t>
+              <a:t>ÉLECTRIFICATION</a:t>
             </a:r>
           </a:p>
         </p:txBody>
@@ -12625,7 +11205,7 @@
                 </a:solidFill>
                 <a:latin typeface="Segoe UI"/>
               </a:rPr>
-              <a:t>L'accès progresse, la forêt recule, la cuisson ne bouge pas</a:t>
+              <a:t>Au rythme observé, l'accès universel rural tombe en 2104</a:t>
             </a:r>
           </a:p>
         </p:txBody>
@@ -12703,7 +11283,7 @@
                 </a:solidFill>
                 <a:latin typeface="Segoe UI"/>
               </a:rPr>
-              <a:t>5 / 11</a:t>
+              <a:t>5 / 10</a:t>
             </a:r>
           </a:p>
         </p:txBody>
@@ -12742,7 +11322,7 @@
         </p:nvGraphicFramePr>
         <p:xfrm>
           <a:off x="566928" y="1572768"/>
-          <a:ext cx="11057839" cy="2240280"/>
+          <a:ext cx="6858000" cy="3108960"/>
         </p:xfrm>
         <a:graphic>
           <a:graphicData uri="http://schemas.openxmlformats.org/drawingml/2006/chart">
@@ -12750,24 +11330,54 @@
           </a:graphicData>
         </a:graphic>
       </p:graphicFrame>
-      <p:graphicFrame>
-        <p:nvGraphicFramePr>
-          <p:cNvPr id="9" name="Chart 8"/>
-          <p:cNvGraphicFramePr>
-            <a:graphicFrameLocks noGrp="1"/>
-          </p:cNvGraphicFramePr>
-          <p:nvPr/>
-        </p:nvGraphicFramePr>
-        <p:xfrm>
-          <a:off x="566928" y="3877056"/>
-          <a:ext cx="11057839" cy="1700784"/>
-        </p:xfrm>
-        <a:graphic>
-          <a:graphicData uri="http://schemas.openxmlformats.org/drawingml/2006/chart">
-            <c:chart xmlns:c="http://schemas.openxmlformats.org/drawingml/2006/chart" r:id="rId4"/>
-          </a:graphicData>
-        </a:graphic>
-      </p:graphicFrame>
+      <p:sp>
+        <p:nvSpPr>
+          <p:cNvPr id="9" name="Rounded Rectangle 8"/>
+          <p:cNvSpPr/>
+          <p:nvPr/>
+        </p:nvSpPr>
+        <p:spPr>
+          <a:xfrm>
+            <a:off x="7699248" y="1572768"/>
+            <a:ext cx="3925519" cy="1371600"/>
+          </a:xfrm>
+          <a:prstGeom prst="roundRect">
+            <a:avLst>
+              <a:gd name="adj" fmla="val 5000"/>
+            </a:avLst>
+          </a:prstGeom>
+          <a:solidFill>
+            <a:srgbClr val="FFFFFF"/>
+          </a:solidFill>
+          <a:ln w="9525">
+            <a:solidFill>
+              <a:srgbClr val="D5DED8"/>
+            </a:solidFill>
+          </a:ln>
+          <a:effectLst/>
+        </p:spPr>
+        <p:style>
+          <a:lnRef idx="1">
+            <a:schemeClr val="accent1"/>
+          </a:lnRef>
+          <a:fillRef idx="3">
+            <a:schemeClr val="accent1"/>
+          </a:fillRef>
+          <a:effectRef idx="2">
+            <a:schemeClr val="accent1"/>
+          </a:effectRef>
+          <a:fontRef idx="minor">
+            <a:schemeClr val="lt1"/>
+          </a:fontRef>
+        </p:style>
+        <p:txBody>
+          <a:bodyPr rtlCol="0" anchor="ctr" wrap="square"/>
+          <a:lstStyle/>
+          <a:p>
+            <a:pPr algn="ctr"/>
+          </a:p>
+        </p:txBody>
+      </p:sp>
       <p:sp>
         <p:nvSpPr>
           <p:cNvPr id="10" name="TextBox 9"/>
@@ -12776,8 +11386,393 @@
         </p:nvSpPr>
         <p:spPr>
           <a:xfrm>
-            <a:off x="566928" y="5632704"/>
-            <a:ext cx="11057839" cy="640080"/>
+            <a:off x="7854696" y="1709928"/>
+            <a:ext cx="3614623" cy="182880"/>
+          </a:xfrm>
+          <a:prstGeom prst="rect">
+            <a:avLst/>
+          </a:prstGeom>
+          <a:noFill/>
+        </p:spPr>
+        <p:txBody>
+          <a:bodyPr wrap="square" anchor="t" lIns="0" rIns="0" tIns="0" bIns="0">
+            <a:spAutoFit/>
+          </a:bodyPr>
+          <a:lstStyle/>
+          <a:p>
+            <a:pPr algn="l">
+              <a:lnSpc>
+                <a:spcPct val="125000"/>
+              </a:lnSpc>
+            </a:pPr>
+            <a:r>
+              <a:rPr sz="800" b="1" spc="50">
+                <a:solidFill>
+                  <a:srgbClr val="0C1A14"/>
+                </a:solidFill>
+                <a:latin typeface="Segoe UI"/>
+              </a:rPr>
+              <a:t>ÉCART VILLE / CAMPAGNE</a:t>
+            </a:r>
+          </a:p>
+        </p:txBody>
+      </p:sp>
+      <p:sp>
+        <p:nvSpPr>
+          <p:cNvPr id="11" name="TextBox 10"/>
+          <p:cNvSpPr txBox="1"/>
+          <p:nvPr/>
+        </p:nvSpPr>
+        <p:spPr>
+          <a:xfrm>
+            <a:off x="7854696" y="1938528"/>
+            <a:ext cx="3614623" cy="411480"/>
+          </a:xfrm>
+          <a:prstGeom prst="rect">
+            <a:avLst/>
+          </a:prstGeom>
+          <a:noFill/>
+        </p:spPr>
+        <p:txBody>
+          <a:bodyPr wrap="square" anchor="t" lIns="0" rIns="0" tIns="0" bIns="0">
+            <a:spAutoFit/>
+          </a:bodyPr>
+          <a:lstStyle/>
+          <a:p>
+            <a:pPr algn="l">
+              <a:lnSpc>
+                <a:spcPct val="100000"/>
+              </a:lnSpc>
+            </a:pPr>
+            <a:r>
+              <a:rPr sz="2600" b="1">
+                <a:solidFill>
+                  <a:srgbClr val="B32418"/>
+                </a:solidFill>
+                <a:latin typeface="Segoe UI"/>
+              </a:rPr>
+              <a:t>72</a:t>
+            </a:r>
+            <a:r>
+              <a:rPr sz="2600" b="1">
+                <a:solidFill>
+                  <a:srgbClr val="B32418"/>
+                </a:solidFill>
+                <a:latin typeface="Segoe UI"/>
+              </a:rPr>
+              <a:t> points</a:t>
+            </a:r>
+          </a:p>
+        </p:txBody>
+      </p:sp>
+      <p:sp>
+        <p:nvSpPr>
+          <p:cNvPr id="12" name="TextBox 11"/>
+          <p:cNvSpPr txBox="1"/>
+          <p:nvPr/>
+        </p:nvSpPr>
+        <p:spPr>
+          <a:xfrm>
+            <a:off x="7854696" y="2414016"/>
+            <a:ext cx="3614623" cy="438912"/>
+          </a:xfrm>
+          <a:prstGeom prst="rect">
+            <a:avLst/>
+          </a:prstGeom>
+          <a:noFill/>
+        </p:spPr>
+        <p:txBody>
+          <a:bodyPr wrap="square" anchor="t" lIns="0" rIns="0" tIns="0" bIns="0">
+            <a:spAutoFit/>
+          </a:bodyPr>
+          <a:lstStyle/>
+          <a:p>
+            <a:pPr algn="l">
+              <a:lnSpc>
+                <a:spcPct val="130000"/>
+              </a:lnSpc>
+            </a:pPr>
+            <a:r>
+              <a:rPr sz="850" b="0">
+                <a:solidFill>
+                  <a:srgbClr val="5D6E64"/>
+                </a:solidFill>
+                <a:latin typeface="Segoe UI"/>
+              </a:rPr>
+              <a:t>96 % contre 25 % en 2022</a:t>
+            </a:r>
+          </a:p>
+        </p:txBody>
+      </p:sp>
+      <p:sp>
+        <p:nvSpPr>
+          <p:cNvPr id="13" name="Rounded Rectangle 12"/>
+          <p:cNvSpPr/>
+          <p:nvPr/>
+        </p:nvSpPr>
+        <p:spPr>
+          <a:xfrm>
+            <a:off x="7699248" y="3054096"/>
+            <a:ext cx="3925519" cy="1627632"/>
+          </a:xfrm>
+          <a:prstGeom prst="roundRect">
+            <a:avLst>
+              <a:gd name="adj" fmla="val 5000"/>
+            </a:avLst>
+          </a:prstGeom>
+          <a:solidFill>
+            <a:srgbClr val="FFFFFF"/>
+          </a:solidFill>
+          <a:ln w="9525">
+            <a:solidFill>
+              <a:srgbClr val="D5DED8"/>
+            </a:solidFill>
+          </a:ln>
+          <a:effectLst/>
+        </p:spPr>
+        <p:style>
+          <a:lnRef idx="1">
+            <a:schemeClr val="accent1"/>
+          </a:lnRef>
+          <a:fillRef idx="3">
+            <a:schemeClr val="accent1"/>
+          </a:fillRef>
+          <a:effectRef idx="2">
+            <a:schemeClr val="accent1"/>
+          </a:effectRef>
+          <a:fontRef idx="minor">
+            <a:schemeClr val="lt1"/>
+          </a:fontRef>
+        </p:style>
+        <p:txBody>
+          <a:bodyPr rtlCol="0" anchor="ctr" wrap="square"/>
+          <a:lstStyle/>
+          <a:p>
+            <a:pPr algn="ctr"/>
+          </a:p>
+        </p:txBody>
+      </p:sp>
+      <p:sp>
+        <p:nvSpPr>
+          <p:cNvPr id="14" name="TextBox 13"/>
+          <p:cNvSpPr txBox="1"/>
+          <p:nvPr/>
+        </p:nvSpPr>
+        <p:spPr>
+          <a:xfrm>
+            <a:off x="7854696" y="3191256"/>
+            <a:ext cx="3614623" cy="182880"/>
+          </a:xfrm>
+          <a:prstGeom prst="rect">
+            <a:avLst/>
+          </a:prstGeom>
+          <a:noFill/>
+        </p:spPr>
+        <p:txBody>
+          <a:bodyPr wrap="square" anchor="t" lIns="0" rIns="0" tIns="0" bIns="0">
+            <a:spAutoFit/>
+          </a:bodyPr>
+          <a:lstStyle/>
+          <a:p>
+            <a:pPr algn="l">
+              <a:lnSpc>
+                <a:spcPct val="125000"/>
+              </a:lnSpc>
+            </a:pPr>
+            <a:r>
+              <a:rPr sz="800" b="1" spc="50">
+                <a:solidFill>
+                  <a:srgbClr val="0C1A14"/>
+                </a:solidFill>
+                <a:latin typeface="Segoe UI"/>
+              </a:rPr>
+              <a:t>COUPURES SUBIES PAR LES ENTREPRISES</a:t>
+            </a:r>
+          </a:p>
+        </p:txBody>
+      </p:sp>
+      <p:sp>
+        <p:nvSpPr>
+          <p:cNvPr id="15" name="TextBox 14"/>
+          <p:cNvSpPr txBox="1"/>
+          <p:nvPr/>
+        </p:nvSpPr>
+        <p:spPr>
+          <a:xfrm>
+            <a:off x="7854696" y="3419856"/>
+            <a:ext cx="3614623" cy="411480"/>
+          </a:xfrm>
+          <a:prstGeom prst="rect">
+            <a:avLst/>
+          </a:prstGeom>
+          <a:noFill/>
+        </p:spPr>
+        <p:txBody>
+          <a:bodyPr wrap="square" anchor="t" lIns="0" rIns="0" tIns="0" bIns="0">
+            <a:spAutoFit/>
+          </a:bodyPr>
+          <a:lstStyle/>
+          <a:p>
+            <a:pPr algn="l">
+              <a:lnSpc>
+                <a:spcPct val="100000"/>
+              </a:lnSpc>
+            </a:pPr>
+            <a:r>
+              <a:rPr sz="2600" b="1">
+                <a:solidFill>
+                  <a:srgbClr val="B32418"/>
+                </a:solidFill>
+                <a:latin typeface="Segoe UI"/>
+              </a:rPr>
+              <a:t>5,5</a:t>
+            </a:r>
+            <a:r>
+              <a:rPr sz="2600" b="1">
+                <a:solidFill>
+                  <a:srgbClr val="B32418"/>
+                </a:solidFill>
+                <a:latin typeface="Segoe UI"/>
+              </a:rPr>
+              <a:t> /mois</a:t>
+            </a:r>
+          </a:p>
+        </p:txBody>
+      </p:sp>
+      <p:sp>
+        <p:nvSpPr>
+          <p:cNvPr id="16" name="TextBox 15"/>
+          <p:cNvSpPr txBox="1"/>
+          <p:nvPr/>
+        </p:nvSpPr>
+        <p:spPr>
+          <a:xfrm>
+            <a:off x="7854696" y="3895344"/>
+            <a:ext cx="3614623" cy="694944"/>
+          </a:xfrm>
+          <a:prstGeom prst="rect">
+            <a:avLst/>
+          </a:prstGeom>
+          <a:noFill/>
+        </p:spPr>
+        <p:txBody>
+          <a:bodyPr wrap="square" anchor="t" lIns="0" rIns="0" tIns="0" bIns="0">
+            <a:spAutoFit/>
+          </a:bodyPr>
+          <a:lstStyle/>
+          <a:p>
+            <a:pPr algn="l">
+              <a:lnSpc>
+                <a:spcPct val="130000"/>
+              </a:lnSpc>
+            </a:pPr>
+            <a:r>
+              <a:rPr sz="850" b="0">
+                <a:solidFill>
+                  <a:srgbClr val="5D6E64"/>
+                </a:solidFill>
+                <a:latin typeface="Segoe UI"/>
+              </a:rPr>
+              <a:t>94 % des entreprises touchées en 2016, contre 80 % en 2009</a:t>
+            </a:r>
+          </a:p>
+        </p:txBody>
+      </p:sp>
+      <p:sp>
+        <p:nvSpPr>
+          <p:cNvPr id="17" name="Rounded Rectangle 16"/>
+          <p:cNvSpPr/>
+          <p:nvPr/>
+        </p:nvSpPr>
+        <p:spPr>
+          <a:xfrm>
+            <a:off x="566928" y="4828032"/>
+            <a:ext cx="11057839" cy="1371600"/>
+          </a:xfrm>
+          <a:prstGeom prst="roundRect">
+            <a:avLst>
+              <a:gd name="adj" fmla="val 5000"/>
+            </a:avLst>
+          </a:prstGeom>
+          <a:solidFill>
+            <a:srgbClr val="FBF0DC"/>
+          </a:solidFill>
+          <a:ln>
+            <a:noFill/>
+          </a:ln>
+          <a:effectLst/>
+        </p:spPr>
+        <p:style>
+          <a:lnRef idx="1">
+            <a:schemeClr val="accent1"/>
+          </a:lnRef>
+          <a:fillRef idx="3">
+            <a:schemeClr val="accent1"/>
+          </a:fillRef>
+          <a:effectRef idx="2">
+            <a:schemeClr val="accent1"/>
+          </a:effectRef>
+          <a:fontRef idx="minor">
+            <a:schemeClr val="lt1"/>
+          </a:fontRef>
+        </p:style>
+        <p:txBody>
+          <a:bodyPr rtlCol="0" anchor="ctr" wrap="square"/>
+          <a:lstStyle/>
+          <a:p>
+            <a:pPr algn="ctr"/>
+          </a:p>
+        </p:txBody>
+      </p:sp>
+      <p:sp>
+        <p:nvSpPr>
+          <p:cNvPr id="18" name="TextBox 17"/>
+          <p:cNvSpPr txBox="1"/>
+          <p:nvPr/>
+        </p:nvSpPr>
+        <p:spPr>
+          <a:xfrm>
+            <a:off x="749808" y="4965192"/>
+            <a:ext cx="10692079" cy="164592"/>
+          </a:xfrm>
+          <a:prstGeom prst="rect">
+            <a:avLst/>
+          </a:prstGeom>
+          <a:noFill/>
+        </p:spPr>
+        <p:txBody>
+          <a:bodyPr wrap="square" anchor="t" lIns="0" rIns="0" tIns="0" bIns="0">
+            <a:spAutoFit/>
+          </a:bodyPr>
+          <a:lstStyle/>
+          <a:p>
+            <a:pPr algn="l">
+              <a:lnSpc>
+                <a:spcPct val="125000"/>
+              </a:lnSpc>
+            </a:pPr>
+            <a:r>
+              <a:rPr sz="850" b="1" spc="60">
+                <a:solidFill>
+                  <a:srgbClr val="B87407"/>
+                </a:solidFill>
+                <a:latin typeface="Segoe UI"/>
+              </a:rPr>
+              <a:t>DÉCISION</a:t>
+            </a:r>
+          </a:p>
+        </p:txBody>
+      </p:sp>
+      <p:sp>
+        <p:nvSpPr>
+          <p:cNvPr id="19" name="TextBox 18"/>
+          <p:cNvSpPr txBox="1"/>
+          <p:nvPr/>
+        </p:nvSpPr>
+        <p:spPr>
+          <a:xfrm>
+            <a:off x="749808" y="5193792"/>
+            <a:ext cx="10692079" cy="914400"/>
           </a:xfrm>
           <a:prstGeom prst="rect">
             <a:avLst/>
@@ -12796,13 +11791,13 @@
               </a:lnSpc>
             </a:pPr>
             <a:r>
-              <a:rPr sz="1050" b="0">
-                <a:solidFill>
-                  <a:srgbClr val="324239"/>
-                </a:solidFill>
-                <a:latin typeface="Segoe UI"/>
-              </a:rPr>
-              <a:t>Deux panneaux, un seul axe du temps : chaque série garde son échelle. Le couvert passe de 23,7 % à 22,2 % du territoire pendant que l'accès rural est multiplié par 8 — et que la cuisson propre reste à 0,9 %. L'électricité éclaire les foyers, elle ne remplace pas le bois dans les marmites.</a:t>
+              <a:rPr sz="1100" b="0">
+                <a:solidFill>
+                  <a:srgbClr val="0C1A14"/>
+                </a:solidFill>
+                <a:latin typeface="Segoe UI"/>
+              </a:rPr>
+              <a:t>Un facteur d'accélération de cet ordre ne s'obtient pas en prolongeant le réseau, dont le coût au raccordement croît avec la distance. Il s'obtient par le solaire décentralisé — mini-réseaux et kits domestiques — déployable sans attendre la ligne moyenne tension. Second argument : le réseau s'est étendu plus vite qu'il ne s'est consolidé, la part d'entreprises subissant des coupures a augmenté.</a:t>
             </a:r>
           </a:p>
         </p:txBody>
@@ -12903,7 +11898,7 @@
                 </a:solidFill>
                 <a:latin typeface="Segoe UI"/>
               </a:rPr>
-              <a:t>ÉLECTRIFICATION</a:t>
+              <a:t>CUISSON</a:t>
             </a:r>
           </a:p>
         </p:txBody>
@@ -12942,7 +11937,7 @@
                 </a:solidFill>
                 <a:latin typeface="Segoe UI"/>
               </a:rPr>
-              <a:t>Au rythme observé, l'accès universel rural tombe en 2104</a:t>
+              <a:t>Le bois de feu n'est pas une énergie du passé : sa part augmente</a:t>
             </a:r>
           </a:p>
         </p:txBody>
@@ -13020,7 +12015,7 @@
                 </a:solidFill>
                 <a:latin typeface="Segoe UI"/>
               </a:rPr>
-              <a:t>6 / 11</a:t>
+              <a:t>6 / 10</a:t>
             </a:r>
           </a:p>
         </p:txBody>
@@ -13059,7 +12054,7 @@
         </p:nvGraphicFramePr>
         <p:xfrm>
           <a:off x="566928" y="1572768"/>
-          <a:ext cx="6858000" cy="3108960"/>
+          <a:ext cx="6858000" cy="3200400"/>
         </p:xfrm>
         <a:graphic>
           <a:graphicData uri="http://schemas.openxmlformats.org/drawingml/2006/chart">
@@ -13076,7 +12071,7 @@
         <p:spPr>
           <a:xfrm>
             <a:off x="7699248" y="1572768"/>
-            <a:ext cx="3925519" cy="1371600"/>
+            <a:ext cx="3925519" cy="1554480"/>
           </a:xfrm>
           <a:prstGeom prst="roundRect">
             <a:avLst>
@@ -13149,7 +12144,7 @@
                 </a:solidFill>
                 <a:latin typeface="Segoe UI"/>
               </a:rPr>
-              <a:t>ÉCART VILLE / CAMPAGNE</a:t>
+              <a:t>BOIS BRUT, ENTRE LES DEUX ENQUÊTES</a:t>
             </a:r>
           </a:p>
         </p:txBody>
@@ -13188,7 +12183,7 @@
                 </a:solidFill>
                 <a:latin typeface="Segoe UI"/>
               </a:rPr>
-              <a:t>72</a:t>
+              <a:t>+3,6</a:t>
             </a:r>
             <a:r>
               <a:rPr sz="2600" b="1">
@@ -13211,7 +12206,7 @@
         <p:spPr>
           <a:xfrm>
             <a:off x="7854696" y="2414016"/>
-            <a:ext cx="3614623" cy="438912"/>
+            <a:ext cx="3614623" cy="621792"/>
           </a:xfrm>
           <a:prstGeom prst="rect">
             <a:avLst/>
@@ -13236,7 +12231,7 @@
                 </a:solidFill>
                 <a:latin typeface="Segoe UI"/>
               </a:rPr>
-              <a:t>96 % contre 25 % en 2022</a:t>
+              <a:t>de 48,2 % à 51,8 % des ménages, quand le charbon perd 4,5 points</a:t>
             </a:r>
           </a:p>
         </p:txBody>
@@ -13249,8 +12244,8 @@
         </p:nvSpPr>
         <p:spPr>
           <a:xfrm>
-            <a:off x="7699248" y="3054096"/>
-            <a:ext cx="3925519" cy="1627632"/>
+            <a:off x="7699248" y="3236976"/>
+            <a:ext cx="3925519" cy="1554480"/>
           </a:xfrm>
           <a:prstGeom prst="roundRect">
             <a:avLst>
@@ -13297,7 +12292,7 @@
         </p:nvSpPr>
         <p:spPr>
           <a:xfrm>
-            <a:off x="7854696" y="3191256"/>
+            <a:off x="7854696" y="3374136"/>
             <a:ext cx="3614623" cy="182880"/>
           </a:xfrm>
           <a:prstGeom prst="rect">
@@ -13323,7 +12318,7 @@
                 </a:solidFill>
                 <a:latin typeface="Segoe UI"/>
               </a:rPr>
-              <a:t>COUPURES SUBIES PAR LES ENTREPRISES</a:t>
+              <a:t>MORTALITÉ ATTRIBUÉE À LA POLLUTION DE L'AIR</a:t>
             </a:r>
           </a:p>
         </p:txBody>
@@ -13336,7 +12331,7 @@
         </p:nvSpPr>
         <p:spPr>
           <a:xfrm>
-            <a:off x="7854696" y="3419856"/>
+            <a:off x="7854696" y="3602736"/>
             <a:ext cx="3614623" cy="411480"/>
           </a:xfrm>
           <a:prstGeom prst="rect">
@@ -13362,7 +12357,7 @@
                 </a:solidFill>
                 <a:latin typeface="Segoe UI"/>
               </a:rPr>
-              <a:t>5,5</a:t>
+              <a:t>223</a:t>
             </a:r>
             <a:r>
               <a:rPr sz="2600" b="1">
@@ -13371,7 +12366,7 @@
                 </a:solidFill>
                 <a:latin typeface="Segoe UI"/>
               </a:rPr>
-              <a:t> /mois</a:t>
+              <a:t/>
             </a:r>
           </a:p>
         </p:txBody>
@@ -13384,8 +12379,8 @@
         </p:nvSpPr>
         <p:spPr>
           <a:xfrm>
-            <a:off x="7854696" y="3895344"/>
-            <a:ext cx="3614623" cy="694944"/>
+            <a:off x="7854696" y="4078224"/>
+            <a:ext cx="3614623" cy="621792"/>
           </a:xfrm>
           <a:prstGeom prst="rect">
             <a:avLst/>
@@ -13410,7 +12405,7 @@
                 </a:solidFill>
                 <a:latin typeface="Segoe UI"/>
               </a:rPr>
-              <a:t>94 % des entreprises touchées en 2016, contre 80 % en 2009</a:t>
+              <a:t>décès pour 100 000 habitants (2019) · PM2,5 à 52 µg/m³, soit × 10 la ligne directrice OMS</a:t>
             </a:r>
           </a:p>
         </p:txBody>
@@ -13423,8 +12418,8 @@
         </p:nvSpPr>
         <p:spPr>
           <a:xfrm>
-            <a:off x="566928" y="4828032"/>
-            <a:ext cx="11057839" cy="1371600"/>
+            <a:off x="566928" y="4892040"/>
+            <a:ext cx="11057839" cy="1280160"/>
           </a:xfrm>
           <a:prstGeom prst="roundRect">
             <a:avLst>
@@ -13432,7 +12427,7 @@
             </a:avLst>
           </a:prstGeom>
           <a:solidFill>
-            <a:srgbClr val="FBF0DC"/>
+            <a:srgbClr val="FBE7E4"/>
           </a:solidFill>
           <a:ln>
             <a:noFill/>
@@ -13469,7 +12464,7 @@
         </p:nvSpPr>
         <p:spPr>
           <a:xfrm>
-            <a:off x="749808" y="4965192"/>
+            <a:off x="749808" y="5029200"/>
             <a:ext cx="10692079" cy="164592"/>
           </a:xfrm>
           <a:prstGeom prst="rect">
@@ -13491,11 +12486,11 @@
             <a:r>
               <a:rPr sz="850" b="1" spc="60">
                 <a:solidFill>
-                  <a:srgbClr val="B87407"/>
-                </a:solidFill>
-                <a:latin typeface="Segoe UI"/>
-              </a:rPr>
-              <a:t>DÉCISION</a:t>
+                  <a:srgbClr val="B32418"/>
+                </a:solidFill>
+                <a:latin typeface="Segoe UI"/>
+              </a:rPr>
+              <a:t>ALERTE</a:t>
             </a:r>
           </a:p>
         </p:txBody>
@@ -13508,8 +12503,8 @@
         </p:nvSpPr>
         <p:spPr>
           <a:xfrm>
-            <a:off x="749808" y="5193792"/>
-            <a:ext cx="10692079" cy="914400"/>
+            <a:off x="749808" y="5257800"/>
+            <a:ext cx="10692079" cy="822960"/>
           </a:xfrm>
           <a:prstGeom prst="rect">
             <a:avLst/>
@@ -13534,7 +12529,7 @@
                 </a:solidFill>
                 <a:latin typeface="Segoe UI"/>
               </a:rPr>
-              <a:t>Un facteur d'accélération de cet ordre ne s'obtient pas en prolongeant le réseau, dont le coût au raccordement croît avec la distance. Il s'obtient par le solaire décentralisé — mini-réseaux et kits domestiques — déployable sans attendre la ligne moyenne tension. Second argument : le réseau s'est étendu plus vite qu'il ne s'est consolidé, la part d'entreprises subissant des coupures a augmenté.</a:t>
+              <a:t>La transition n'a pas commencé, elle a reculé. Le mouvement observé est un glissement du charbon vers le bois brut — le combustible le plus émetteur de particules à l'intérieur des habitations — pendant que le total biomasse reste à 89 % des ménages.</a:t>
             </a:r>
           </a:p>
         </p:txBody>
@@ -13635,7 +12630,7 @@
                 </a:solidFill>
                 <a:latin typeface="Segoe UI"/>
               </a:rPr>
-              <a:t>CUISSON</a:t>
+              <a:t>L'INDICATEUR TROMPEUR</a:t>
             </a:r>
           </a:p>
         </p:txBody>
@@ -13674,7 +12669,7 @@
                 </a:solidFill>
                 <a:latin typeface="Segoe UI"/>
               </a:rPr>
-              <a:t>Le bois de feu n'est pas une énergie du passé : sa part augmente</a:t>
+              <a:t>« Renouvelable » ne veut pas dire « propre »</a:t>
             </a:r>
           </a:p>
         </p:txBody>
@@ -13752,7 +12747,7 @@
                 </a:solidFill>
                 <a:latin typeface="Segoe UI"/>
               </a:rPr>
-              <a:t>7 / 11</a:t>
+              <a:t>7 / 10</a:t>
             </a:r>
           </a:p>
         </p:txBody>
@@ -13801,14 +12796,91 @@
       </p:graphicFrame>
       <p:sp>
         <p:nvSpPr>
-          <p:cNvPr id="9" name="Rounded Rectangle 8"/>
+          <p:cNvPr id="9" name="TextBox 8"/>
+          <p:cNvSpPr txBox="1"/>
+          <p:nvPr/>
+        </p:nvSpPr>
+        <p:spPr>
+          <a:xfrm>
+            <a:off x="7699248" y="1609344"/>
+            <a:ext cx="3925519" cy="3017520"/>
+          </a:xfrm>
+          <a:prstGeom prst="rect">
+            <a:avLst/>
+          </a:prstGeom>
+          <a:noFill/>
+        </p:spPr>
+        <p:txBody>
+          <a:bodyPr wrap="square" anchor="t" lIns="0" rIns="0" tIns="0" bIns="0">
+            <a:spAutoFit/>
+          </a:bodyPr>
+          <a:lstStyle/>
+          <a:p>
+            <a:pPr algn="l">
+              <a:lnSpc>
+                <a:spcPct val="140000"/>
+              </a:lnSpc>
+            </a:pPr>
+            <a:r>
+              <a:rPr sz="1150" b="0">
+                <a:solidFill>
+                  <a:srgbClr val="324239"/>
+                </a:solidFill>
+                <a:latin typeface="Segoe UI"/>
+              </a:rPr>
+              <a:t>En 2021, 75,1 % de l'énergie finale consommée au Togo est comptée comme renouvelable — un taux que peu de pays affichent.</a:t>
+            </a:r>
+          </a:p>
+          <a:p>
+            <a:pPr algn="l">
+              <a:lnSpc>
+                <a:spcPct val="140000"/>
+              </a:lnSpc>
+              <a:spcBef>
+                <a:spcPts val="600"/>
+              </a:spcBef>
+            </a:pPr>
+            <a:r>
+              <a:rPr sz="1150" b="0">
+                <a:solidFill>
+                  <a:srgbClr val="324239"/>
+                </a:solidFill>
+                <a:latin typeface="Segoe UI"/>
+              </a:rPr>
+              <a:t>Au même moment, 11,9 % des ménages seulement cuisinent proprement.</a:t>
+            </a:r>
+          </a:p>
+          <a:p>
+            <a:pPr algn="l">
+              <a:lnSpc>
+                <a:spcPct val="140000"/>
+              </a:lnSpc>
+              <a:spcBef>
+                <a:spcPts val="600"/>
+              </a:spcBef>
+            </a:pPr>
+            <a:r>
+              <a:rPr sz="1150" b="0">
+                <a:solidFill>
+                  <a:srgbClr val="324239"/>
+                </a:solidFill>
+                <a:latin typeface="Segoe UI"/>
+              </a:rPr>
+              <a:t>L'écart entre les deux courbes, c'est la biomasse brûlée dans les foyers : du bois et du charbon prélevés plus vite qu'ils ne se régénèrent, brûlés sans évacuation des fumées.</a:t>
+            </a:r>
+          </a:p>
+        </p:txBody>
+      </p:sp>
+      <p:sp>
+        <p:nvSpPr>
+          <p:cNvPr id="10" name="Rounded Rectangle 9"/>
           <p:cNvSpPr/>
           <p:nvPr/>
         </p:nvSpPr>
         <p:spPr>
           <a:xfrm>
-            <a:off x="7699248" y="1572768"/>
-            <a:ext cx="3925519" cy="1554480"/>
+            <a:off x="566928" y="4892040"/>
+            <a:ext cx="11057839" cy="1280160"/>
           </a:xfrm>
           <a:prstGeom prst="roundRect">
             <a:avLst>
@@ -13816,12 +12888,10 @@
             </a:avLst>
           </a:prstGeom>
           <a:solidFill>
-            <a:srgbClr val="FFFFFF"/>
+            <a:srgbClr val="FBF0DC"/>
           </a:solidFill>
-          <a:ln w="9525">
-            <a:solidFill>
-              <a:srgbClr val="D5DED8"/>
-            </a:solidFill>
+          <a:ln>
+            <a:noFill/>
           </a:ln>
           <a:effectLst/>
         </p:spPr>
@@ -13849,353 +12919,7 @@
       </p:sp>
       <p:sp>
         <p:nvSpPr>
-          <p:cNvPr id="10" name="TextBox 9"/>
-          <p:cNvSpPr txBox="1"/>
-          <p:nvPr/>
-        </p:nvSpPr>
-        <p:spPr>
-          <a:xfrm>
-            <a:off x="7854696" y="1709928"/>
-            <a:ext cx="3614623" cy="182880"/>
-          </a:xfrm>
-          <a:prstGeom prst="rect">
-            <a:avLst/>
-          </a:prstGeom>
-          <a:noFill/>
-        </p:spPr>
-        <p:txBody>
-          <a:bodyPr wrap="square" anchor="t" lIns="0" rIns="0" tIns="0" bIns="0">
-            <a:spAutoFit/>
-          </a:bodyPr>
-          <a:lstStyle/>
-          <a:p>
-            <a:pPr algn="l">
-              <a:lnSpc>
-                <a:spcPct val="125000"/>
-              </a:lnSpc>
-            </a:pPr>
-            <a:r>
-              <a:rPr sz="800" b="1" spc="50">
-                <a:solidFill>
-                  <a:srgbClr val="0C1A14"/>
-                </a:solidFill>
-                <a:latin typeface="Segoe UI"/>
-              </a:rPr>
-              <a:t>BOIS BRUT, ENTRE LES DEUX ENQUÊTES</a:t>
-            </a:r>
-          </a:p>
-        </p:txBody>
-      </p:sp>
-      <p:sp>
-        <p:nvSpPr>
           <p:cNvPr id="11" name="TextBox 10"/>
-          <p:cNvSpPr txBox="1"/>
-          <p:nvPr/>
-        </p:nvSpPr>
-        <p:spPr>
-          <a:xfrm>
-            <a:off x="7854696" y="1938528"/>
-            <a:ext cx="3614623" cy="411480"/>
-          </a:xfrm>
-          <a:prstGeom prst="rect">
-            <a:avLst/>
-          </a:prstGeom>
-          <a:noFill/>
-        </p:spPr>
-        <p:txBody>
-          <a:bodyPr wrap="square" anchor="t" lIns="0" rIns="0" tIns="0" bIns="0">
-            <a:spAutoFit/>
-          </a:bodyPr>
-          <a:lstStyle/>
-          <a:p>
-            <a:pPr algn="l">
-              <a:lnSpc>
-                <a:spcPct val="100000"/>
-              </a:lnSpc>
-            </a:pPr>
-            <a:r>
-              <a:rPr sz="2600" b="1">
-                <a:solidFill>
-                  <a:srgbClr val="B32418"/>
-                </a:solidFill>
-                <a:latin typeface="Segoe UI"/>
-              </a:rPr>
-              <a:t>+3,6</a:t>
-            </a:r>
-            <a:r>
-              <a:rPr sz="2600" b="1">
-                <a:solidFill>
-                  <a:srgbClr val="B32418"/>
-                </a:solidFill>
-                <a:latin typeface="Segoe UI"/>
-              </a:rPr>
-              <a:t> points</a:t>
-            </a:r>
-          </a:p>
-        </p:txBody>
-      </p:sp>
-      <p:sp>
-        <p:nvSpPr>
-          <p:cNvPr id="12" name="TextBox 11"/>
-          <p:cNvSpPr txBox="1"/>
-          <p:nvPr/>
-        </p:nvSpPr>
-        <p:spPr>
-          <a:xfrm>
-            <a:off x="7854696" y="2414016"/>
-            <a:ext cx="3614623" cy="621792"/>
-          </a:xfrm>
-          <a:prstGeom prst="rect">
-            <a:avLst/>
-          </a:prstGeom>
-          <a:noFill/>
-        </p:spPr>
-        <p:txBody>
-          <a:bodyPr wrap="square" anchor="t" lIns="0" rIns="0" tIns="0" bIns="0">
-            <a:spAutoFit/>
-          </a:bodyPr>
-          <a:lstStyle/>
-          <a:p>
-            <a:pPr algn="l">
-              <a:lnSpc>
-                <a:spcPct val="130000"/>
-              </a:lnSpc>
-            </a:pPr>
-            <a:r>
-              <a:rPr sz="850" b="0">
-                <a:solidFill>
-                  <a:srgbClr val="5D6E64"/>
-                </a:solidFill>
-                <a:latin typeface="Segoe UI"/>
-              </a:rPr>
-              <a:t>de 48,2 % à 51,8 % des ménages, quand le charbon perd 4,5 points</a:t>
-            </a:r>
-          </a:p>
-        </p:txBody>
-      </p:sp>
-      <p:sp>
-        <p:nvSpPr>
-          <p:cNvPr id="13" name="Rounded Rectangle 12"/>
-          <p:cNvSpPr/>
-          <p:nvPr/>
-        </p:nvSpPr>
-        <p:spPr>
-          <a:xfrm>
-            <a:off x="7699248" y="3236976"/>
-            <a:ext cx="3925519" cy="1554480"/>
-          </a:xfrm>
-          <a:prstGeom prst="roundRect">
-            <a:avLst>
-              <a:gd name="adj" fmla="val 5000"/>
-            </a:avLst>
-          </a:prstGeom>
-          <a:solidFill>
-            <a:srgbClr val="FFFFFF"/>
-          </a:solidFill>
-          <a:ln w="9525">
-            <a:solidFill>
-              <a:srgbClr val="D5DED8"/>
-            </a:solidFill>
-          </a:ln>
-          <a:effectLst/>
-        </p:spPr>
-        <p:style>
-          <a:lnRef idx="1">
-            <a:schemeClr val="accent1"/>
-          </a:lnRef>
-          <a:fillRef idx="3">
-            <a:schemeClr val="accent1"/>
-          </a:fillRef>
-          <a:effectRef idx="2">
-            <a:schemeClr val="accent1"/>
-          </a:effectRef>
-          <a:fontRef idx="minor">
-            <a:schemeClr val="lt1"/>
-          </a:fontRef>
-        </p:style>
-        <p:txBody>
-          <a:bodyPr rtlCol="0" anchor="ctr" wrap="square"/>
-          <a:lstStyle/>
-          <a:p>
-            <a:pPr algn="ctr"/>
-          </a:p>
-        </p:txBody>
-      </p:sp>
-      <p:sp>
-        <p:nvSpPr>
-          <p:cNvPr id="14" name="TextBox 13"/>
-          <p:cNvSpPr txBox="1"/>
-          <p:nvPr/>
-        </p:nvSpPr>
-        <p:spPr>
-          <a:xfrm>
-            <a:off x="7854696" y="3374136"/>
-            <a:ext cx="3614623" cy="182880"/>
-          </a:xfrm>
-          <a:prstGeom prst="rect">
-            <a:avLst/>
-          </a:prstGeom>
-          <a:noFill/>
-        </p:spPr>
-        <p:txBody>
-          <a:bodyPr wrap="square" anchor="t" lIns="0" rIns="0" tIns="0" bIns="0">
-            <a:spAutoFit/>
-          </a:bodyPr>
-          <a:lstStyle/>
-          <a:p>
-            <a:pPr algn="l">
-              <a:lnSpc>
-                <a:spcPct val="125000"/>
-              </a:lnSpc>
-            </a:pPr>
-            <a:r>
-              <a:rPr sz="800" b="1" spc="50">
-                <a:solidFill>
-                  <a:srgbClr val="0C1A14"/>
-                </a:solidFill>
-                <a:latin typeface="Segoe UI"/>
-              </a:rPr>
-              <a:t>MORTALITÉ ATTRIBUÉE À LA POLLUTION DE L'AIR</a:t>
-            </a:r>
-          </a:p>
-        </p:txBody>
-      </p:sp>
-      <p:sp>
-        <p:nvSpPr>
-          <p:cNvPr id="15" name="TextBox 14"/>
-          <p:cNvSpPr txBox="1"/>
-          <p:nvPr/>
-        </p:nvSpPr>
-        <p:spPr>
-          <a:xfrm>
-            <a:off x="7854696" y="3602736"/>
-            <a:ext cx="3614623" cy="411480"/>
-          </a:xfrm>
-          <a:prstGeom prst="rect">
-            <a:avLst/>
-          </a:prstGeom>
-          <a:noFill/>
-        </p:spPr>
-        <p:txBody>
-          <a:bodyPr wrap="square" anchor="t" lIns="0" rIns="0" tIns="0" bIns="0">
-            <a:spAutoFit/>
-          </a:bodyPr>
-          <a:lstStyle/>
-          <a:p>
-            <a:pPr algn="l">
-              <a:lnSpc>
-                <a:spcPct val="100000"/>
-              </a:lnSpc>
-            </a:pPr>
-            <a:r>
-              <a:rPr sz="2600" b="1">
-                <a:solidFill>
-                  <a:srgbClr val="B32418"/>
-                </a:solidFill>
-                <a:latin typeface="Segoe UI"/>
-              </a:rPr>
-              <a:t>223</a:t>
-            </a:r>
-            <a:r>
-              <a:rPr sz="2600" b="1">
-                <a:solidFill>
-                  <a:srgbClr val="B32418"/>
-                </a:solidFill>
-                <a:latin typeface="Segoe UI"/>
-              </a:rPr>
-              <a:t/>
-            </a:r>
-          </a:p>
-        </p:txBody>
-      </p:sp>
-      <p:sp>
-        <p:nvSpPr>
-          <p:cNvPr id="16" name="TextBox 15"/>
-          <p:cNvSpPr txBox="1"/>
-          <p:nvPr/>
-        </p:nvSpPr>
-        <p:spPr>
-          <a:xfrm>
-            <a:off x="7854696" y="4078224"/>
-            <a:ext cx="3614623" cy="621792"/>
-          </a:xfrm>
-          <a:prstGeom prst="rect">
-            <a:avLst/>
-          </a:prstGeom>
-          <a:noFill/>
-        </p:spPr>
-        <p:txBody>
-          <a:bodyPr wrap="square" anchor="t" lIns="0" rIns="0" tIns="0" bIns="0">
-            <a:spAutoFit/>
-          </a:bodyPr>
-          <a:lstStyle/>
-          <a:p>
-            <a:pPr algn="l">
-              <a:lnSpc>
-                <a:spcPct val="130000"/>
-              </a:lnSpc>
-            </a:pPr>
-            <a:r>
-              <a:rPr sz="850" b="0">
-                <a:solidFill>
-                  <a:srgbClr val="5D6E64"/>
-                </a:solidFill>
-                <a:latin typeface="Segoe UI"/>
-              </a:rPr>
-              <a:t>décès pour 100 000 habitants (2019) · PM2,5 à 52 µg/m³, soit × 10 la ligne directrice OMS</a:t>
-            </a:r>
-          </a:p>
-        </p:txBody>
-      </p:sp>
-      <p:sp>
-        <p:nvSpPr>
-          <p:cNvPr id="17" name="Rounded Rectangle 16"/>
-          <p:cNvSpPr/>
-          <p:nvPr/>
-        </p:nvSpPr>
-        <p:spPr>
-          <a:xfrm>
-            <a:off x="566928" y="4892040"/>
-            <a:ext cx="11057839" cy="1280160"/>
-          </a:xfrm>
-          <a:prstGeom prst="roundRect">
-            <a:avLst>
-              <a:gd name="adj" fmla="val 5000"/>
-            </a:avLst>
-          </a:prstGeom>
-          <a:solidFill>
-            <a:srgbClr val="FBE7E4"/>
-          </a:solidFill>
-          <a:ln>
-            <a:noFill/>
-          </a:ln>
-          <a:effectLst/>
-        </p:spPr>
-        <p:style>
-          <a:lnRef idx="1">
-            <a:schemeClr val="accent1"/>
-          </a:lnRef>
-          <a:fillRef idx="3">
-            <a:schemeClr val="accent1"/>
-          </a:fillRef>
-          <a:effectRef idx="2">
-            <a:schemeClr val="accent1"/>
-          </a:effectRef>
-          <a:fontRef idx="minor">
-            <a:schemeClr val="lt1"/>
-          </a:fontRef>
-        </p:style>
-        <p:txBody>
-          <a:bodyPr rtlCol="0" anchor="ctr" wrap="square"/>
-          <a:lstStyle/>
-          <a:p>
-            <a:pPr algn="ctr"/>
-          </a:p>
-        </p:txBody>
-      </p:sp>
-      <p:sp>
-        <p:nvSpPr>
-          <p:cNvPr id="18" name="TextBox 17"/>
           <p:cNvSpPr txBox="1"/>
           <p:nvPr/>
         </p:nvSpPr>
@@ -14223,18 +12947,18 @@
             <a:r>
               <a:rPr sz="850" b="1" spc="60">
                 <a:solidFill>
-                  <a:srgbClr val="B32418"/>
-                </a:solidFill>
-                <a:latin typeface="Segoe UI"/>
-              </a:rPr>
-              <a:t>ALERTE</a:t>
-            </a:r>
-          </a:p>
-        </p:txBody>
-      </p:sp>
-      <p:sp>
-        <p:nvSpPr>
-          <p:cNvPr id="19" name="TextBox 18"/>
+                  <a:srgbClr val="B87407"/>
+                </a:solidFill>
+                <a:latin typeface="Segoe UI"/>
+              </a:rPr>
+              <a:t>DÉCISION</a:t>
+            </a:r>
+          </a:p>
+        </p:txBody>
+      </p:sp>
+      <p:sp>
+        <p:nvSpPr>
+          <p:cNvPr id="12" name="TextBox 11"/>
           <p:cNvSpPr txBox="1"/>
           <p:nvPr/>
         </p:nvSpPr>
@@ -14266,7 +12990,7 @@
                 </a:solidFill>
                 <a:latin typeface="Segoe UI"/>
               </a:rPr>
-              <a:t>La transition n'a pas commencé, elle a reculé. Le mouvement observé est un glissement du charbon vers le bois brut — le combustible le plus émetteur de particules à l'intérieur des habitations — pendant que le total biomasse reste à 89 % des ménages.</a:t>
+              <a:t>Conséquence de pilotage : le taux d'énergie renouvelable est un mauvais indicateur de suivi pour la transition togolaise — il baissera mécaniquement quand les ménages passeront au GPL ou à l'électricité, c'est-à-dire quand la situation s'améliorera. Les indicateurs à suivre sont l'accès à la cuisson propre et la part des ménages sortis de la biomasse.</a:t>
             </a:r>
           </a:p>
         </p:txBody>
@@ -14367,7 +13091,7 @@
                 </a:solidFill>
                 <a:latin typeface="Segoe UI"/>
               </a:rPr>
-              <a:t>L'INDICATEUR TROMPEUR</a:t>
+              <a:t>INVENTAIRE DES ÉMISSIONS</a:t>
             </a:r>
           </a:p>
         </p:txBody>
@@ -14406,7 +13130,7 @@
                 </a:solidFill>
                 <a:latin typeface="Segoe UI"/>
               </a:rPr>
-              <a:t>« Renouvelable » ne veut pas dire « propre »</a:t>
+              <a:t>Le secteur énergie n'est marginal que si l'on ne regarde que le CO₂</a:t>
             </a:r>
           </a:p>
         </p:txBody>
@@ -14484,7 +13208,7 @@
                 </a:solidFill>
                 <a:latin typeface="Segoe UI"/>
               </a:rPr>
-              <a:t>8 / 11</a:t>
+              <a:t>8 / 10</a:t>
             </a:r>
           </a:p>
         </p:txBody>
@@ -14533,91 +13257,14 @@
       </p:graphicFrame>
       <p:sp>
         <p:nvSpPr>
-          <p:cNvPr id="9" name="TextBox 8"/>
-          <p:cNvSpPr txBox="1"/>
-          <p:nvPr/>
-        </p:nvSpPr>
-        <p:spPr>
-          <a:xfrm>
-            <a:off x="7699248" y="1609344"/>
-            <a:ext cx="3925519" cy="3017520"/>
-          </a:xfrm>
-          <a:prstGeom prst="rect">
-            <a:avLst/>
-          </a:prstGeom>
-          <a:noFill/>
-        </p:spPr>
-        <p:txBody>
-          <a:bodyPr wrap="square" anchor="t" lIns="0" rIns="0" tIns="0" bIns="0">
-            <a:spAutoFit/>
-          </a:bodyPr>
-          <a:lstStyle/>
-          <a:p>
-            <a:pPr algn="l">
-              <a:lnSpc>
-                <a:spcPct val="140000"/>
-              </a:lnSpc>
-            </a:pPr>
-            <a:r>
-              <a:rPr sz="1150" b="0">
-                <a:solidFill>
-                  <a:srgbClr val="324239"/>
-                </a:solidFill>
-                <a:latin typeface="Segoe UI"/>
-              </a:rPr>
-              <a:t>En 2021, 75,1 % de l'énergie finale consommée au Togo est comptée comme renouvelable — un taux que peu de pays affichent.</a:t>
-            </a:r>
-          </a:p>
-          <a:p>
-            <a:pPr algn="l">
-              <a:lnSpc>
-                <a:spcPct val="140000"/>
-              </a:lnSpc>
-              <a:spcBef>
-                <a:spcPts val="600"/>
-              </a:spcBef>
-            </a:pPr>
-            <a:r>
-              <a:rPr sz="1150" b="0">
-                <a:solidFill>
-                  <a:srgbClr val="324239"/>
-                </a:solidFill>
-                <a:latin typeface="Segoe UI"/>
-              </a:rPr>
-              <a:t>Au même moment, 11,9 % des ménages seulement cuisinent proprement.</a:t>
-            </a:r>
-          </a:p>
-          <a:p>
-            <a:pPr algn="l">
-              <a:lnSpc>
-                <a:spcPct val="140000"/>
-              </a:lnSpc>
-              <a:spcBef>
-                <a:spcPts val="600"/>
-              </a:spcBef>
-            </a:pPr>
-            <a:r>
-              <a:rPr sz="1150" b="0">
-                <a:solidFill>
-                  <a:srgbClr val="324239"/>
-                </a:solidFill>
-                <a:latin typeface="Segoe UI"/>
-              </a:rPr>
-              <a:t>L'écart entre les deux courbes, c'est la biomasse brûlée dans les foyers : du bois et du charbon prélevés plus vite qu'ils ne se régénèrent, brûlés sans évacuation des fumées.</a:t>
-            </a:r>
-          </a:p>
-        </p:txBody>
-      </p:sp>
-      <p:sp>
-        <p:nvSpPr>
-          <p:cNvPr id="10" name="Rounded Rectangle 9"/>
+          <p:cNvPr id="9" name="Rounded Rectangle 8"/>
           <p:cNvSpPr/>
           <p:nvPr/>
         </p:nvSpPr>
         <p:spPr>
           <a:xfrm>
-            <a:off x="566928" y="4892040"/>
-            <a:ext cx="11057839" cy="1280160"/>
+            <a:off x="7699248" y="1572768"/>
+            <a:ext cx="3925519" cy="1554480"/>
           </a:xfrm>
           <a:prstGeom prst="roundRect">
             <a:avLst>
@@ -14625,10 +13272,12 @@
             </a:avLst>
           </a:prstGeom>
           <a:solidFill>
-            <a:srgbClr val="FBF0DC"/>
+            <a:srgbClr val="FFFFFF"/>
           </a:solidFill>
-          <a:ln>
-            <a:noFill/>
+          <a:ln w="9525">
+            <a:solidFill>
+              <a:srgbClr val="D5DED8"/>
+            </a:solidFill>
           </a:ln>
           <a:effectLst/>
         </p:spPr>
@@ -14656,7 +13305,353 @@
       </p:sp>
       <p:sp>
         <p:nvSpPr>
+          <p:cNvPr id="10" name="TextBox 9"/>
+          <p:cNvSpPr txBox="1"/>
+          <p:nvPr/>
+        </p:nvSpPr>
+        <p:spPr>
+          <a:xfrm>
+            <a:off x="7854696" y="1709928"/>
+            <a:ext cx="3614623" cy="182880"/>
+          </a:xfrm>
+          <a:prstGeom prst="rect">
+            <a:avLst/>
+          </a:prstGeom>
+          <a:noFill/>
+        </p:spPr>
+        <p:txBody>
+          <a:bodyPr wrap="square" anchor="t" lIns="0" rIns="0" tIns="0" bIns="0">
+            <a:spAutoFit/>
+          </a:bodyPr>
+          <a:lstStyle/>
+          <a:p>
+            <a:pPr algn="l">
+              <a:lnSpc>
+                <a:spcPct val="125000"/>
+              </a:lnSpc>
+            </a:pPr>
+            <a:r>
+              <a:rPr sz="800" b="1" spc="50">
+                <a:solidFill>
+                  <a:srgbClr val="0C1A14"/>
+                </a:solidFill>
+                <a:latin typeface="Segoe UI"/>
+              </a:rPr>
+              <a:t>LE SECTEUR ÉNERGIE, SELON L'UNITÉ DE LECTURE</a:t>
+            </a:r>
+          </a:p>
+        </p:txBody>
+      </p:sp>
+      <p:sp>
+        <p:nvSpPr>
           <p:cNvPr id="11" name="TextBox 10"/>
+          <p:cNvSpPr txBox="1"/>
+          <p:nvPr/>
+        </p:nvSpPr>
+        <p:spPr>
+          <a:xfrm>
+            <a:off x="7854696" y="1938528"/>
+            <a:ext cx="3614623" cy="411480"/>
+          </a:xfrm>
+          <a:prstGeom prst="rect">
+            <a:avLst/>
+          </a:prstGeom>
+          <a:noFill/>
+        </p:spPr>
+        <p:txBody>
+          <a:bodyPr wrap="square" anchor="t" lIns="0" rIns="0" tIns="0" bIns="0">
+            <a:spAutoFit/>
+          </a:bodyPr>
+          <a:lstStyle/>
+          <a:p>
+            <a:pPr algn="l">
+              <a:lnSpc>
+                <a:spcPct val="100000"/>
+              </a:lnSpc>
+            </a:pPr>
+            <a:r>
+              <a:rPr sz="2600" b="1">
+                <a:solidFill>
+                  <a:srgbClr val="B32418"/>
+                </a:solidFill>
+                <a:latin typeface="Segoe UI"/>
+              </a:rPr>
+              <a:t>6 → 27</a:t>
+            </a:r>
+            <a:r>
+              <a:rPr sz="2600" b="1">
+                <a:solidFill>
+                  <a:srgbClr val="B32418"/>
+                </a:solidFill>
+                <a:latin typeface="Segoe UI"/>
+              </a:rPr>
+              <a:t> %</a:t>
+            </a:r>
+          </a:p>
+        </p:txBody>
+      </p:sp>
+      <p:sp>
+        <p:nvSpPr>
+          <p:cNvPr id="12" name="TextBox 11"/>
+          <p:cNvSpPr txBox="1"/>
+          <p:nvPr/>
+        </p:nvSpPr>
+        <p:spPr>
+          <a:xfrm>
+            <a:off x="7854696" y="2414016"/>
+            <a:ext cx="3614623" cy="621792"/>
+          </a:xfrm>
+          <a:prstGeom prst="rect">
+            <a:avLst/>
+          </a:prstGeom>
+          <a:noFill/>
+        </p:spPr>
+        <p:txBody>
+          <a:bodyPr wrap="square" anchor="t" lIns="0" rIns="0" tIns="0" bIns="0">
+            <a:spAutoFit/>
+          </a:bodyPr>
+          <a:lstStyle/>
+          <a:p>
+            <a:pPr algn="l">
+              <a:lnSpc>
+                <a:spcPct val="130000"/>
+              </a:lnSpc>
+            </a:pPr>
+            <a:r>
+              <a:rPr sz="850" b="0">
+                <a:solidFill>
+                  <a:srgbClr val="5D6E64"/>
+                </a:solidFill>
+                <a:latin typeface="Segoe UI"/>
+              </a:rPr>
+              <a:t>des émissions nationales : la même année, le même inventaire, deux classements différents</a:t>
+            </a:r>
+          </a:p>
+        </p:txBody>
+      </p:sp>
+      <p:sp>
+        <p:nvSpPr>
+          <p:cNvPr id="13" name="Rounded Rectangle 12"/>
+          <p:cNvSpPr/>
+          <p:nvPr/>
+        </p:nvSpPr>
+        <p:spPr>
+          <a:xfrm>
+            <a:off x="7699248" y="3236976"/>
+            <a:ext cx="3925519" cy="1554480"/>
+          </a:xfrm>
+          <a:prstGeom prst="roundRect">
+            <a:avLst>
+              <a:gd name="adj" fmla="val 5000"/>
+            </a:avLst>
+          </a:prstGeom>
+          <a:solidFill>
+            <a:srgbClr val="FFFFFF"/>
+          </a:solidFill>
+          <a:ln w="9525">
+            <a:solidFill>
+              <a:srgbClr val="D5DED8"/>
+            </a:solidFill>
+          </a:ln>
+          <a:effectLst/>
+        </p:spPr>
+        <p:style>
+          <a:lnRef idx="1">
+            <a:schemeClr val="accent1"/>
+          </a:lnRef>
+          <a:fillRef idx="3">
+            <a:schemeClr val="accent1"/>
+          </a:fillRef>
+          <a:effectRef idx="2">
+            <a:schemeClr val="accent1"/>
+          </a:effectRef>
+          <a:fontRef idx="minor">
+            <a:schemeClr val="lt1"/>
+          </a:fontRef>
+        </p:style>
+        <p:txBody>
+          <a:bodyPr rtlCol="0" anchor="ctr" wrap="square"/>
+          <a:lstStyle/>
+          <a:p>
+            <a:pPr algn="ctr"/>
+          </a:p>
+        </p:txBody>
+      </p:sp>
+      <p:sp>
+        <p:nvSpPr>
+          <p:cNvPr id="14" name="TextBox 13"/>
+          <p:cNvSpPr txBox="1"/>
+          <p:nvPr/>
+        </p:nvSpPr>
+        <p:spPr>
+          <a:xfrm>
+            <a:off x="7854696" y="3374136"/>
+            <a:ext cx="3614623" cy="182880"/>
+          </a:xfrm>
+          <a:prstGeom prst="rect">
+            <a:avLst/>
+          </a:prstGeom>
+          <a:noFill/>
+        </p:spPr>
+        <p:txBody>
+          <a:bodyPr wrap="square" anchor="t" lIns="0" rIns="0" tIns="0" bIns="0">
+            <a:spAutoFit/>
+          </a:bodyPr>
+          <a:lstStyle/>
+          <a:p>
+            <a:pPr algn="l">
+              <a:lnSpc>
+                <a:spcPct val="125000"/>
+              </a:lnSpc>
+            </a:pPr>
+            <a:r>
+              <a:rPr sz="800" b="1" spc="50">
+                <a:solidFill>
+                  <a:srgbClr val="0C1A14"/>
+                </a:solidFill>
+                <a:latin typeface="Segoe UI"/>
+              </a:rPr>
+              <a:t>PART DE L'ÉNERGIE DANS LES GAZ LES PLUS RÉCHAUFFANTS</a:t>
+            </a:r>
+          </a:p>
+        </p:txBody>
+      </p:sp>
+      <p:sp>
+        <p:nvSpPr>
+          <p:cNvPr id="15" name="TextBox 14"/>
+          <p:cNvSpPr txBox="1"/>
+          <p:nvPr/>
+        </p:nvSpPr>
+        <p:spPr>
+          <a:xfrm>
+            <a:off x="7854696" y="3602736"/>
+            <a:ext cx="3614623" cy="411480"/>
+          </a:xfrm>
+          <a:prstGeom prst="rect">
+            <a:avLst/>
+          </a:prstGeom>
+          <a:noFill/>
+        </p:spPr>
+        <p:txBody>
+          <a:bodyPr wrap="square" anchor="t" lIns="0" rIns="0" tIns="0" bIns="0">
+            <a:spAutoFit/>
+          </a:bodyPr>
+          <a:lstStyle/>
+          <a:p>
+            <a:pPr algn="l">
+              <a:lnSpc>
+                <a:spcPct val="100000"/>
+              </a:lnSpc>
+            </a:pPr>
+            <a:r>
+              <a:rPr sz="2600" b="1">
+                <a:solidFill>
+                  <a:srgbClr val="B32418"/>
+                </a:solidFill>
+                <a:latin typeface="Segoe UI"/>
+              </a:rPr>
+              <a:t>57</a:t>
+            </a:r>
+            <a:r>
+              <a:rPr sz="2600" b="1">
+                <a:solidFill>
+                  <a:srgbClr val="B32418"/>
+                </a:solidFill>
+                <a:latin typeface="Segoe UI"/>
+              </a:rPr>
+              <a:t> %</a:t>
+            </a:r>
+          </a:p>
+        </p:txBody>
+      </p:sp>
+      <p:sp>
+        <p:nvSpPr>
+          <p:cNvPr id="16" name="TextBox 15"/>
+          <p:cNvSpPr txBox="1"/>
+          <p:nvPr/>
+        </p:nvSpPr>
+        <p:spPr>
+          <a:xfrm>
+            <a:off x="7854696" y="4078224"/>
+            <a:ext cx="3614623" cy="621792"/>
+          </a:xfrm>
+          <a:prstGeom prst="rect">
+            <a:avLst/>
+          </a:prstGeom>
+          <a:noFill/>
+        </p:spPr>
+        <p:txBody>
+          <a:bodyPr wrap="square" anchor="t" lIns="0" rIns="0" tIns="0" bIns="0">
+            <a:spAutoFit/>
+          </a:bodyPr>
+          <a:lstStyle/>
+          <a:p>
+            <a:pPr algn="l">
+              <a:lnSpc>
+                <a:spcPct val="130000"/>
+              </a:lnSpc>
+            </a:pPr>
+            <a:r>
+              <a:rPr sz="850" b="0">
+                <a:solidFill>
+                  <a:srgbClr val="5D6E64"/>
+                </a:solidFill>
+                <a:latin typeface="Segoe UI"/>
+              </a:rPr>
+              <a:t>du protoxyde d'azote et 23 % du méthane du pays — deux gaz de combustion incomplète de biomasse</a:t>
+            </a:r>
+          </a:p>
+        </p:txBody>
+      </p:sp>
+      <p:sp>
+        <p:nvSpPr>
+          <p:cNvPr id="17" name="Rounded Rectangle 16"/>
+          <p:cNvSpPr/>
+          <p:nvPr/>
+        </p:nvSpPr>
+        <p:spPr>
+          <a:xfrm>
+            <a:off x="566928" y="4892040"/>
+            <a:ext cx="11057839" cy="1280160"/>
+          </a:xfrm>
+          <a:prstGeom prst="roundRect">
+            <a:avLst>
+              <a:gd name="adj" fmla="val 5000"/>
+            </a:avLst>
+          </a:prstGeom>
+          <a:solidFill>
+            <a:srgbClr val="E7F2EB"/>
+          </a:solidFill>
+          <a:ln>
+            <a:noFill/>
+          </a:ln>
+          <a:effectLst/>
+        </p:spPr>
+        <p:style>
+          <a:lnRef idx="1">
+            <a:schemeClr val="accent1"/>
+          </a:lnRef>
+          <a:fillRef idx="3">
+            <a:schemeClr val="accent1"/>
+          </a:fillRef>
+          <a:effectRef idx="2">
+            <a:schemeClr val="accent1"/>
+          </a:effectRef>
+          <a:fontRef idx="minor">
+            <a:schemeClr val="lt1"/>
+          </a:fontRef>
+        </p:style>
+        <p:txBody>
+          <a:bodyPr rtlCol="0" anchor="ctr" wrap="square"/>
+          <a:lstStyle/>
+          <a:p>
+            <a:pPr algn="ctr"/>
+          </a:p>
+        </p:txBody>
+      </p:sp>
+      <p:sp>
+        <p:nvSpPr>
+          <p:cNvPr id="18" name="TextBox 17"/>
           <p:cNvSpPr txBox="1"/>
           <p:nvPr/>
         </p:nvSpPr>
@@ -14684,18 +13679,18 @@
             <a:r>
               <a:rPr sz="850" b="1" spc="60">
                 <a:solidFill>
-                  <a:srgbClr val="B87407"/>
-                </a:solidFill>
-                <a:latin typeface="Segoe UI"/>
-              </a:rPr>
-              <a:t>DÉCISION</a:t>
-            </a:r>
-          </a:p>
-        </p:txBody>
-      </p:sp>
-      <p:sp>
-        <p:nvSpPr>
-          <p:cNvPr id="12" name="TextBox 11"/>
+                  <a:srgbClr val="0F7A4A"/>
+                </a:solidFill>
+                <a:latin typeface="Segoe UI"/>
+              </a:rPr>
+              <a:t>CONSTAT</a:t>
+            </a:r>
+          </a:p>
+        </p:txBody>
+      </p:sp>
+      <p:sp>
+        <p:nvSpPr>
+          <p:cNvPr id="19" name="TextBox 18"/>
           <p:cNvSpPr txBox="1"/>
           <p:nvPr/>
         </p:nvSpPr>
@@ -14727,7 +13722,7 @@
                 </a:solidFill>
                 <a:latin typeface="Segoe UI"/>
               </a:rPr>
-              <a:t>Conséquence de pilotage : le taux d'énergie renouvelable est un mauvais indicateur de suivi pour la transition togolaise — il baissera mécaniquement quand les ménages passeront au GPL ou à l'électricité, c'est-à-dire quand la situation s'améliorera. Les indicateurs à suivre sont l'accès à la cuisson propre et la part des ménages sortis de la biomasse.</a:t>
+              <a:t>L'inventaire publie des masses brutes, où une tonne de méthane pèse autant qu'une tonne de CO₂. Or le méthane réchauffe 28 fois plus et le protoxyde d'azote 265 fois plus. « L'énergie ne pèse que 6 % » est donc une lecture comptable, pas une lecture climatique — et ce que cette lecture masque, ce sont les foyers de cuisson.</a:t>
             </a:r>
           </a:p>
         </p:txBody>
@@ -14828,7 +13823,7 @@
                 </a:solidFill>
                 <a:latin typeface="Segoe UI"/>
               </a:rPr>
-              <a:t>INVENTAIRE DES ÉMISSIONS</a:t>
+              <a:t>OÙ AGIR</a:t>
             </a:r>
           </a:p>
         </p:txBody>
@@ -14867,7 +13862,7 @@
                 </a:solidFill>
                 <a:latin typeface="Segoe UI"/>
               </a:rPr>
-              <a:t>Le secteur énergie n'est marginal que si l'on ne regarde que le CO₂</a:t>
+              <a:t>9 massifs restent prioritaires quelle que soit la pondération</a:t>
             </a:r>
           </a:p>
         </p:txBody>
@@ -14945,7 +13940,7 @@
                 </a:solidFill>
                 <a:latin typeface="Segoe UI"/>
               </a:rPr>
-              <a:t>9 / 11</a:t>
+              <a:t>9 / 10</a:t>
             </a:r>
           </a:p>
         </p:txBody>
@@ -14984,7 +13979,7 @@
         </p:nvGraphicFramePr>
         <p:xfrm>
           <a:off x="566928" y="1572768"/>
-          <a:ext cx="6858000" cy="3200400"/>
+          <a:ext cx="6949440" cy="3712463"/>
         </p:xfrm>
         <a:graphic>
           <a:graphicData uri="http://schemas.openxmlformats.org/drawingml/2006/chart">
@@ -14994,14 +13989,91 @@
       </p:graphicFrame>
       <p:sp>
         <p:nvSpPr>
-          <p:cNvPr id="9" name="Rounded Rectangle 8"/>
+          <p:cNvPr id="9" name="TextBox 8"/>
+          <p:cNvSpPr txBox="1"/>
+          <p:nvPr/>
+        </p:nvSpPr>
+        <p:spPr>
+          <a:xfrm>
+            <a:off x="7790688" y="1609344"/>
+            <a:ext cx="3834079" cy="2286000"/>
+          </a:xfrm>
+          <a:prstGeom prst="rect">
+            <a:avLst/>
+          </a:prstGeom>
+          <a:noFill/>
+        </p:spPr>
+        <p:txBody>
+          <a:bodyPr wrap="square" anchor="t" lIns="0" rIns="0" tIns="0" bIns="0">
+            <a:spAutoFit/>
+          </a:bodyPr>
+          <a:lstStyle/>
+          <a:p>
+            <a:pPr algn="l">
+              <a:lnSpc>
+                <a:spcPct val="140000"/>
+              </a:lnSpc>
+            </a:pPr>
+            <a:r>
+              <a:rPr sz="1150" b="0">
+                <a:solidFill>
+                  <a:srgbClr val="324239"/>
+                </a:solidFill>
+                <a:latin typeface="Segoe UI"/>
+              </a:rPr>
+              <a:t>Sur les 53 forêts classées du territoire, 9 ne quittent jamais le top 10, quelle que soit la pondération testée entre enclavement, surface et stress thermique.</a:t>
+            </a:r>
+          </a:p>
+          <a:p>
+            <a:pPr algn="l">
+              <a:lnSpc>
+                <a:spcPct val="140000"/>
+              </a:lnSpc>
+              <a:spcBef>
+                <a:spcPts val="600"/>
+              </a:spcBef>
+            </a:pPr>
+            <a:r>
+              <a:rPr sz="1150" b="0">
+                <a:solidFill>
+                  <a:srgbClr val="324239"/>
+                </a:solidFill>
+                <a:latin typeface="Segoe UI"/>
+              </a:rPr>
+              <a:t>Le classement de tête est donc un résultat des données, pas un choix d'analyste : ce sont de grands massifs enclavés, éloignés de tout pôle raccordé, donc soumis à la pression du bois-énergie.</a:t>
+            </a:r>
+          </a:p>
+          <a:p>
+            <a:pPr algn="l">
+              <a:lnSpc>
+                <a:spcPct val="140000"/>
+              </a:lnSpc>
+              <a:spcBef>
+                <a:spcPts val="600"/>
+              </a:spcBef>
+            </a:pPr>
+            <a:r>
+              <a:rPr sz="1150" b="0">
+                <a:solidFill>
+                  <a:srgbClr val="324239"/>
+                </a:solidFill>
+                <a:latin typeface="Segoe UI"/>
+              </a:rPr>
+              <a:t>Éloignement médian d'un pôle urbain : 29 km.</a:t>
+            </a:r>
+          </a:p>
+        </p:txBody>
+      </p:sp>
+      <p:sp>
+        <p:nvSpPr>
+          <p:cNvPr id="10" name="Rounded Rectangle 9"/>
           <p:cNvSpPr/>
           <p:nvPr/>
         </p:nvSpPr>
         <p:spPr>
           <a:xfrm>
-            <a:off x="7699248" y="1572768"/>
-            <a:ext cx="3925519" cy="1554480"/>
+            <a:off x="7790688" y="4114800"/>
+            <a:ext cx="3834079" cy="1170432"/>
           </a:xfrm>
           <a:prstGeom prst="roundRect">
             <a:avLst>
@@ -15009,12 +14081,10 @@
             </a:avLst>
           </a:prstGeom>
           <a:solidFill>
-            <a:srgbClr val="FFFFFF"/>
+            <a:srgbClr val="FBF0DC"/>
           </a:solidFill>
-          <a:ln w="9525">
-            <a:solidFill>
-              <a:srgbClr val="D5DED8"/>
-            </a:solidFill>
+          <a:ln>
+            <a:noFill/>
           </a:ln>
           <a:effectLst/>
         </p:spPr>
@@ -15042,14 +14112,14 @@
       </p:sp>
       <p:sp>
         <p:nvSpPr>
-          <p:cNvPr id="10" name="TextBox 9"/>
-          <p:cNvSpPr txBox="1"/>
-          <p:nvPr/>
-        </p:nvSpPr>
-        <p:spPr>
-          <a:xfrm>
-            <a:off x="7854696" y="1709928"/>
-            <a:ext cx="3614623" cy="182880"/>
+          <p:cNvPr id="11" name="TextBox 10"/>
+          <p:cNvSpPr txBox="1"/>
+          <p:nvPr/>
+        </p:nvSpPr>
+        <p:spPr>
+          <a:xfrm>
+            <a:off x="7973568" y="4251960"/>
+            <a:ext cx="3468319" cy="164592"/>
           </a:xfrm>
           <a:prstGeom prst="rect">
             <a:avLst/>
@@ -15068,398 +14138,52 @@
               </a:lnSpc>
             </a:pPr>
             <a:r>
-              <a:rPr sz="800" b="1" spc="50">
+              <a:rPr sz="850" b="1" spc="60">
+                <a:solidFill>
+                  <a:srgbClr val="B87407"/>
+                </a:solidFill>
+                <a:latin typeface="Segoe UI"/>
+              </a:rPr>
+              <a:t>DÉCISION</a:t>
+            </a:r>
+          </a:p>
+        </p:txBody>
+      </p:sp>
+      <p:sp>
+        <p:nvSpPr>
+          <p:cNvPr id="12" name="TextBox 11"/>
+          <p:cNvSpPr txBox="1"/>
+          <p:nvPr/>
+        </p:nvSpPr>
+        <p:spPr>
+          <a:xfrm>
+            <a:off x="7973568" y="4480560"/>
+            <a:ext cx="3468319" cy="713232"/>
+          </a:xfrm>
+          <a:prstGeom prst="rect">
+            <a:avLst/>
+          </a:prstGeom>
+          <a:noFill/>
+        </p:spPr>
+        <p:txBody>
+          <a:bodyPr wrap="square" anchor="t" lIns="0" rIns="0" tIns="0" bIns="0">
+            <a:spAutoFit/>
+          </a:bodyPr>
+          <a:lstStyle/>
+          <a:p>
+            <a:pPr algn="l">
+              <a:lnSpc>
+                <a:spcPct val="135000"/>
+              </a:lnSpc>
+            </a:pPr>
+            <a:r>
+              <a:rPr sz="1100" b="0">
                 <a:solidFill>
                   <a:srgbClr val="0C1A14"/>
                 </a:solidFill>
                 <a:latin typeface="Segoe UI"/>
               </a:rPr>
-              <a:t>LE SECTEUR ÉNERGIE, SELON L'UNITÉ DE LECTURE</a:t>
-            </a:r>
-          </a:p>
-        </p:txBody>
-      </p:sp>
-      <p:sp>
-        <p:nvSpPr>
-          <p:cNvPr id="11" name="TextBox 10"/>
-          <p:cNvSpPr txBox="1"/>
-          <p:nvPr/>
-        </p:nvSpPr>
-        <p:spPr>
-          <a:xfrm>
-            <a:off x="7854696" y="1938528"/>
-            <a:ext cx="3614623" cy="411480"/>
-          </a:xfrm>
-          <a:prstGeom prst="rect">
-            <a:avLst/>
-          </a:prstGeom>
-          <a:noFill/>
-        </p:spPr>
-        <p:txBody>
-          <a:bodyPr wrap="square" anchor="t" lIns="0" rIns="0" tIns="0" bIns="0">
-            <a:spAutoFit/>
-          </a:bodyPr>
-          <a:lstStyle/>
-          <a:p>
-            <a:pPr algn="l">
-              <a:lnSpc>
-                <a:spcPct val="100000"/>
-              </a:lnSpc>
-            </a:pPr>
-            <a:r>
-              <a:rPr sz="2600" b="1">
-                <a:solidFill>
-                  <a:srgbClr val="B32418"/>
-                </a:solidFill>
-                <a:latin typeface="Segoe UI"/>
-              </a:rPr>
-              <a:t>6 → 27</a:t>
-            </a:r>
-            <a:r>
-              <a:rPr sz="2600" b="1">
-                <a:solidFill>
-                  <a:srgbClr val="B32418"/>
-                </a:solidFill>
-                <a:latin typeface="Segoe UI"/>
-              </a:rPr>
-              <a:t> %</a:t>
-            </a:r>
-          </a:p>
-        </p:txBody>
-      </p:sp>
-      <p:sp>
-        <p:nvSpPr>
-          <p:cNvPr id="12" name="TextBox 11"/>
-          <p:cNvSpPr txBox="1"/>
-          <p:nvPr/>
-        </p:nvSpPr>
-        <p:spPr>
-          <a:xfrm>
-            <a:off x="7854696" y="2414016"/>
-            <a:ext cx="3614623" cy="621792"/>
-          </a:xfrm>
-          <a:prstGeom prst="rect">
-            <a:avLst/>
-          </a:prstGeom>
-          <a:noFill/>
-        </p:spPr>
-        <p:txBody>
-          <a:bodyPr wrap="square" anchor="t" lIns="0" rIns="0" tIns="0" bIns="0">
-            <a:spAutoFit/>
-          </a:bodyPr>
-          <a:lstStyle/>
-          <a:p>
-            <a:pPr algn="l">
-              <a:lnSpc>
-                <a:spcPct val="130000"/>
-              </a:lnSpc>
-            </a:pPr>
-            <a:r>
-              <a:rPr sz="850" b="0">
-                <a:solidFill>
-                  <a:srgbClr val="5D6E64"/>
-                </a:solidFill>
-                <a:latin typeface="Segoe UI"/>
-              </a:rPr>
-              <a:t>des émissions nationales : la même année, le même inventaire, deux classements différents</a:t>
-            </a:r>
-          </a:p>
-        </p:txBody>
-      </p:sp>
-      <p:sp>
-        <p:nvSpPr>
-          <p:cNvPr id="13" name="Rounded Rectangle 12"/>
-          <p:cNvSpPr/>
-          <p:nvPr/>
-        </p:nvSpPr>
-        <p:spPr>
-          <a:xfrm>
-            <a:off x="7699248" y="3236976"/>
-            <a:ext cx="3925519" cy="1554480"/>
-          </a:xfrm>
-          <a:prstGeom prst="roundRect">
-            <a:avLst>
-              <a:gd name="adj" fmla="val 5000"/>
-            </a:avLst>
-          </a:prstGeom>
-          <a:solidFill>
-            <a:srgbClr val="FFFFFF"/>
-          </a:solidFill>
-          <a:ln w="9525">
-            <a:solidFill>
-              <a:srgbClr val="D5DED8"/>
-            </a:solidFill>
-          </a:ln>
-          <a:effectLst/>
-        </p:spPr>
-        <p:style>
-          <a:lnRef idx="1">
-            <a:schemeClr val="accent1"/>
-          </a:lnRef>
-          <a:fillRef idx="3">
-            <a:schemeClr val="accent1"/>
-          </a:fillRef>
-          <a:effectRef idx="2">
-            <a:schemeClr val="accent1"/>
-          </a:effectRef>
-          <a:fontRef idx="minor">
-            <a:schemeClr val="lt1"/>
-          </a:fontRef>
-        </p:style>
-        <p:txBody>
-          <a:bodyPr rtlCol="0" anchor="ctr" wrap="square"/>
-          <a:lstStyle/>
-          <a:p>
-            <a:pPr algn="ctr"/>
-          </a:p>
-        </p:txBody>
-      </p:sp>
-      <p:sp>
-        <p:nvSpPr>
-          <p:cNvPr id="14" name="TextBox 13"/>
-          <p:cNvSpPr txBox="1"/>
-          <p:nvPr/>
-        </p:nvSpPr>
-        <p:spPr>
-          <a:xfrm>
-            <a:off x="7854696" y="3374136"/>
-            <a:ext cx="3614623" cy="182880"/>
-          </a:xfrm>
-          <a:prstGeom prst="rect">
-            <a:avLst/>
-          </a:prstGeom>
-          <a:noFill/>
-        </p:spPr>
-        <p:txBody>
-          <a:bodyPr wrap="square" anchor="t" lIns="0" rIns="0" tIns="0" bIns="0">
-            <a:spAutoFit/>
-          </a:bodyPr>
-          <a:lstStyle/>
-          <a:p>
-            <a:pPr algn="l">
-              <a:lnSpc>
-                <a:spcPct val="125000"/>
-              </a:lnSpc>
-            </a:pPr>
-            <a:r>
-              <a:rPr sz="800" b="1" spc="50">
-                <a:solidFill>
-                  <a:srgbClr val="0C1A14"/>
-                </a:solidFill>
-                <a:latin typeface="Segoe UI"/>
-              </a:rPr>
-              <a:t>PART DE L'ÉNERGIE DANS LES GAZ LES PLUS RÉCHAUFFANTS</a:t>
-            </a:r>
-          </a:p>
-        </p:txBody>
-      </p:sp>
-      <p:sp>
-        <p:nvSpPr>
-          <p:cNvPr id="15" name="TextBox 14"/>
-          <p:cNvSpPr txBox="1"/>
-          <p:nvPr/>
-        </p:nvSpPr>
-        <p:spPr>
-          <a:xfrm>
-            <a:off x="7854696" y="3602736"/>
-            <a:ext cx="3614623" cy="411480"/>
-          </a:xfrm>
-          <a:prstGeom prst="rect">
-            <a:avLst/>
-          </a:prstGeom>
-          <a:noFill/>
-        </p:spPr>
-        <p:txBody>
-          <a:bodyPr wrap="square" anchor="t" lIns="0" rIns="0" tIns="0" bIns="0">
-            <a:spAutoFit/>
-          </a:bodyPr>
-          <a:lstStyle/>
-          <a:p>
-            <a:pPr algn="l">
-              <a:lnSpc>
-                <a:spcPct val="100000"/>
-              </a:lnSpc>
-            </a:pPr>
-            <a:r>
-              <a:rPr sz="2600" b="1">
-                <a:solidFill>
-                  <a:srgbClr val="B32418"/>
-                </a:solidFill>
-                <a:latin typeface="Segoe UI"/>
-              </a:rPr>
-              <a:t>57</a:t>
-            </a:r>
-            <a:r>
-              <a:rPr sz="2600" b="1">
-                <a:solidFill>
-                  <a:srgbClr val="B32418"/>
-                </a:solidFill>
-                <a:latin typeface="Segoe UI"/>
-              </a:rPr>
-              <a:t> %</a:t>
-            </a:r>
-          </a:p>
-        </p:txBody>
-      </p:sp>
-      <p:sp>
-        <p:nvSpPr>
-          <p:cNvPr id="16" name="TextBox 15"/>
-          <p:cNvSpPr txBox="1"/>
-          <p:nvPr/>
-        </p:nvSpPr>
-        <p:spPr>
-          <a:xfrm>
-            <a:off x="7854696" y="4078224"/>
-            <a:ext cx="3614623" cy="621792"/>
-          </a:xfrm>
-          <a:prstGeom prst="rect">
-            <a:avLst/>
-          </a:prstGeom>
-          <a:noFill/>
-        </p:spPr>
-        <p:txBody>
-          <a:bodyPr wrap="square" anchor="t" lIns="0" rIns="0" tIns="0" bIns="0">
-            <a:spAutoFit/>
-          </a:bodyPr>
-          <a:lstStyle/>
-          <a:p>
-            <a:pPr algn="l">
-              <a:lnSpc>
-                <a:spcPct val="130000"/>
-              </a:lnSpc>
-            </a:pPr>
-            <a:r>
-              <a:rPr sz="850" b="0">
-                <a:solidFill>
-                  <a:srgbClr val="5D6E64"/>
-                </a:solidFill>
-                <a:latin typeface="Segoe UI"/>
-              </a:rPr>
-              <a:t>du protoxyde d'azote et 23 % du méthane du pays — deux gaz de combustion incomplète de biomasse</a:t>
-            </a:r>
-          </a:p>
-        </p:txBody>
-      </p:sp>
-      <p:sp>
-        <p:nvSpPr>
-          <p:cNvPr id="17" name="Rounded Rectangle 16"/>
-          <p:cNvSpPr/>
-          <p:nvPr/>
-        </p:nvSpPr>
-        <p:spPr>
-          <a:xfrm>
-            <a:off x="566928" y="4892040"/>
-            <a:ext cx="11057839" cy="1280160"/>
-          </a:xfrm>
-          <a:prstGeom prst="roundRect">
-            <a:avLst>
-              <a:gd name="adj" fmla="val 5000"/>
-            </a:avLst>
-          </a:prstGeom>
-          <a:solidFill>
-            <a:srgbClr val="E7F2EB"/>
-          </a:solidFill>
-          <a:ln>
-            <a:noFill/>
-          </a:ln>
-          <a:effectLst/>
-        </p:spPr>
-        <p:style>
-          <a:lnRef idx="1">
-            <a:schemeClr val="accent1"/>
-          </a:lnRef>
-          <a:fillRef idx="3">
-            <a:schemeClr val="accent1"/>
-          </a:fillRef>
-          <a:effectRef idx="2">
-            <a:schemeClr val="accent1"/>
-          </a:effectRef>
-          <a:fontRef idx="minor">
-            <a:schemeClr val="lt1"/>
-          </a:fontRef>
-        </p:style>
-        <p:txBody>
-          <a:bodyPr rtlCol="0" anchor="ctr" wrap="square"/>
-          <a:lstStyle/>
-          <a:p>
-            <a:pPr algn="ctr"/>
-          </a:p>
-        </p:txBody>
-      </p:sp>
-      <p:sp>
-        <p:nvSpPr>
-          <p:cNvPr id="18" name="TextBox 17"/>
-          <p:cNvSpPr txBox="1"/>
-          <p:nvPr/>
-        </p:nvSpPr>
-        <p:spPr>
-          <a:xfrm>
-            <a:off x="749808" y="5029200"/>
-            <a:ext cx="10692079" cy="164592"/>
-          </a:xfrm>
-          <a:prstGeom prst="rect">
-            <a:avLst/>
-          </a:prstGeom>
-          <a:noFill/>
-        </p:spPr>
-        <p:txBody>
-          <a:bodyPr wrap="square" anchor="t" lIns="0" rIns="0" tIns="0" bIns="0">
-            <a:spAutoFit/>
-          </a:bodyPr>
-          <a:lstStyle/>
-          <a:p>
-            <a:pPr algn="l">
-              <a:lnSpc>
-                <a:spcPct val="125000"/>
-              </a:lnSpc>
-            </a:pPr>
-            <a:r>
-              <a:rPr sz="850" b="1" spc="60">
-                <a:solidFill>
-                  <a:srgbClr val="0F7A4A"/>
-                </a:solidFill>
-                <a:latin typeface="Segoe UI"/>
-              </a:rPr>
-              <a:t>CONSTAT</a:t>
-            </a:r>
-          </a:p>
-        </p:txBody>
-      </p:sp>
-      <p:sp>
-        <p:nvSpPr>
-          <p:cNvPr id="19" name="TextBox 18"/>
-          <p:cNvSpPr txBox="1"/>
-          <p:nvPr/>
-        </p:nvSpPr>
-        <p:spPr>
-          <a:xfrm>
-            <a:off x="749808" y="5257800"/>
-            <a:ext cx="10692079" cy="822960"/>
-          </a:xfrm>
-          <a:prstGeom prst="rect">
-            <a:avLst/>
-          </a:prstGeom>
-          <a:noFill/>
-        </p:spPr>
-        <p:txBody>
-          <a:bodyPr wrap="square" anchor="t" lIns="0" rIns="0" tIns="0" bIns="0">
-            <a:spAutoFit/>
-          </a:bodyPr>
-          <a:lstStyle/>
-          <a:p>
-            <a:pPr algn="l">
-              <a:lnSpc>
-                <a:spcPct val="135000"/>
-              </a:lnSpc>
-            </a:pPr>
-            <a:r>
-              <a:rPr sz="1100" b="0">
-                <a:solidFill>
-                  <a:srgbClr val="0C1A14"/>
-                </a:solidFill>
-                <a:latin typeface="Segoe UI"/>
-              </a:rPr>
-              <a:t>L'inventaire publie des masses brutes, où une tonne de méthane pèse autant qu'une tonne de CO₂. Or le méthane réchauffe 28 fois plus et le protoxyde d'azote 265 fois plus. « L'énergie ne pèse que 6 % » est donc une lecture comptable, pas une lecture climatique — et ce que cette lecture masque, ce sont les foyers de cuisson.</a:t>
+              <a:t>Ces massifs reçoivent le premier budget de protection. Les forêts dont l'intervalle de rang est large méritent une instruction complémentaire avant tout engagement.</a:t>
             </a:r>
           </a:p>
         </p:txBody>

--- a/report/Defi2_Togo_Energie_Climat_Forets.pptx
+++ b/report/Defi2_Togo_Energie_Climat_Forets.pptx
@@ -5907,7 +5907,7 @@
                 </a:solidFill>
                 <a:latin typeface="Segoe UI"/>
               </a:rPr>
-              <a:t>−5 011 ha</a:t>
+              <a:t>−2 960 ha</a:t>
             </a:r>
           </a:p>
         </p:txBody>
@@ -6125,7 +6125,7 @@
                 </a:solidFill>
                 <a:latin typeface="Segoe UI"/>
               </a:rPr>
-              <a:t>Quatre leviers, dans cet ordre</a:t>
+              <a:t>Trois leviers, dans cet ordre</a:t>
             </a:r>
           </a:p>
         </p:txBody>
@@ -6241,7 +6241,7 @@
         <p:spPr>
           <a:xfrm>
             <a:off x="566928" y="1572768"/>
-            <a:ext cx="11057839" cy="1097280"/>
+            <a:ext cx="11057839" cy="1371600"/>
           </a:xfrm>
           <a:prstGeom prst="roundRect">
             <a:avLst>
@@ -6288,8 +6288,8 @@
         </p:nvSpPr>
         <p:spPr>
           <a:xfrm>
-            <a:off x="749808" y="1810512"/>
-            <a:ext cx="411480" cy="384048"/>
+            <a:off x="768096" y="1847088"/>
+            <a:ext cx="457200" cy="457200"/>
           </a:xfrm>
           <a:prstGeom prst="rect">
             <a:avLst/>
@@ -6308,7 +6308,7 @@
               </a:lnSpc>
             </a:pPr>
             <a:r>
-              <a:rPr sz="2400" b="1">
+              <a:rPr sz="3000" b="1">
                 <a:solidFill>
                   <a:srgbClr val="B32418"/>
                 </a:solidFill>
@@ -6327,8 +6327,8 @@
         </p:nvSpPr>
         <p:spPr>
           <a:xfrm>
-            <a:off x="1170432" y="1719072"/>
-            <a:ext cx="3017520" cy="256032"/>
+            <a:off x="1252728" y="1755648"/>
+            <a:ext cx="3017520" cy="274320"/>
           </a:xfrm>
           <a:prstGeom prst="rect">
             <a:avLst/>
@@ -6347,7 +6347,7 @@
               </a:lnSpc>
             </a:pPr>
             <a:r>
-              <a:rPr sz="1250" b="1">
+              <a:rPr sz="1400" b="1">
                 <a:solidFill>
                   <a:srgbClr val="0C1A14"/>
                 </a:solidFill>
@@ -6366,8 +6366,8 @@
         </p:nvSpPr>
         <p:spPr>
           <a:xfrm>
-            <a:off x="1170432" y="2011680"/>
-            <a:ext cx="3108960" cy="585216"/>
+            <a:off x="1252728" y="2075688"/>
+            <a:ext cx="3108960" cy="731520"/>
           </a:xfrm>
           <a:prstGeom prst="rect">
             <a:avLst/>
@@ -6382,31 +6382,70 @@
           <a:p>
             <a:pPr algn="l">
               <a:lnSpc>
+                <a:spcPct val="130000"/>
+              </a:lnSpc>
+            </a:pPr>
+            <a:r>
+              <a:rPr sz="950" b="0">
+                <a:solidFill>
+                  <a:srgbClr val="5D6E64"/>
+                </a:solidFill>
+                <a:latin typeface="Segoe UI"/>
+              </a:rPr>
+              <a:t>GPL subventionné en zone périurbaine, foyers améliorés certifiés en zone rurale enclavée.</a:t>
+            </a:r>
+          </a:p>
+        </p:txBody>
+      </p:sp>
+      <p:sp>
+        <p:nvSpPr>
+          <p:cNvPr id="12" name="TextBox 11"/>
+          <p:cNvSpPr txBox="1"/>
+          <p:nvPr/>
+        </p:nvSpPr>
+        <p:spPr>
+          <a:xfrm>
+            <a:off x="4590288" y="1773936"/>
+            <a:ext cx="2194560" cy="164592"/>
+          </a:xfrm>
+          <a:prstGeom prst="rect">
+            <a:avLst/>
+          </a:prstGeom>
+          <a:noFill/>
+        </p:spPr>
+        <p:txBody>
+          <a:bodyPr wrap="square" anchor="t" lIns="0" rIns="0" tIns="0" bIns="0">
+            <a:spAutoFit/>
+          </a:bodyPr>
+          <a:lstStyle/>
+          <a:p>
+            <a:pPr algn="l">
+              <a:lnSpc>
                 <a:spcPct val="125000"/>
               </a:lnSpc>
             </a:pPr>
             <a:r>
-              <a:rPr sz="850" b="0">
+              <a:rPr sz="800" b="1" spc="50">
                 <a:solidFill>
                   <a:srgbClr val="5D6E64"/>
                 </a:solidFill>
                 <a:latin typeface="Segoe UI"/>
               </a:rPr>
-              <a:t>GPL subventionné en zone périurbaine, foyers améliorés certifiés en zone rurale enclavée.</a:t>
-            </a:r>
-          </a:p>
-        </p:txBody>
-      </p:sp>
-      <p:sp>
-        <p:nvSpPr>
-          <p:cNvPr id="12" name="TextBox 11"/>
-          <p:cNvSpPr txBox="1"/>
-          <p:nvPr/>
-        </p:nvSpPr>
-        <p:spPr>
-          <a:xfrm>
-            <a:off x="4590288" y="1728216"/>
-            <a:ext cx="2194560" cy="146304"/>
+              <a:t>PORTÉE DIRECTE</a:t>
+            </a:r>
+          </a:p>
+        </p:txBody>
+      </p:sp>
+      <p:sp>
+        <p:nvSpPr>
+          <p:cNvPr id="13" name="TextBox 12"/>
+          <p:cNvSpPr txBox="1"/>
+          <p:nvPr/>
+        </p:nvSpPr>
+        <p:spPr>
+          <a:xfrm>
+            <a:off x="4590288" y="1993392"/>
+            <a:ext cx="2212848" cy="822960"/>
           </a:xfrm>
           <a:prstGeom prst="rect">
             <a:avLst/>
@@ -6421,31 +6460,70 @@
           <a:p>
             <a:pPr algn="l">
               <a:lnSpc>
+                <a:spcPct val="130000"/>
+              </a:lnSpc>
+            </a:pPr>
+            <a:r>
+              <a:rPr sz="950" b="0">
+                <a:solidFill>
+                  <a:srgbClr val="0C1A14"/>
+                </a:solidFill>
+                <a:latin typeface="Segoe UI"/>
+              </a:rPr>
+              <a:t>8,1 M de personnes</a:t>
+            </a:r>
+          </a:p>
+        </p:txBody>
+      </p:sp>
+      <p:sp>
+        <p:nvSpPr>
+          <p:cNvPr id="14" name="TextBox 13"/>
+          <p:cNvSpPr txBox="1"/>
+          <p:nvPr/>
+        </p:nvSpPr>
+        <p:spPr>
+          <a:xfrm>
+            <a:off x="6967728" y="1773936"/>
+            <a:ext cx="2194560" cy="164592"/>
+          </a:xfrm>
+          <a:prstGeom prst="rect">
+            <a:avLst/>
+          </a:prstGeom>
+          <a:noFill/>
+        </p:spPr>
+        <p:txBody>
+          <a:bodyPr wrap="square" anchor="t" lIns="0" rIns="0" tIns="0" bIns="0">
+            <a:spAutoFit/>
+          </a:bodyPr>
+          <a:lstStyle/>
+          <a:p>
+            <a:pPr algn="l">
+              <a:lnSpc>
                 <a:spcPct val="125000"/>
               </a:lnSpc>
             </a:pPr>
             <a:r>
-              <a:rPr sz="750" b="1" spc="50">
+              <a:rPr sz="800" b="1" spc="50">
                 <a:solidFill>
                   <a:srgbClr val="5D6E64"/>
                 </a:solidFill>
                 <a:latin typeface="Segoe UI"/>
               </a:rPr>
-              <a:t>PORTÉE DIRECTE</a:t>
-            </a:r>
-          </a:p>
-        </p:txBody>
-      </p:sp>
-      <p:sp>
-        <p:nvSpPr>
-          <p:cNvPr id="13" name="TextBox 12"/>
-          <p:cNvSpPr txBox="1"/>
-          <p:nvPr/>
-        </p:nvSpPr>
-        <p:spPr>
-          <a:xfrm>
-            <a:off x="4590288" y="1920240"/>
-            <a:ext cx="2212848" cy="694944"/>
+              <a:t>CIBLE 2030</a:t>
+            </a:r>
+          </a:p>
+        </p:txBody>
+      </p:sp>
+      <p:sp>
+        <p:nvSpPr>
+          <p:cNvPr id="15" name="TextBox 14"/>
+          <p:cNvSpPr txBox="1"/>
+          <p:nvPr/>
+        </p:nvSpPr>
+        <p:spPr>
+          <a:xfrm>
+            <a:off x="6967728" y="1993392"/>
+            <a:ext cx="2212848" cy="822960"/>
           </a:xfrm>
           <a:prstGeom prst="rect">
             <a:avLst/>
@@ -6460,31 +6538,70 @@
           <a:p>
             <a:pPr algn="l">
               <a:lnSpc>
+                <a:spcPct val="130000"/>
+              </a:lnSpc>
+            </a:pPr>
+            <a:r>
+              <a:rPr sz="950" b="0">
+                <a:solidFill>
+                  <a:srgbClr val="0C1A14"/>
+                </a:solidFill>
+                <a:latin typeface="Segoe UI"/>
+              </a:rPr>
+              <a:t>De 0,9 % à 15 % d'accès rural à une cuisson propre en 2030</a:t>
+            </a:r>
+          </a:p>
+        </p:txBody>
+      </p:sp>
+      <p:sp>
+        <p:nvSpPr>
+          <p:cNvPr id="16" name="TextBox 15"/>
+          <p:cNvSpPr txBox="1"/>
+          <p:nvPr/>
+        </p:nvSpPr>
+        <p:spPr>
+          <a:xfrm>
+            <a:off x="9345168" y="1773936"/>
+            <a:ext cx="2194560" cy="164592"/>
+          </a:xfrm>
+          <a:prstGeom prst="rect">
+            <a:avLst/>
+          </a:prstGeom>
+          <a:noFill/>
+        </p:spPr>
+        <p:txBody>
+          <a:bodyPr wrap="square" anchor="t" lIns="0" rIns="0" tIns="0" bIns="0">
+            <a:spAutoFit/>
+          </a:bodyPr>
+          <a:lstStyle/>
+          <a:p>
+            <a:pPr algn="l">
+              <a:lnSpc>
                 <a:spcPct val="125000"/>
               </a:lnSpc>
             </a:pPr>
             <a:r>
-              <a:rPr sz="850" b="0">
-                <a:solidFill>
-                  <a:srgbClr val="0C1A14"/>
-                </a:solidFill>
-                <a:latin typeface="Segoe UI"/>
-              </a:rPr>
-              <a:t>8,1 M de personnes</a:t>
-            </a:r>
-          </a:p>
-        </p:txBody>
-      </p:sp>
-      <p:sp>
-        <p:nvSpPr>
-          <p:cNvPr id="14" name="TextBox 13"/>
-          <p:cNvSpPr txBox="1"/>
-          <p:nvPr/>
-        </p:nvSpPr>
-        <p:spPr>
-          <a:xfrm>
-            <a:off x="6967728" y="1728216"/>
-            <a:ext cx="2194560" cy="146304"/>
+              <a:rPr sz="800" b="1" spc="50">
+                <a:solidFill>
+                  <a:srgbClr val="5D6E64"/>
+                </a:solidFill>
+                <a:latin typeface="Segoe UI"/>
+              </a:rPr>
+              <a:t>INDICATEUR DE SUIVI</a:t>
+            </a:r>
+          </a:p>
+        </p:txBody>
+      </p:sp>
+      <p:sp>
+        <p:nvSpPr>
+          <p:cNvPr id="17" name="TextBox 16"/>
+          <p:cNvSpPr txBox="1"/>
+          <p:nvPr/>
+        </p:nvSpPr>
+        <p:spPr>
+          <a:xfrm>
+            <a:off x="9345168" y="1993392"/>
+            <a:ext cx="2212848" cy="822960"/>
           </a:xfrm>
           <a:prstGeom prst="rect">
             <a:avLst/>
@@ -6499,128 +6616,11 @@
           <a:p>
             <a:pPr algn="l">
               <a:lnSpc>
-                <a:spcPct val="125000"/>
-              </a:lnSpc>
-            </a:pPr>
-            <a:r>
-              <a:rPr sz="750" b="1" spc="50">
-                <a:solidFill>
-                  <a:srgbClr val="5D6E64"/>
-                </a:solidFill>
-                <a:latin typeface="Segoe UI"/>
-              </a:rPr>
-              <a:t>CIBLE 2030</a:t>
-            </a:r>
-          </a:p>
-        </p:txBody>
-      </p:sp>
-      <p:sp>
-        <p:nvSpPr>
-          <p:cNvPr id="15" name="TextBox 14"/>
-          <p:cNvSpPr txBox="1"/>
-          <p:nvPr/>
-        </p:nvSpPr>
-        <p:spPr>
-          <a:xfrm>
-            <a:off x="6967728" y="1920240"/>
-            <a:ext cx="2212848" cy="694944"/>
-          </a:xfrm>
-          <a:prstGeom prst="rect">
-            <a:avLst/>
-          </a:prstGeom>
-          <a:noFill/>
-        </p:spPr>
-        <p:txBody>
-          <a:bodyPr wrap="square" anchor="t" lIns="0" rIns="0" tIns="0" bIns="0">
-            <a:spAutoFit/>
-          </a:bodyPr>
-          <a:lstStyle/>
-          <a:p>
-            <a:pPr algn="l">
-              <a:lnSpc>
-                <a:spcPct val="125000"/>
-              </a:lnSpc>
-            </a:pPr>
-            <a:r>
-              <a:rPr sz="850" b="0">
-                <a:solidFill>
-                  <a:srgbClr val="0C1A14"/>
-                </a:solidFill>
-                <a:latin typeface="Segoe UI"/>
-              </a:rPr>
-              <a:t>De 0,9 % à 15 % d'accès rural à une cuisson propre en 2030</a:t>
-            </a:r>
-          </a:p>
-        </p:txBody>
-      </p:sp>
-      <p:sp>
-        <p:nvSpPr>
-          <p:cNvPr id="16" name="TextBox 15"/>
-          <p:cNvSpPr txBox="1"/>
-          <p:nvPr/>
-        </p:nvSpPr>
-        <p:spPr>
-          <a:xfrm>
-            <a:off x="9345168" y="1728216"/>
-            <a:ext cx="2194560" cy="146304"/>
-          </a:xfrm>
-          <a:prstGeom prst="rect">
-            <a:avLst/>
-          </a:prstGeom>
-          <a:noFill/>
-        </p:spPr>
-        <p:txBody>
-          <a:bodyPr wrap="square" anchor="t" lIns="0" rIns="0" tIns="0" bIns="0">
-            <a:spAutoFit/>
-          </a:bodyPr>
-          <a:lstStyle/>
-          <a:p>
-            <a:pPr algn="l">
-              <a:lnSpc>
-                <a:spcPct val="125000"/>
-              </a:lnSpc>
-            </a:pPr>
-            <a:r>
-              <a:rPr sz="750" b="1" spc="50">
-                <a:solidFill>
-                  <a:srgbClr val="5D6E64"/>
-                </a:solidFill>
-                <a:latin typeface="Segoe UI"/>
-              </a:rPr>
-              <a:t>INDICATEUR DE SUIVI</a:t>
-            </a:r>
-          </a:p>
-        </p:txBody>
-      </p:sp>
-      <p:sp>
-        <p:nvSpPr>
-          <p:cNvPr id="17" name="TextBox 16"/>
-          <p:cNvSpPr txBox="1"/>
-          <p:nvPr/>
-        </p:nvSpPr>
-        <p:spPr>
-          <a:xfrm>
-            <a:off x="9345168" y="1920240"/>
-            <a:ext cx="2212848" cy="694944"/>
-          </a:xfrm>
-          <a:prstGeom prst="rect">
-            <a:avLst/>
-          </a:prstGeom>
-          <a:noFill/>
-        </p:spPr>
-        <p:txBody>
-          <a:bodyPr wrap="square" anchor="t" lIns="0" rIns="0" tIns="0" bIns="0">
-            <a:spAutoFit/>
-          </a:bodyPr>
-          <a:lstStyle/>
-          <a:p>
-            <a:pPr algn="l">
-              <a:lnSpc>
-                <a:spcPct val="125000"/>
-              </a:lnSpc>
-            </a:pPr>
-            <a:r>
-              <a:rPr sz="850" b="0">
+                <a:spcPct val="130000"/>
+              </a:lnSpc>
+            </a:pPr>
+            <a:r>
+              <a:rPr sz="950" b="0">
                 <a:solidFill>
                   <a:srgbClr val="0C1A14"/>
                 </a:solidFill>
@@ -6639,8 +6639,8 @@
         </p:nvSpPr>
         <p:spPr>
           <a:xfrm>
-            <a:off x="566928" y="2761488"/>
-            <a:ext cx="11057839" cy="1097280"/>
+            <a:off x="566928" y="3054096"/>
+            <a:ext cx="11057839" cy="1371600"/>
           </a:xfrm>
           <a:prstGeom prst="roundRect">
             <a:avLst>
@@ -6687,8 +6687,8 @@
         </p:nvSpPr>
         <p:spPr>
           <a:xfrm>
-            <a:off x="749808" y="2999232"/>
-            <a:ext cx="411480" cy="384048"/>
+            <a:off x="768096" y="3328416"/>
+            <a:ext cx="457200" cy="457200"/>
           </a:xfrm>
           <a:prstGeom prst="rect">
             <a:avLst/>
@@ -6707,7 +6707,7 @@
               </a:lnSpc>
             </a:pPr>
             <a:r>
-              <a:rPr sz="2400" b="1">
+              <a:rPr sz="3000" b="1">
                 <a:solidFill>
                   <a:srgbClr val="B87407"/>
                 </a:solidFill>
@@ -6726,8 +6726,8 @@
         </p:nvSpPr>
         <p:spPr>
           <a:xfrm>
-            <a:off x="1170432" y="2907792"/>
-            <a:ext cx="3017520" cy="256032"/>
+            <a:off x="1252728" y="3236976"/>
+            <a:ext cx="3017520" cy="274320"/>
           </a:xfrm>
           <a:prstGeom prst="rect">
             <a:avLst/>
@@ -6746,7 +6746,7 @@
               </a:lnSpc>
             </a:pPr>
             <a:r>
-              <a:rPr sz="1250" b="1">
+              <a:rPr sz="1400" b="1">
                 <a:solidFill>
                   <a:srgbClr val="0C1A14"/>
                 </a:solidFill>
@@ -6765,8 +6765,8 @@
         </p:nvSpPr>
         <p:spPr>
           <a:xfrm>
-            <a:off x="1170432" y="3200400"/>
-            <a:ext cx="3108960" cy="585216"/>
+            <a:off x="1252728" y="3557016"/>
+            <a:ext cx="3108960" cy="731520"/>
           </a:xfrm>
           <a:prstGeom prst="rect">
             <a:avLst/>
@@ -6781,31 +6781,70 @@
           <a:p>
             <a:pPr algn="l">
               <a:lnSpc>
+                <a:spcPct val="130000"/>
+              </a:lnSpc>
+            </a:pPr>
+            <a:r>
+              <a:rPr sz="950" b="0">
+                <a:solidFill>
+                  <a:srgbClr val="5D6E64"/>
+                </a:solidFill>
+                <a:latin typeface="Segoe UI"/>
+              </a:rPr>
+              <a:t>Mini-réseaux avec stockage pour les gros bourgs, kits domestiques pour l'habitat dispersé, dimensionnés sur les usages productifs.</a:t>
+            </a:r>
+          </a:p>
+        </p:txBody>
+      </p:sp>
+      <p:sp>
+        <p:nvSpPr>
+          <p:cNvPr id="22" name="TextBox 21"/>
+          <p:cNvSpPr txBox="1"/>
+          <p:nvPr/>
+        </p:nvSpPr>
+        <p:spPr>
+          <a:xfrm>
+            <a:off x="4590288" y="3255264"/>
+            <a:ext cx="2194560" cy="164592"/>
+          </a:xfrm>
+          <a:prstGeom prst="rect">
+            <a:avLst/>
+          </a:prstGeom>
+          <a:noFill/>
+        </p:spPr>
+        <p:txBody>
+          <a:bodyPr wrap="square" anchor="t" lIns="0" rIns="0" tIns="0" bIns="0">
+            <a:spAutoFit/>
+          </a:bodyPr>
+          <a:lstStyle/>
+          <a:p>
+            <a:pPr algn="l">
+              <a:lnSpc>
                 <a:spcPct val="125000"/>
               </a:lnSpc>
             </a:pPr>
             <a:r>
-              <a:rPr sz="850" b="0">
+              <a:rPr sz="800" b="1" spc="50">
                 <a:solidFill>
                   <a:srgbClr val="5D6E64"/>
                 </a:solidFill>
                 <a:latin typeface="Segoe UI"/>
               </a:rPr>
-              <a:t>Mini-réseaux avec stockage pour les gros bourgs, kits domestiques pour l'habitat dispersé, dimensionnés sur les usages productifs.</a:t>
-            </a:r>
-          </a:p>
-        </p:txBody>
-      </p:sp>
-      <p:sp>
-        <p:nvSpPr>
-          <p:cNvPr id="22" name="TextBox 21"/>
-          <p:cNvSpPr txBox="1"/>
-          <p:nvPr/>
-        </p:nvSpPr>
-        <p:spPr>
-          <a:xfrm>
-            <a:off x="4590288" y="2916936"/>
-            <a:ext cx="2194560" cy="146304"/>
+              <a:t>PORTÉE DIRECTE</a:t>
+            </a:r>
+          </a:p>
+        </p:txBody>
+      </p:sp>
+      <p:sp>
+        <p:nvSpPr>
+          <p:cNvPr id="23" name="TextBox 22"/>
+          <p:cNvSpPr txBox="1"/>
+          <p:nvPr/>
+        </p:nvSpPr>
+        <p:spPr>
+          <a:xfrm>
+            <a:off x="4590288" y="3474720"/>
+            <a:ext cx="2212848" cy="822960"/>
           </a:xfrm>
           <a:prstGeom prst="rect">
             <a:avLst/>
@@ -6820,31 +6859,70 @@
           <a:p>
             <a:pPr algn="l">
               <a:lnSpc>
+                <a:spcPct val="130000"/>
+              </a:lnSpc>
+            </a:pPr>
+            <a:r>
+              <a:rPr sz="950" b="0">
+                <a:solidFill>
+                  <a:srgbClr val="0C1A14"/>
+                </a:solidFill>
+                <a:latin typeface="Segoe UI"/>
+              </a:rPr>
+              <a:t>3,7 M de ruraux sans électricité</a:t>
+            </a:r>
+          </a:p>
+        </p:txBody>
+      </p:sp>
+      <p:sp>
+        <p:nvSpPr>
+          <p:cNvPr id="24" name="TextBox 23"/>
+          <p:cNvSpPr txBox="1"/>
+          <p:nvPr/>
+        </p:nvSpPr>
+        <p:spPr>
+          <a:xfrm>
+            <a:off x="6967728" y="3255264"/>
+            <a:ext cx="2194560" cy="164592"/>
+          </a:xfrm>
+          <a:prstGeom prst="rect">
+            <a:avLst/>
+          </a:prstGeom>
+          <a:noFill/>
+        </p:spPr>
+        <p:txBody>
+          <a:bodyPr wrap="square" anchor="t" lIns="0" rIns="0" tIns="0" bIns="0">
+            <a:spAutoFit/>
+          </a:bodyPr>
+          <a:lstStyle/>
+          <a:p>
+            <a:pPr algn="l">
+              <a:lnSpc>
                 <a:spcPct val="125000"/>
               </a:lnSpc>
             </a:pPr>
             <a:r>
-              <a:rPr sz="750" b="1" spc="50">
+              <a:rPr sz="800" b="1" spc="50">
                 <a:solidFill>
                   <a:srgbClr val="5D6E64"/>
                 </a:solidFill>
                 <a:latin typeface="Segoe UI"/>
               </a:rPr>
-              <a:t>PORTÉE DIRECTE</a:t>
-            </a:r>
-          </a:p>
-        </p:txBody>
-      </p:sp>
-      <p:sp>
-        <p:nvSpPr>
-          <p:cNvPr id="23" name="TextBox 22"/>
-          <p:cNvSpPr txBox="1"/>
-          <p:nvPr/>
-        </p:nvSpPr>
-        <p:spPr>
-          <a:xfrm>
-            <a:off x="4590288" y="3108960"/>
-            <a:ext cx="2212848" cy="694944"/>
+              <a:t>CIBLE 2030</a:t>
+            </a:r>
+          </a:p>
+        </p:txBody>
+      </p:sp>
+      <p:sp>
+        <p:nvSpPr>
+          <p:cNvPr id="25" name="TextBox 24"/>
+          <p:cNvSpPr txBox="1"/>
+          <p:nvPr/>
+        </p:nvSpPr>
+        <p:spPr>
+          <a:xfrm>
+            <a:off x="6967728" y="3474720"/>
+            <a:ext cx="2212848" cy="822960"/>
           </a:xfrm>
           <a:prstGeom prst="rect">
             <a:avLst/>
@@ -6859,173 +6937,95 @@
           <a:p>
             <a:pPr algn="l">
               <a:lnSpc>
+                <a:spcPct val="130000"/>
+              </a:lnSpc>
+            </a:pPr>
+            <a:r>
+              <a:rPr sz="950" b="0">
+                <a:solidFill>
+                  <a:srgbClr val="0C1A14"/>
+                </a:solidFill>
+                <a:latin typeface="Segoe UI"/>
+              </a:rPr>
+              <a:t>Dépasser 65 700 raccordements ruraux par an — le seuil démographique — puis viser l'accès universel</a:t>
+            </a:r>
+          </a:p>
+        </p:txBody>
+      </p:sp>
+      <p:sp>
+        <p:nvSpPr>
+          <p:cNvPr id="26" name="TextBox 25"/>
+          <p:cNvSpPr txBox="1"/>
+          <p:nvPr/>
+        </p:nvSpPr>
+        <p:spPr>
+          <a:xfrm>
+            <a:off x="9345168" y="3255264"/>
+            <a:ext cx="2194560" cy="164592"/>
+          </a:xfrm>
+          <a:prstGeom prst="rect">
+            <a:avLst/>
+          </a:prstGeom>
+          <a:noFill/>
+        </p:spPr>
+        <p:txBody>
+          <a:bodyPr wrap="square" anchor="t" lIns="0" rIns="0" tIns="0" bIns="0">
+            <a:spAutoFit/>
+          </a:bodyPr>
+          <a:lstStyle/>
+          <a:p>
+            <a:pPr algn="l">
+              <a:lnSpc>
                 <a:spcPct val="125000"/>
               </a:lnSpc>
             </a:pPr>
             <a:r>
-              <a:rPr sz="850" b="0">
+              <a:rPr sz="800" b="1" spc="50">
+                <a:solidFill>
+                  <a:srgbClr val="5D6E64"/>
+                </a:solidFill>
+                <a:latin typeface="Segoe UI"/>
+              </a:rPr>
+              <a:t>INDICATEUR DE SUIVI</a:t>
+            </a:r>
+          </a:p>
+        </p:txBody>
+      </p:sp>
+      <p:sp>
+        <p:nvSpPr>
+          <p:cNvPr id="27" name="TextBox 26"/>
+          <p:cNvSpPr txBox="1"/>
+          <p:nvPr/>
+        </p:nvSpPr>
+        <p:spPr>
+          <a:xfrm>
+            <a:off x="9345168" y="3474720"/>
+            <a:ext cx="2212848" cy="822960"/>
+          </a:xfrm>
+          <a:prstGeom prst="rect">
+            <a:avLst/>
+          </a:prstGeom>
+          <a:noFill/>
+        </p:spPr>
+        <p:txBody>
+          <a:bodyPr wrap="square" anchor="t" lIns="0" rIns="0" tIns="0" bIns="0">
+            <a:spAutoFit/>
+          </a:bodyPr>
+          <a:lstStyle/>
+          <a:p>
+            <a:pPr algn="l">
+              <a:lnSpc>
+                <a:spcPct val="130000"/>
+              </a:lnSpc>
+            </a:pPr>
+            <a:r>
+              <a:rPr sz="950" b="0">
                 <a:solidFill>
                   <a:srgbClr val="0C1A14"/>
                 </a:solidFill>
                 <a:latin typeface="Segoe UI"/>
               </a:rPr>
-              <a:t>3,7 M de ruraux sans électricité</a:t>
-            </a:r>
-          </a:p>
-        </p:txBody>
-      </p:sp>
-      <p:sp>
-        <p:nvSpPr>
-          <p:cNvPr id="24" name="TextBox 23"/>
-          <p:cNvSpPr txBox="1"/>
-          <p:nvPr/>
-        </p:nvSpPr>
-        <p:spPr>
-          <a:xfrm>
-            <a:off x="6967728" y="2916936"/>
-            <a:ext cx="2194560" cy="146304"/>
-          </a:xfrm>
-          <a:prstGeom prst="rect">
-            <a:avLst/>
-          </a:prstGeom>
-          <a:noFill/>
-        </p:spPr>
-        <p:txBody>
-          <a:bodyPr wrap="square" anchor="t" lIns="0" rIns="0" tIns="0" bIns="0">
-            <a:spAutoFit/>
-          </a:bodyPr>
-          <a:lstStyle/>
-          <a:p>
-            <a:pPr algn="l">
-              <a:lnSpc>
-                <a:spcPct val="125000"/>
-              </a:lnSpc>
-            </a:pPr>
-            <a:r>
-              <a:rPr sz="750" b="1" spc="50">
-                <a:solidFill>
-                  <a:srgbClr val="5D6E64"/>
-                </a:solidFill>
-                <a:latin typeface="Segoe UI"/>
-              </a:rPr>
-              <a:t>CIBLE 2030</a:t>
-            </a:r>
-          </a:p>
-        </p:txBody>
-      </p:sp>
-      <p:sp>
-        <p:nvSpPr>
-          <p:cNvPr id="25" name="TextBox 24"/>
-          <p:cNvSpPr txBox="1"/>
-          <p:nvPr/>
-        </p:nvSpPr>
-        <p:spPr>
-          <a:xfrm>
-            <a:off x="6967728" y="3108960"/>
-            <a:ext cx="2212848" cy="694944"/>
-          </a:xfrm>
-          <a:prstGeom prst="rect">
-            <a:avLst/>
-          </a:prstGeom>
-          <a:noFill/>
-        </p:spPr>
-        <p:txBody>
-          <a:bodyPr wrap="square" anchor="t" lIns="0" rIns="0" tIns="0" bIns="0">
-            <a:spAutoFit/>
-          </a:bodyPr>
-          <a:lstStyle/>
-          <a:p>
-            <a:pPr algn="l">
-              <a:lnSpc>
-                <a:spcPct val="125000"/>
-              </a:lnSpc>
-            </a:pPr>
-            <a:r>
-              <a:rPr sz="850" b="0">
-                <a:solidFill>
-                  <a:srgbClr val="0C1A14"/>
-                </a:solidFill>
-                <a:latin typeface="Segoe UI"/>
-              </a:rPr>
-              <a:t>Dépasser 65 700 raccordements ruraux par an — le seuil démographique — puis viser l'accès universel</a:t>
-            </a:r>
-          </a:p>
-        </p:txBody>
-      </p:sp>
-      <p:sp>
-        <p:nvSpPr>
-          <p:cNvPr id="26" name="TextBox 25"/>
-          <p:cNvSpPr txBox="1"/>
-          <p:nvPr/>
-        </p:nvSpPr>
-        <p:spPr>
-          <a:xfrm>
-            <a:off x="9345168" y="2916936"/>
-            <a:ext cx="2194560" cy="146304"/>
-          </a:xfrm>
-          <a:prstGeom prst="rect">
-            <a:avLst/>
-          </a:prstGeom>
-          <a:noFill/>
-        </p:spPr>
-        <p:txBody>
-          <a:bodyPr wrap="square" anchor="t" lIns="0" rIns="0" tIns="0" bIns="0">
-            <a:spAutoFit/>
-          </a:bodyPr>
-          <a:lstStyle/>
-          <a:p>
-            <a:pPr algn="l">
-              <a:lnSpc>
-                <a:spcPct val="125000"/>
-              </a:lnSpc>
-            </a:pPr>
-            <a:r>
-              <a:rPr sz="750" b="1" spc="50">
-                <a:solidFill>
-                  <a:srgbClr val="5D6E64"/>
-                </a:solidFill>
-                <a:latin typeface="Segoe UI"/>
-              </a:rPr>
-              <a:t>INDICATEUR DE SUIVI</a:t>
-            </a:r>
-          </a:p>
-        </p:txBody>
-      </p:sp>
-      <p:sp>
-        <p:nvSpPr>
-          <p:cNvPr id="27" name="TextBox 26"/>
-          <p:cNvSpPr txBox="1"/>
-          <p:nvPr/>
-        </p:nvSpPr>
-        <p:spPr>
-          <a:xfrm>
-            <a:off x="9345168" y="3108960"/>
-            <a:ext cx="2212848" cy="694944"/>
-          </a:xfrm>
-          <a:prstGeom prst="rect">
-            <a:avLst/>
-          </a:prstGeom>
-          <a:noFill/>
-        </p:spPr>
-        <p:txBody>
-          <a:bodyPr wrap="square" anchor="t" lIns="0" rIns="0" tIns="0" bIns="0">
-            <a:spAutoFit/>
-          </a:bodyPr>
-          <a:lstStyle/>
-          <a:p>
-            <a:pPr algn="l">
-              <a:lnSpc>
-                <a:spcPct val="125000"/>
-              </a:lnSpc>
-            </a:pPr>
-            <a:r>
-              <a:rPr sz="850" b="0">
-                <a:solidFill>
-                  <a:srgbClr val="0C1A14"/>
-                </a:solidFill>
-                <a:latin typeface="Segoe UI"/>
-              </a:rPr>
-              <a:t>Le volume annuel de raccordements, et non le seul taux d'accès</a:t>
+              <a:t>EG.ELC.ACCS.RU.ZS + un indicateur de disponibilité horaire, absent des données actuelles</a:t>
             </a:r>
           </a:p>
         </p:txBody>
@@ -7038,8 +7038,8 @@
         </p:nvSpPr>
         <p:spPr>
           <a:xfrm>
-            <a:off x="566928" y="3950208"/>
-            <a:ext cx="11057839" cy="1097280"/>
+            <a:off x="566928" y="4535424"/>
+            <a:ext cx="11057839" cy="1371600"/>
           </a:xfrm>
           <a:prstGeom prst="roundRect">
             <a:avLst>
@@ -7086,8 +7086,8 @@
         </p:nvSpPr>
         <p:spPr>
           <a:xfrm>
-            <a:off x="749808" y="4187952"/>
-            <a:ext cx="411480" cy="384048"/>
+            <a:off x="768096" y="4809744"/>
+            <a:ext cx="457200" cy="457200"/>
           </a:xfrm>
           <a:prstGeom prst="rect">
             <a:avLst/>
@@ -7106,7 +7106,7 @@
               </a:lnSpc>
             </a:pPr>
             <a:r>
-              <a:rPr sz="2400" b="1">
+              <a:rPr sz="3000" b="1">
                 <a:solidFill>
                   <a:srgbClr val="0F7A4A"/>
                 </a:solidFill>
@@ -7125,8 +7125,8 @@
         </p:nvSpPr>
         <p:spPr>
           <a:xfrm>
-            <a:off x="1170432" y="4096512"/>
-            <a:ext cx="3017520" cy="256032"/>
+            <a:off x="1252728" y="4718304"/>
+            <a:ext cx="3017520" cy="274320"/>
           </a:xfrm>
           <a:prstGeom prst="rect">
             <a:avLst/>
@@ -7145,7 +7145,7 @@
               </a:lnSpc>
             </a:pPr>
             <a:r>
-              <a:rPr sz="1250" b="1">
+              <a:rPr sz="1400" b="1">
                 <a:solidFill>
                   <a:srgbClr val="0C1A14"/>
                 </a:solidFill>
@@ -7164,8 +7164,8 @@
         </p:nvSpPr>
         <p:spPr>
           <a:xfrm>
-            <a:off x="1170432" y="4389120"/>
-            <a:ext cx="3108960" cy="585216"/>
+            <a:off x="1252728" y="5038344"/>
+            <a:ext cx="3108960" cy="731520"/>
           </a:xfrm>
           <a:prstGeom prst="rect">
             <a:avLst/>
@@ -7180,31 +7180,70 @@
           <a:p>
             <a:pPr algn="l">
               <a:lnSpc>
+                <a:spcPct val="130000"/>
+              </a:lnSpc>
+            </a:pPr>
+            <a:r>
+              <a:rPr sz="950" b="0">
+                <a:solidFill>
+                  <a:srgbClr val="5D6E64"/>
+                </a:solidFill>
+                <a:latin typeface="Segoe UI"/>
+              </a:rPr>
+              <a:t>Surveillance, régénération assistée et agroforesterie concentrées sur les massifs prioritaires plutôt que saupoudrées.</a:t>
+            </a:r>
+          </a:p>
+        </p:txBody>
+      </p:sp>
+      <p:sp>
+        <p:nvSpPr>
+          <p:cNvPr id="32" name="TextBox 31"/>
+          <p:cNvSpPr txBox="1"/>
+          <p:nvPr/>
+        </p:nvSpPr>
+        <p:spPr>
+          <a:xfrm>
+            <a:off x="4590288" y="4736592"/>
+            <a:ext cx="2194560" cy="164592"/>
+          </a:xfrm>
+          <a:prstGeom prst="rect">
+            <a:avLst/>
+          </a:prstGeom>
+          <a:noFill/>
+        </p:spPr>
+        <p:txBody>
+          <a:bodyPr wrap="square" anchor="t" lIns="0" rIns="0" tIns="0" bIns="0">
+            <a:spAutoFit/>
+          </a:bodyPr>
+          <a:lstStyle/>
+          <a:p>
+            <a:pPr algn="l">
+              <a:lnSpc>
                 <a:spcPct val="125000"/>
               </a:lnSpc>
             </a:pPr>
             <a:r>
-              <a:rPr sz="850" b="0">
+              <a:rPr sz="800" b="1" spc="50">
                 <a:solidFill>
                   <a:srgbClr val="5D6E64"/>
                 </a:solidFill>
                 <a:latin typeface="Segoe UI"/>
               </a:rPr>
-              <a:t>Surveillance, régénération assistée et agroforesterie concentrées sur les massifs prioritaires plutôt que saupoudrées.</a:t>
-            </a:r>
-          </a:p>
-        </p:txBody>
-      </p:sp>
-      <p:sp>
-        <p:nvSpPr>
-          <p:cNvPr id="32" name="TextBox 31"/>
-          <p:cNvSpPr txBox="1"/>
-          <p:nvPr/>
-        </p:nvSpPr>
-        <p:spPr>
-          <a:xfrm>
-            <a:off x="4590288" y="4105656"/>
-            <a:ext cx="2194560" cy="146304"/>
+              <a:t>PORTÉE DIRECTE</a:t>
+            </a:r>
+          </a:p>
+        </p:txBody>
+      </p:sp>
+      <p:sp>
+        <p:nvSpPr>
+          <p:cNvPr id="33" name="TextBox 32"/>
+          <p:cNvSpPr txBox="1"/>
+          <p:nvPr/>
+        </p:nvSpPr>
+        <p:spPr>
+          <a:xfrm>
+            <a:off x="4590288" y="4956048"/>
+            <a:ext cx="2212848" cy="822960"/>
           </a:xfrm>
           <a:prstGeom prst="rect">
             <a:avLst/>
@@ -7219,31 +7258,70 @@
           <a:p>
             <a:pPr algn="l">
               <a:lnSpc>
+                <a:spcPct val="130000"/>
+              </a:lnSpc>
+            </a:pPr>
+            <a:r>
+              <a:rPr sz="950" b="0">
+                <a:solidFill>
+                  <a:srgbClr val="0C1A14"/>
+                </a:solidFill>
+                <a:latin typeface="Segoe UI"/>
+              </a:rPr>
+              <a:t>9 massifs · 91 468 ha de forêts classées</a:t>
+            </a:r>
+          </a:p>
+        </p:txBody>
+      </p:sp>
+      <p:sp>
+        <p:nvSpPr>
+          <p:cNvPr id="34" name="TextBox 33"/>
+          <p:cNvSpPr txBox="1"/>
+          <p:nvPr/>
+        </p:nvSpPr>
+        <p:spPr>
+          <a:xfrm>
+            <a:off x="6967728" y="4736592"/>
+            <a:ext cx="2194560" cy="164592"/>
+          </a:xfrm>
+          <a:prstGeom prst="rect">
+            <a:avLst/>
+          </a:prstGeom>
+          <a:noFill/>
+        </p:spPr>
+        <p:txBody>
+          <a:bodyPr wrap="square" anchor="t" lIns="0" rIns="0" tIns="0" bIns="0">
+            <a:spAutoFit/>
+          </a:bodyPr>
+          <a:lstStyle/>
+          <a:p>
+            <a:pPr algn="l">
+              <a:lnSpc>
                 <a:spcPct val="125000"/>
               </a:lnSpc>
             </a:pPr>
             <a:r>
-              <a:rPr sz="750" b="1" spc="50">
+              <a:rPr sz="800" b="1" spc="50">
                 <a:solidFill>
                   <a:srgbClr val="5D6E64"/>
                 </a:solidFill>
                 <a:latin typeface="Segoe UI"/>
               </a:rPr>
-              <a:t>PORTÉE DIRECTE</a:t>
-            </a:r>
-          </a:p>
-        </p:txBody>
-      </p:sp>
-      <p:sp>
-        <p:nvSpPr>
-          <p:cNvPr id="33" name="TextBox 32"/>
-          <p:cNvSpPr txBox="1"/>
-          <p:nvPr/>
-        </p:nvSpPr>
-        <p:spPr>
-          <a:xfrm>
-            <a:off x="4590288" y="4297680"/>
-            <a:ext cx="2212848" cy="694944"/>
+              <a:t>CIBLE 2030</a:t>
+            </a:r>
+          </a:p>
+        </p:txBody>
+      </p:sp>
+      <p:sp>
+        <p:nvSpPr>
+          <p:cNvPr id="35" name="TextBox 34"/>
+          <p:cNvSpPr txBox="1"/>
+          <p:nvPr/>
+        </p:nvSpPr>
+        <p:spPr>
+          <a:xfrm>
+            <a:off x="6967728" y="4956048"/>
+            <a:ext cx="2212848" cy="822960"/>
           </a:xfrm>
           <a:prstGeom prst="rect">
             <a:avLst/>
@@ -7258,31 +7336,109 @@
           <a:p>
             <a:pPr algn="l">
               <a:lnSpc>
+                <a:spcPct val="130000"/>
+              </a:lnSpc>
+            </a:pPr>
+            <a:r>
+              <a:rPr sz="950" b="0">
+                <a:solidFill>
+                  <a:srgbClr val="0C1A14"/>
+                </a:solidFill>
+                <a:latin typeface="Segoe UI"/>
+              </a:rPr>
+              <a:t>Perte nette nulle sur les massifs prioritaires</a:t>
+            </a:r>
+          </a:p>
+        </p:txBody>
+      </p:sp>
+      <p:sp>
+        <p:nvSpPr>
+          <p:cNvPr id="36" name="TextBox 35"/>
+          <p:cNvSpPr txBox="1"/>
+          <p:nvPr/>
+        </p:nvSpPr>
+        <p:spPr>
+          <a:xfrm>
+            <a:off x="9345168" y="4736592"/>
+            <a:ext cx="2194560" cy="164592"/>
+          </a:xfrm>
+          <a:prstGeom prst="rect">
+            <a:avLst/>
+          </a:prstGeom>
+          <a:noFill/>
+        </p:spPr>
+        <p:txBody>
+          <a:bodyPr wrap="square" anchor="t" lIns="0" rIns="0" tIns="0" bIns="0">
+            <a:spAutoFit/>
+          </a:bodyPr>
+          <a:lstStyle/>
+          <a:p>
+            <a:pPr algn="l">
+              <a:lnSpc>
                 <a:spcPct val="125000"/>
               </a:lnSpc>
             </a:pPr>
             <a:r>
-              <a:rPr sz="850" b="0">
+              <a:rPr sz="800" b="1" spc="50">
+                <a:solidFill>
+                  <a:srgbClr val="5D6E64"/>
+                </a:solidFill>
+                <a:latin typeface="Segoe UI"/>
+              </a:rPr>
+              <a:t>INDICATEUR DE SUIVI</a:t>
+            </a:r>
+          </a:p>
+        </p:txBody>
+      </p:sp>
+      <p:sp>
+        <p:nvSpPr>
+          <p:cNvPr id="37" name="TextBox 36"/>
+          <p:cNvSpPr txBox="1"/>
+          <p:nvPr/>
+        </p:nvSpPr>
+        <p:spPr>
+          <a:xfrm>
+            <a:off x="9345168" y="4956048"/>
+            <a:ext cx="2212848" cy="822960"/>
+          </a:xfrm>
+          <a:prstGeom prst="rect">
+            <a:avLst/>
+          </a:prstGeom>
+          <a:noFill/>
+        </p:spPr>
+        <p:txBody>
+          <a:bodyPr wrap="square" anchor="t" lIns="0" rIns="0" tIns="0" bIns="0">
+            <a:spAutoFit/>
+          </a:bodyPr>
+          <a:lstStyle/>
+          <a:p>
+            <a:pPr algn="l">
+              <a:lnSpc>
+                <a:spcPct val="130000"/>
+              </a:lnSpc>
+            </a:pPr>
+            <a:r>
+              <a:rPr sz="950" b="0">
                 <a:solidFill>
                   <a:srgbClr val="0C1A14"/>
                 </a:solidFill>
                 <a:latin typeface="Segoe UI"/>
               </a:rPr>
-              <a:t>9 massifs · 91 468 ha de forêts classées</a:t>
-            </a:r>
-          </a:p>
-        </p:txBody>
-      </p:sp>
-      <p:sp>
-        <p:nvSpPr>
-          <p:cNvPr id="34" name="TextBox 33"/>
-          <p:cNvSpPr txBox="1"/>
-          <p:nvPr/>
-        </p:nvSpPr>
-        <p:spPr>
-          <a:xfrm>
-            <a:off x="6967728" y="4105656"/>
-            <a:ext cx="2194560" cy="146304"/>
+              <a:t>AG.LND.FRST.K2 + un suivi surfacique par massif, à créer</a:t>
+            </a:r>
+          </a:p>
+        </p:txBody>
+      </p:sp>
+      <p:sp>
+        <p:nvSpPr>
+          <p:cNvPr id="38" name="TextBox 37"/>
+          <p:cNvSpPr txBox="1"/>
+          <p:nvPr/>
+        </p:nvSpPr>
+        <p:spPr>
+          <a:xfrm>
+            <a:off x="566928" y="6035040"/>
+            <a:ext cx="11057839" cy="365760"/>
           </a:xfrm>
           <a:prstGeom prst="rect">
             <a:avLst/>
@@ -7297,533 +7453,17 @@
           <a:p>
             <a:pPr algn="l">
               <a:lnSpc>
-                <a:spcPct val="125000"/>
-              </a:lnSpc>
-            </a:pPr>
-            <a:r>
-              <a:rPr sz="750" b="1" spc="50">
+                <a:spcPct val="130000"/>
+              </a:lnSpc>
+            </a:pPr>
+            <a:r>
+              <a:rPr sz="950" b="0">
                 <a:solidFill>
                   <a:srgbClr val="5D6E64"/>
                 </a:solidFill>
                 <a:latin typeface="Segoe UI"/>
               </a:rPr>
-              <a:t>CIBLE 2030</a:t>
-            </a:r>
-          </a:p>
-        </p:txBody>
-      </p:sp>
-      <p:sp>
-        <p:nvSpPr>
-          <p:cNvPr id="35" name="TextBox 34"/>
-          <p:cNvSpPr txBox="1"/>
-          <p:nvPr/>
-        </p:nvSpPr>
-        <p:spPr>
-          <a:xfrm>
-            <a:off x="6967728" y="4297680"/>
-            <a:ext cx="2212848" cy="694944"/>
-          </a:xfrm>
-          <a:prstGeom prst="rect">
-            <a:avLst/>
-          </a:prstGeom>
-          <a:noFill/>
-        </p:spPr>
-        <p:txBody>
-          <a:bodyPr wrap="square" anchor="t" lIns="0" rIns="0" tIns="0" bIns="0">
-            <a:spAutoFit/>
-          </a:bodyPr>
-          <a:lstStyle/>
-          <a:p>
-            <a:pPr algn="l">
-              <a:lnSpc>
-                <a:spcPct val="125000"/>
-              </a:lnSpc>
-            </a:pPr>
-            <a:r>
-              <a:rPr sz="850" b="0">
-                <a:solidFill>
-                  <a:srgbClr val="0C1A14"/>
-                </a:solidFill>
-                <a:latin typeface="Segoe UI"/>
-              </a:rPr>
-              <a:t>Perte nette nulle sur les massifs prioritaires</a:t>
-            </a:r>
-          </a:p>
-        </p:txBody>
-      </p:sp>
-      <p:sp>
-        <p:nvSpPr>
-          <p:cNvPr id="36" name="TextBox 35"/>
-          <p:cNvSpPr txBox="1"/>
-          <p:nvPr/>
-        </p:nvSpPr>
-        <p:spPr>
-          <a:xfrm>
-            <a:off x="9345168" y="4105656"/>
-            <a:ext cx="2194560" cy="146304"/>
-          </a:xfrm>
-          <a:prstGeom prst="rect">
-            <a:avLst/>
-          </a:prstGeom>
-          <a:noFill/>
-        </p:spPr>
-        <p:txBody>
-          <a:bodyPr wrap="square" anchor="t" lIns="0" rIns="0" tIns="0" bIns="0">
-            <a:spAutoFit/>
-          </a:bodyPr>
-          <a:lstStyle/>
-          <a:p>
-            <a:pPr algn="l">
-              <a:lnSpc>
-                <a:spcPct val="125000"/>
-              </a:lnSpc>
-            </a:pPr>
-            <a:r>
-              <a:rPr sz="750" b="1" spc="50">
-                <a:solidFill>
-                  <a:srgbClr val="5D6E64"/>
-                </a:solidFill>
-                <a:latin typeface="Segoe UI"/>
-              </a:rPr>
-              <a:t>INDICATEUR DE SUIVI</a:t>
-            </a:r>
-          </a:p>
-        </p:txBody>
-      </p:sp>
-      <p:sp>
-        <p:nvSpPr>
-          <p:cNvPr id="37" name="TextBox 36"/>
-          <p:cNvSpPr txBox="1"/>
-          <p:nvPr/>
-        </p:nvSpPr>
-        <p:spPr>
-          <a:xfrm>
-            <a:off x="9345168" y="4297680"/>
-            <a:ext cx="2212848" cy="694944"/>
-          </a:xfrm>
-          <a:prstGeom prst="rect">
-            <a:avLst/>
-          </a:prstGeom>
-          <a:noFill/>
-        </p:spPr>
-        <p:txBody>
-          <a:bodyPr wrap="square" anchor="t" lIns="0" rIns="0" tIns="0" bIns="0">
-            <a:spAutoFit/>
-          </a:bodyPr>
-          <a:lstStyle/>
-          <a:p>
-            <a:pPr algn="l">
-              <a:lnSpc>
-                <a:spcPct val="125000"/>
-              </a:lnSpc>
-            </a:pPr>
-            <a:r>
-              <a:rPr sz="850" b="0">
-                <a:solidFill>
-                  <a:srgbClr val="0C1A14"/>
-                </a:solidFill>
-                <a:latin typeface="Segoe UI"/>
-              </a:rPr>
-              <a:t>Un suivi surfacique par massif, à créer : AG.LND.FRST.K2 ne contient que 3 mesures indépendantes</a:t>
-            </a:r>
-          </a:p>
-        </p:txBody>
-      </p:sp>
-      <p:sp>
-        <p:nvSpPr>
-          <p:cNvPr id="38" name="Rounded Rectangle 37"/>
-          <p:cNvSpPr/>
-          <p:nvPr/>
-        </p:nvSpPr>
-        <p:spPr>
-          <a:xfrm>
-            <a:off x="566928" y="5138928"/>
-            <a:ext cx="11057839" cy="1097280"/>
-          </a:xfrm>
-          <a:prstGeom prst="roundRect">
-            <a:avLst>
-              <a:gd name="adj" fmla="val 5000"/>
-            </a:avLst>
-          </a:prstGeom>
-          <a:solidFill>
-            <a:srgbClr val="FFFFFF"/>
-          </a:solidFill>
-          <a:ln w="9525">
-            <a:solidFill>
-              <a:srgbClr val="D5DED8"/>
-            </a:solidFill>
-          </a:ln>
-          <a:effectLst/>
-        </p:spPr>
-        <p:style>
-          <a:lnRef idx="1">
-            <a:schemeClr val="accent1"/>
-          </a:lnRef>
-          <a:fillRef idx="3">
-            <a:schemeClr val="accent1"/>
-          </a:fillRef>
-          <a:effectRef idx="2">
-            <a:schemeClr val="accent1"/>
-          </a:effectRef>
-          <a:fontRef idx="minor">
-            <a:schemeClr val="lt1"/>
-          </a:fontRef>
-        </p:style>
-        <p:txBody>
-          <a:bodyPr rtlCol="0" anchor="ctr" wrap="square"/>
-          <a:lstStyle/>
-          <a:p>
-            <a:pPr algn="ctr"/>
-          </a:p>
-        </p:txBody>
-      </p:sp>
-      <p:sp>
-        <p:nvSpPr>
-          <p:cNvPr id="39" name="TextBox 38"/>
-          <p:cNvSpPr txBox="1"/>
-          <p:nvPr/>
-        </p:nvSpPr>
-        <p:spPr>
-          <a:xfrm>
-            <a:off x="749808" y="5376672"/>
-            <a:ext cx="411480" cy="384048"/>
-          </a:xfrm>
-          <a:prstGeom prst="rect">
-            <a:avLst/>
-          </a:prstGeom>
-          <a:noFill/>
-        </p:spPr>
-        <p:txBody>
-          <a:bodyPr wrap="square" anchor="t" lIns="0" rIns="0" tIns="0" bIns="0">
-            <a:spAutoFit/>
-          </a:bodyPr>
-          <a:lstStyle/>
-          <a:p>
-            <a:pPr algn="l">
-              <a:lnSpc>
-                <a:spcPct val="100000"/>
-              </a:lnSpc>
-            </a:pPr>
-            <a:r>
-              <a:rPr sz="2400" b="1">
-                <a:solidFill>
-                  <a:srgbClr val="7C441F"/>
-                </a:solidFill>
-                <a:latin typeface="Segoe UI"/>
-              </a:rPr>
-              <a:t>4</a:t>
-            </a:r>
-          </a:p>
-        </p:txBody>
-      </p:sp>
-      <p:sp>
-        <p:nvSpPr>
-          <p:cNvPr id="40" name="TextBox 39"/>
-          <p:cNvSpPr txBox="1"/>
-          <p:nvPr/>
-        </p:nvSpPr>
-        <p:spPr>
-          <a:xfrm>
-            <a:off x="1170432" y="5285232"/>
-            <a:ext cx="3017520" cy="256032"/>
-          </a:xfrm>
-          <a:prstGeom prst="rect">
-            <a:avLst/>
-          </a:prstGeom>
-          <a:noFill/>
-        </p:spPr>
-        <p:txBody>
-          <a:bodyPr wrap="square" anchor="t" lIns="0" rIns="0" tIns="0" bIns="0">
-            <a:spAutoFit/>
-          </a:bodyPr>
-          <a:lstStyle/>
-          <a:p>
-            <a:pPr algn="l">
-              <a:lnSpc>
-                <a:spcPct val="125000"/>
-              </a:lnSpc>
-            </a:pPr>
-            <a:r>
-              <a:rPr sz="1250" b="1">
-                <a:solidFill>
-                  <a:srgbClr val="0C1A14"/>
-                </a:solidFill>
-                <a:latin typeface="Segoe UI"/>
-              </a:rPr>
-              <a:t>Intensification agricole</a:t>
-            </a:r>
-          </a:p>
-        </p:txBody>
-      </p:sp>
-      <p:sp>
-        <p:nvSpPr>
-          <p:cNvPr id="41" name="TextBox 40"/>
-          <p:cNvSpPr txBox="1"/>
-          <p:nvPr/>
-        </p:nvSpPr>
-        <p:spPr>
-          <a:xfrm>
-            <a:off x="1170432" y="5577840"/>
-            <a:ext cx="3108960" cy="585216"/>
-          </a:xfrm>
-          <a:prstGeom prst="rect">
-            <a:avLst/>
-          </a:prstGeom>
-          <a:noFill/>
-        </p:spPr>
-        <p:txBody>
-          <a:bodyPr wrap="square" anchor="t" lIns="0" rIns="0" tIns="0" bIns="0">
-            <a:spAutoFit/>
-          </a:bodyPr>
-          <a:lstStyle/>
-          <a:p>
-            <a:pPr algn="l">
-              <a:lnSpc>
-                <a:spcPct val="125000"/>
-              </a:lnSpc>
-            </a:pPr>
-            <a:r>
-              <a:rPr sz="850" b="0">
-                <a:solidFill>
-                  <a:srgbClr val="5D6E64"/>
-                </a:solidFill>
-                <a:latin typeface="Segoe UI"/>
-              </a:rPr>
-              <a:t>Semences améliorées, fertilité des sols et conseil agricole sur les bassins céréaliers riverains des massifs prioritaires.</a:t>
-            </a:r>
-          </a:p>
-        </p:txBody>
-      </p:sp>
-      <p:sp>
-        <p:nvSpPr>
-          <p:cNvPr id="42" name="TextBox 41"/>
-          <p:cNvSpPr txBox="1"/>
-          <p:nvPr/>
-        </p:nvSpPr>
-        <p:spPr>
-          <a:xfrm>
-            <a:off x="4590288" y="5294376"/>
-            <a:ext cx="2194560" cy="146304"/>
-          </a:xfrm>
-          <a:prstGeom prst="rect">
-            <a:avLst/>
-          </a:prstGeom>
-          <a:noFill/>
-        </p:spPr>
-        <p:txBody>
-          <a:bodyPr wrap="square" anchor="t" lIns="0" rIns="0" tIns="0" bIns="0">
-            <a:spAutoFit/>
-          </a:bodyPr>
-          <a:lstStyle/>
-          <a:p>
-            <a:pPr algn="l">
-              <a:lnSpc>
-                <a:spcPct val="125000"/>
-              </a:lnSpc>
-            </a:pPr>
-            <a:r>
-              <a:rPr sz="750" b="1" spc="50">
-                <a:solidFill>
-                  <a:srgbClr val="5D6E64"/>
-                </a:solidFill>
-                <a:latin typeface="Segoe UI"/>
-              </a:rPr>
-              <a:t>PORTÉE DIRECTE</a:t>
-            </a:r>
-          </a:p>
-        </p:txBody>
-      </p:sp>
-      <p:sp>
-        <p:nvSpPr>
-          <p:cNvPr id="43" name="TextBox 42"/>
-          <p:cNvSpPr txBox="1"/>
-          <p:nvPr/>
-        </p:nvSpPr>
-        <p:spPr>
-          <a:xfrm>
-            <a:off x="4590288" y="5486400"/>
-            <a:ext cx="2212848" cy="694944"/>
-          </a:xfrm>
-          <a:prstGeom prst="rect">
-            <a:avLst/>
-          </a:prstGeom>
-          <a:noFill/>
-        </p:spPr>
-        <p:txBody>
-          <a:bodyPr wrap="square" anchor="t" lIns="0" rIns="0" tIns="0" bIns="0">
-            <a:spAutoFit/>
-          </a:bodyPr>
-          <a:lstStyle/>
-          <a:p>
-            <a:pPr algn="l">
-              <a:lnSpc>
-                <a:spcPct val="125000"/>
-              </a:lnSpc>
-            </a:pPr>
-            <a:r>
-              <a:rPr sz="850" b="0">
-                <a:solidFill>
-                  <a:srgbClr val="0C1A14"/>
-                </a:solidFill>
-                <a:latin typeface="Segoe UI"/>
-              </a:rPr>
-              <a:t>19 700 ha défrichés par an, soit 6.7 × la perte forestière</a:t>
-            </a:r>
-          </a:p>
-        </p:txBody>
-      </p:sp>
-      <p:sp>
-        <p:nvSpPr>
-          <p:cNvPr id="44" name="TextBox 43"/>
-          <p:cNvSpPr txBox="1"/>
-          <p:nvPr/>
-        </p:nvSpPr>
-        <p:spPr>
-          <a:xfrm>
-            <a:off x="6967728" y="5294376"/>
-            <a:ext cx="2194560" cy="146304"/>
-          </a:xfrm>
-          <a:prstGeom prst="rect">
-            <a:avLst/>
-          </a:prstGeom>
-          <a:noFill/>
-        </p:spPr>
-        <p:txBody>
-          <a:bodyPr wrap="square" anchor="t" lIns="0" rIns="0" tIns="0" bIns="0">
-            <a:spAutoFit/>
-          </a:bodyPr>
-          <a:lstStyle/>
-          <a:p>
-            <a:pPr algn="l">
-              <a:lnSpc>
-                <a:spcPct val="125000"/>
-              </a:lnSpc>
-            </a:pPr>
-            <a:r>
-              <a:rPr sz="750" b="1" spc="50">
-                <a:solidFill>
-                  <a:srgbClr val="5D6E64"/>
-                </a:solidFill>
-                <a:latin typeface="Segoe UI"/>
-              </a:rPr>
-              <a:t>CIBLE 2030</a:t>
-            </a:r>
-          </a:p>
-        </p:txBody>
-      </p:sp>
-      <p:sp>
-        <p:nvSpPr>
-          <p:cNvPr id="45" name="TextBox 44"/>
-          <p:cNvSpPr txBox="1"/>
-          <p:nvPr/>
-        </p:nvSpPr>
-        <p:spPr>
-          <a:xfrm>
-            <a:off x="6967728" y="5486400"/>
-            <a:ext cx="2212848" cy="694944"/>
-          </a:xfrm>
-          <a:prstGeom prst="rect">
-            <a:avLst/>
-          </a:prstGeom>
-          <a:noFill/>
-        </p:spPr>
-        <p:txBody>
-          <a:bodyPr wrap="square" anchor="t" lIns="0" rIns="0" tIns="0" bIns="0">
-            <a:spAutoFit/>
-          </a:bodyPr>
-          <a:lstStyle/>
-          <a:p>
-            <a:pPr algn="l">
-              <a:lnSpc>
-                <a:spcPct val="125000"/>
-              </a:lnSpc>
-            </a:pPr>
-            <a:r>
-              <a:rPr sz="850" b="0">
-                <a:solidFill>
-                  <a:srgbClr val="0C1A14"/>
-                </a:solidFill>
-                <a:latin typeface="Segoe UI"/>
-              </a:rPr>
-              <a:t>Ramener l'expansion des surfaces céréalières vers zéro</a:t>
-            </a:r>
-          </a:p>
-        </p:txBody>
-      </p:sp>
-      <p:sp>
-        <p:nvSpPr>
-          <p:cNvPr id="46" name="TextBox 45"/>
-          <p:cNvSpPr txBox="1"/>
-          <p:nvPr/>
-        </p:nvSpPr>
-        <p:spPr>
-          <a:xfrm>
-            <a:off x="9345168" y="5294376"/>
-            <a:ext cx="2194560" cy="146304"/>
-          </a:xfrm>
-          <a:prstGeom prst="rect">
-            <a:avLst/>
-          </a:prstGeom>
-          <a:noFill/>
-        </p:spPr>
-        <p:txBody>
-          <a:bodyPr wrap="square" anchor="t" lIns="0" rIns="0" tIns="0" bIns="0">
-            <a:spAutoFit/>
-          </a:bodyPr>
-          <a:lstStyle/>
-          <a:p>
-            <a:pPr algn="l">
-              <a:lnSpc>
-                <a:spcPct val="125000"/>
-              </a:lnSpc>
-            </a:pPr>
-            <a:r>
-              <a:rPr sz="750" b="1" spc="50">
-                <a:solidFill>
-                  <a:srgbClr val="5D6E64"/>
-                </a:solidFill>
-                <a:latin typeface="Segoe UI"/>
-              </a:rPr>
-              <a:t>INDICATEUR DE SUIVI</a:t>
-            </a:r>
-          </a:p>
-        </p:txBody>
-      </p:sp>
-      <p:sp>
-        <p:nvSpPr>
-          <p:cNvPr id="47" name="TextBox 46"/>
-          <p:cNvSpPr txBox="1"/>
-          <p:nvPr/>
-        </p:nvSpPr>
-        <p:spPr>
-          <a:xfrm>
-            <a:off x="9345168" y="5486400"/>
-            <a:ext cx="2212848" cy="694944"/>
-          </a:xfrm>
-          <a:prstGeom prst="rect">
-            <a:avLst/>
-          </a:prstGeom>
-          <a:noFill/>
-        </p:spPr>
-        <p:txBody>
-          <a:bodyPr wrap="square" anchor="t" lIns="0" rIns="0" tIns="0" bIns="0">
-            <a:spAutoFit/>
-          </a:bodyPr>
-          <a:lstStyle/>
-          <a:p>
-            <a:pPr algn="l">
-              <a:lnSpc>
-                <a:spcPct val="125000"/>
-              </a:lnSpc>
-            </a:pPr>
-            <a:r>
-              <a:rPr sz="850" b="0">
-                <a:solidFill>
-                  <a:srgbClr val="0C1A14"/>
-                </a:solidFill>
-                <a:latin typeface="Segoe UI"/>
-              </a:rPr>
-              <a:t>AG.PRD.CREL.MT / AG.LND.CREL.HA, lus comme un rendement en t/ha</a:t>
+              <a:t>Aucun coût ni budget dans les six jeux de données : ces trois leviers fixent un ordre de priorité et des cibles physiques, pas un plan de financement.</a:t>
             </a:r>
           </a:p>
         </p:txBody>
@@ -7924,7 +7564,7 @@
                 </a:solidFill>
                 <a:latin typeface="Segoe UI"/>
               </a:rPr>
-              <a:t>L'ESSENTIEL</a:t>
+              <a:t>MÉTHODE</a:t>
             </a:r>
           </a:p>
         </p:txBody>
@@ -7963,7 +7603,7 @@
                 </a:solidFill>
                 <a:latin typeface="Segoe UI"/>
               </a:rPr>
-              <a:t>Ce qu'il faut décider, et pourquoi</a:t>
+              <a:t>Six jeux de données, une seule question : où agir en premier ?</a:t>
             </a:r>
           </a:p>
         </p:txBody>
@@ -8072,14 +7712,482 @@
       </p:pic>
       <p:sp>
         <p:nvSpPr>
-          <p:cNvPr id="8" name="Rounded Rectangle 7"/>
+          <p:cNvPr id="8" name="TextBox 7"/>
+          <p:cNvSpPr txBox="1"/>
+          <p:nvPr/>
+        </p:nvSpPr>
+        <p:spPr>
+          <a:xfrm>
+            <a:off x="566928" y="1572768"/>
+            <a:ext cx="5346039" cy="182880"/>
+          </a:xfrm>
+          <a:prstGeom prst="rect">
+            <a:avLst/>
+          </a:prstGeom>
+          <a:noFill/>
+        </p:spPr>
+        <p:txBody>
+          <a:bodyPr wrap="square" anchor="t" lIns="0" rIns="0" tIns="0" bIns="0">
+            <a:spAutoFit/>
+          </a:bodyPr>
+          <a:lstStyle/>
+          <a:p>
+            <a:pPr algn="l">
+              <a:lnSpc>
+                <a:spcPct val="125000"/>
+              </a:lnSpc>
+            </a:pPr>
+            <a:r>
+              <a:rPr sz="1100" b="1">
+                <a:solidFill>
+                  <a:srgbClr val="0C1A14"/>
+                </a:solidFill>
+                <a:latin typeface="Segoe UI"/>
+              </a:rPr>
+              <a:t>Accès à l'électricité</a:t>
+            </a:r>
+          </a:p>
+        </p:txBody>
+      </p:sp>
+      <p:sp>
+        <p:nvSpPr>
+          <p:cNvPr id="9" name="TextBox 8"/>
+          <p:cNvSpPr txBox="1"/>
+          <p:nvPr/>
+        </p:nvSpPr>
+        <p:spPr>
+          <a:xfrm>
+            <a:off x="566928" y="1792224"/>
+            <a:ext cx="5254599" cy="457200"/>
+          </a:xfrm>
+          <a:prstGeom prst="rect">
+            <a:avLst/>
+          </a:prstGeom>
+          <a:noFill/>
+        </p:spPr>
+        <p:txBody>
+          <a:bodyPr wrap="square" anchor="t" lIns="0" rIns="0" tIns="0" bIns="0">
+            <a:spAutoFit/>
+          </a:bodyPr>
+          <a:lstStyle/>
+          <a:p>
+            <a:pPr algn="l">
+              <a:lnSpc>
+                <a:spcPct val="130000"/>
+              </a:lnSpc>
+            </a:pPr>
+            <a:r>
+              <a:rPr sz="950" b="0">
+                <a:solidFill>
+                  <a:srgbClr val="5D6E64"/>
+                </a:solidFill>
+                <a:latin typeface="Segoe UI"/>
+              </a:rPr>
+              <a:t>Banque Mondiale · total, urbain, rural · 1998–2022</a:t>
+            </a:r>
+          </a:p>
+        </p:txBody>
+      </p:sp>
+      <p:sp>
+        <p:nvSpPr>
+          <p:cNvPr id="10" name="TextBox 9"/>
+          <p:cNvSpPr txBox="1"/>
+          <p:nvPr/>
+        </p:nvSpPr>
+        <p:spPr>
+          <a:xfrm>
+            <a:off x="6205575" y="1572768"/>
+            <a:ext cx="5346039" cy="182880"/>
+          </a:xfrm>
+          <a:prstGeom prst="rect">
+            <a:avLst/>
+          </a:prstGeom>
+          <a:noFill/>
+        </p:spPr>
+        <p:txBody>
+          <a:bodyPr wrap="square" anchor="t" lIns="0" rIns="0" tIns="0" bIns="0">
+            <a:spAutoFit/>
+          </a:bodyPr>
+          <a:lstStyle/>
+          <a:p>
+            <a:pPr algn="l">
+              <a:lnSpc>
+                <a:spcPct val="125000"/>
+              </a:lnSpc>
+            </a:pPr>
+            <a:r>
+              <a:rPr sz="1100" b="1">
+                <a:solidFill>
+                  <a:srgbClr val="0C1A14"/>
+                </a:solidFill>
+                <a:latin typeface="Segoe UI"/>
+              </a:rPr>
+              <a:t>Cuisson des ménages</a:t>
+            </a:r>
+          </a:p>
+        </p:txBody>
+      </p:sp>
+      <p:sp>
+        <p:nvSpPr>
+          <p:cNvPr id="11" name="TextBox 10"/>
+          <p:cNvSpPr txBox="1"/>
+          <p:nvPr/>
+        </p:nvSpPr>
+        <p:spPr>
+          <a:xfrm>
+            <a:off x="6205575" y="1792224"/>
+            <a:ext cx="5254599" cy="457200"/>
+          </a:xfrm>
+          <a:prstGeom prst="rect">
+            <a:avLst/>
+          </a:prstGeom>
+          <a:noFill/>
+        </p:spPr>
+        <p:txBody>
+          <a:bodyPr wrap="square" anchor="t" lIns="0" rIns="0" tIns="0" bIns="0">
+            <a:spAutoFit/>
+          </a:bodyPr>
+          <a:lstStyle/>
+          <a:p>
+            <a:pPr algn="l">
+              <a:lnSpc>
+                <a:spcPct val="130000"/>
+              </a:lnSpc>
+            </a:pPr>
+            <a:r>
+              <a:rPr sz="950" b="0">
+                <a:solidFill>
+                  <a:srgbClr val="5D6E64"/>
+                </a:solidFill>
+                <a:latin typeface="Segoe UI"/>
+              </a:rPr>
+              <a:t>Combustible principal (deux enquêtes 2014 et 2017) et accès à une cuisson propre, série annuelle</a:t>
+            </a:r>
+          </a:p>
+        </p:txBody>
+      </p:sp>
+      <p:sp>
+        <p:nvSpPr>
+          <p:cNvPr id="12" name="TextBox 11"/>
+          <p:cNvSpPr txBox="1"/>
+          <p:nvPr/>
+        </p:nvSpPr>
+        <p:spPr>
+          <a:xfrm>
+            <a:off x="566928" y="2414016"/>
+            <a:ext cx="5346039" cy="182880"/>
+          </a:xfrm>
+          <a:prstGeom prst="rect">
+            <a:avLst/>
+          </a:prstGeom>
+          <a:noFill/>
+        </p:spPr>
+        <p:txBody>
+          <a:bodyPr wrap="square" anchor="t" lIns="0" rIns="0" tIns="0" bIns="0">
+            <a:spAutoFit/>
+          </a:bodyPr>
+          <a:lstStyle/>
+          <a:p>
+            <a:pPr algn="l">
+              <a:lnSpc>
+                <a:spcPct val="125000"/>
+              </a:lnSpc>
+            </a:pPr>
+            <a:r>
+              <a:rPr sz="1100" b="1">
+                <a:solidFill>
+                  <a:srgbClr val="0C1A14"/>
+                </a:solidFill>
+                <a:latin typeface="Segoe UI"/>
+              </a:rPr>
+              <a:t>Énergies renouvelables</a:t>
+            </a:r>
+          </a:p>
+        </p:txBody>
+      </p:sp>
+      <p:sp>
+        <p:nvSpPr>
+          <p:cNvPr id="13" name="TextBox 12"/>
+          <p:cNvSpPr txBox="1"/>
+          <p:nvPr/>
+        </p:nvSpPr>
+        <p:spPr>
+          <a:xfrm>
+            <a:off x="566928" y="2633472"/>
+            <a:ext cx="5254599" cy="457200"/>
+          </a:xfrm>
+          <a:prstGeom prst="rect">
+            <a:avLst/>
+          </a:prstGeom>
+          <a:noFill/>
+        </p:spPr>
+        <p:txBody>
+          <a:bodyPr wrap="square" anchor="t" lIns="0" rIns="0" tIns="0" bIns="0">
+            <a:spAutoFit/>
+          </a:bodyPr>
+          <a:lstStyle/>
+          <a:p>
+            <a:pPr algn="l">
+              <a:lnSpc>
+                <a:spcPct val="130000"/>
+              </a:lnSpc>
+            </a:pPr>
+            <a:r>
+              <a:rPr sz="950" b="0">
+                <a:solidFill>
+                  <a:srgbClr val="5D6E64"/>
+                </a:solidFill>
+                <a:latin typeface="Segoe UI"/>
+              </a:rPr>
+              <a:t>Part des renouvelables dans la consommation finale, croisée avec la cuisson propre</a:t>
+            </a:r>
+          </a:p>
+        </p:txBody>
+      </p:sp>
+      <p:sp>
+        <p:nvSpPr>
+          <p:cNvPr id="14" name="TextBox 13"/>
+          <p:cNvSpPr txBox="1"/>
+          <p:nvPr/>
+        </p:nvSpPr>
+        <p:spPr>
+          <a:xfrm>
+            <a:off x="6205575" y="2414016"/>
+            <a:ext cx="5346039" cy="182880"/>
+          </a:xfrm>
+          <a:prstGeom prst="rect">
+            <a:avLst/>
+          </a:prstGeom>
+          <a:noFill/>
+        </p:spPr>
+        <p:txBody>
+          <a:bodyPr wrap="square" anchor="t" lIns="0" rIns="0" tIns="0" bIns="0">
+            <a:spAutoFit/>
+          </a:bodyPr>
+          <a:lstStyle/>
+          <a:p>
+            <a:pPr algn="l">
+              <a:lnSpc>
+                <a:spcPct val="125000"/>
+              </a:lnSpc>
+            </a:pPr>
+            <a:r>
+              <a:rPr sz="1100" b="1">
+                <a:solidFill>
+                  <a:srgbClr val="0C1A14"/>
+                </a:solidFill>
+                <a:latin typeface="Segoe UI"/>
+              </a:rPr>
+              <a:t>Couvert forestier</a:t>
+            </a:r>
+          </a:p>
+        </p:txBody>
+      </p:sp>
+      <p:sp>
+        <p:nvSpPr>
+          <p:cNvPr id="15" name="TextBox 14"/>
+          <p:cNvSpPr txBox="1"/>
+          <p:nvPr/>
+        </p:nvSpPr>
+        <p:spPr>
+          <a:xfrm>
+            <a:off x="6205575" y="2633472"/>
+            <a:ext cx="5254599" cy="457200"/>
+          </a:xfrm>
+          <a:prstGeom prst="rect">
+            <a:avLst/>
+          </a:prstGeom>
+          <a:noFill/>
+        </p:spPr>
+        <p:txBody>
+          <a:bodyPr wrap="square" anchor="t" lIns="0" rIns="0" tIns="0" bIns="0">
+            <a:spAutoFit/>
+          </a:bodyPr>
+          <a:lstStyle/>
+          <a:p>
+            <a:pPr algn="l">
+              <a:lnSpc>
+                <a:spcPct val="130000"/>
+              </a:lnSpc>
+            </a:pPr>
+            <a:r>
+              <a:rPr sz="950" b="0">
+                <a:solidFill>
+                  <a:srgbClr val="5D6E64"/>
+                </a:solidFill>
+                <a:latin typeface="Segoe UI"/>
+              </a:rPr>
+              <a:t>Surface forestière · 1990–2021 · % du territoire et km²</a:t>
+            </a:r>
+          </a:p>
+        </p:txBody>
+      </p:sp>
+      <p:sp>
+        <p:nvSpPr>
+          <p:cNvPr id="16" name="TextBox 15"/>
+          <p:cNvSpPr txBox="1"/>
+          <p:nvPr/>
+        </p:nvSpPr>
+        <p:spPr>
+          <a:xfrm>
+            <a:off x="566928" y="3255264"/>
+            <a:ext cx="5346039" cy="182880"/>
+          </a:xfrm>
+          <a:prstGeom prst="rect">
+            <a:avLst/>
+          </a:prstGeom>
+          <a:noFill/>
+        </p:spPr>
+        <p:txBody>
+          <a:bodyPr wrap="square" anchor="t" lIns="0" rIns="0" tIns="0" bIns="0">
+            <a:spAutoFit/>
+          </a:bodyPr>
+          <a:lstStyle/>
+          <a:p>
+            <a:pPr algn="l">
+              <a:lnSpc>
+                <a:spcPct val="125000"/>
+              </a:lnSpc>
+            </a:pPr>
+            <a:r>
+              <a:rPr sz="1100" b="1">
+                <a:solidFill>
+                  <a:srgbClr val="0C1A14"/>
+                </a:solidFill>
+                <a:latin typeface="Segoe UI"/>
+              </a:rPr>
+              <a:t>Inventaire GES 2018</a:t>
+            </a:r>
+          </a:p>
+        </p:txBody>
+      </p:sp>
+      <p:sp>
+        <p:nvSpPr>
+          <p:cNvPr id="17" name="TextBox 16"/>
+          <p:cNvSpPr txBox="1"/>
+          <p:nvPr/>
+        </p:nvSpPr>
+        <p:spPr>
+          <a:xfrm>
+            <a:off x="566928" y="3474720"/>
+            <a:ext cx="5254599" cy="457200"/>
+          </a:xfrm>
+          <a:prstGeom prst="rect">
+            <a:avLst/>
+          </a:prstGeom>
+          <a:noFill/>
+        </p:spPr>
+        <p:txBody>
+          <a:bodyPr wrap="square" anchor="t" lIns="0" rIns="0" tIns="0" bIns="0">
+            <a:spAutoFit/>
+          </a:bodyPr>
+          <a:lstStyle/>
+          <a:p>
+            <a:pPr algn="l">
+              <a:lnSpc>
+                <a:spcPct val="130000"/>
+              </a:lnSpc>
+            </a:pPr>
+            <a:r>
+              <a:rPr sz="950" b="0">
+                <a:solidFill>
+                  <a:srgbClr val="5D6E64"/>
+                </a:solidFill>
+                <a:latin typeface="Segoe UI"/>
+              </a:rPr>
+              <a:t>Émissions par secteur et par gaz, relues en équivalent CO₂ (PRG 100 ans, AR5)</a:t>
+            </a:r>
+          </a:p>
+        </p:txBody>
+      </p:sp>
+      <p:sp>
+        <p:nvSpPr>
+          <p:cNvPr id="18" name="TextBox 17"/>
+          <p:cNvSpPr txBox="1"/>
+          <p:nvPr/>
+        </p:nvSpPr>
+        <p:spPr>
+          <a:xfrm>
+            <a:off x="6205575" y="3255264"/>
+            <a:ext cx="5346039" cy="182880"/>
+          </a:xfrm>
+          <a:prstGeom prst="rect">
+            <a:avLst/>
+          </a:prstGeom>
+          <a:noFill/>
+        </p:spPr>
+        <p:txBody>
+          <a:bodyPr wrap="square" anchor="t" lIns="0" rIns="0" tIns="0" bIns="0">
+            <a:spAutoFit/>
+          </a:bodyPr>
+          <a:lstStyle/>
+          <a:p>
+            <a:pPr algn="l">
+              <a:lnSpc>
+                <a:spcPct val="125000"/>
+              </a:lnSpc>
+            </a:pPr>
+            <a:r>
+              <a:rPr sz="1100" b="1">
+                <a:solidFill>
+                  <a:srgbClr val="0C1A14"/>
+                </a:solidFill>
+                <a:latin typeface="Segoe UI"/>
+              </a:rPr>
+              <a:t>Forêts classées &amp; climat</a:t>
+            </a:r>
+          </a:p>
+        </p:txBody>
+      </p:sp>
+      <p:sp>
+        <p:nvSpPr>
+          <p:cNvPr id="19" name="TextBox 18"/>
+          <p:cNvSpPr txBox="1"/>
+          <p:nvPr/>
+        </p:nvSpPr>
+        <p:spPr>
+          <a:xfrm>
+            <a:off x="6205575" y="3474720"/>
+            <a:ext cx="5254599" cy="457200"/>
+          </a:xfrm>
+          <a:prstGeom prst="rect">
+            <a:avLst/>
+          </a:prstGeom>
+          <a:noFill/>
+        </p:spPr>
+        <p:txBody>
+          <a:bodyPr wrap="square" anchor="t" lIns="0" rIns="0" tIns="0" bIns="0">
+            <a:spAutoFit/>
+          </a:bodyPr>
+          <a:lstStyle/>
+          <a:p>
+            <a:pPr algn="l">
+              <a:lnSpc>
+                <a:spcPct val="130000"/>
+              </a:lnSpc>
+            </a:pPr>
+            <a:r>
+              <a:rPr sz="950" b="0">
+                <a:solidFill>
+                  <a:srgbClr val="5D6E64"/>
+                </a:solidFill>
+                <a:latin typeface="Segoe UI"/>
+              </a:rPr>
+              <a:t>53 forêts classées (surface, enclavement) et 10 stations météorologiques 2013-2019</a:t>
+            </a:r>
+          </a:p>
+        </p:txBody>
+      </p:sp>
+      <p:sp>
+        <p:nvSpPr>
+          <p:cNvPr id="20" name="Rounded Rectangle 19"/>
           <p:cNvSpPr/>
           <p:nvPr/>
         </p:nvSpPr>
         <p:spPr>
           <a:xfrm>
-            <a:off x="566928" y="1572768"/>
-            <a:ext cx="2145731" cy="1481328"/>
+            <a:off x="566928" y="4343400"/>
+            <a:ext cx="11057839" cy="1737360"/>
           </a:xfrm>
           <a:prstGeom prst="roundRect">
             <a:avLst>
@@ -8087,12 +8195,10 @@
             </a:avLst>
           </a:prstGeom>
           <a:solidFill>
-            <a:srgbClr val="FFFFFF"/>
+            <a:srgbClr val="E7F2EB"/>
           </a:solidFill>
-          <a:ln w="9525">
-            <a:solidFill>
-              <a:srgbClr val="D5DED8"/>
-            </a:solidFill>
+          <a:ln>
+            <a:noFill/>
           </a:ln>
           <a:effectLst/>
         </p:spPr>
@@ -8120,14 +8226,14 @@
       </p:sp>
       <p:sp>
         <p:nvSpPr>
-          <p:cNvPr id="9" name="TextBox 8"/>
-          <p:cNvSpPr txBox="1"/>
-          <p:nvPr/>
-        </p:nvSpPr>
-        <p:spPr>
-          <a:xfrm>
-            <a:off x="722376" y="1709928"/>
-            <a:ext cx="1834835" cy="182880"/>
+          <p:cNvPr id="21" name="TextBox 20"/>
+          <p:cNvSpPr txBox="1"/>
+          <p:nvPr/>
+        </p:nvSpPr>
+        <p:spPr>
+          <a:xfrm>
+            <a:off x="749808" y="4480560"/>
+            <a:ext cx="10692079" cy="164592"/>
           </a:xfrm>
           <a:prstGeom prst="rect">
             <a:avLst/>
@@ -8146,1775 +8252,52 @@
               </a:lnSpc>
             </a:pPr>
             <a:r>
-              <a:rPr sz="800" b="1" spc="50">
+              <a:rPr sz="850" b="1" spc="60">
+                <a:solidFill>
+                  <a:srgbClr val="0F7A4A"/>
+                </a:solidFill>
+                <a:latin typeface="Segoe UI"/>
+              </a:rPr>
+              <a:t>CE QUE CES DONNÉES NE PERMETTENT PAS DE DIRE</a:t>
+            </a:r>
+          </a:p>
+        </p:txBody>
+      </p:sp>
+      <p:sp>
+        <p:nvSpPr>
+          <p:cNvPr id="22" name="TextBox 21"/>
+          <p:cNvSpPr txBox="1"/>
+          <p:nvPr/>
+        </p:nvSpPr>
+        <p:spPr>
+          <a:xfrm>
+            <a:off x="749808" y="4709160"/>
+            <a:ext cx="10692079" cy="1280160"/>
+          </a:xfrm>
+          <a:prstGeom prst="rect">
+            <a:avLst/>
+          </a:prstGeom>
+          <a:noFill/>
+        </p:spPr>
+        <p:txBody>
+          <a:bodyPr wrap="square" anchor="t" lIns="0" rIns="0" tIns="0" bIns="0">
+            <a:spAutoFit/>
+          </a:bodyPr>
+          <a:lstStyle/>
+          <a:p>
+            <a:pPr algn="l">
+              <a:lnSpc>
+                <a:spcPct val="135000"/>
+              </a:lnSpc>
+            </a:pPr>
+            <a:r>
+              <a:rPr sz="1100" b="0">
                 <a:solidFill>
                   <a:srgbClr val="0C1A14"/>
                 </a:solidFill>
                 <a:latin typeface="Segoe UI"/>
               </a:rPr>
-              <a:t>RURAUX PRIVÉS D'ÉLECTRICITÉ</a:t>
-            </a:r>
-          </a:p>
-        </p:txBody>
-      </p:sp>
-      <p:sp>
-        <p:nvSpPr>
-          <p:cNvPr id="10" name="TextBox 9"/>
-          <p:cNvSpPr txBox="1"/>
-          <p:nvPr/>
-        </p:nvSpPr>
-        <p:spPr>
-          <a:xfrm>
-            <a:off x="722376" y="1938528"/>
-            <a:ext cx="1834835" cy="411480"/>
-          </a:xfrm>
-          <a:prstGeom prst="rect">
-            <a:avLst/>
-          </a:prstGeom>
-          <a:noFill/>
-        </p:spPr>
-        <p:txBody>
-          <a:bodyPr wrap="square" anchor="t" lIns="0" rIns="0" tIns="0" bIns="0">
-            <a:spAutoFit/>
-          </a:bodyPr>
-          <a:lstStyle/>
-          <a:p>
-            <a:pPr algn="l">
-              <a:lnSpc>
-                <a:spcPct val="100000"/>
-              </a:lnSpc>
-            </a:pPr>
-            <a:r>
-              <a:rPr sz="2600" b="1">
-                <a:solidFill>
-                  <a:srgbClr val="B32418"/>
-                </a:solidFill>
-                <a:latin typeface="Segoe UI"/>
-              </a:rPr>
-              <a:t>+19</a:t>
-            </a:r>
-            <a:r>
-              <a:rPr sz="2600" b="1">
-                <a:solidFill>
-                  <a:srgbClr val="B32418"/>
-                </a:solidFill>
-                <a:latin typeface="Segoe UI"/>
-              </a:rPr>
-              <a:t> %</a:t>
-            </a:r>
-          </a:p>
-        </p:txBody>
-      </p:sp>
-      <p:sp>
-        <p:nvSpPr>
-          <p:cNvPr id="11" name="TextBox 10"/>
-          <p:cNvSpPr txBox="1"/>
-          <p:nvPr/>
-        </p:nvSpPr>
-        <p:spPr>
-          <a:xfrm>
-            <a:off x="722376" y="2414016"/>
-            <a:ext cx="1834835" cy="548640"/>
-          </a:xfrm>
-          <a:prstGeom prst="rect">
-            <a:avLst/>
-          </a:prstGeom>
-          <a:noFill/>
-        </p:spPr>
-        <p:txBody>
-          <a:bodyPr wrap="square" anchor="t" lIns="0" rIns="0" tIns="0" bIns="0">
-            <a:spAutoFit/>
-          </a:bodyPr>
-          <a:lstStyle/>
-          <a:p>
-            <a:pPr algn="l">
-              <a:lnSpc>
-                <a:spcPct val="130000"/>
-              </a:lnSpc>
-            </a:pPr>
-            <a:r>
-              <a:rPr sz="850" b="0">
-                <a:solidFill>
-                  <a:srgbClr val="5D6E64"/>
-                </a:solidFill>
-                <a:latin typeface="Segoe UI"/>
-              </a:rPr>
-              <a:t>depuis 1998 — de 3,11 à 3,72 M de personnes, alors que le taux d'accès était multiplié par 8</a:t>
-            </a:r>
-          </a:p>
-        </p:txBody>
-      </p:sp>
-      <p:sp>
-        <p:nvSpPr>
-          <p:cNvPr id="12" name="Rounded Rectangle 11"/>
-          <p:cNvSpPr/>
-          <p:nvPr/>
-        </p:nvSpPr>
-        <p:spPr>
-          <a:xfrm>
-            <a:off x="2794955" y="1572768"/>
-            <a:ext cx="2145731" cy="1481328"/>
-          </a:xfrm>
-          <a:prstGeom prst="roundRect">
-            <a:avLst>
-              <a:gd name="adj" fmla="val 5000"/>
-            </a:avLst>
-          </a:prstGeom>
-          <a:solidFill>
-            <a:srgbClr val="FFFFFF"/>
-          </a:solidFill>
-          <a:ln w="9525">
-            <a:solidFill>
-              <a:srgbClr val="D5DED8"/>
-            </a:solidFill>
-          </a:ln>
-          <a:effectLst/>
-        </p:spPr>
-        <p:style>
-          <a:lnRef idx="1">
-            <a:schemeClr val="accent1"/>
-          </a:lnRef>
-          <a:fillRef idx="3">
-            <a:schemeClr val="accent1"/>
-          </a:fillRef>
-          <a:effectRef idx="2">
-            <a:schemeClr val="accent1"/>
-          </a:effectRef>
-          <a:fontRef idx="minor">
-            <a:schemeClr val="lt1"/>
-          </a:fontRef>
-        </p:style>
-        <p:txBody>
-          <a:bodyPr rtlCol="0" anchor="ctr" wrap="square"/>
-          <a:lstStyle/>
-          <a:p>
-            <a:pPr algn="ctr"/>
-          </a:p>
-        </p:txBody>
-      </p:sp>
-      <p:sp>
-        <p:nvSpPr>
-          <p:cNvPr id="13" name="TextBox 12"/>
-          <p:cNvSpPr txBox="1"/>
-          <p:nvPr/>
-        </p:nvSpPr>
-        <p:spPr>
-          <a:xfrm>
-            <a:off x="2950403" y="1709928"/>
-            <a:ext cx="1834835" cy="182880"/>
-          </a:xfrm>
-          <a:prstGeom prst="rect">
-            <a:avLst/>
-          </a:prstGeom>
-          <a:noFill/>
-        </p:spPr>
-        <p:txBody>
-          <a:bodyPr wrap="square" anchor="t" lIns="0" rIns="0" tIns="0" bIns="0">
-            <a:spAutoFit/>
-          </a:bodyPr>
-          <a:lstStyle/>
-          <a:p>
-            <a:pPr algn="l">
-              <a:lnSpc>
-                <a:spcPct val="125000"/>
-              </a:lnSpc>
-            </a:pPr>
-            <a:r>
-              <a:rPr sz="800" b="1" spc="50">
-                <a:solidFill>
-                  <a:srgbClr val="0C1A14"/>
-                </a:solidFill>
-                <a:latin typeface="Segoe UI"/>
-              </a:rPr>
-              <a:t>RACCORDEMENTS MANQUANTS</a:t>
-            </a:r>
-          </a:p>
-        </p:txBody>
-      </p:sp>
-      <p:sp>
-        <p:nvSpPr>
-          <p:cNvPr id="14" name="TextBox 13"/>
-          <p:cNvSpPr txBox="1"/>
-          <p:nvPr/>
-        </p:nvSpPr>
-        <p:spPr>
-          <a:xfrm>
-            <a:off x="2950403" y="1938528"/>
-            <a:ext cx="1834835" cy="411480"/>
-          </a:xfrm>
-          <a:prstGeom prst="rect">
-            <a:avLst/>
-          </a:prstGeom>
-          <a:noFill/>
-        </p:spPr>
-        <p:txBody>
-          <a:bodyPr wrap="square" anchor="t" lIns="0" rIns="0" tIns="0" bIns="0">
-            <a:spAutoFit/>
-          </a:bodyPr>
-          <a:lstStyle/>
-          <a:p>
-            <a:pPr algn="l">
-              <a:lnSpc>
-                <a:spcPct val="100000"/>
-              </a:lnSpc>
-            </a:pPr>
-            <a:r>
-              <a:rPr sz="2600" b="1">
-                <a:solidFill>
-                  <a:srgbClr val="B32418"/>
-                </a:solidFill>
-                <a:latin typeface="Segoe UI"/>
-              </a:rPr>
-              <a:t>13 800</a:t>
-            </a:r>
-            <a:r>
-              <a:rPr sz="2600" b="1">
-                <a:solidFill>
-                  <a:srgbClr val="B32418"/>
-                </a:solidFill>
-                <a:latin typeface="Segoe UI"/>
-              </a:rPr>
-              <a:t> /an</a:t>
-            </a:r>
-          </a:p>
-        </p:txBody>
-      </p:sp>
-      <p:sp>
-        <p:nvSpPr>
-          <p:cNvPr id="15" name="TextBox 14"/>
-          <p:cNvSpPr txBox="1"/>
-          <p:nvPr/>
-        </p:nvSpPr>
-        <p:spPr>
-          <a:xfrm>
-            <a:off x="2950403" y="2414016"/>
-            <a:ext cx="1834835" cy="548640"/>
-          </a:xfrm>
-          <a:prstGeom prst="rect">
-            <a:avLst/>
-          </a:prstGeom>
-          <a:noFill/>
-        </p:spPr>
-        <p:txBody>
-          <a:bodyPr wrap="square" anchor="t" lIns="0" rIns="0" tIns="0" bIns="0">
-            <a:spAutoFit/>
-          </a:bodyPr>
-          <a:lstStyle/>
-          <a:p>
-            <a:pPr algn="l">
-              <a:lnSpc>
-                <a:spcPct val="130000"/>
-              </a:lnSpc>
-            </a:pPr>
-            <a:r>
-              <a:rPr sz="850" b="0">
-                <a:solidFill>
-                  <a:srgbClr val="5D6E64"/>
-                </a:solidFill>
-                <a:latin typeface="Segoe UI"/>
-              </a:rPr>
-              <a:t>le déficit annuel face à la seule croissance rurale, sur 2012–2022</a:t>
-            </a:r>
-          </a:p>
-        </p:txBody>
-      </p:sp>
-      <p:sp>
-        <p:nvSpPr>
-          <p:cNvPr id="16" name="Rounded Rectangle 15"/>
-          <p:cNvSpPr/>
-          <p:nvPr/>
-        </p:nvSpPr>
-        <p:spPr>
-          <a:xfrm>
-            <a:off x="5022982" y="1572768"/>
-            <a:ext cx="2145731" cy="1481328"/>
-          </a:xfrm>
-          <a:prstGeom prst="roundRect">
-            <a:avLst>
-              <a:gd name="adj" fmla="val 5000"/>
-            </a:avLst>
-          </a:prstGeom>
-          <a:solidFill>
-            <a:srgbClr val="FFFFFF"/>
-          </a:solidFill>
-          <a:ln w="9525">
-            <a:solidFill>
-              <a:srgbClr val="D5DED8"/>
-            </a:solidFill>
-          </a:ln>
-          <a:effectLst/>
-        </p:spPr>
-        <p:style>
-          <a:lnRef idx="1">
-            <a:schemeClr val="accent1"/>
-          </a:lnRef>
-          <a:fillRef idx="3">
-            <a:schemeClr val="accent1"/>
-          </a:fillRef>
-          <a:effectRef idx="2">
-            <a:schemeClr val="accent1"/>
-          </a:effectRef>
-          <a:fontRef idx="minor">
-            <a:schemeClr val="lt1"/>
-          </a:fontRef>
-        </p:style>
-        <p:txBody>
-          <a:bodyPr rtlCol="0" anchor="ctr" wrap="square"/>
-          <a:lstStyle/>
-          <a:p>
-            <a:pPr algn="ctr"/>
-          </a:p>
-        </p:txBody>
-      </p:sp>
-      <p:sp>
-        <p:nvSpPr>
-          <p:cNvPr id="17" name="TextBox 16"/>
-          <p:cNvSpPr txBox="1"/>
-          <p:nvPr/>
-        </p:nvSpPr>
-        <p:spPr>
-          <a:xfrm>
-            <a:off x="5178430" y="1709928"/>
-            <a:ext cx="1834835" cy="182880"/>
-          </a:xfrm>
-          <a:prstGeom prst="rect">
-            <a:avLst/>
-          </a:prstGeom>
-          <a:noFill/>
-        </p:spPr>
-        <p:txBody>
-          <a:bodyPr wrap="square" anchor="t" lIns="0" rIns="0" tIns="0" bIns="0">
-            <a:spAutoFit/>
-          </a:bodyPr>
-          <a:lstStyle/>
-          <a:p>
-            <a:pPr algn="l">
-              <a:lnSpc>
-                <a:spcPct val="125000"/>
-              </a:lnSpc>
-            </a:pPr>
-            <a:r>
-              <a:rPr sz="800" b="1" spc="50">
-                <a:solidFill>
-                  <a:srgbClr val="0C1A14"/>
-                </a:solidFill>
-                <a:latin typeface="Segoe UI"/>
-              </a:rPr>
-              <a:t>MÉNAGES AU BOIS OU AU CHARBON</a:t>
-            </a:r>
-          </a:p>
-        </p:txBody>
-      </p:sp>
-      <p:sp>
-        <p:nvSpPr>
-          <p:cNvPr id="18" name="TextBox 17"/>
-          <p:cNvSpPr txBox="1"/>
-          <p:nvPr/>
-        </p:nvSpPr>
-        <p:spPr>
-          <a:xfrm>
-            <a:off x="5178430" y="1938528"/>
-            <a:ext cx="1834835" cy="411480"/>
-          </a:xfrm>
-          <a:prstGeom prst="rect">
-            <a:avLst/>
-          </a:prstGeom>
-          <a:noFill/>
-        </p:spPr>
-        <p:txBody>
-          <a:bodyPr wrap="square" anchor="t" lIns="0" rIns="0" tIns="0" bIns="0">
-            <a:spAutoFit/>
-          </a:bodyPr>
-          <a:lstStyle/>
-          <a:p>
-            <a:pPr algn="l">
-              <a:lnSpc>
-                <a:spcPct val="100000"/>
-              </a:lnSpc>
-            </a:pPr>
-            <a:r>
-              <a:rPr sz="2600" b="1">
-                <a:solidFill>
-                  <a:srgbClr val="B32418"/>
-                </a:solidFill>
-                <a:latin typeface="Segoe UI"/>
-              </a:rPr>
-              <a:t>89</a:t>
-            </a:r>
-            <a:r>
-              <a:rPr sz="2600" b="1">
-                <a:solidFill>
-                  <a:srgbClr val="B32418"/>
-                </a:solidFill>
-                <a:latin typeface="Segoe UI"/>
-              </a:rPr>
-              <a:t> %</a:t>
-            </a:r>
-          </a:p>
-        </p:txBody>
-      </p:sp>
-      <p:sp>
-        <p:nvSpPr>
-          <p:cNvPr id="19" name="TextBox 18"/>
-          <p:cNvSpPr txBox="1"/>
-          <p:nvPr/>
-        </p:nvSpPr>
-        <p:spPr>
-          <a:xfrm>
-            <a:off x="5178430" y="2414016"/>
-            <a:ext cx="1834835" cy="548640"/>
-          </a:xfrm>
-          <a:prstGeom prst="rect">
-            <a:avLst/>
-          </a:prstGeom>
-          <a:noFill/>
-        </p:spPr>
-        <p:txBody>
-          <a:bodyPr wrap="square" anchor="t" lIns="0" rIns="0" tIns="0" bIns="0">
-            <a:spAutoFit/>
-          </a:bodyPr>
-          <a:lstStyle/>
-          <a:p>
-            <a:pPr algn="l">
-              <a:lnSpc>
-                <a:spcPct val="130000"/>
-              </a:lnSpc>
-            </a:pPr>
-            <a:r>
-              <a:rPr sz="850" b="0">
-                <a:solidFill>
-                  <a:srgbClr val="5D6E64"/>
-                </a:solidFill>
-                <a:latin typeface="Segoe UI"/>
-              </a:rPr>
-              <a:t>en 2017, contre 90 % en 2014 : aucun recul</a:t>
-            </a:r>
-          </a:p>
-        </p:txBody>
-      </p:sp>
-      <p:sp>
-        <p:nvSpPr>
-          <p:cNvPr id="20" name="Rounded Rectangle 19"/>
-          <p:cNvSpPr/>
-          <p:nvPr/>
-        </p:nvSpPr>
-        <p:spPr>
-          <a:xfrm>
-            <a:off x="7251009" y="1572768"/>
-            <a:ext cx="2145731" cy="1481328"/>
-          </a:xfrm>
-          <a:prstGeom prst="roundRect">
-            <a:avLst>
-              <a:gd name="adj" fmla="val 5000"/>
-            </a:avLst>
-          </a:prstGeom>
-          <a:solidFill>
-            <a:srgbClr val="FFFFFF"/>
-          </a:solidFill>
-          <a:ln w="9525">
-            <a:solidFill>
-              <a:srgbClr val="D5DED8"/>
-            </a:solidFill>
-          </a:ln>
-          <a:effectLst/>
-        </p:spPr>
-        <p:style>
-          <a:lnRef idx="1">
-            <a:schemeClr val="accent1"/>
-          </a:lnRef>
-          <a:fillRef idx="3">
-            <a:schemeClr val="accent1"/>
-          </a:fillRef>
-          <a:effectRef idx="2">
-            <a:schemeClr val="accent1"/>
-          </a:effectRef>
-          <a:fontRef idx="minor">
-            <a:schemeClr val="lt1"/>
-          </a:fontRef>
-        </p:style>
-        <p:txBody>
-          <a:bodyPr rtlCol="0" anchor="ctr" wrap="square"/>
-          <a:lstStyle/>
-          <a:p>
-            <a:pPr algn="ctr"/>
-          </a:p>
-        </p:txBody>
-      </p:sp>
-      <p:sp>
-        <p:nvSpPr>
-          <p:cNvPr id="21" name="TextBox 20"/>
-          <p:cNvSpPr txBox="1"/>
-          <p:nvPr/>
-        </p:nvSpPr>
-        <p:spPr>
-          <a:xfrm>
-            <a:off x="7406457" y="1709928"/>
-            <a:ext cx="1834835" cy="182880"/>
-          </a:xfrm>
-          <a:prstGeom prst="rect">
-            <a:avLst/>
-          </a:prstGeom>
-          <a:noFill/>
-        </p:spPr>
-        <p:txBody>
-          <a:bodyPr wrap="square" anchor="t" lIns="0" rIns="0" tIns="0" bIns="0">
-            <a:spAutoFit/>
-          </a:bodyPr>
-          <a:lstStyle/>
-          <a:p>
-            <a:pPr algn="l">
-              <a:lnSpc>
-                <a:spcPct val="125000"/>
-              </a:lnSpc>
-            </a:pPr>
-            <a:r>
-              <a:rPr sz="800" b="1" spc="50">
-                <a:solidFill>
-                  <a:srgbClr val="0C1A14"/>
-                </a:solidFill>
-                <a:latin typeface="Segoe UI"/>
-              </a:rPr>
-              <a:t>FORÊT PERDUE CHAQUE ANNÉE</a:t>
-            </a:r>
-          </a:p>
-        </p:txBody>
-      </p:sp>
-      <p:sp>
-        <p:nvSpPr>
-          <p:cNvPr id="22" name="TextBox 21"/>
-          <p:cNvSpPr txBox="1"/>
-          <p:nvPr/>
-        </p:nvSpPr>
-        <p:spPr>
-          <a:xfrm>
-            <a:off x="7406457" y="1938528"/>
-            <a:ext cx="1834835" cy="411480"/>
-          </a:xfrm>
-          <a:prstGeom prst="rect">
-            <a:avLst/>
-          </a:prstGeom>
-          <a:noFill/>
-        </p:spPr>
-        <p:txBody>
-          <a:bodyPr wrap="square" anchor="t" lIns="0" rIns="0" tIns="0" bIns="0">
-            <a:spAutoFit/>
-          </a:bodyPr>
-          <a:lstStyle/>
-          <a:p>
-            <a:pPr algn="l">
-              <a:lnSpc>
-                <a:spcPct val="100000"/>
-              </a:lnSpc>
-            </a:pPr>
-            <a:r>
-              <a:rPr sz="2600" b="1">
-                <a:solidFill>
-                  <a:srgbClr val="B32418"/>
-                </a:solidFill>
-                <a:latin typeface="Segoe UI"/>
-              </a:rPr>
-              <a:t>2 960</a:t>
-            </a:r>
-            <a:r>
-              <a:rPr sz="2600" b="1">
-                <a:solidFill>
-                  <a:srgbClr val="B32418"/>
-                </a:solidFill>
-                <a:latin typeface="Segoe UI"/>
-              </a:rPr>
-              <a:t> ha</a:t>
-            </a:r>
-          </a:p>
-        </p:txBody>
-      </p:sp>
-      <p:sp>
-        <p:nvSpPr>
-          <p:cNvPr id="23" name="TextBox 22"/>
-          <p:cNvSpPr txBox="1"/>
-          <p:nvPr/>
-        </p:nvSpPr>
-        <p:spPr>
-          <a:xfrm>
-            <a:off x="7406457" y="2414016"/>
-            <a:ext cx="1834835" cy="548640"/>
-          </a:xfrm>
-          <a:prstGeom prst="rect">
-            <a:avLst/>
-          </a:prstGeom>
-          <a:noFill/>
-        </p:spPr>
-        <p:txBody>
-          <a:bodyPr wrap="square" anchor="t" lIns="0" rIns="0" tIns="0" bIns="0">
-            <a:spAutoFit/>
-          </a:bodyPr>
-          <a:lstStyle/>
-          <a:p>
-            <a:pPr algn="l">
-              <a:lnSpc>
-                <a:spcPct val="130000"/>
-              </a:lnSpc>
-            </a:pPr>
-            <a:r>
-              <a:rPr sz="850" b="0">
-                <a:solidFill>
-                  <a:srgbClr val="5D6E64"/>
-                </a:solidFill>
-                <a:latin typeface="Segoe UI"/>
-              </a:rPr>
-              <a:t>dans le régime en cours depuis 2000 — 3.1 fois moins que dans les années 1990, mais sans reprise</a:t>
-            </a:r>
-          </a:p>
-        </p:txBody>
-      </p:sp>
-      <p:sp>
-        <p:nvSpPr>
-          <p:cNvPr id="24" name="Rounded Rectangle 23"/>
-          <p:cNvSpPr/>
-          <p:nvPr/>
-        </p:nvSpPr>
-        <p:spPr>
-          <a:xfrm>
-            <a:off x="9479036" y="1572768"/>
-            <a:ext cx="2145731" cy="1481328"/>
-          </a:xfrm>
-          <a:prstGeom prst="roundRect">
-            <a:avLst>
-              <a:gd name="adj" fmla="val 5000"/>
-            </a:avLst>
-          </a:prstGeom>
-          <a:solidFill>
-            <a:srgbClr val="FFFFFF"/>
-          </a:solidFill>
-          <a:ln w="9525">
-            <a:solidFill>
-              <a:srgbClr val="D5DED8"/>
-            </a:solidFill>
-          </a:ln>
-          <a:effectLst/>
-        </p:spPr>
-        <p:style>
-          <a:lnRef idx="1">
-            <a:schemeClr val="accent1"/>
-          </a:lnRef>
-          <a:fillRef idx="3">
-            <a:schemeClr val="accent1"/>
-          </a:fillRef>
-          <a:effectRef idx="2">
-            <a:schemeClr val="accent1"/>
-          </a:effectRef>
-          <a:fontRef idx="minor">
-            <a:schemeClr val="lt1"/>
-          </a:fontRef>
-        </p:style>
-        <p:txBody>
-          <a:bodyPr rtlCol="0" anchor="ctr" wrap="square"/>
-          <a:lstStyle/>
-          <a:p>
-            <a:pPr algn="ctr"/>
-          </a:p>
-        </p:txBody>
-      </p:sp>
-      <p:sp>
-        <p:nvSpPr>
-          <p:cNvPr id="25" name="TextBox 24"/>
-          <p:cNvSpPr txBox="1"/>
-          <p:nvPr/>
-        </p:nvSpPr>
-        <p:spPr>
-          <a:xfrm>
-            <a:off x="9634484" y="1709928"/>
-            <a:ext cx="1834835" cy="182880"/>
-          </a:xfrm>
-          <a:prstGeom prst="rect">
-            <a:avLst/>
-          </a:prstGeom>
-          <a:noFill/>
-        </p:spPr>
-        <p:txBody>
-          <a:bodyPr wrap="square" anchor="t" lIns="0" rIns="0" tIns="0" bIns="0">
-            <a:spAutoFit/>
-          </a:bodyPr>
-          <a:lstStyle/>
-          <a:p>
-            <a:pPr algn="l">
-              <a:lnSpc>
-                <a:spcPct val="125000"/>
-              </a:lnSpc>
-            </a:pPr>
-            <a:r>
-              <a:rPr sz="800" b="1" spc="50">
-                <a:solidFill>
-                  <a:srgbClr val="0C1A14"/>
-                </a:solidFill>
-                <a:latin typeface="Segoe UI"/>
-              </a:rPr>
-              <a:t>EXPANSION AGRICOLE</a:t>
-            </a:r>
-          </a:p>
-        </p:txBody>
-      </p:sp>
-      <p:sp>
-        <p:nvSpPr>
-          <p:cNvPr id="26" name="TextBox 25"/>
-          <p:cNvSpPr txBox="1"/>
-          <p:nvPr/>
-        </p:nvSpPr>
-        <p:spPr>
-          <a:xfrm>
-            <a:off x="9634484" y="1938528"/>
-            <a:ext cx="1834835" cy="411480"/>
-          </a:xfrm>
-          <a:prstGeom prst="rect">
-            <a:avLst/>
-          </a:prstGeom>
-          <a:noFill/>
-        </p:spPr>
-        <p:txBody>
-          <a:bodyPr wrap="square" anchor="t" lIns="0" rIns="0" tIns="0" bIns="0">
-            <a:spAutoFit/>
-          </a:bodyPr>
-          <a:lstStyle/>
-          <a:p>
-            <a:pPr algn="l">
-              <a:lnSpc>
-                <a:spcPct val="100000"/>
-              </a:lnSpc>
-            </a:pPr>
-            <a:r>
-              <a:rPr sz="2600" b="1">
-                <a:solidFill>
-                  <a:srgbClr val="B87407"/>
-                </a:solidFill>
-                <a:latin typeface="Segoe UI"/>
-              </a:rPr>
-              <a:t>× 5.0</a:t>
-            </a:r>
-            <a:r>
-              <a:rPr sz="2600" b="1">
-                <a:solidFill>
-                  <a:srgbClr val="B87407"/>
-                </a:solidFill>
-                <a:latin typeface="Segoe UI"/>
-              </a:rPr>
-              <a:t/>
-            </a:r>
-          </a:p>
-        </p:txBody>
-      </p:sp>
-      <p:sp>
-        <p:nvSpPr>
-          <p:cNvPr id="27" name="TextBox 26"/>
-          <p:cNvSpPr txBox="1"/>
-          <p:nvPr/>
-        </p:nvSpPr>
-        <p:spPr>
-          <a:xfrm>
-            <a:off x="9634484" y="2414016"/>
-            <a:ext cx="1834835" cy="548640"/>
-          </a:xfrm>
-          <a:prstGeom prst="rect">
-            <a:avLst/>
-          </a:prstGeom>
-          <a:noFill/>
-        </p:spPr>
-        <p:txBody>
-          <a:bodyPr wrap="square" anchor="t" lIns="0" rIns="0" tIns="0" bIns="0">
-            <a:spAutoFit/>
-          </a:bodyPr>
-          <a:lstStyle/>
-          <a:p>
-            <a:pPr algn="l">
-              <a:lnSpc>
-                <a:spcPct val="130000"/>
-              </a:lnSpc>
-            </a:pPr>
-            <a:r>
-              <a:rPr sz="850" b="0">
-                <a:solidFill>
-                  <a:srgbClr val="5D6E64"/>
-                </a:solidFill>
-                <a:latin typeface="Segoe UI"/>
-              </a:rPr>
-              <a:t>ce que la forêt perd : 6 600 km² gagnés par l'agriculture contre 1 317 km² de forêt perdus</a:t>
-            </a:r>
-          </a:p>
-        </p:txBody>
-      </p:sp>
-      <p:sp>
-        <p:nvSpPr>
-          <p:cNvPr id="28" name="Rounded Rectangle 27"/>
-          <p:cNvSpPr/>
-          <p:nvPr/>
-        </p:nvSpPr>
-        <p:spPr>
-          <a:xfrm>
-            <a:off x="566928" y="3182112"/>
-            <a:ext cx="11057839" cy="1097280"/>
-          </a:xfrm>
-          <a:prstGeom prst="roundRect">
-            <a:avLst>
-              <a:gd name="adj" fmla="val 5000"/>
-            </a:avLst>
-          </a:prstGeom>
-          <a:solidFill>
-            <a:srgbClr val="FBE7E4"/>
-          </a:solidFill>
-          <a:ln>
-            <a:noFill/>
-          </a:ln>
-          <a:effectLst/>
-        </p:spPr>
-        <p:style>
-          <a:lnRef idx="1">
-            <a:schemeClr val="accent1"/>
-          </a:lnRef>
-          <a:fillRef idx="3">
-            <a:schemeClr val="accent1"/>
-          </a:fillRef>
-          <a:effectRef idx="2">
-            <a:schemeClr val="accent1"/>
-          </a:effectRef>
-          <a:fontRef idx="minor">
-            <a:schemeClr val="lt1"/>
-          </a:fontRef>
-        </p:style>
-        <p:txBody>
-          <a:bodyPr rtlCol="0" anchor="ctr" wrap="square"/>
-          <a:lstStyle/>
-          <a:p>
-            <a:pPr algn="ctr"/>
-          </a:p>
-        </p:txBody>
-      </p:sp>
-      <p:sp>
-        <p:nvSpPr>
-          <p:cNvPr id="29" name="TextBox 28"/>
-          <p:cNvSpPr txBox="1"/>
-          <p:nvPr/>
-        </p:nvSpPr>
-        <p:spPr>
-          <a:xfrm>
-            <a:off x="749808" y="3319272"/>
-            <a:ext cx="10692079" cy="164592"/>
-          </a:xfrm>
-          <a:prstGeom prst="rect">
-            <a:avLst/>
-          </a:prstGeom>
-          <a:noFill/>
-        </p:spPr>
-        <p:txBody>
-          <a:bodyPr wrap="square" anchor="t" lIns="0" rIns="0" tIns="0" bIns="0">
-            <a:spAutoFit/>
-          </a:bodyPr>
-          <a:lstStyle/>
-          <a:p>
-            <a:pPr algn="l">
-              <a:lnSpc>
-                <a:spcPct val="125000"/>
-              </a:lnSpc>
-            </a:pPr>
-            <a:r>
-              <a:rPr sz="850" b="1" spc="60">
-                <a:solidFill>
-                  <a:srgbClr val="B32418"/>
-                </a:solidFill>
-                <a:latin typeface="Segoe UI"/>
-              </a:rPr>
-              <a:t>LE RÉSULTAT QUI COMMANDE TOUT LE RESTE</a:t>
-            </a:r>
-          </a:p>
-        </p:txBody>
-      </p:sp>
-      <p:sp>
-        <p:nvSpPr>
-          <p:cNvPr id="30" name="TextBox 29"/>
-          <p:cNvSpPr txBox="1"/>
-          <p:nvPr/>
-        </p:nvSpPr>
-        <p:spPr>
-          <a:xfrm>
-            <a:off x="749808" y="3547872"/>
-            <a:ext cx="10692079" cy="640080"/>
-          </a:xfrm>
-          <a:prstGeom prst="rect">
-            <a:avLst/>
-          </a:prstGeom>
-          <a:noFill/>
-        </p:spPr>
-        <p:txBody>
-          <a:bodyPr wrap="square" anchor="t" lIns="0" rIns="0" tIns="0" bIns="0">
-            <a:spAutoFit/>
-          </a:bodyPr>
-          <a:lstStyle/>
-          <a:p>
-            <a:pPr algn="l">
-              <a:lnSpc>
-                <a:spcPct val="135000"/>
-              </a:lnSpc>
-            </a:pPr>
-            <a:r>
-              <a:rPr sz="1100" b="0">
-                <a:solidFill>
-                  <a:srgbClr val="0C1A14"/>
-                </a:solidFill>
-                <a:latin typeface="Segoe UI"/>
-              </a:rPr>
-              <a:t>Le taux d'accès rural a été multiplié par 8 depuis 1998 ; le nombre de ruraux privés d'électricité a augmenté de 19 % sur la même période, parce que la population rurale croît plus vite que le réseau. Piloter sur le taux, c'est piloter sur l'indicateur qui progresse pendant que le problème grandit. Au rythme observé (+0,91 pt/an), l'accès universel rural tombe en 2104 : tenir 2030 demanderait +9,4 pt/an, soit 10 fois plus vite.</a:t>
-            </a:r>
-          </a:p>
-        </p:txBody>
-      </p:sp>
-      <p:sp>
-        <p:nvSpPr>
-          <p:cNvPr id="31" name="TextBox 30"/>
-          <p:cNvSpPr txBox="1"/>
-          <p:nvPr/>
-        </p:nvSpPr>
-        <p:spPr>
-          <a:xfrm>
-            <a:off x="566928" y="4443984"/>
-            <a:ext cx="11057839" cy="182880"/>
-          </a:xfrm>
-          <a:prstGeom prst="rect">
-            <a:avLst/>
-          </a:prstGeom>
-          <a:noFill/>
-        </p:spPr>
-        <p:txBody>
-          <a:bodyPr wrap="square" anchor="t" lIns="0" rIns="0" tIns="0" bIns="0">
-            <a:spAutoFit/>
-          </a:bodyPr>
-          <a:lstStyle/>
-          <a:p>
-            <a:pPr algn="l">
-              <a:lnSpc>
-                <a:spcPct val="125000"/>
-              </a:lnSpc>
-            </a:pPr>
-            <a:r>
-              <a:rPr sz="1100" b="1" spc="60">
-                <a:solidFill>
-                  <a:srgbClr val="0C1A14"/>
-                </a:solidFill>
-                <a:latin typeface="Segoe UI"/>
-              </a:rPr>
-              <a:t>QUATRE LEVIERS, DANS CET ORDRE DE PRIORITÉ</a:t>
-            </a:r>
-          </a:p>
-        </p:txBody>
-      </p:sp>
-      <p:sp>
-        <p:nvSpPr>
-          <p:cNvPr id="32" name="Rounded Rectangle 31"/>
-          <p:cNvSpPr/>
-          <p:nvPr/>
-        </p:nvSpPr>
-        <p:spPr>
-          <a:xfrm>
-            <a:off x="566928" y="4718304"/>
-            <a:ext cx="2702737" cy="1481328"/>
-          </a:xfrm>
-          <a:prstGeom prst="roundRect">
-            <a:avLst>
-              <a:gd name="adj" fmla="val 5000"/>
-            </a:avLst>
-          </a:prstGeom>
-          <a:solidFill>
-            <a:srgbClr val="FFFFFF"/>
-          </a:solidFill>
-          <a:ln w="9525">
-            <a:solidFill>
-              <a:srgbClr val="D5DED8"/>
-            </a:solidFill>
-          </a:ln>
-          <a:effectLst/>
-        </p:spPr>
-        <p:style>
-          <a:lnRef idx="1">
-            <a:schemeClr val="accent1"/>
-          </a:lnRef>
-          <a:fillRef idx="3">
-            <a:schemeClr val="accent1"/>
-          </a:fillRef>
-          <a:effectRef idx="2">
-            <a:schemeClr val="accent1"/>
-          </a:effectRef>
-          <a:fontRef idx="minor">
-            <a:schemeClr val="lt1"/>
-          </a:fontRef>
-        </p:style>
-        <p:txBody>
-          <a:bodyPr rtlCol="0" anchor="ctr" wrap="square"/>
-          <a:lstStyle/>
-          <a:p>
-            <a:pPr algn="ctr"/>
-          </a:p>
-        </p:txBody>
-      </p:sp>
-      <p:sp>
-        <p:nvSpPr>
-          <p:cNvPr id="33" name="TextBox 32"/>
-          <p:cNvSpPr txBox="1"/>
-          <p:nvPr/>
-        </p:nvSpPr>
-        <p:spPr>
-          <a:xfrm>
-            <a:off x="713232" y="4809744"/>
-            <a:ext cx="274320" cy="292608"/>
-          </a:xfrm>
-          <a:prstGeom prst="rect">
-            <a:avLst/>
-          </a:prstGeom>
-          <a:noFill/>
-        </p:spPr>
-        <p:txBody>
-          <a:bodyPr wrap="square" anchor="t" lIns="0" rIns="0" tIns="0" bIns="0">
-            <a:spAutoFit/>
-          </a:bodyPr>
-          <a:lstStyle/>
-          <a:p>
-            <a:pPr algn="l">
-              <a:lnSpc>
-                <a:spcPct val="100000"/>
-              </a:lnSpc>
-            </a:pPr>
-            <a:r>
-              <a:rPr sz="1900" b="1">
-                <a:solidFill>
-                  <a:srgbClr val="B32418"/>
-                </a:solidFill>
-                <a:latin typeface="Segoe UI"/>
-              </a:rPr>
-              <a:t>1</a:t>
-            </a:r>
-          </a:p>
-        </p:txBody>
-      </p:sp>
-      <p:sp>
-        <p:nvSpPr>
-          <p:cNvPr id="34" name="TextBox 33"/>
-          <p:cNvSpPr txBox="1"/>
-          <p:nvPr/>
-        </p:nvSpPr>
-        <p:spPr>
-          <a:xfrm>
-            <a:off x="1024128" y="4846320"/>
-            <a:ext cx="2135809" cy="256032"/>
-          </a:xfrm>
-          <a:prstGeom prst="rect">
-            <a:avLst/>
-          </a:prstGeom>
-          <a:noFill/>
-        </p:spPr>
-        <p:txBody>
-          <a:bodyPr wrap="square" anchor="t" lIns="0" rIns="0" tIns="0" bIns="0">
-            <a:spAutoFit/>
-          </a:bodyPr>
-          <a:lstStyle/>
-          <a:p>
-            <a:pPr algn="l">
-              <a:lnSpc>
-                <a:spcPct val="110000"/>
-              </a:lnSpc>
-            </a:pPr>
-            <a:r>
-              <a:rPr sz="1150" b="1">
-                <a:solidFill>
-                  <a:srgbClr val="0C1A14"/>
-                </a:solidFill>
-                <a:latin typeface="Segoe UI"/>
-              </a:rPr>
-              <a:t>Cuisson propre</a:t>
-            </a:r>
-          </a:p>
-        </p:txBody>
-      </p:sp>
-      <p:sp>
-        <p:nvSpPr>
-          <p:cNvPr id="35" name="TextBox 34"/>
-          <p:cNvSpPr txBox="1"/>
-          <p:nvPr/>
-        </p:nvSpPr>
-        <p:spPr>
-          <a:xfrm>
-            <a:off x="713232" y="5285232"/>
-            <a:ext cx="2410129" cy="274320"/>
-          </a:xfrm>
-          <a:prstGeom prst="rect">
-            <a:avLst/>
-          </a:prstGeom>
-          <a:noFill/>
-        </p:spPr>
-        <p:txBody>
-          <a:bodyPr wrap="square" anchor="t" lIns="0" rIns="0" tIns="0" bIns="0">
-            <a:spAutoFit/>
-          </a:bodyPr>
-          <a:lstStyle/>
-          <a:p>
-            <a:pPr algn="l">
-              <a:lnSpc>
-                <a:spcPct val="125000"/>
-              </a:lnSpc>
-            </a:pPr>
-            <a:r>
-              <a:rPr sz="900" b="1">
-                <a:solidFill>
-                  <a:srgbClr val="B32418"/>
-                </a:solidFill>
-                <a:latin typeface="Segoe UI"/>
-              </a:rPr>
-              <a:t>8,1 M de personnes</a:t>
-            </a:r>
-          </a:p>
-        </p:txBody>
-      </p:sp>
-      <p:sp>
-        <p:nvSpPr>
-          <p:cNvPr id="36" name="TextBox 35"/>
-          <p:cNvSpPr txBox="1"/>
-          <p:nvPr/>
-        </p:nvSpPr>
-        <p:spPr>
-          <a:xfrm>
-            <a:off x="713232" y="5577840"/>
-            <a:ext cx="2410129" cy="530352"/>
-          </a:xfrm>
-          <a:prstGeom prst="rect">
-            <a:avLst/>
-          </a:prstGeom>
-          <a:noFill/>
-        </p:spPr>
-        <p:txBody>
-          <a:bodyPr wrap="square" anchor="t" lIns="0" rIns="0" tIns="0" bIns="0">
-            <a:spAutoFit/>
-          </a:bodyPr>
-          <a:lstStyle/>
-          <a:p>
-            <a:pPr algn="l">
-              <a:lnSpc>
-                <a:spcPct val="125000"/>
-              </a:lnSpc>
-            </a:pPr>
-            <a:r>
-              <a:rPr sz="850" b="0">
-                <a:solidFill>
-                  <a:srgbClr val="5D6E64"/>
-                </a:solidFill>
-                <a:latin typeface="Segoe UI"/>
-              </a:rPr>
-              <a:t>De 0,9 % à 15 % d'accès rural à une cuisson propre en 2030</a:t>
-            </a:r>
-          </a:p>
-        </p:txBody>
-      </p:sp>
-      <p:sp>
-        <p:nvSpPr>
-          <p:cNvPr id="37" name="Rounded Rectangle 36"/>
-          <p:cNvSpPr/>
-          <p:nvPr/>
-        </p:nvSpPr>
-        <p:spPr>
-          <a:xfrm>
-            <a:off x="3351961" y="4718304"/>
-            <a:ext cx="2702737" cy="1481328"/>
-          </a:xfrm>
-          <a:prstGeom prst="roundRect">
-            <a:avLst>
-              <a:gd name="adj" fmla="val 5000"/>
-            </a:avLst>
-          </a:prstGeom>
-          <a:solidFill>
-            <a:srgbClr val="FFFFFF"/>
-          </a:solidFill>
-          <a:ln w="9525">
-            <a:solidFill>
-              <a:srgbClr val="D5DED8"/>
-            </a:solidFill>
-          </a:ln>
-          <a:effectLst/>
-        </p:spPr>
-        <p:style>
-          <a:lnRef idx="1">
-            <a:schemeClr val="accent1"/>
-          </a:lnRef>
-          <a:fillRef idx="3">
-            <a:schemeClr val="accent1"/>
-          </a:fillRef>
-          <a:effectRef idx="2">
-            <a:schemeClr val="accent1"/>
-          </a:effectRef>
-          <a:fontRef idx="minor">
-            <a:schemeClr val="lt1"/>
-          </a:fontRef>
-        </p:style>
-        <p:txBody>
-          <a:bodyPr rtlCol="0" anchor="ctr" wrap="square"/>
-          <a:lstStyle/>
-          <a:p>
-            <a:pPr algn="ctr"/>
-          </a:p>
-        </p:txBody>
-      </p:sp>
-      <p:sp>
-        <p:nvSpPr>
-          <p:cNvPr id="38" name="TextBox 37"/>
-          <p:cNvSpPr txBox="1"/>
-          <p:nvPr/>
-        </p:nvSpPr>
-        <p:spPr>
-          <a:xfrm>
-            <a:off x="3498265" y="4809744"/>
-            <a:ext cx="274320" cy="292608"/>
-          </a:xfrm>
-          <a:prstGeom prst="rect">
-            <a:avLst/>
-          </a:prstGeom>
-          <a:noFill/>
-        </p:spPr>
-        <p:txBody>
-          <a:bodyPr wrap="square" anchor="t" lIns="0" rIns="0" tIns="0" bIns="0">
-            <a:spAutoFit/>
-          </a:bodyPr>
-          <a:lstStyle/>
-          <a:p>
-            <a:pPr algn="l">
-              <a:lnSpc>
-                <a:spcPct val="100000"/>
-              </a:lnSpc>
-            </a:pPr>
-            <a:r>
-              <a:rPr sz="1900" b="1">
-                <a:solidFill>
-                  <a:srgbClr val="B87407"/>
-                </a:solidFill>
-                <a:latin typeface="Segoe UI"/>
-              </a:rPr>
-              <a:t>2</a:t>
-            </a:r>
-          </a:p>
-        </p:txBody>
-      </p:sp>
-      <p:sp>
-        <p:nvSpPr>
-          <p:cNvPr id="39" name="TextBox 38"/>
-          <p:cNvSpPr txBox="1"/>
-          <p:nvPr/>
-        </p:nvSpPr>
-        <p:spPr>
-          <a:xfrm>
-            <a:off x="3809161" y="4846320"/>
-            <a:ext cx="2135809" cy="256032"/>
-          </a:xfrm>
-          <a:prstGeom prst="rect">
-            <a:avLst/>
-          </a:prstGeom>
-          <a:noFill/>
-        </p:spPr>
-        <p:txBody>
-          <a:bodyPr wrap="square" anchor="t" lIns="0" rIns="0" tIns="0" bIns="0">
-            <a:spAutoFit/>
-          </a:bodyPr>
-          <a:lstStyle/>
-          <a:p>
-            <a:pPr algn="l">
-              <a:lnSpc>
-                <a:spcPct val="110000"/>
-              </a:lnSpc>
-            </a:pPr>
-            <a:r>
-              <a:rPr sz="1150" b="1">
-                <a:solidFill>
-                  <a:srgbClr val="0C1A14"/>
-                </a:solidFill>
-                <a:latin typeface="Segoe UI"/>
-              </a:rPr>
-              <a:t>Solaire villageois décentralisé</a:t>
-            </a:r>
-          </a:p>
-        </p:txBody>
-      </p:sp>
-      <p:sp>
-        <p:nvSpPr>
-          <p:cNvPr id="40" name="TextBox 39"/>
-          <p:cNvSpPr txBox="1"/>
-          <p:nvPr/>
-        </p:nvSpPr>
-        <p:spPr>
-          <a:xfrm>
-            <a:off x="3498265" y="5285232"/>
-            <a:ext cx="2410129" cy="274320"/>
-          </a:xfrm>
-          <a:prstGeom prst="rect">
-            <a:avLst/>
-          </a:prstGeom>
-          <a:noFill/>
-        </p:spPr>
-        <p:txBody>
-          <a:bodyPr wrap="square" anchor="t" lIns="0" rIns="0" tIns="0" bIns="0">
-            <a:spAutoFit/>
-          </a:bodyPr>
-          <a:lstStyle/>
-          <a:p>
-            <a:pPr algn="l">
-              <a:lnSpc>
-                <a:spcPct val="125000"/>
-              </a:lnSpc>
-            </a:pPr>
-            <a:r>
-              <a:rPr sz="900" b="1">
-                <a:solidFill>
-                  <a:srgbClr val="B87407"/>
-                </a:solidFill>
-                <a:latin typeface="Segoe UI"/>
-              </a:rPr>
-              <a:t>3,7 M de ruraux sans électricité</a:t>
-            </a:r>
-          </a:p>
-        </p:txBody>
-      </p:sp>
-      <p:sp>
-        <p:nvSpPr>
-          <p:cNvPr id="41" name="TextBox 40"/>
-          <p:cNvSpPr txBox="1"/>
-          <p:nvPr/>
-        </p:nvSpPr>
-        <p:spPr>
-          <a:xfrm>
-            <a:off x="3498265" y="5577840"/>
-            <a:ext cx="2410129" cy="530352"/>
-          </a:xfrm>
-          <a:prstGeom prst="rect">
-            <a:avLst/>
-          </a:prstGeom>
-          <a:noFill/>
-        </p:spPr>
-        <p:txBody>
-          <a:bodyPr wrap="square" anchor="t" lIns="0" rIns="0" tIns="0" bIns="0">
-            <a:spAutoFit/>
-          </a:bodyPr>
-          <a:lstStyle/>
-          <a:p>
-            <a:pPr algn="l">
-              <a:lnSpc>
-                <a:spcPct val="125000"/>
-              </a:lnSpc>
-            </a:pPr>
-            <a:r>
-              <a:rPr sz="850" b="0">
-                <a:solidFill>
-                  <a:srgbClr val="5D6E64"/>
-                </a:solidFill>
-                <a:latin typeface="Segoe UI"/>
-              </a:rPr>
-              <a:t>Dépasser 65 700 raccordements ruraux par an — le seuil démographique — puis viser l'accès universel</a:t>
-            </a:r>
-          </a:p>
-        </p:txBody>
-      </p:sp>
-      <p:sp>
-        <p:nvSpPr>
-          <p:cNvPr id="42" name="Rounded Rectangle 41"/>
-          <p:cNvSpPr/>
-          <p:nvPr/>
-        </p:nvSpPr>
-        <p:spPr>
-          <a:xfrm>
-            <a:off x="6136995" y="4718304"/>
-            <a:ext cx="2702737" cy="1481328"/>
-          </a:xfrm>
-          <a:prstGeom prst="roundRect">
-            <a:avLst>
-              <a:gd name="adj" fmla="val 5000"/>
-            </a:avLst>
-          </a:prstGeom>
-          <a:solidFill>
-            <a:srgbClr val="FFFFFF"/>
-          </a:solidFill>
-          <a:ln w="9525">
-            <a:solidFill>
-              <a:srgbClr val="D5DED8"/>
-            </a:solidFill>
-          </a:ln>
-          <a:effectLst/>
-        </p:spPr>
-        <p:style>
-          <a:lnRef idx="1">
-            <a:schemeClr val="accent1"/>
-          </a:lnRef>
-          <a:fillRef idx="3">
-            <a:schemeClr val="accent1"/>
-          </a:fillRef>
-          <a:effectRef idx="2">
-            <a:schemeClr val="accent1"/>
-          </a:effectRef>
-          <a:fontRef idx="minor">
-            <a:schemeClr val="lt1"/>
-          </a:fontRef>
-        </p:style>
-        <p:txBody>
-          <a:bodyPr rtlCol="0" anchor="ctr" wrap="square"/>
-          <a:lstStyle/>
-          <a:p>
-            <a:pPr algn="ctr"/>
-          </a:p>
-        </p:txBody>
-      </p:sp>
-      <p:sp>
-        <p:nvSpPr>
-          <p:cNvPr id="43" name="TextBox 42"/>
-          <p:cNvSpPr txBox="1"/>
-          <p:nvPr/>
-        </p:nvSpPr>
-        <p:spPr>
-          <a:xfrm>
-            <a:off x="6283299" y="4809744"/>
-            <a:ext cx="274320" cy="292608"/>
-          </a:xfrm>
-          <a:prstGeom prst="rect">
-            <a:avLst/>
-          </a:prstGeom>
-          <a:noFill/>
-        </p:spPr>
-        <p:txBody>
-          <a:bodyPr wrap="square" anchor="t" lIns="0" rIns="0" tIns="0" bIns="0">
-            <a:spAutoFit/>
-          </a:bodyPr>
-          <a:lstStyle/>
-          <a:p>
-            <a:pPr algn="l">
-              <a:lnSpc>
-                <a:spcPct val="100000"/>
-              </a:lnSpc>
-            </a:pPr>
-            <a:r>
-              <a:rPr sz="1900" b="1">
-                <a:solidFill>
-                  <a:srgbClr val="0F7A4A"/>
-                </a:solidFill>
-                <a:latin typeface="Segoe UI"/>
-              </a:rPr>
-              <a:t>3</a:t>
-            </a:r>
-          </a:p>
-        </p:txBody>
-      </p:sp>
-      <p:sp>
-        <p:nvSpPr>
-          <p:cNvPr id="44" name="TextBox 43"/>
-          <p:cNvSpPr txBox="1"/>
-          <p:nvPr/>
-        </p:nvSpPr>
-        <p:spPr>
-          <a:xfrm>
-            <a:off x="6594195" y="4846320"/>
-            <a:ext cx="2135809" cy="256032"/>
-          </a:xfrm>
-          <a:prstGeom prst="rect">
-            <a:avLst/>
-          </a:prstGeom>
-          <a:noFill/>
-        </p:spPr>
-        <p:txBody>
-          <a:bodyPr wrap="square" anchor="t" lIns="0" rIns="0" tIns="0" bIns="0">
-            <a:spAutoFit/>
-          </a:bodyPr>
-          <a:lstStyle/>
-          <a:p>
-            <a:pPr algn="l">
-              <a:lnSpc>
-                <a:spcPct val="110000"/>
-              </a:lnSpc>
-            </a:pPr>
-            <a:r>
-              <a:rPr sz="1150" b="1">
-                <a:solidFill>
-                  <a:srgbClr val="0C1A14"/>
-                </a:solidFill>
-                <a:latin typeface="Segoe UI"/>
-              </a:rPr>
-              <a:t>Protection ciblée des massifs</a:t>
-            </a:r>
-          </a:p>
-        </p:txBody>
-      </p:sp>
-      <p:sp>
-        <p:nvSpPr>
-          <p:cNvPr id="45" name="TextBox 44"/>
-          <p:cNvSpPr txBox="1"/>
-          <p:nvPr/>
-        </p:nvSpPr>
-        <p:spPr>
-          <a:xfrm>
-            <a:off x="6283299" y="5285232"/>
-            <a:ext cx="2410129" cy="274320"/>
-          </a:xfrm>
-          <a:prstGeom prst="rect">
-            <a:avLst/>
-          </a:prstGeom>
-          <a:noFill/>
-        </p:spPr>
-        <p:txBody>
-          <a:bodyPr wrap="square" anchor="t" lIns="0" rIns="0" tIns="0" bIns="0">
-            <a:spAutoFit/>
-          </a:bodyPr>
-          <a:lstStyle/>
-          <a:p>
-            <a:pPr algn="l">
-              <a:lnSpc>
-                <a:spcPct val="125000"/>
-              </a:lnSpc>
-            </a:pPr>
-            <a:r>
-              <a:rPr sz="900" b="1">
-                <a:solidFill>
-                  <a:srgbClr val="0F7A4A"/>
-                </a:solidFill>
-                <a:latin typeface="Segoe UI"/>
-              </a:rPr>
-              <a:t>9 massifs · 91 468 ha de forêts classées</a:t>
-            </a:r>
-          </a:p>
-        </p:txBody>
-      </p:sp>
-      <p:sp>
-        <p:nvSpPr>
-          <p:cNvPr id="46" name="TextBox 45"/>
-          <p:cNvSpPr txBox="1"/>
-          <p:nvPr/>
-        </p:nvSpPr>
-        <p:spPr>
-          <a:xfrm>
-            <a:off x="6283299" y="5577840"/>
-            <a:ext cx="2410129" cy="530352"/>
-          </a:xfrm>
-          <a:prstGeom prst="rect">
-            <a:avLst/>
-          </a:prstGeom>
-          <a:noFill/>
-        </p:spPr>
-        <p:txBody>
-          <a:bodyPr wrap="square" anchor="t" lIns="0" rIns="0" tIns="0" bIns="0">
-            <a:spAutoFit/>
-          </a:bodyPr>
-          <a:lstStyle/>
-          <a:p>
-            <a:pPr algn="l">
-              <a:lnSpc>
-                <a:spcPct val="125000"/>
-              </a:lnSpc>
-            </a:pPr>
-            <a:r>
-              <a:rPr sz="850" b="0">
-                <a:solidFill>
-                  <a:srgbClr val="5D6E64"/>
-                </a:solidFill>
-                <a:latin typeface="Segoe UI"/>
-              </a:rPr>
-              <a:t>Perte nette nulle sur les massifs prioritaires</a:t>
-            </a:r>
-          </a:p>
-        </p:txBody>
-      </p:sp>
-      <p:sp>
-        <p:nvSpPr>
-          <p:cNvPr id="47" name="Rounded Rectangle 46"/>
-          <p:cNvSpPr/>
-          <p:nvPr/>
-        </p:nvSpPr>
-        <p:spPr>
-          <a:xfrm>
-            <a:off x="8922029" y="4718304"/>
-            <a:ext cx="2702737" cy="1481328"/>
-          </a:xfrm>
-          <a:prstGeom prst="roundRect">
-            <a:avLst>
-              <a:gd name="adj" fmla="val 5000"/>
-            </a:avLst>
-          </a:prstGeom>
-          <a:solidFill>
-            <a:srgbClr val="FFFFFF"/>
-          </a:solidFill>
-          <a:ln w="9525">
-            <a:solidFill>
-              <a:srgbClr val="D5DED8"/>
-            </a:solidFill>
-          </a:ln>
-          <a:effectLst/>
-        </p:spPr>
-        <p:style>
-          <a:lnRef idx="1">
-            <a:schemeClr val="accent1"/>
-          </a:lnRef>
-          <a:fillRef idx="3">
-            <a:schemeClr val="accent1"/>
-          </a:fillRef>
-          <a:effectRef idx="2">
-            <a:schemeClr val="accent1"/>
-          </a:effectRef>
-          <a:fontRef idx="minor">
-            <a:schemeClr val="lt1"/>
-          </a:fontRef>
-        </p:style>
-        <p:txBody>
-          <a:bodyPr rtlCol="0" anchor="ctr" wrap="square"/>
-          <a:lstStyle/>
-          <a:p>
-            <a:pPr algn="ctr"/>
-          </a:p>
-        </p:txBody>
-      </p:sp>
-      <p:sp>
-        <p:nvSpPr>
-          <p:cNvPr id="48" name="TextBox 47"/>
-          <p:cNvSpPr txBox="1"/>
-          <p:nvPr/>
-        </p:nvSpPr>
-        <p:spPr>
-          <a:xfrm>
-            <a:off x="9068333" y="4809744"/>
-            <a:ext cx="274320" cy="292608"/>
-          </a:xfrm>
-          <a:prstGeom prst="rect">
-            <a:avLst/>
-          </a:prstGeom>
-          <a:noFill/>
-        </p:spPr>
-        <p:txBody>
-          <a:bodyPr wrap="square" anchor="t" lIns="0" rIns="0" tIns="0" bIns="0">
-            <a:spAutoFit/>
-          </a:bodyPr>
-          <a:lstStyle/>
-          <a:p>
-            <a:pPr algn="l">
-              <a:lnSpc>
-                <a:spcPct val="100000"/>
-              </a:lnSpc>
-            </a:pPr>
-            <a:r>
-              <a:rPr sz="1900" b="1">
-                <a:solidFill>
-                  <a:srgbClr val="7C441F"/>
-                </a:solidFill>
-                <a:latin typeface="Segoe UI"/>
-              </a:rPr>
-              <a:t>4</a:t>
-            </a:r>
-          </a:p>
-        </p:txBody>
-      </p:sp>
-      <p:sp>
-        <p:nvSpPr>
-          <p:cNvPr id="49" name="TextBox 48"/>
-          <p:cNvSpPr txBox="1"/>
-          <p:nvPr/>
-        </p:nvSpPr>
-        <p:spPr>
-          <a:xfrm>
-            <a:off x="9379229" y="4846320"/>
-            <a:ext cx="2135809" cy="256032"/>
-          </a:xfrm>
-          <a:prstGeom prst="rect">
-            <a:avLst/>
-          </a:prstGeom>
-          <a:noFill/>
-        </p:spPr>
-        <p:txBody>
-          <a:bodyPr wrap="square" anchor="t" lIns="0" rIns="0" tIns="0" bIns="0">
-            <a:spAutoFit/>
-          </a:bodyPr>
-          <a:lstStyle/>
-          <a:p>
-            <a:pPr algn="l">
-              <a:lnSpc>
-                <a:spcPct val="110000"/>
-              </a:lnSpc>
-            </a:pPr>
-            <a:r>
-              <a:rPr sz="1150" b="1">
-                <a:solidFill>
-                  <a:srgbClr val="0C1A14"/>
-                </a:solidFill>
-                <a:latin typeface="Segoe UI"/>
-              </a:rPr>
-              <a:t>Intensification agricole</a:t>
-            </a:r>
-          </a:p>
-        </p:txBody>
-      </p:sp>
-      <p:sp>
-        <p:nvSpPr>
-          <p:cNvPr id="50" name="TextBox 49"/>
-          <p:cNvSpPr txBox="1"/>
-          <p:nvPr/>
-        </p:nvSpPr>
-        <p:spPr>
-          <a:xfrm>
-            <a:off x="9068333" y="5285232"/>
-            <a:ext cx="2410129" cy="274320"/>
-          </a:xfrm>
-          <a:prstGeom prst="rect">
-            <a:avLst/>
-          </a:prstGeom>
-          <a:noFill/>
-        </p:spPr>
-        <p:txBody>
-          <a:bodyPr wrap="square" anchor="t" lIns="0" rIns="0" tIns="0" bIns="0">
-            <a:spAutoFit/>
-          </a:bodyPr>
-          <a:lstStyle/>
-          <a:p>
-            <a:pPr algn="l">
-              <a:lnSpc>
-                <a:spcPct val="125000"/>
-              </a:lnSpc>
-            </a:pPr>
-            <a:r>
-              <a:rPr sz="900" b="1">
-                <a:solidFill>
-                  <a:srgbClr val="7C441F"/>
-                </a:solidFill>
-                <a:latin typeface="Segoe UI"/>
-              </a:rPr>
-              <a:t>19 700 ha défrichés par an, soit 6.7 × la perte forestière</a:t>
-            </a:r>
-          </a:p>
-        </p:txBody>
-      </p:sp>
-      <p:sp>
-        <p:nvSpPr>
-          <p:cNvPr id="51" name="TextBox 50"/>
-          <p:cNvSpPr txBox="1"/>
-          <p:nvPr/>
-        </p:nvSpPr>
-        <p:spPr>
-          <a:xfrm>
-            <a:off x="9068333" y="5577840"/>
-            <a:ext cx="2410129" cy="530352"/>
-          </a:xfrm>
-          <a:prstGeom prst="rect">
-            <a:avLst/>
-          </a:prstGeom>
-          <a:noFill/>
-        </p:spPr>
-        <p:txBody>
-          <a:bodyPr wrap="square" anchor="t" lIns="0" rIns="0" tIns="0" bIns="0">
-            <a:spAutoFit/>
-          </a:bodyPr>
-          <a:lstStyle/>
-          <a:p>
-            <a:pPr algn="l">
-              <a:lnSpc>
-                <a:spcPct val="125000"/>
-              </a:lnSpc>
-            </a:pPr>
-            <a:r>
-              <a:rPr sz="850" b="0">
-                <a:solidFill>
-                  <a:srgbClr val="5D6E64"/>
-                </a:solidFill>
-                <a:latin typeface="Segoe UI"/>
-              </a:rPr>
-              <a:t>Ramener l'expansion des surfaces céréalières vers zéro</a:t>
+              <a:t>Aucun coût ni budget dans les données : les recommandations portent sur un ordre de priorité et des cibles physiques, pas sur un plan de financement.   ·   La cuisson n'est mesurée directement qu'en 2014 et 2017 : on lit un contraste, pas une tendance.   ·   La part du recul forestier imputable au bois-énergie n'est tranchée par aucune source : elle reste un curseur explicite dans le tableau de bord.</a:t>
             </a:r>
           </a:p>
         </p:txBody>
@@ -10015,7 +8398,7 @@
                 </a:solidFill>
                 <a:latin typeface="Segoe UI"/>
               </a:rPr>
-              <a:t>MÉTHODE</a:t>
+              <a:t>DIAGNOSTIC</a:t>
             </a:r>
           </a:p>
         </p:txBody>
@@ -10054,7 +8437,7 @@
                 </a:solidFill>
                 <a:latin typeface="Segoe UI"/>
               </a:rPr>
-              <a:t>Six jeux de données, une seule question : où agir en premier ?</a:t>
+              <a:t>Cinq chiffres qui commandent tout le reste</a:t>
             </a:r>
           </a:p>
         </p:txBody>
@@ -10163,482 +8546,14 @@
       </p:pic>
       <p:sp>
         <p:nvSpPr>
-          <p:cNvPr id="8" name="TextBox 7"/>
-          <p:cNvSpPr txBox="1"/>
+          <p:cNvPr id="8" name="Rounded Rectangle 7"/>
+          <p:cNvSpPr/>
           <p:nvPr/>
         </p:nvSpPr>
         <p:spPr>
           <a:xfrm>
             <a:off x="566928" y="1572768"/>
-            <a:ext cx="5346039" cy="182880"/>
-          </a:xfrm>
-          <a:prstGeom prst="rect">
-            <a:avLst/>
-          </a:prstGeom>
-          <a:noFill/>
-        </p:spPr>
-        <p:txBody>
-          <a:bodyPr wrap="square" anchor="t" lIns="0" rIns="0" tIns="0" bIns="0">
-            <a:spAutoFit/>
-          </a:bodyPr>
-          <a:lstStyle/>
-          <a:p>
-            <a:pPr algn="l">
-              <a:lnSpc>
-                <a:spcPct val="125000"/>
-              </a:lnSpc>
-            </a:pPr>
-            <a:r>
-              <a:rPr sz="1100" b="1">
-                <a:solidFill>
-                  <a:srgbClr val="0C1A14"/>
-                </a:solidFill>
-                <a:latin typeface="Segoe UI"/>
-              </a:rPr>
-              <a:t>Accès à l'électricité</a:t>
-            </a:r>
-          </a:p>
-        </p:txBody>
-      </p:sp>
-      <p:sp>
-        <p:nvSpPr>
-          <p:cNvPr id="9" name="TextBox 8"/>
-          <p:cNvSpPr txBox="1"/>
-          <p:nvPr/>
-        </p:nvSpPr>
-        <p:spPr>
-          <a:xfrm>
-            <a:off x="566928" y="1792224"/>
-            <a:ext cx="5254599" cy="457200"/>
-          </a:xfrm>
-          <a:prstGeom prst="rect">
-            <a:avLst/>
-          </a:prstGeom>
-          <a:noFill/>
-        </p:spPr>
-        <p:txBody>
-          <a:bodyPr wrap="square" anchor="t" lIns="0" rIns="0" tIns="0" bIns="0">
-            <a:spAutoFit/>
-          </a:bodyPr>
-          <a:lstStyle/>
-          <a:p>
-            <a:pPr algn="l">
-              <a:lnSpc>
-                <a:spcPct val="130000"/>
-              </a:lnSpc>
-            </a:pPr>
-            <a:r>
-              <a:rPr sz="950" b="0">
-                <a:solidFill>
-                  <a:srgbClr val="5D6E64"/>
-                </a:solidFill>
-                <a:latin typeface="Segoe UI"/>
-              </a:rPr>
-              <a:t>Banque Mondiale · total, urbain, rural · 1998–2022</a:t>
-            </a:r>
-          </a:p>
-        </p:txBody>
-      </p:sp>
-      <p:sp>
-        <p:nvSpPr>
-          <p:cNvPr id="10" name="TextBox 9"/>
-          <p:cNvSpPr txBox="1"/>
-          <p:nvPr/>
-        </p:nvSpPr>
-        <p:spPr>
-          <a:xfrm>
-            <a:off x="6205575" y="1572768"/>
-            <a:ext cx="5346039" cy="182880"/>
-          </a:xfrm>
-          <a:prstGeom prst="rect">
-            <a:avLst/>
-          </a:prstGeom>
-          <a:noFill/>
-        </p:spPr>
-        <p:txBody>
-          <a:bodyPr wrap="square" anchor="t" lIns="0" rIns="0" tIns="0" bIns="0">
-            <a:spAutoFit/>
-          </a:bodyPr>
-          <a:lstStyle/>
-          <a:p>
-            <a:pPr algn="l">
-              <a:lnSpc>
-                <a:spcPct val="125000"/>
-              </a:lnSpc>
-            </a:pPr>
-            <a:r>
-              <a:rPr sz="1100" b="1">
-                <a:solidFill>
-                  <a:srgbClr val="0C1A14"/>
-                </a:solidFill>
-                <a:latin typeface="Segoe UI"/>
-              </a:rPr>
-              <a:t>Cuisson des ménages</a:t>
-            </a:r>
-          </a:p>
-        </p:txBody>
-      </p:sp>
-      <p:sp>
-        <p:nvSpPr>
-          <p:cNvPr id="11" name="TextBox 10"/>
-          <p:cNvSpPr txBox="1"/>
-          <p:nvPr/>
-        </p:nvSpPr>
-        <p:spPr>
-          <a:xfrm>
-            <a:off x="6205575" y="1792224"/>
-            <a:ext cx="5254599" cy="457200"/>
-          </a:xfrm>
-          <a:prstGeom prst="rect">
-            <a:avLst/>
-          </a:prstGeom>
-          <a:noFill/>
-        </p:spPr>
-        <p:txBody>
-          <a:bodyPr wrap="square" anchor="t" lIns="0" rIns="0" tIns="0" bIns="0">
-            <a:spAutoFit/>
-          </a:bodyPr>
-          <a:lstStyle/>
-          <a:p>
-            <a:pPr algn="l">
-              <a:lnSpc>
-                <a:spcPct val="130000"/>
-              </a:lnSpc>
-            </a:pPr>
-            <a:r>
-              <a:rPr sz="950" b="0">
-                <a:solidFill>
-                  <a:srgbClr val="5D6E64"/>
-                </a:solidFill>
-                <a:latin typeface="Segoe UI"/>
-              </a:rPr>
-              <a:t>Combustible principal (deux enquêtes 2014 et 2017) et accès à une cuisson propre, série annuelle</a:t>
-            </a:r>
-          </a:p>
-        </p:txBody>
-      </p:sp>
-      <p:sp>
-        <p:nvSpPr>
-          <p:cNvPr id="12" name="TextBox 11"/>
-          <p:cNvSpPr txBox="1"/>
-          <p:nvPr/>
-        </p:nvSpPr>
-        <p:spPr>
-          <a:xfrm>
-            <a:off x="566928" y="2414016"/>
-            <a:ext cx="5346039" cy="182880"/>
-          </a:xfrm>
-          <a:prstGeom prst="rect">
-            <a:avLst/>
-          </a:prstGeom>
-          <a:noFill/>
-        </p:spPr>
-        <p:txBody>
-          <a:bodyPr wrap="square" anchor="t" lIns="0" rIns="0" tIns="0" bIns="0">
-            <a:spAutoFit/>
-          </a:bodyPr>
-          <a:lstStyle/>
-          <a:p>
-            <a:pPr algn="l">
-              <a:lnSpc>
-                <a:spcPct val="125000"/>
-              </a:lnSpc>
-            </a:pPr>
-            <a:r>
-              <a:rPr sz="1100" b="1">
-                <a:solidFill>
-                  <a:srgbClr val="0C1A14"/>
-                </a:solidFill>
-                <a:latin typeface="Segoe UI"/>
-              </a:rPr>
-              <a:t>Énergies renouvelables</a:t>
-            </a:r>
-          </a:p>
-        </p:txBody>
-      </p:sp>
-      <p:sp>
-        <p:nvSpPr>
-          <p:cNvPr id="13" name="TextBox 12"/>
-          <p:cNvSpPr txBox="1"/>
-          <p:nvPr/>
-        </p:nvSpPr>
-        <p:spPr>
-          <a:xfrm>
-            <a:off x="566928" y="2633472"/>
-            <a:ext cx="5254599" cy="457200"/>
-          </a:xfrm>
-          <a:prstGeom prst="rect">
-            <a:avLst/>
-          </a:prstGeom>
-          <a:noFill/>
-        </p:spPr>
-        <p:txBody>
-          <a:bodyPr wrap="square" anchor="t" lIns="0" rIns="0" tIns="0" bIns="0">
-            <a:spAutoFit/>
-          </a:bodyPr>
-          <a:lstStyle/>
-          <a:p>
-            <a:pPr algn="l">
-              <a:lnSpc>
-                <a:spcPct val="130000"/>
-              </a:lnSpc>
-            </a:pPr>
-            <a:r>
-              <a:rPr sz="950" b="0">
-                <a:solidFill>
-                  <a:srgbClr val="5D6E64"/>
-                </a:solidFill>
-                <a:latin typeface="Segoe UI"/>
-              </a:rPr>
-              <a:t>Part des renouvelables dans la consommation finale, croisée avec la cuisson propre</a:t>
-            </a:r>
-          </a:p>
-        </p:txBody>
-      </p:sp>
-      <p:sp>
-        <p:nvSpPr>
-          <p:cNvPr id="14" name="TextBox 13"/>
-          <p:cNvSpPr txBox="1"/>
-          <p:nvPr/>
-        </p:nvSpPr>
-        <p:spPr>
-          <a:xfrm>
-            <a:off x="6205575" y="2414016"/>
-            <a:ext cx="5346039" cy="182880"/>
-          </a:xfrm>
-          <a:prstGeom prst="rect">
-            <a:avLst/>
-          </a:prstGeom>
-          <a:noFill/>
-        </p:spPr>
-        <p:txBody>
-          <a:bodyPr wrap="square" anchor="t" lIns="0" rIns="0" tIns="0" bIns="0">
-            <a:spAutoFit/>
-          </a:bodyPr>
-          <a:lstStyle/>
-          <a:p>
-            <a:pPr algn="l">
-              <a:lnSpc>
-                <a:spcPct val="125000"/>
-              </a:lnSpc>
-            </a:pPr>
-            <a:r>
-              <a:rPr sz="1100" b="1">
-                <a:solidFill>
-                  <a:srgbClr val="0C1A14"/>
-                </a:solidFill>
-                <a:latin typeface="Segoe UI"/>
-              </a:rPr>
-              <a:t>Couvert forestier</a:t>
-            </a:r>
-          </a:p>
-        </p:txBody>
-      </p:sp>
-      <p:sp>
-        <p:nvSpPr>
-          <p:cNvPr id="15" name="TextBox 14"/>
-          <p:cNvSpPr txBox="1"/>
-          <p:nvPr/>
-        </p:nvSpPr>
-        <p:spPr>
-          <a:xfrm>
-            <a:off x="6205575" y="2633472"/>
-            <a:ext cx="5254599" cy="457200"/>
-          </a:xfrm>
-          <a:prstGeom prst="rect">
-            <a:avLst/>
-          </a:prstGeom>
-          <a:noFill/>
-        </p:spPr>
-        <p:txBody>
-          <a:bodyPr wrap="square" anchor="t" lIns="0" rIns="0" tIns="0" bIns="0">
-            <a:spAutoFit/>
-          </a:bodyPr>
-          <a:lstStyle/>
-          <a:p>
-            <a:pPr algn="l">
-              <a:lnSpc>
-                <a:spcPct val="130000"/>
-              </a:lnSpc>
-            </a:pPr>
-            <a:r>
-              <a:rPr sz="950" b="0">
-                <a:solidFill>
-                  <a:srgbClr val="5D6E64"/>
-                </a:solidFill>
-                <a:latin typeface="Segoe UI"/>
-              </a:rPr>
-              <a:t>Surface forestière · 1990–2021 · % du territoire et km²</a:t>
-            </a:r>
-          </a:p>
-        </p:txBody>
-      </p:sp>
-      <p:sp>
-        <p:nvSpPr>
-          <p:cNvPr id="16" name="TextBox 15"/>
-          <p:cNvSpPr txBox="1"/>
-          <p:nvPr/>
-        </p:nvSpPr>
-        <p:spPr>
-          <a:xfrm>
-            <a:off x="566928" y="3255264"/>
-            <a:ext cx="5346039" cy="182880"/>
-          </a:xfrm>
-          <a:prstGeom prst="rect">
-            <a:avLst/>
-          </a:prstGeom>
-          <a:noFill/>
-        </p:spPr>
-        <p:txBody>
-          <a:bodyPr wrap="square" anchor="t" lIns="0" rIns="0" tIns="0" bIns="0">
-            <a:spAutoFit/>
-          </a:bodyPr>
-          <a:lstStyle/>
-          <a:p>
-            <a:pPr algn="l">
-              <a:lnSpc>
-                <a:spcPct val="125000"/>
-              </a:lnSpc>
-            </a:pPr>
-            <a:r>
-              <a:rPr sz="1100" b="1">
-                <a:solidFill>
-                  <a:srgbClr val="0C1A14"/>
-                </a:solidFill>
-                <a:latin typeface="Segoe UI"/>
-              </a:rPr>
-              <a:t>Inventaire GES 2018</a:t>
-            </a:r>
-          </a:p>
-        </p:txBody>
-      </p:sp>
-      <p:sp>
-        <p:nvSpPr>
-          <p:cNvPr id="17" name="TextBox 16"/>
-          <p:cNvSpPr txBox="1"/>
-          <p:nvPr/>
-        </p:nvSpPr>
-        <p:spPr>
-          <a:xfrm>
-            <a:off x="566928" y="3474720"/>
-            <a:ext cx="5254599" cy="457200"/>
-          </a:xfrm>
-          <a:prstGeom prst="rect">
-            <a:avLst/>
-          </a:prstGeom>
-          <a:noFill/>
-        </p:spPr>
-        <p:txBody>
-          <a:bodyPr wrap="square" anchor="t" lIns="0" rIns="0" tIns="0" bIns="0">
-            <a:spAutoFit/>
-          </a:bodyPr>
-          <a:lstStyle/>
-          <a:p>
-            <a:pPr algn="l">
-              <a:lnSpc>
-                <a:spcPct val="130000"/>
-              </a:lnSpc>
-            </a:pPr>
-            <a:r>
-              <a:rPr sz="950" b="0">
-                <a:solidFill>
-                  <a:srgbClr val="5D6E64"/>
-                </a:solidFill>
-                <a:latin typeface="Segoe UI"/>
-              </a:rPr>
-              <a:t>Émissions par secteur et par gaz, relues en équivalent CO₂ (PRG 100 ans, AR5)</a:t>
-            </a:r>
-          </a:p>
-        </p:txBody>
-      </p:sp>
-      <p:sp>
-        <p:nvSpPr>
-          <p:cNvPr id="18" name="TextBox 17"/>
-          <p:cNvSpPr txBox="1"/>
-          <p:nvPr/>
-        </p:nvSpPr>
-        <p:spPr>
-          <a:xfrm>
-            <a:off x="6205575" y="3255264"/>
-            <a:ext cx="5346039" cy="182880"/>
-          </a:xfrm>
-          <a:prstGeom prst="rect">
-            <a:avLst/>
-          </a:prstGeom>
-          <a:noFill/>
-        </p:spPr>
-        <p:txBody>
-          <a:bodyPr wrap="square" anchor="t" lIns="0" rIns="0" tIns="0" bIns="0">
-            <a:spAutoFit/>
-          </a:bodyPr>
-          <a:lstStyle/>
-          <a:p>
-            <a:pPr algn="l">
-              <a:lnSpc>
-                <a:spcPct val="125000"/>
-              </a:lnSpc>
-            </a:pPr>
-            <a:r>
-              <a:rPr sz="1100" b="1">
-                <a:solidFill>
-                  <a:srgbClr val="0C1A14"/>
-                </a:solidFill>
-                <a:latin typeface="Segoe UI"/>
-              </a:rPr>
-              <a:t>Forêts classées &amp; climat</a:t>
-            </a:r>
-          </a:p>
-        </p:txBody>
-      </p:sp>
-      <p:sp>
-        <p:nvSpPr>
-          <p:cNvPr id="19" name="TextBox 18"/>
-          <p:cNvSpPr txBox="1"/>
-          <p:nvPr/>
-        </p:nvSpPr>
-        <p:spPr>
-          <a:xfrm>
-            <a:off x="6205575" y="3474720"/>
-            <a:ext cx="5254599" cy="457200"/>
-          </a:xfrm>
-          <a:prstGeom prst="rect">
-            <a:avLst/>
-          </a:prstGeom>
-          <a:noFill/>
-        </p:spPr>
-        <p:txBody>
-          <a:bodyPr wrap="square" anchor="t" lIns="0" rIns="0" tIns="0" bIns="0">
-            <a:spAutoFit/>
-          </a:bodyPr>
-          <a:lstStyle/>
-          <a:p>
-            <a:pPr algn="l">
-              <a:lnSpc>
-                <a:spcPct val="130000"/>
-              </a:lnSpc>
-            </a:pPr>
-            <a:r>
-              <a:rPr sz="950" b="0">
-                <a:solidFill>
-                  <a:srgbClr val="5D6E64"/>
-                </a:solidFill>
-                <a:latin typeface="Segoe UI"/>
-              </a:rPr>
-              <a:t>53 forêts classées (surface, enclavement) et 10 stations météorologiques 2013-2019</a:t>
-            </a:r>
-          </a:p>
-        </p:txBody>
-      </p:sp>
-      <p:sp>
-        <p:nvSpPr>
-          <p:cNvPr id="20" name="Rounded Rectangle 19"/>
-          <p:cNvSpPr/>
-          <p:nvPr/>
-        </p:nvSpPr>
-        <p:spPr>
-          <a:xfrm>
-            <a:off x="566928" y="4343400"/>
-            <a:ext cx="11057839" cy="1737360"/>
+            <a:ext cx="2123785" cy="1600200"/>
           </a:xfrm>
           <a:prstGeom prst="roundRect">
             <a:avLst>
@@ -10646,10 +8561,12 @@
             </a:avLst>
           </a:prstGeom>
           <a:solidFill>
-            <a:srgbClr val="E7F2EB"/>
+            <a:srgbClr val="FFFFFF"/>
           </a:solidFill>
-          <a:ln>
-            <a:noFill/>
+          <a:ln w="9525">
+            <a:solidFill>
+              <a:srgbClr val="D5DED8"/>
+            </a:solidFill>
           </a:ln>
           <a:effectLst/>
         </p:spPr>
@@ -10677,13 +8594,881 @@
       </p:sp>
       <p:sp>
         <p:nvSpPr>
+          <p:cNvPr id="9" name="TextBox 8"/>
+          <p:cNvSpPr txBox="1"/>
+          <p:nvPr/>
+        </p:nvSpPr>
+        <p:spPr>
+          <a:xfrm>
+            <a:off x="722376" y="1709928"/>
+            <a:ext cx="1812889" cy="182880"/>
+          </a:xfrm>
+          <a:prstGeom prst="rect">
+            <a:avLst/>
+          </a:prstGeom>
+          <a:noFill/>
+        </p:spPr>
+        <p:txBody>
+          <a:bodyPr wrap="square" anchor="t" lIns="0" rIns="0" tIns="0" bIns="0">
+            <a:spAutoFit/>
+          </a:bodyPr>
+          <a:lstStyle/>
+          <a:p>
+            <a:pPr algn="l">
+              <a:lnSpc>
+                <a:spcPct val="125000"/>
+              </a:lnSpc>
+            </a:pPr>
+            <a:r>
+              <a:rPr sz="800" b="1" spc="50">
+                <a:solidFill>
+                  <a:srgbClr val="0C1A14"/>
+                </a:solidFill>
+                <a:latin typeface="Segoe UI"/>
+              </a:rPr>
+              <a:t>ACCÈS RURAL À L'ÉLECTRICITÉ</a:t>
+            </a:r>
+          </a:p>
+        </p:txBody>
+      </p:sp>
+      <p:sp>
+        <p:nvSpPr>
+          <p:cNvPr id="10" name="TextBox 9"/>
+          <p:cNvSpPr txBox="1"/>
+          <p:nvPr/>
+        </p:nvSpPr>
+        <p:spPr>
+          <a:xfrm>
+            <a:off x="722376" y="1938528"/>
+            <a:ext cx="1812889" cy="411480"/>
+          </a:xfrm>
+          <a:prstGeom prst="rect">
+            <a:avLst/>
+          </a:prstGeom>
+          <a:noFill/>
+        </p:spPr>
+        <p:txBody>
+          <a:bodyPr wrap="square" anchor="t" lIns="0" rIns="0" tIns="0" bIns="0">
+            <a:spAutoFit/>
+          </a:bodyPr>
+          <a:lstStyle/>
+          <a:p>
+            <a:pPr algn="l">
+              <a:lnSpc>
+                <a:spcPct val="100000"/>
+              </a:lnSpc>
+            </a:pPr>
+            <a:r>
+              <a:rPr sz="2600" b="1">
+                <a:solidFill>
+                  <a:srgbClr val="B87407"/>
+                </a:solidFill>
+                <a:latin typeface="Segoe UI"/>
+              </a:rPr>
+              <a:t>25</a:t>
+            </a:r>
+            <a:r>
+              <a:rPr sz="2600" b="1">
+                <a:solidFill>
+                  <a:srgbClr val="B87407"/>
+                </a:solidFill>
+                <a:latin typeface="Segoe UI"/>
+              </a:rPr>
+              <a:t> %</a:t>
+            </a:r>
+          </a:p>
+        </p:txBody>
+      </p:sp>
+      <p:sp>
+        <p:nvSpPr>
+          <p:cNvPr id="11" name="TextBox 10"/>
+          <p:cNvSpPr txBox="1"/>
+          <p:nvPr/>
+        </p:nvSpPr>
+        <p:spPr>
+          <a:xfrm>
+            <a:off x="722376" y="2414016"/>
+            <a:ext cx="1812889" cy="667512"/>
+          </a:xfrm>
+          <a:prstGeom prst="rect">
+            <a:avLst/>
+          </a:prstGeom>
+          <a:noFill/>
+        </p:spPr>
+        <p:txBody>
+          <a:bodyPr wrap="square" anchor="t" lIns="0" rIns="0" tIns="0" bIns="0">
+            <a:spAutoFit/>
+          </a:bodyPr>
+          <a:lstStyle/>
+          <a:p>
+            <a:pPr algn="l">
+              <a:lnSpc>
+                <a:spcPct val="130000"/>
+              </a:lnSpc>
+            </a:pPr>
+            <a:r>
+              <a:rPr sz="850" b="0">
+                <a:solidFill>
+                  <a:srgbClr val="5D6E64"/>
+                </a:solidFill>
+                <a:latin typeface="Segoe UI"/>
+              </a:rPr>
+              <a:t>contre 96 % en ville en 2022 — 72 points d'écart</a:t>
+            </a:r>
+          </a:p>
+        </p:txBody>
+      </p:sp>
+      <p:sp>
+        <p:nvSpPr>
+          <p:cNvPr id="12" name="Rounded Rectangle 11"/>
+          <p:cNvSpPr/>
+          <p:nvPr/>
+        </p:nvSpPr>
+        <p:spPr>
+          <a:xfrm>
+            <a:off x="2800441" y="1572768"/>
+            <a:ext cx="2123785" cy="1600200"/>
+          </a:xfrm>
+          <a:prstGeom prst="roundRect">
+            <a:avLst>
+              <a:gd name="adj" fmla="val 5000"/>
+            </a:avLst>
+          </a:prstGeom>
+          <a:solidFill>
+            <a:srgbClr val="FFFFFF"/>
+          </a:solidFill>
+          <a:ln w="9525">
+            <a:solidFill>
+              <a:srgbClr val="D5DED8"/>
+            </a:solidFill>
+          </a:ln>
+          <a:effectLst/>
+        </p:spPr>
+        <p:style>
+          <a:lnRef idx="1">
+            <a:schemeClr val="accent1"/>
+          </a:lnRef>
+          <a:fillRef idx="3">
+            <a:schemeClr val="accent1"/>
+          </a:fillRef>
+          <a:effectRef idx="2">
+            <a:schemeClr val="accent1"/>
+          </a:effectRef>
+          <a:fontRef idx="minor">
+            <a:schemeClr val="lt1"/>
+          </a:fontRef>
+        </p:style>
+        <p:txBody>
+          <a:bodyPr rtlCol="0" anchor="ctr" wrap="square"/>
+          <a:lstStyle/>
+          <a:p>
+            <a:pPr algn="ctr"/>
+          </a:p>
+        </p:txBody>
+      </p:sp>
+      <p:sp>
+        <p:nvSpPr>
+          <p:cNvPr id="13" name="TextBox 12"/>
+          <p:cNvSpPr txBox="1"/>
+          <p:nvPr/>
+        </p:nvSpPr>
+        <p:spPr>
+          <a:xfrm>
+            <a:off x="2955889" y="1709928"/>
+            <a:ext cx="1812889" cy="182880"/>
+          </a:xfrm>
+          <a:prstGeom prst="rect">
+            <a:avLst/>
+          </a:prstGeom>
+          <a:noFill/>
+        </p:spPr>
+        <p:txBody>
+          <a:bodyPr wrap="square" anchor="t" lIns="0" rIns="0" tIns="0" bIns="0">
+            <a:spAutoFit/>
+          </a:bodyPr>
+          <a:lstStyle/>
+          <a:p>
+            <a:pPr algn="l">
+              <a:lnSpc>
+                <a:spcPct val="125000"/>
+              </a:lnSpc>
+            </a:pPr>
+            <a:r>
+              <a:rPr sz="800" b="1" spc="50">
+                <a:solidFill>
+                  <a:srgbClr val="0C1A14"/>
+                </a:solidFill>
+                <a:latin typeface="Segoe UI"/>
+              </a:rPr>
+              <a:t>RURAUX PRIVÉS D'ÉLECTRICITÉ</a:t>
+            </a:r>
+          </a:p>
+        </p:txBody>
+      </p:sp>
+      <p:sp>
+        <p:nvSpPr>
+          <p:cNvPr id="14" name="TextBox 13"/>
+          <p:cNvSpPr txBox="1"/>
+          <p:nvPr/>
+        </p:nvSpPr>
+        <p:spPr>
+          <a:xfrm>
+            <a:off x="2955889" y="1938528"/>
+            <a:ext cx="1812889" cy="411480"/>
+          </a:xfrm>
+          <a:prstGeom prst="rect">
+            <a:avLst/>
+          </a:prstGeom>
+          <a:noFill/>
+        </p:spPr>
+        <p:txBody>
+          <a:bodyPr wrap="square" anchor="t" lIns="0" rIns="0" tIns="0" bIns="0">
+            <a:spAutoFit/>
+          </a:bodyPr>
+          <a:lstStyle/>
+          <a:p>
+            <a:pPr algn="l">
+              <a:lnSpc>
+                <a:spcPct val="100000"/>
+              </a:lnSpc>
+            </a:pPr>
+            <a:r>
+              <a:rPr sz="2600" b="1">
+                <a:solidFill>
+                  <a:srgbClr val="B32418"/>
+                </a:solidFill>
+                <a:latin typeface="Segoe UI"/>
+              </a:rPr>
+              <a:t>+19</a:t>
+            </a:r>
+            <a:r>
+              <a:rPr sz="2600" b="1">
+                <a:solidFill>
+                  <a:srgbClr val="B32418"/>
+                </a:solidFill>
+                <a:latin typeface="Segoe UI"/>
+              </a:rPr>
+              <a:t> %</a:t>
+            </a:r>
+          </a:p>
+        </p:txBody>
+      </p:sp>
+      <p:sp>
+        <p:nvSpPr>
+          <p:cNvPr id="15" name="TextBox 14"/>
+          <p:cNvSpPr txBox="1"/>
+          <p:nvPr/>
+        </p:nvSpPr>
+        <p:spPr>
+          <a:xfrm>
+            <a:off x="2955889" y="2414016"/>
+            <a:ext cx="1812889" cy="667512"/>
+          </a:xfrm>
+          <a:prstGeom prst="rect">
+            <a:avLst/>
+          </a:prstGeom>
+          <a:noFill/>
+        </p:spPr>
+        <p:txBody>
+          <a:bodyPr wrap="square" anchor="t" lIns="0" rIns="0" tIns="0" bIns="0">
+            <a:spAutoFit/>
+          </a:bodyPr>
+          <a:lstStyle/>
+          <a:p>
+            <a:pPr algn="l">
+              <a:lnSpc>
+                <a:spcPct val="130000"/>
+              </a:lnSpc>
+            </a:pPr>
+            <a:r>
+              <a:rPr sz="850" b="0">
+                <a:solidFill>
+                  <a:srgbClr val="5D6E64"/>
+                </a:solidFill>
+                <a:latin typeface="Segoe UI"/>
+              </a:rPr>
+              <a:t>depuis 1998 — de 3,11 à 3,72 M de personnes, alors que le taux d'accès était multiplié par 8</a:t>
+            </a:r>
+          </a:p>
+        </p:txBody>
+      </p:sp>
+      <p:sp>
+        <p:nvSpPr>
+          <p:cNvPr id="16" name="Rounded Rectangle 15"/>
+          <p:cNvSpPr/>
+          <p:nvPr/>
+        </p:nvSpPr>
+        <p:spPr>
+          <a:xfrm>
+            <a:off x="5033954" y="1572768"/>
+            <a:ext cx="2123785" cy="1600200"/>
+          </a:xfrm>
+          <a:prstGeom prst="roundRect">
+            <a:avLst>
+              <a:gd name="adj" fmla="val 5000"/>
+            </a:avLst>
+          </a:prstGeom>
+          <a:solidFill>
+            <a:srgbClr val="FFFFFF"/>
+          </a:solidFill>
+          <a:ln w="9525">
+            <a:solidFill>
+              <a:srgbClr val="D5DED8"/>
+            </a:solidFill>
+          </a:ln>
+          <a:effectLst/>
+        </p:spPr>
+        <p:style>
+          <a:lnRef idx="1">
+            <a:schemeClr val="accent1"/>
+          </a:lnRef>
+          <a:fillRef idx="3">
+            <a:schemeClr val="accent1"/>
+          </a:fillRef>
+          <a:effectRef idx="2">
+            <a:schemeClr val="accent1"/>
+          </a:effectRef>
+          <a:fontRef idx="minor">
+            <a:schemeClr val="lt1"/>
+          </a:fontRef>
+        </p:style>
+        <p:txBody>
+          <a:bodyPr rtlCol="0" anchor="ctr" wrap="square"/>
+          <a:lstStyle/>
+          <a:p>
+            <a:pPr algn="ctr"/>
+          </a:p>
+        </p:txBody>
+      </p:sp>
+      <p:sp>
+        <p:nvSpPr>
+          <p:cNvPr id="17" name="TextBox 16"/>
+          <p:cNvSpPr txBox="1"/>
+          <p:nvPr/>
+        </p:nvSpPr>
+        <p:spPr>
+          <a:xfrm>
+            <a:off x="5189402" y="1709928"/>
+            <a:ext cx="1812889" cy="182880"/>
+          </a:xfrm>
+          <a:prstGeom prst="rect">
+            <a:avLst/>
+          </a:prstGeom>
+          <a:noFill/>
+        </p:spPr>
+        <p:txBody>
+          <a:bodyPr wrap="square" anchor="t" lIns="0" rIns="0" tIns="0" bIns="0">
+            <a:spAutoFit/>
+          </a:bodyPr>
+          <a:lstStyle/>
+          <a:p>
+            <a:pPr algn="l">
+              <a:lnSpc>
+                <a:spcPct val="125000"/>
+              </a:lnSpc>
+            </a:pPr>
+            <a:r>
+              <a:rPr sz="800" b="1" spc="50">
+                <a:solidFill>
+                  <a:srgbClr val="0C1A14"/>
+                </a:solidFill>
+                <a:latin typeface="Segoe UI"/>
+              </a:rPr>
+              <a:t>MÉNAGES AU BOIS OU AU CHARBON</a:t>
+            </a:r>
+          </a:p>
+        </p:txBody>
+      </p:sp>
+      <p:sp>
+        <p:nvSpPr>
+          <p:cNvPr id="18" name="TextBox 17"/>
+          <p:cNvSpPr txBox="1"/>
+          <p:nvPr/>
+        </p:nvSpPr>
+        <p:spPr>
+          <a:xfrm>
+            <a:off x="5189402" y="1938528"/>
+            <a:ext cx="1812889" cy="411480"/>
+          </a:xfrm>
+          <a:prstGeom prst="rect">
+            <a:avLst/>
+          </a:prstGeom>
+          <a:noFill/>
+        </p:spPr>
+        <p:txBody>
+          <a:bodyPr wrap="square" anchor="t" lIns="0" rIns="0" tIns="0" bIns="0">
+            <a:spAutoFit/>
+          </a:bodyPr>
+          <a:lstStyle/>
+          <a:p>
+            <a:pPr algn="l">
+              <a:lnSpc>
+                <a:spcPct val="100000"/>
+              </a:lnSpc>
+            </a:pPr>
+            <a:r>
+              <a:rPr sz="2600" b="1">
+                <a:solidFill>
+                  <a:srgbClr val="B32418"/>
+                </a:solidFill>
+                <a:latin typeface="Segoe UI"/>
+              </a:rPr>
+              <a:t>89</a:t>
+            </a:r>
+            <a:r>
+              <a:rPr sz="2600" b="1">
+                <a:solidFill>
+                  <a:srgbClr val="B32418"/>
+                </a:solidFill>
+                <a:latin typeface="Segoe UI"/>
+              </a:rPr>
+              <a:t> %</a:t>
+            </a:r>
+          </a:p>
+        </p:txBody>
+      </p:sp>
+      <p:sp>
+        <p:nvSpPr>
+          <p:cNvPr id="19" name="TextBox 18"/>
+          <p:cNvSpPr txBox="1"/>
+          <p:nvPr/>
+        </p:nvSpPr>
+        <p:spPr>
+          <a:xfrm>
+            <a:off x="5189402" y="2414016"/>
+            <a:ext cx="1812889" cy="667512"/>
+          </a:xfrm>
+          <a:prstGeom prst="rect">
+            <a:avLst/>
+          </a:prstGeom>
+          <a:noFill/>
+        </p:spPr>
+        <p:txBody>
+          <a:bodyPr wrap="square" anchor="t" lIns="0" rIns="0" tIns="0" bIns="0">
+            <a:spAutoFit/>
+          </a:bodyPr>
+          <a:lstStyle/>
+          <a:p>
+            <a:pPr algn="l">
+              <a:lnSpc>
+                <a:spcPct val="130000"/>
+              </a:lnSpc>
+            </a:pPr>
+            <a:r>
+              <a:rPr sz="850" b="0">
+                <a:solidFill>
+                  <a:srgbClr val="5D6E64"/>
+                </a:solidFill>
+                <a:latin typeface="Segoe UI"/>
+              </a:rPr>
+              <a:t>en 2017, contre 90 % en 2014 : aucun recul</a:t>
+            </a:r>
+          </a:p>
+        </p:txBody>
+      </p:sp>
+      <p:sp>
+        <p:nvSpPr>
+          <p:cNvPr id="20" name="Rounded Rectangle 19"/>
+          <p:cNvSpPr/>
+          <p:nvPr/>
+        </p:nvSpPr>
+        <p:spPr>
+          <a:xfrm>
+            <a:off x="7267468" y="1572768"/>
+            <a:ext cx="2123785" cy="1600200"/>
+          </a:xfrm>
+          <a:prstGeom prst="roundRect">
+            <a:avLst>
+              <a:gd name="adj" fmla="val 5000"/>
+            </a:avLst>
+          </a:prstGeom>
+          <a:solidFill>
+            <a:srgbClr val="FFFFFF"/>
+          </a:solidFill>
+          <a:ln w="9525">
+            <a:solidFill>
+              <a:srgbClr val="D5DED8"/>
+            </a:solidFill>
+          </a:ln>
+          <a:effectLst/>
+        </p:spPr>
+        <p:style>
+          <a:lnRef idx="1">
+            <a:schemeClr val="accent1"/>
+          </a:lnRef>
+          <a:fillRef idx="3">
+            <a:schemeClr val="accent1"/>
+          </a:fillRef>
+          <a:effectRef idx="2">
+            <a:schemeClr val="accent1"/>
+          </a:effectRef>
+          <a:fontRef idx="minor">
+            <a:schemeClr val="lt1"/>
+          </a:fontRef>
+        </p:style>
+        <p:txBody>
+          <a:bodyPr rtlCol="0" anchor="ctr" wrap="square"/>
+          <a:lstStyle/>
+          <a:p>
+            <a:pPr algn="ctr"/>
+          </a:p>
+        </p:txBody>
+      </p:sp>
+      <p:sp>
+        <p:nvSpPr>
           <p:cNvPr id="21" name="TextBox 20"/>
           <p:cNvSpPr txBox="1"/>
           <p:nvPr/>
         </p:nvSpPr>
         <p:spPr>
           <a:xfrm>
-            <a:off x="749808" y="4480560"/>
+            <a:off x="7422916" y="1709928"/>
+            <a:ext cx="1812889" cy="182880"/>
+          </a:xfrm>
+          <a:prstGeom prst="rect">
+            <a:avLst/>
+          </a:prstGeom>
+          <a:noFill/>
+        </p:spPr>
+        <p:txBody>
+          <a:bodyPr wrap="square" anchor="t" lIns="0" rIns="0" tIns="0" bIns="0">
+            <a:spAutoFit/>
+          </a:bodyPr>
+          <a:lstStyle/>
+          <a:p>
+            <a:pPr algn="l">
+              <a:lnSpc>
+                <a:spcPct val="125000"/>
+              </a:lnSpc>
+            </a:pPr>
+            <a:r>
+              <a:rPr sz="800" b="1" spc="50">
+                <a:solidFill>
+                  <a:srgbClr val="0C1A14"/>
+                </a:solidFill>
+                <a:latin typeface="Segoe UI"/>
+              </a:rPr>
+              <a:t>FORÊT PERDUE CHAQUE ANNÉE</a:t>
+            </a:r>
+          </a:p>
+        </p:txBody>
+      </p:sp>
+      <p:sp>
+        <p:nvSpPr>
+          <p:cNvPr id="22" name="TextBox 21"/>
+          <p:cNvSpPr txBox="1"/>
+          <p:nvPr/>
+        </p:nvSpPr>
+        <p:spPr>
+          <a:xfrm>
+            <a:off x="7422916" y="1938528"/>
+            <a:ext cx="1812889" cy="411480"/>
+          </a:xfrm>
+          <a:prstGeom prst="rect">
+            <a:avLst/>
+          </a:prstGeom>
+          <a:noFill/>
+        </p:spPr>
+        <p:txBody>
+          <a:bodyPr wrap="square" anchor="t" lIns="0" rIns="0" tIns="0" bIns="0">
+            <a:spAutoFit/>
+          </a:bodyPr>
+          <a:lstStyle/>
+          <a:p>
+            <a:pPr algn="l">
+              <a:lnSpc>
+                <a:spcPct val="100000"/>
+              </a:lnSpc>
+            </a:pPr>
+            <a:r>
+              <a:rPr sz="2600" b="1">
+                <a:solidFill>
+                  <a:srgbClr val="B32418"/>
+                </a:solidFill>
+                <a:latin typeface="Segoe UI"/>
+              </a:rPr>
+              <a:t>2 960</a:t>
+            </a:r>
+            <a:r>
+              <a:rPr sz="2600" b="1">
+                <a:solidFill>
+                  <a:srgbClr val="B32418"/>
+                </a:solidFill>
+                <a:latin typeface="Segoe UI"/>
+              </a:rPr>
+              <a:t> ha</a:t>
+            </a:r>
+          </a:p>
+        </p:txBody>
+      </p:sp>
+      <p:sp>
+        <p:nvSpPr>
+          <p:cNvPr id="23" name="TextBox 22"/>
+          <p:cNvSpPr txBox="1"/>
+          <p:nvPr/>
+        </p:nvSpPr>
+        <p:spPr>
+          <a:xfrm>
+            <a:off x="7422916" y="2414016"/>
+            <a:ext cx="1812889" cy="667512"/>
+          </a:xfrm>
+          <a:prstGeom prst="rect">
+            <a:avLst/>
+          </a:prstGeom>
+          <a:noFill/>
+        </p:spPr>
+        <p:txBody>
+          <a:bodyPr wrap="square" anchor="t" lIns="0" rIns="0" tIns="0" bIns="0">
+            <a:spAutoFit/>
+          </a:bodyPr>
+          <a:lstStyle/>
+          <a:p>
+            <a:pPr algn="l">
+              <a:lnSpc>
+                <a:spcPct val="130000"/>
+              </a:lnSpc>
+            </a:pPr>
+            <a:r>
+              <a:rPr sz="850" b="0">
+                <a:solidFill>
+                  <a:srgbClr val="5D6E64"/>
+                </a:solidFill>
+                <a:latin typeface="Segoe UI"/>
+              </a:rPr>
+              <a:t>dans le régime en cours depuis 2000 — trois fois moins que dans les années 1990, mais sans une seule année de reprise</a:t>
+            </a:r>
+          </a:p>
+        </p:txBody>
+      </p:sp>
+      <p:sp>
+        <p:nvSpPr>
+          <p:cNvPr id="24" name="Rounded Rectangle 23"/>
+          <p:cNvSpPr/>
+          <p:nvPr/>
+        </p:nvSpPr>
+        <p:spPr>
+          <a:xfrm>
+            <a:off x="9500981" y="1572768"/>
+            <a:ext cx="2123785" cy="1600200"/>
+          </a:xfrm>
+          <a:prstGeom prst="roundRect">
+            <a:avLst>
+              <a:gd name="adj" fmla="val 5000"/>
+            </a:avLst>
+          </a:prstGeom>
+          <a:solidFill>
+            <a:srgbClr val="FFFFFF"/>
+          </a:solidFill>
+          <a:ln w="9525">
+            <a:solidFill>
+              <a:srgbClr val="D5DED8"/>
+            </a:solidFill>
+          </a:ln>
+          <a:effectLst/>
+        </p:spPr>
+        <p:style>
+          <a:lnRef idx="1">
+            <a:schemeClr val="accent1"/>
+          </a:lnRef>
+          <a:fillRef idx="3">
+            <a:schemeClr val="accent1"/>
+          </a:fillRef>
+          <a:effectRef idx="2">
+            <a:schemeClr val="accent1"/>
+          </a:effectRef>
+          <a:fontRef idx="minor">
+            <a:schemeClr val="lt1"/>
+          </a:fontRef>
+        </p:style>
+        <p:txBody>
+          <a:bodyPr rtlCol="0" anchor="ctr" wrap="square"/>
+          <a:lstStyle/>
+          <a:p>
+            <a:pPr algn="ctr"/>
+          </a:p>
+        </p:txBody>
+      </p:sp>
+      <p:sp>
+        <p:nvSpPr>
+          <p:cNvPr id="25" name="TextBox 24"/>
+          <p:cNvSpPr txBox="1"/>
+          <p:nvPr/>
+        </p:nvSpPr>
+        <p:spPr>
+          <a:xfrm>
+            <a:off x="9656429" y="1709928"/>
+            <a:ext cx="1812889" cy="182880"/>
+          </a:xfrm>
+          <a:prstGeom prst="rect">
+            <a:avLst/>
+          </a:prstGeom>
+          <a:noFill/>
+        </p:spPr>
+        <p:txBody>
+          <a:bodyPr wrap="square" anchor="t" lIns="0" rIns="0" tIns="0" bIns="0">
+            <a:spAutoFit/>
+          </a:bodyPr>
+          <a:lstStyle/>
+          <a:p>
+            <a:pPr algn="l">
+              <a:lnSpc>
+                <a:spcPct val="125000"/>
+              </a:lnSpc>
+            </a:pPr>
+            <a:r>
+              <a:rPr sz="800" b="1" spc="50">
+                <a:solidFill>
+                  <a:srgbClr val="0C1A14"/>
+                </a:solidFill>
+                <a:latin typeface="Segoe UI"/>
+              </a:rPr>
+              <a:t>ACCÉLÉRATION REQUISE</a:t>
+            </a:r>
+          </a:p>
+        </p:txBody>
+      </p:sp>
+      <p:sp>
+        <p:nvSpPr>
+          <p:cNvPr id="26" name="TextBox 25"/>
+          <p:cNvSpPr txBox="1"/>
+          <p:nvPr/>
+        </p:nvSpPr>
+        <p:spPr>
+          <a:xfrm>
+            <a:off x="9656429" y="1938528"/>
+            <a:ext cx="1812889" cy="411480"/>
+          </a:xfrm>
+          <a:prstGeom prst="rect">
+            <a:avLst/>
+          </a:prstGeom>
+          <a:noFill/>
+        </p:spPr>
+        <p:txBody>
+          <a:bodyPr wrap="square" anchor="t" lIns="0" rIns="0" tIns="0" bIns="0">
+            <a:spAutoFit/>
+          </a:bodyPr>
+          <a:lstStyle/>
+          <a:p>
+            <a:pPr algn="l">
+              <a:lnSpc>
+                <a:spcPct val="100000"/>
+              </a:lnSpc>
+            </a:pPr>
+            <a:r>
+              <a:rPr sz="2600" b="1">
+                <a:solidFill>
+                  <a:srgbClr val="B32418"/>
+                </a:solidFill>
+                <a:latin typeface="Segoe UI"/>
+              </a:rPr>
+              <a:t>× 10</a:t>
+            </a:r>
+            <a:r>
+              <a:rPr sz="2600" b="1">
+                <a:solidFill>
+                  <a:srgbClr val="B32418"/>
+                </a:solidFill>
+                <a:latin typeface="Segoe UI"/>
+              </a:rPr>
+              <a:t/>
+            </a:r>
+          </a:p>
+        </p:txBody>
+      </p:sp>
+      <p:sp>
+        <p:nvSpPr>
+          <p:cNvPr id="27" name="TextBox 26"/>
+          <p:cNvSpPr txBox="1"/>
+          <p:nvPr/>
+        </p:nvSpPr>
+        <p:spPr>
+          <a:xfrm>
+            <a:off x="9656429" y="2414016"/>
+            <a:ext cx="1812889" cy="667512"/>
+          </a:xfrm>
+          <a:prstGeom prst="rect">
+            <a:avLst/>
+          </a:prstGeom>
+          <a:noFill/>
+        </p:spPr>
+        <p:txBody>
+          <a:bodyPr wrap="square" anchor="t" lIns="0" rIns="0" tIns="0" bIns="0">
+            <a:spAutoFit/>
+          </a:bodyPr>
+          <a:lstStyle/>
+          <a:p>
+            <a:pPr algn="l">
+              <a:lnSpc>
+                <a:spcPct val="130000"/>
+              </a:lnSpc>
+            </a:pPr>
+            <a:r>
+              <a:rPr sz="850" b="0">
+                <a:solidFill>
+                  <a:srgbClr val="5D6E64"/>
+                </a:solidFill>
+                <a:latin typeface="Segoe UI"/>
+              </a:rPr>
+              <a:t>il faudrait +9,4 pt/an au lieu de +0,9</a:t>
+            </a:r>
+          </a:p>
+        </p:txBody>
+      </p:sp>
+      <p:sp>
+        <p:nvSpPr>
+          <p:cNvPr id="28" name="Rounded Rectangle 27"/>
+          <p:cNvSpPr/>
+          <p:nvPr/>
+        </p:nvSpPr>
+        <p:spPr>
+          <a:xfrm>
+            <a:off x="566928" y="3429000"/>
+            <a:ext cx="11057839" cy="1371600"/>
+          </a:xfrm>
+          <a:prstGeom prst="roundRect">
+            <a:avLst>
+              <a:gd name="adj" fmla="val 5000"/>
+            </a:avLst>
+          </a:prstGeom>
+          <a:solidFill>
+            <a:srgbClr val="FBE7E4"/>
+          </a:solidFill>
+          <a:ln>
+            <a:noFill/>
+          </a:ln>
+          <a:effectLst/>
+        </p:spPr>
+        <p:style>
+          <a:lnRef idx="1">
+            <a:schemeClr val="accent1"/>
+          </a:lnRef>
+          <a:fillRef idx="3">
+            <a:schemeClr val="accent1"/>
+          </a:fillRef>
+          <a:effectRef idx="2">
+            <a:schemeClr val="accent1"/>
+          </a:effectRef>
+          <a:fontRef idx="minor">
+            <a:schemeClr val="lt1"/>
+          </a:fontRef>
+        </p:style>
+        <p:txBody>
+          <a:bodyPr rtlCol="0" anchor="ctr" wrap="square"/>
+          <a:lstStyle/>
+          <a:p>
+            <a:pPr algn="ctr"/>
+          </a:p>
+        </p:txBody>
+      </p:sp>
+      <p:sp>
+        <p:nvSpPr>
+          <p:cNvPr id="29" name="TextBox 28"/>
+          <p:cNvSpPr txBox="1"/>
+          <p:nvPr/>
+        </p:nvSpPr>
+        <p:spPr>
+          <a:xfrm>
+            <a:off x="749808" y="3566160"/>
             <a:ext cx="10692079" cy="164592"/>
           </a:xfrm>
           <a:prstGeom prst="rect">
@@ -10705,25 +9490,25 @@
             <a:r>
               <a:rPr sz="850" b="1" spc="60">
                 <a:solidFill>
-                  <a:srgbClr val="0F7A4A"/>
-                </a:solidFill>
-                <a:latin typeface="Segoe UI"/>
-              </a:rPr>
-              <a:t>CE QUE CES DONNÉES NE PERMETTENT PAS DE DIRE</a:t>
-            </a:r>
-          </a:p>
-        </p:txBody>
-      </p:sp>
-      <p:sp>
-        <p:nvSpPr>
-          <p:cNvPr id="22" name="TextBox 21"/>
-          <p:cNvSpPr txBox="1"/>
-          <p:nvPr/>
-        </p:nvSpPr>
-        <p:spPr>
-          <a:xfrm>
-            <a:off x="749808" y="4709160"/>
-            <a:ext cx="10692079" cy="1280160"/>
+                  <a:srgbClr val="B32418"/>
+                </a:solidFill>
+                <a:latin typeface="Segoe UI"/>
+              </a:rPr>
+              <a:t>LE CONSTAT QUI COMMANDE TOUT LE RESTE</a:t>
+            </a:r>
+          </a:p>
+        </p:txBody>
+      </p:sp>
+      <p:sp>
+        <p:nvSpPr>
+          <p:cNvPr id="30" name="TextBox 29"/>
+          <p:cNvSpPr txBox="1"/>
+          <p:nvPr/>
+        </p:nvSpPr>
+        <p:spPr>
+          <a:xfrm>
+            <a:off x="749808" y="3794760"/>
+            <a:ext cx="10692079" cy="914400"/>
           </a:xfrm>
           <a:prstGeom prst="rect">
             <a:avLst/>
@@ -10748,7 +9533,7 @@
                 </a:solidFill>
                 <a:latin typeface="Segoe UI"/>
               </a:rPr>
-              <a:t>Aucun coût ni budget dans les données : les recommandations portent sur un ordre de priorité et des cibles physiques, pas sur un plan de financement.   ·   La cuisson n'est mesurée directement qu'en 2014 et 2017 : on lit un contraste, pas une tendance.   ·   La part du recul forestier imputable au bois-énergie n'est tranchée par aucune source : elle reste un curseur explicite dans le tableau de bord.</a:t>
+              <a:t>Le rythme actuel ne mène pas à 2030, il mène à 2104. L'électrification rurale progresse de +0,91 point par an depuis 1998 ; atteindre 100 % en 2030 en demanderait +9,4, soit 10 fois plus vite. L'extension du réseau seule ne produit pas une telle accélération.</a:t>
             </a:r>
           </a:p>
         </p:txBody>
